--- a/Lectures/Lecture2.pptx
+++ b/Lectures/Lecture2.pptx
@@ -5,12 +5,12 @@
     <p:sldMasterId id="2147483648" r:id="rId1"/>
   </p:sldMasterIdLst>
   <p:notesMasterIdLst>
-    <p:notesMasterId r:id="rId44"/>
+    <p:notesMasterId r:id="rId45"/>
   </p:notesMasterIdLst>
   <p:sldIdLst>
     <p:sldId id="296" r:id="rId2"/>
     <p:sldId id="299" r:id="rId3"/>
-    <p:sldId id="303" r:id="rId4"/>
+    <p:sldId id="306" r:id="rId4"/>
     <p:sldId id="301" r:id="rId5"/>
     <p:sldId id="304" r:id="rId6"/>
     <p:sldId id="257" r:id="rId7"/>
@@ -23,12 +23,12 @@
     <p:sldId id="264" r:id="rId14"/>
     <p:sldId id="265" r:id="rId15"/>
     <p:sldId id="266" r:id="rId16"/>
-    <p:sldId id="289" r:id="rId17"/>
-    <p:sldId id="276" r:id="rId18"/>
-    <p:sldId id="298" r:id="rId19"/>
-    <p:sldId id="268" r:id="rId20"/>
-    <p:sldId id="269" r:id="rId21"/>
-    <p:sldId id="270" r:id="rId22"/>
+    <p:sldId id="268" r:id="rId17"/>
+    <p:sldId id="269" r:id="rId18"/>
+    <p:sldId id="270" r:id="rId19"/>
+    <p:sldId id="289" r:id="rId20"/>
+    <p:sldId id="276" r:id="rId21"/>
+    <p:sldId id="298" r:id="rId22"/>
     <p:sldId id="267" r:id="rId23"/>
     <p:sldId id="271" r:id="rId24"/>
     <p:sldId id="272" r:id="rId25"/>
@@ -48,8 +48,9 @@
     <p:sldId id="295" r:id="rId39"/>
     <p:sldId id="297" r:id="rId40"/>
     <p:sldId id="305" r:id="rId41"/>
-    <p:sldId id="302" r:id="rId42"/>
-    <p:sldId id="300" r:id="rId43"/>
+    <p:sldId id="303" r:id="rId42"/>
+    <p:sldId id="302" r:id="rId43"/>
+    <p:sldId id="300" r:id="rId44"/>
   </p:sldIdLst>
   <p:sldSz cx="12192000" cy="6858000"/>
   <p:notesSz cx="6858000" cy="9144000"/>
@@ -155,7 +156,7 @@
           <p14:sldIdLst>
             <p14:sldId id="296"/>
             <p14:sldId id="299"/>
-            <p14:sldId id="303"/>
+            <p14:sldId id="306"/>
             <p14:sldId id="301"/>
             <p14:sldId id="304"/>
             <p14:sldId id="257"/>
@@ -176,12 +177,12 @@
             <p14:sldId id="264"/>
             <p14:sldId id="265"/>
             <p14:sldId id="266"/>
+            <p14:sldId id="268"/>
+            <p14:sldId id="269"/>
+            <p14:sldId id="270"/>
             <p14:sldId id="289"/>
             <p14:sldId id="276"/>
             <p14:sldId id="298"/>
-            <p14:sldId id="268"/>
-            <p14:sldId id="269"/>
-            <p14:sldId id="270"/>
           </p14:sldIdLst>
         </p14:section>
         <p14:section name="Поточные шифры" id="{59469AD1-2B57-4335-8612-62B992E44F08}">
@@ -209,6 +210,7 @@
         </p14:section>
         <p14:section name="Старые тесты" id="{CF07BB18-F8C1-4D34-B5F4-6437445140CC}">
           <p14:sldIdLst>
+            <p14:sldId id="303"/>
             <p14:sldId id="302"/>
             <p14:sldId id="300"/>
           </p14:sldIdLst>
@@ -307,7 +309,7 @@
           <a:p>
             <a:fld id="{CBA08D16-15DC-4E25-BDC3-F25146157B16}" type="datetimeFigureOut">
               <a:rPr lang="ru-RU" smtClean="0"/>
-              <a:t>16.09.2025</a:t>
+              <a:t>17.09.2026</a:t>
             </a:fld>
             <a:endParaRPr lang="ru-RU"/>
           </a:p>
@@ -703,7 +705,7 @@
           <a:p>
             <a:fld id="{FCEC8293-DB51-454A-BE81-EC8FCB31EBA2}" type="datetime1">
               <a:rPr lang="ru-RU" smtClean="0"/>
-              <a:t>16.09.2025</a:t>
+              <a:t>17.09.2026</a:t>
             </a:fld>
             <a:endParaRPr lang="ru-RU"/>
           </a:p>
@@ -874,7 +876,7 @@
           <a:p>
             <a:fld id="{241C87B1-1C35-4DBD-BC18-2BC72E776603}" type="datetime1">
               <a:rPr lang="ru-RU" smtClean="0"/>
-              <a:t>16.09.2025</a:t>
+              <a:t>17.09.2026</a:t>
             </a:fld>
             <a:endParaRPr lang="ru-RU"/>
           </a:p>
@@ -1055,7 +1057,7 @@
           <a:p>
             <a:fld id="{3134C275-26C0-42CD-9111-9ADE65922AF9}" type="datetime1">
               <a:rPr lang="ru-RU" smtClean="0"/>
-              <a:t>16.09.2025</a:t>
+              <a:t>17.09.2026</a:t>
             </a:fld>
             <a:endParaRPr lang="ru-RU"/>
           </a:p>
@@ -1226,7 +1228,7 @@
           <a:p>
             <a:fld id="{C1A9A50B-C350-45F5-8AAB-ADB9E670AF2E}" type="datetime1">
               <a:rPr lang="ru-RU" smtClean="0"/>
-              <a:t>16.09.2025</a:t>
+              <a:t>17.09.2026</a:t>
             </a:fld>
             <a:endParaRPr lang="ru-RU"/>
           </a:p>
@@ -1474,7 +1476,7 @@
           <a:p>
             <a:fld id="{089688C9-348F-42F9-B6C0-5990DDE0C5B2}" type="datetime1">
               <a:rPr lang="ru-RU" smtClean="0"/>
-              <a:t>16.09.2025</a:t>
+              <a:t>17.09.2026</a:t>
             </a:fld>
             <a:endParaRPr lang="ru-RU"/>
           </a:p>
@@ -1706,7 +1708,7 @@
           <a:p>
             <a:fld id="{684AFD8F-6DD9-4AD3-A505-FDC3F5C5F3F6}" type="datetime1">
               <a:rPr lang="ru-RU" smtClean="0"/>
-              <a:t>16.09.2025</a:t>
+              <a:t>17.09.2026</a:t>
             </a:fld>
             <a:endParaRPr lang="ru-RU"/>
           </a:p>
@@ -2073,7 +2075,7 @@
           <a:p>
             <a:fld id="{63551EFE-4D02-45EB-A747-8B6F047B5AA0}" type="datetime1">
               <a:rPr lang="ru-RU" smtClean="0"/>
-              <a:t>16.09.2025</a:t>
+              <a:t>17.09.2026</a:t>
             </a:fld>
             <a:endParaRPr lang="ru-RU"/>
           </a:p>
@@ -2193,7 +2195,7 @@
           <a:p>
             <a:fld id="{813A9F34-E5CD-4B8F-AA9E-889C84372B20}" type="datetime1">
               <a:rPr lang="ru-RU" smtClean="0"/>
-              <a:t>16.09.2025</a:t>
+              <a:t>17.09.2026</a:t>
             </a:fld>
             <a:endParaRPr lang="ru-RU"/>
           </a:p>
@@ -2291,7 +2293,7 @@
           <a:p>
             <a:fld id="{51224D22-9B29-44A6-8E82-95FC492DEDC1}" type="datetime1">
               <a:rPr lang="ru-RU" smtClean="0"/>
-              <a:t>16.09.2025</a:t>
+              <a:t>17.09.2026</a:t>
             </a:fld>
             <a:endParaRPr lang="ru-RU"/>
           </a:p>
@@ -2569,7 +2571,7 @@
           <a:p>
             <a:fld id="{91D1034F-4441-48A1-BDC0-25EA1022324A}" type="datetime1">
               <a:rPr lang="ru-RU" smtClean="0"/>
-              <a:t>16.09.2025</a:t>
+              <a:t>17.09.2026</a:t>
             </a:fld>
             <a:endParaRPr lang="ru-RU"/>
           </a:p>
@@ -2824,7 +2826,7 @@
           <a:p>
             <a:fld id="{B0FFDE79-B627-473B-AE17-4C65BD2495F7}" type="datetime1">
               <a:rPr lang="ru-RU" smtClean="0"/>
-              <a:t>16.09.2025</a:t>
+              <a:t>17.09.2026</a:t>
             </a:fld>
             <a:endParaRPr lang="ru-RU"/>
           </a:p>
@@ -3038,7 +3040,7 @@
           <a:p>
             <a:fld id="{11CA537A-1B8C-47BA-9BA6-7CE3FAFDA8BE}" type="datetime1">
               <a:rPr lang="ru-RU" smtClean="0"/>
-              <a:t>16.09.2025</a:t>
+              <a:t>17.09.2026</a:t>
             </a:fld>
             <a:endParaRPr lang="ru-RU"/>
           </a:p>
@@ -3526,11 +3528,80 @@
             </a:r>
             <a:r>
               <a:rPr lang="en-US" dirty="0"/>
-              <a:t>2</a:t>
+              <a:t>26</a:t>
             </a:r>
+            <a:endParaRPr lang="ru-RU" dirty="0"/>
+          </a:p>
+        </p:txBody>
+      </p:sp>
+      <p:pic>
+        <p:nvPicPr>
+          <p:cNvPr id="4" name="Рисунок 3">
+            <a:extLst>
+              <a:ext uri="{FF2B5EF4-FFF2-40B4-BE49-F238E27FC236}">
+                <a16:creationId xmlns:a16="http://schemas.microsoft.com/office/drawing/2014/main" id="{0EEF2FEB-8DEC-4D1A-8C1C-22573315DE12}"/>
+              </a:ext>
+            </a:extLst>
+          </p:cNvPr>
+          <p:cNvPicPr>
+            <a:picLocks noChangeAspect="1"/>
+          </p:cNvPicPr>
+          <p:nvPr/>
+        </p:nvPicPr>
+        <p:blipFill>
+          <a:blip r:embed="rId2"/>
+          <a:stretch>
+            <a:fillRect/>
+          </a:stretch>
+        </p:blipFill>
+        <p:spPr>
+          <a:xfrm>
+            <a:off x="9906000" y="4335274"/>
+            <a:ext cx="1524000" cy="1466850"/>
+          </a:xfrm>
+          <a:prstGeom prst="rect">
+            <a:avLst/>
+          </a:prstGeom>
+        </p:spPr>
+      </p:pic>
+      <p:sp>
+        <p:nvSpPr>
+          <p:cNvPr id="5" name="TextBox 4">
+            <a:extLst>
+              <a:ext uri="{FF2B5EF4-FFF2-40B4-BE49-F238E27FC236}">
+                <a16:creationId xmlns:a16="http://schemas.microsoft.com/office/drawing/2014/main" id="{AE0CC556-191A-4235-997C-6D17226C0C7D}"/>
+              </a:ext>
+            </a:extLst>
+          </p:cNvPr>
+          <p:cNvSpPr txBox="1"/>
+          <p:nvPr/>
+        </p:nvSpPr>
+        <p:spPr>
+          <a:xfrm>
+            <a:off x="9493896" y="5802124"/>
+            <a:ext cx="2348207" cy="646331"/>
+          </a:xfrm>
+          <a:prstGeom prst="rect">
+            <a:avLst/>
+          </a:prstGeom>
+          <a:noFill/>
+        </p:spPr>
+        <p:txBody>
+          <a:bodyPr wrap="none" rtlCol="0">
+            <a:spAutoFit/>
+          </a:bodyPr>
+          <a:lstStyle/>
+          <a:p>
             <a:r>
               <a:rPr lang="ru-RU" dirty="0"/>
-              <a:t>5</a:t>
+              <a:t>Плейлист в ожидании</a:t>
+            </a:r>
+          </a:p>
+          <a:p>
+            <a:pPr algn="ctr"/>
+            <a:r>
+              <a:rPr lang="ru-RU" dirty="0"/>
+              <a:t>пары</a:t>
             </a:r>
           </a:p>
         </p:txBody>
@@ -3720,8 +3791,12 @@
                   </m:oMath>
                 </a14:m>
                 <a:r>
+                  <a:rPr lang="en-US" dirty="0"/>
+                  <a:t> </a:t>
+                </a:r>
+                <a:r>
                   <a:rPr lang="ru-RU" dirty="0"/>
-                  <a:t>- пренебрежимо малая, если событие вряд ли произойдёт при «жизни» ключа длины 160 бит</a:t>
+                  <a:t>– пренебрежимо малая, если событие вряд ли произойдёт при «жизни» ключа длины 160 бит</a:t>
                 </a:r>
                 <a:r>
                   <a:rPr lang="en-US" dirty="0"/>
@@ -3888,8 +3963,8 @@
           </a:p>
         </p:txBody>
       </p:sp>
-      <mc:AlternateContent xmlns:mc="http://schemas.openxmlformats.org/markup-compatibility/2006">
-        <mc:Choice xmlns:a14="http://schemas.microsoft.com/office/drawing/2010/main" Requires="a14">
+      <mc:AlternateContent xmlns:mc="http://schemas.openxmlformats.org/markup-compatibility/2006" xmlns:a14="http://schemas.microsoft.com/office/drawing/2010/main">
+        <mc:Choice Requires="a14">
           <p:sp>
             <p:nvSpPr>
               <p:cNvPr id="3" name="Объект 2"/>
@@ -3938,7 +4013,7 @@
                     <m:sSub>
                       <m:sSubPr>
                         <m:ctrlPr>
-                          <a:rPr lang="en-US" b="0" smtClean="0">
+                          <a:rPr lang="en-US" b="0" i="1" smtClean="0">
                             <a:latin typeface="Cambria Math" panose="02040503050406030204" pitchFamily="18" charset="0"/>
                           </a:rPr>
                         </m:ctrlPr>
@@ -4412,7 +4487,7 @@
             </p:txBody>
           </p:sp>
         </mc:Choice>
-        <mc:Fallback>
+        <mc:Fallback xmlns="">
           <p:sp>
             <p:nvSpPr>
               <p:cNvPr id="3" name="Объект 2"/>
@@ -4541,7 +4616,23 @@
             </a:pPr>
             <a:r>
               <a:rPr lang="ru-RU" dirty="0"/>
-              <a:t>Ранее, при введении понятия (вычислимого) шифра, мы описывали его без явного описания параметров.</a:t>
+              <a:t>Ранее, при введении понятия </a:t>
+            </a:r>
+            <a:r>
+              <a:rPr lang="ru-RU" b="1" dirty="0"/>
+              <a:t>вычислимого шифра</a:t>
+            </a:r>
+            <a:r>
+              <a:rPr lang="ru-RU" dirty="0"/>
+              <a:t>, мы описывали его без явного описания </a:t>
+            </a:r>
+            <a:r>
+              <a:rPr lang="ru-RU" b="1" dirty="0"/>
+              <a:t>параметров</a:t>
+            </a:r>
+            <a:r>
+              <a:rPr lang="ru-RU" dirty="0"/>
+              <a:t>.</a:t>
             </a:r>
           </a:p>
           <a:p>
@@ -4579,7 +4670,15 @@
             </a:pPr>
             <a:r>
               <a:rPr lang="ru-RU" dirty="0"/>
-              <a:t>Пример – длина ключа (и максимального сообщения) в одноразовом блокноте, модуль и длина ключа в аддитивном одноразовом блокноте. </a:t>
+              <a:t>Пример</a:t>
+            </a:r>
+            <a:r>
+              <a:rPr lang="en-US" dirty="0"/>
+              <a:t>:</a:t>
+            </a:r>
+            <a:r>
+              <a:rPr lang="ru-RU" dirty="0"/>
+              <a:t> длина ключа (и максимального сообщения) в одноразовом блокноте, модуль и длина ключа в аддитивном одноразовом блокноте. </a:t>
             </a:r>
           </a:p>
         </p:txBody>
@@ -4659,8 +4758,8 @@
           </a:p>
         </p:txBody>
       </p:sp>
-      <mc:AlternateContent xmlns:mc="http://schemas.openxmlformats.org/markup-compatibility/2006" xmlns:a14="http://schemas.microsoft.com/office/drawing/2010/main">
-        <mc:Choice Requires="a14">
+      <mc:AlternateContent xmlns:mc="http://schemas.openxmlformats.org/markup-compatibility/2006">
+        <mc:Choice xmlns:a14="http://schemas.microsoft.com/office/drawing/2010/main" Requires="a14">
           <p:sp>
             <p:nvSpPr>
               <p:cNvPr id="3" name="Объект 2"/>
@@ -4749,7 +4848,7 @@
                           <a:rPr lang="en-US" b="0" i="1" smtClean="0">
                             <a:latin typeface="Cambria Math" panose="02040503050406030204" pitchFamily="18" charset="0"/>
                           </a:rPr>
-                          <m:t>𝑍</m:t>
+                          <m:t>ℤ</m:t>
                         </m:r>
                       </m:e>
                       <m:sub>
@@ -4844,10 +4943,10 @@
                       </m:sSubPr>
                       <m:e>
                         <m:r>
-                          <a:rPr lang="en-US" i="1">
-                            <a:latin typeface="Cambria Math" panose="02040503050406030204" pitchFamily="18" charset="0"/>
-                          </a:rPr>
-                          <m:t>𝑍</m:t>
+                          <a:rPr lang="en-US" b="0" i="1" smtClean="0">
+                            <a:latin typeface="Cambria Math" panose="02040503050406030204" pitchFamily="18" charset="0"/>
+                          </a:rPr>
+                          <m:t>ℤ</m:t>
                         </m:r>
                       </m:e>
                       <m:sub>
@@ -5039,11 +5138,39 @@
                       </a:rPr>
                       <m:t>𝑡</m:t>
                     </m:r>
+                  </m:oMath>
+                </a14:m>
+                <a:r>
+                  <a:rPr lang="en-US" b="0" i="0" dirty="0"/>
+                  <a:t> </a:t>
+                </a:r>
+                <a:r>
+                  <a:rPr lang="ru-RU" dirty="0"/>
+                  <a:t>–</a:t>
+                </a:r>
+                <a:r>
+                  <a:rPr lang="en-US" b="0" i="0" dirty="0"/>
+                  <a:t> </a:t>
+                </a:r>
+                <a:r>
+                  <a:rPr lang="en-US" b="0" i="0" dirty="0" err="1"/>
+                  <a:t>полиномиально</a:t>
+                </a:r>
+                <a:r>
+                  <a:rPr lang="en-US" dirty="0" err="1"/>
+                  <a:t>-</a:t>
+                </a:r>
+                <a:r>
+                  <a:rPr lang="en-US" b="0" i="0" dirty="0" err="1"/>
+                  <a:t>ограниченная</a:t>
+                </a:r>
+                <a14:m>
+                  <m:oMath xmlns:m="http://schemas.openxmlformats.org/officeDocument/2006/math">
                     <m:r>
                       <a:rPr lang="en-US" b="0" i="1" smtClean="0">
                         <a:latin typeface="Cambria Math" panose="02040503050406030204" pitchFamily="18" charset="0"/>
                       </a:rPr>
-                      <m:t>−полиномиально ограниченная, </m:t>
+                      <m:t>, </m:t>
                     </m:r>
                     <m:r>
                       <a:rPr lang="en-US" b="0" i="1" smtClean="0">
@@ -5075,11 +5202,39 @@
                       </a:rPr>
                       <m:t>𝜖</m:t>
                     </m:r>
+                  </m:oMath>
+                </a14:m>
+                <a:r>
+                  <a:rPr lang="en-US" i="0" dirty="0"/>
+                  <a:t> </a:t>
+                </a:r>
+                <a:r>
+                  <a:rPr lang="ru-RU" dirty="0"/>
+                  <a:t>–</a:t>
+                </a:r>
+                <a:r>
+                  <a:rPr lang="en-US" i="0" dirty="0"/>
+                  <a:t> </a:t>
+                </a:r>
+                <a:r>
+                  <a:rPr lang="en-US" i="0" dirty="0" err="1"/>
+                  <a:t>перенебрежимо</a:t>
+                </a:r>
+                <a:r>
+                  <a:rPr lang="en-US" i="0" dirty="0"/>
+                  <a:t> </a:t>
+                </a:r>
+                <a:r>
+                  <a:rPr lang="en-US" i="0" dirty="0" err="1"/>
+                  <a:t>малая</a:t>
+                </a:r>
+                <a14:m>
+                  <m:oMath xmlns:m="http://schemas.openxmlformats.org/officeDocument/2006/math">
                     <m:r>
                       <a:rPr lang="en-US" i="1">
                         <a:latin typeface="Cambria Math" panose="02040503050406030204" pitchFamily="18" charset="0"/>
                       </a:rPr>
-                      <m:t>−перенебрежимо малая:∀</m:t>
+                      <m:t>:∀</m:t>
                     </m:r>
                     <m:r>
                       <a:rPr lang="en-US" i="1">
@@ -5103,10 +5258,10 @@
                       </m:sSubPr>
                       <m:e>
                         <m:r>
-                          <a:rPr lang="en-US" b="0" i="1" smtClean="0">
-                            <a:latin typeface="Cambria Math" panose="02040503050406030204" pitchFamily="18" charset="0"/>
-                          </a:rPr>
-                          <m:t>𝑍</m:t>
+                          <a:rPr lang="en-US" i="1">
+                            <a:latin typeface="Cambria Math" panose="02040503050406030204" pitchFamily="18" charset="0"/>
+                          </a:rPr>
+                          <m:t>ℤ</m:t>
                         </m:r>
                       </m:e>
                       <m:sub>
@@ -5257,11 +5412,11 @@
                 </a14:m>
                 <a:r>
                   <a:rPr lang="ru-RU" dirty="0"/>
-                  <a:t> прев</a:t>
+                  <a:t> превысит</a:t>
                 </a:r>
                 <a:r>
                   <a:rPr lang="ru-RU" i="1" dirty="0"/>
-                  <a:t>ысит </a:t>
+                  <a:t> </a:t>
                 </a:r>
                 <a14:m>
                   <m:oMath xmlns:m="http://schemas.openxmlformats.org/officeDocument/2006/math">
@@ -5382,7 +5537,7 @@
                 </a:r>
                 <a:r>
                   <a:rPr lang="ru-RU" b="1" dirty="0"/>
-                  <a:t>-ограниченном входе он почти всегда (т.е. за исключением конечного малого числа точек) выполняется за полиномиальное время</a:t>
+                  <a:t>-ограниченном входе он почти всегда (т.е. за исключением малого числа точек) выполняется за полиномиальное время</a:t>
                 </a:r>
                 <a:r>
                   <a:rPr lang="ru-RU" dirty="0"/>
@@ -5392,7 +5547,7 @@
             </p:txBody>
           </p:sp>
         </mc:Choice>
-        <mc:Fallback xmlns="">
+        <mc:Fallback>
           <p:sp>
             <p:nvSpPr>
               <p:cNvPr id="3" name="Объект 2"/>
@@ -5407,7 +5562,7 @@
               <a:blipFill>
                 <a:blip r:embed="rId2"/>
                 <a:stretch>
-                  <a:fillRect l="-1043" t="-2801" b="-2941"/>
+                  <a:fillRect l="-1043" t="-2801" b="-3221"/>
                 </a:stretch>
               </a:blipFill>
             </p:spPr>
@@ -6479,7 +6634,39 @@
             </a:pPr>
             <a:r>
               <a:rPr lang="ru-RU" dirty="0"/>
-              <a:t>Ранее мы указывали, что в играх будем рассматривать только эффективные (вычислимые) алгоритмы, как для Претендента, так и для Противника. Иными словами, в игре должно быть </a:t>
+              <a:t>Ранее мы указывали, что </a:t>
+            </a:r>
+            <a:r>
+              <a:rPr lang="ru-RU" b="1" dirty="0"/>
+              <a:t>в играх </a:t>
+            </a:r>
+            <a:r>
+              <a:rPr lang="ru-RU" dirty="0"/>
+              <a:t>будем рассматривать </a:t>
+            </a:r>
+            <a:r>
+              <a:rPr lang="ru-RU" b="1" dirty="0"/>
+              <a:t>только эффективные (вычислимые) алгоритмы</a:t>
+            </a:r>
+            <a:r>
+              <a:rPr lang="ru-RU" dirty="0"/>
+              <a:t>, как для </a:t>
+            </a:r>
+            <a:r>
+              <a:rPr lang="ru-RU" b="1" dirty="0"/>
+              <a:t>Претендента</a:t>
+            </a:r>
+            <a:r>
+              <a:rPr lang="ru-RU" dirty="0"/>
+              <a:t>, так и для </a:t>
+            </a:r>
+            <a:r>
+              <a:rPr lang="ru-RU" b="1" dirty="0"/>
+              <a:t>Противника</a:t>
+            </a:r>
+            <a:r>
+              <a:rPr lang="ru-RU" dirty="0"/>
+              <a:t>. Иными словами, в игре должно быть </a:t>
             </a:r>
             <a:r>
               <a:rPr lang="ru-RU" dirty="0" err="1"/>
@@ -7499,7 +7686,7 @@
           <a:p>
             <a:r>
               <a:rPr lang="ru-RU" dirty="0"/>
-              <a:t>Эффективность в игре</a:t>
+              <a:t>Параметр стойкости</a:t>
             </a:r>
           </a:p>
         </p:txBody>
@@ -7525,49 +7712,138 @@
                   <a:buNone/>
                 </a:pPr>
                 <a:r>
+                  <a:rPr lang="ru-RU" b="1" dirty="0"/>
+                  <a:t>Параметром стойкости </a:t>
+                </a:r>
+                <a:r>
                   <a:rPr lang="ru-RU" dirty="0"/>
-                  <a:t>Два </a:t>
-                </a:r>
-                <a:r>
-                  <a:rPr lang="ru-RU" b="1" dirty="0"/>
-                  <a:t>эксперимента</a:t>
-                </a:r>
-                <a:r>
-                  <a:rPr lang="ru-RU" dirty="0"/>
-                  <a:t> игры называются </a:t>
-                </a:r>
-                <a:r>
-                  <a:rPr lang="ru-RU" b="1" dirty="0"/>
-                  <a:t>статистически неразличимыми</a:t>
-                </a:r>
-                <a:r>
-                  <a:rPr lang="ru-RU" dirty="0"/>
-                  <a:t>, если не существует эффективного алгоритма противника, способного различить</a:t>
-                </a:r>
-                <a:r>
-                  <a:rPr lang="en-US" dirty="0"/>
-                  <a:t> </a:t>
-                </a:r>
-                <a:r>
-                  <a:rPr lang="ru-RU" dirty="0"/>
-                  <a:t>эти эксперименты.</a:t>
+                  <a:t>называют двоичный логарифм, от необходимого числа операций для осуществления теоретической или практической атаки.</a:t>
                 </a:r>
               </a:p>
               <a:p>
                 <a:pPr marL="0" indent="0">
                   <a:buNone/>
                 </a:pPr>
+                <a:endParaRPr lang="ru-RU" dirty="0"/>
+              </a:p>
+              <a:p>
+                <a:pPr marL="0" indent="0">
+                  <a:buNone/>
+                </a:pPr>
                 <a:r>
                   <a:rPr lang="ru-RU" dirty="0"/>
-                  <a:t>Т.е. </a:t>
+                  <a:t>Пример</a:t>
+                </a:r>
+                <a:r>
+                  <a:rPr lang="en-US" dirty="0"/>
+                  <a:t>: </a:t>
+                </a:r>
+                <a:r>
+                  <a:rPr lang="ru-RU" dirty="0"/>
+                  <a:t>абсолютно стойкий шифр с ключом длины </a:t>
                 </a:r>
                 <a14:m>
                   <m:oMath xmlns:m="http://schemas.openxmlformats.org/officeDocument/2006/math">
                     <m:r>
-                      <a:rPr lang="ru-RU" b="0" i="1" smtClean="0">
-                        <a:latin typeface="Cambria Math" panose="02040503050406030204" pitchFamily="18" charset="0"/>
-                      </a:rPr>
-                      <m:t>∀</m:t>
+                      <a:rPr lang="en-US" b="0" i="1" smtClean="0">
+                        <a:latin typeface="Cambria Math" panose="02040503050406030204" pitchFamily="18" charset="0"/>
+                      </a:rPr>
+                      <m:t>𝑙</m:t>
+                    </m:r>
+                  </m:oMath>
+                </a14:m>
+                <a:r>
+                  <a:rPr lang="ru-RU" dirty="0"/>
+                  <a:t>, параметр стойкости </a:t>
+                </a:r>
+                <a14:m>
+                  <m:oMath xmlns:m="http://schemas.openxmlformats.org/officeDocument/2006/math">
+                    <m:r>
+                      <a:rPr lang="en-US" b="0" i="1" smtClean="0">
+                        <a:latin typeface="Cambria Math" panose="02040503050406030204" pitchFamily="18" charset="0"/>
+                      </a:rPr>
+                      <m:t>𝑙</m:t>
+                    </m:r>
+                  </m:oMath>
+                </a14:m>
+                <a:r>
+                  <a:rPr lang="ru-RU" dirty="0"/>
+                  <a:t> бит (необходимо перебрать весь ключ).</a:t>
+                </a:r>
+              </a:p>
+              <a:p>
+                <a:pPr marL="0" indent="0">
+                  <a:buNone/>
+                </a:pPr>
+                <a:endParaRPr lang="ru-RU" dirty="0"/>
+              </a:p>
+              <a:p>
+                <a:pPr marL="0" indent="0">
+                  <a:buNone/>
+                </a:pPr>
+                <a:r>
+                  <a:rPr lang="ru-RU" dirty="0"/>
+                  <a:t>Пример</a:t>
+                </a:r>
+                <a:r>
+                  <a:rPr lang="en-US" dirty="0"/>
+                  <a:t>: </a:t>
+                </a:r>
+                <a:r>
+                  <a:rPr lang="ru-RU" dirty="0"/>
+                  <a:t>Семантически стойкий шифр </a:t>
+                </a:r>
+                <a14:m>
+                  <m:oMath xmlns:m="http://schemas.openxmlformats.org/officeDocument/2006/math">
+                    <m:r>
+                      <m:rPr>
+                        <m:sty m:val="p"/>
+                      </m:rPr>
+                      <a:rPr lang="ru-RU" b="0" i="0" smtClean="0">
+                        <a:latin typeface="Cambria Math" panose="02040503050406030204" pitchFamily="18" charset="0"/>
+                      </a:rPr>
+                      <m:t>Ε</m:t>
+                    </m:r>
+                    <m:r>
+                      <a:rPr lang="en-US" b="0" i="1" smtClean="0">
+                        <a:latin typeface="Cambria Math" panose="02040503050406030204" pitchFamily="18" charset="0"/>
+                      </a:rPr>
+                      <m:t>=</m:t>
+                    </m:r>
+                    <m:d>
+                      <m:dPr>
+                        <m:ctrlPr>
+                          <a:rPr lang="en-US" b="0" i="1" smtClean="0">
+                            <a:latin typeface="Cambria Math" panose="02040503050406030204" pitchFamily="18" charset="0"/>
+                          </a:rPr>
+                        </m:ctrlPr>
+                      </m:dPr>
+                      <m:e>
+                        <m:r>
+                          <a:rPr lang="en-US" b="0" i="1" smtClean="0">
+                            <a:latin typeface="Cambria Math" panose="02040503050406030204" pitchFamily="18" charset="0"/>
+                          </a:rPr>
+                          <m:t>𝐸</m:t>
+                        </m:r>
+                        <m:r>
+                          <a:rPr lang="en-US" b="0" i="1" smtClean="0">
+                            <a:latin typeface="Cambria Math" panose="02040503050406030204" pitchFamily="18" charset="0"/>
+                          </a:rPr>
+                          <m:t>,</m:t>
+                        </m:r>
+                        <m:r>
+                          <a:rPr lang="en-US" b="0" i="1" smtClean="0">
+                            <a:latin typeface="Cambria Math" panose="02040503050406030204" pitchFamily="18" charset="0"/>
+                          </a:rPr>
+                          <m:t>𝐷</m:t>
+                        </m:r>
+                      </m:e>
+                    </m:d>
+                    <m:r>
+                      <a:rPr lang="en-US" b="0" i="1" smtClean="0">
+                        <a:latin typeface="Cambria Math" panose="02040503050406030204" pitchFamily="18" charset="0"/>
+                      </a:rPr>
+                      <m:t>:∀</m:t>
                     </m:r>
                     <m:r>
                       <a:rPr lang="en-US" b="0" i="1" smtClean="0">
@@ -7588,12 +7864,997 @@
                       <a:rPr lang="en-US" b="0" i="0" smtClean="0">
                         <a:latin typeface="Cambria Math" panose="02040503050406030204" pitchFamily="18" charset="0"/>
                       </a:rPr>
-                      <m:t>Di</m:t>
+                      <m:t>S</m:t>
                     </m:r>
                     <m:sSub>
                       <m:sSubPr>
                         <m:ctrlPr>
                           <a:rPr lang="en-US" b="0" smtClean="0">
+                            <a:latin typeface="Cambria Math" panose="02040503050406030204" pitchFamily="18" charset="0"/>
+                          </a:rPr>
+                        </m:ctrlPr>
+                      </m:sSubPr>
+                      <m:e>
+                        <m:r>
+                          <m:rPr>
+                            <m:sty m:val="p"/>
+                          </m:rPr>
+                          <a:rPr lang="en-US" b="0" i="0" smtClean="0">
+                            <a:latin typeface="Cambria Math" panose="02040503050406030204" pitchFamily="18" charset="0"/>
+                          </a:rPr>
+                          <m:t>S</m:t>
+                        </m:r>
+                      </m:e>
+                      <m:sub>
+                        <m:r>
+                          <m:rPr>
+                            <m:sty m:val="p"/>
+                          </m:rPr>
+                          <a:rPr lang="en-US" b="0" i="0" smtClean="0">
+                            <a:latin typeface="Cambria Math" panose="02040503050406030204" pitchFamily="18" charset="0"/>
+                          </a:rPr>
+                          <m:t>adv</m:t>
+                        </m:r>
+                      </m:sub>
+                    </m:sSub>
+                    <m:d>
+                      <m:dPr>
+                        <m:begChr m:val="["/>
+                        <m:endChr m:val="]"/>
+                        <m:ctrlPr>
+                          <a:rPr lang="en-US" b="0" i="1" smtClean="0">
+                            <a:latin typeface="Cambria Math" panose="02040503050406030204" pitchFamily="18" charset="0"/>
+                          </a:rPr>
+                        </m:ctrlPr>
+                      </m:dPr>
+                      <m:e>
+                        <m:r>
+                          <a:rPr lang="en-US" b="0" i="1" smtClean="0">
+                            <a:latin typeface="Cambria Math" panose="02040503050406030204" pitchFamily="18" charset="0"/>
+                          </a:rPr>
+                          <m:t>𝐴</m:t>
+                        </m:r>
+                        <m:r>
+                          <a:rPr lang="en-US" b="0" i="1" smtClean="0">
+                            <a:latin typeface="Cambria Math" panose="02040503050406030204" pitchFamily="18" charset="0"/>
+                          </a:rPr>
+                          <m:t>,</m:t>
+                        </m:r>
+                        <m:r>
+                          <a:rPr lang="en-US" b="0" i="1" smtClean="0">
+                            <a:latin typeface="Cambria Math" panose="02040503050406030204" pitchFamily="18" charset="0"/>
+                          </a:rPr>
+                          <m:t>𝐸</m:t>
+                        </m:r>
+                      </m:e>
+                    </m:d>
+                    <m:r>
+                      <a:rPr lang="en-US" b="0" i="1" smtClean="0">
+                        <a:latin typeface="Cambria Math" panose="02040503050406030204" pitchFamily="18" charset="0"/>
+                      </a:rPr>
+                      <m:t>≤1/</m:t>
+                    </m:r>
+                    <m:sSup>
+                      <m:sSupPr>
+                        <m:ctrlPr>
+                          <a:rPr lang="en-US" b="0" i="1" smtClean="0">
+                            <a:latin typeface="Cambria Math" panose="02040503050406030204" pitchFamily="18" charset="0"/>
+                          </a:rPr>
+                        </m:ctrlPr>
+                      </m:sSupPr>
+                      <m:e>
+                        <m:r>
+                          <a:rPr lang="en-US" b="0" i="1" smtClean="0">
+                            <a:latin typeface="Cambria Math" panose="02040503050406030204" pitchFamily="18" charset="0"/>
+                          </a:rPr>
+                          <m:t>2</m:t>
+                        </m:r>
+                      </m:e>
+                      <m:sup>
+                        <m:r>
+                          <a:rPr lang="en-US" b="0" i="1" smtClean="0">
+                            <a:latin typeface="Cambria Math" panose="02040503050406030204" pitchFamily="18" charset="0"/>
+                          </a:rPr>
+                          <m:t>𝑘</m:t>
+                        </m:r>
+                      </m:sup>
+                    </m:sSup>
+                  </m:oMath>
+                </a14:m>
+                <a:r>
+                  <a:rPr lang="ru-RU" dirty="0"/>
+                  <a:t>, параметр стойкости </a:t>
+                </a:r>
+                <a14:m>
+                  <m:oMath xmlns:m="http://schemas.openxmlformats.org/officeDocument/2006/math">
+                    <m:r>
+                      <a:rPr lang="en-US" b="0" i="1" smtClean="0">
+                        <a:latin typeface="Cambria Math" panose="02040503050406030204" pitchFamily="18" charset="0"/>
+                      </a:rPr>
+                      <m:t>𝑘</m:t>
+                    </m:r>
+                  </m:oMath>
+                </a14:m>
+                <a:r>
+                  <a:rPr lang="ru-RU" dirty="0"/>
+                  <a:t> бит.</a:t>
+                </a:r>
+              </a:p>
+            </p:txBody>
+          </p:sp>
+        </mc:Choice>
+        <mc:Fallback>
+          <p:sp>
+            <p:nvSpPr>
+              <p:cNvPr id="3" name="Объект 2"/>
+              <p:cNvSpPr>
+                <a:spLocks noGrp="1" noRot="1" noChangeAspect="1" noMove="1" noResize="1" noEditPoints="1" noAdjustHandles="1" noChangeArrowheads="1" noChangeShapeType="1" noTextEdit="1"/>
+              </p:cNvSpPr>
+              <p:nvPr>
+                <p:ph idx="1"/>
+              </p:nvPr>
+            </p:nvSpPr>
+            <p:spPr>
+              <a:blipFill>
+                <a:blip r:embed="rId2"/>
+                <a:stretch>
+                  <a:fillRect l="-1043" t="-2101" r="-1449"/>
+                </a:stretch>
+              </a:blipFill>
+            </p:spPr>
+            <p:txBody>
+              <a:bodyPr/>
+              <a:lstStyle/>
+              <a:p>
+                <a:r>
+                  <a:rPr lang="ru-RU">
+                    <a:noFill/>
+                  </a:rPr>
+                  <a:t> </a:t>
+                </a:r>
+              </a:p>
+            </p:txBody>
+          </p:sp>
+        </mc:Fallback>
+      </mc:AlternateContent>
+      <p:sp>
+        <p:nvSpPr>
+          <p:cNvPr id="4" name="Номер слайда 3"/>
+          <p:cNvSpPr>
+            <a:spLocks noGrp="1"/>
+          </p:cNvSpPr>
+          <p:nvPr>
+            <p:ph type="sldNum" sz="quarter" idx="12"/>
+          </p:nvPr>
+        </p:nvSpPr>
+        <p:spPr/>
+        <p:txBody>
+          <a:bodyPr/>
+          <a:lstStyle/>
+          <a:p>
+            <a:fld id="{8253DDDB-F8F7-4D64-A7FD-3F3D61C1949F}" type="slidenum">
+              <a:rPr lang="ru-RU" smtClean="0"/>
+              <a:t>16</a:t>
+            </a:fld>
+            <a:endParaRPr lang="ru-RU"/>
+          </a:p>
+        </p:txBody>
+      </p:sp>
+    </p:spTree>
+    <p:extLst>
+      <p:ext uri="{BB962C8B-B14F-4D97-AF65-F5344CB8AC3E}">
+        <p14:creationId xmlns:p14="http://schemas.microsoft.com/office/powerpoint/2010/main" val="252789709"/>
+      </p:ext>
+    </p:extLst>
+  </p:cSld>
+  <p:clrMapOvr>
+    <a:masterClrMapping/>
+  </p:clrMapOvr>
+</p:sld>
+</file>
+
+<file path=ppt/slides/slide17.xml><?xml version="1.0" encoding="utf-8"?>
+<p:sld xmlns:a="http://schemas.openxmlformats.org/drawingml/2006/main" xmlns:r="http://schemas.openxmlformats.org/officeDocument/2006/relationships" xmlns:p="http://schemas.openxmlformats.org/presentationml/2006/main">
+  <p:cSld>
+    <p:spTree>
+      <p:nvGrpSpPr>
+        <p:cNvPr id="1" name=""/>
+        <p:cNvGrpSpPr/>
+        <p:nvPr/>
+      </p:nvGrpSpPr>
+      <p:grpSpPr>
+        <a:xfrm>
+          <a:off x="0" y="0"/>
+          <a:ext cx="0" cy="0"/>
+          <a:chOff x="0" y="0"/>
+          <a:chExt cx="0" cy="0"/>
+        </a:xfrm>
+      </p:grpSpPr>
+      <p:sp>
+        <p:nvSpPr>
+          <p:cNvPr id="2" name="Заголовок 1"/>
+          <p:cNvSpPr>
+            <a:spLocks noGrp="1"/>
+          </p:cNvSpPr>
+          <p:nvPr>
+            <p:ph type="title"/>
+          </p:nvPr>
+        </p:nvSpPr>
+        <p:spPr/>
+        <p:txBody>
+          <a:bodyPr/>
+          <a:lstStyle/>
+          <a:p>
+            <a:r>
+              <a:rPr lang="ru-RU" dirty="0"/>
+              <a:t>Оценки величин</a:t>
+            </a:r>
+          </a:p>
+        </p:txBody>
+      </p:sp>
+      <mc:AlternateContent xmlns:mc="http://schemas.openxmlformats.org/markup-compatibility/2006" xmlns:a14="http://schemas.microsoft.com/office/drawing/2010/main">
+        <mc:Choice Requires="a14">
+          <p:sp>
+            <p:nvSpPr>
+              <p:cNvPr id="3" name="Объект 2"/>
+              <p:cNvSpPr>
+                <a:spLocks noGrp="1"/>
+              </p:cNvSpPr>
+              <p:nvPr>
+                <p:ph idx="1"/>
+              </p:nvPr>
+            </p:nvSpPr>
+            <p:spPr/>
+            <p:txBody>
+              <a:bodyPr/>
+              <a:lstStyle/>
+              <a:p>
+                <a:pPr marL="0" indent="0">
+                  <a:buNone/>
+                </a:pPr>
+                <a:r>
+                  <a:rPr lang="ru-RU" dirty="0"/>
+                  <a:t>Параметр стойкости</a:t>
+                </a:r>
+                <a:r>
+                  <a:rPr lang="en-US" dirty="0"/>
+                  <a:t> 10 </a:t>
+                </a:r>
+                <a:r>
+                  <a:rPr lang="ru-RU" dirty="0"/>
+                  <a:t>бит это много или мало? А </a:t>
+                </a:r>
+                <a14:m>
+                  <m:oMath xmlns:m="http://schemas.openxmlformats.org/officeDocument/2006/math">
+                    <m:sSup>
+                      <m:sSupPr>
+                        <m:ctrlPr>
+                          <a:rPr lang="en-US" b="0" i="1" smtClean="0">
+                            <a:latin typeface="Cambria Math" panose="02040503050406030204" pitchFamily="18" charset="0"/>
+                          </a:rPr>
+                        </m:ctrlPr>
+                      </m:sSupPr>
+                      <m:e>
+                        <m:r>
+                          <a:rPr lang="ru-RU" b="0" i="1" smtClean="0">
+                            <a:latin typeface="Cambria Math" panose="02040503050406030204" pitchFamily="18" charset="0"/>
+                          </a:rPr>
+                          <m:t>2</m:t>
+                        </m:r>
+                      </m:e>
+                      <m:sup>
+                        <m:r>
+                          <a:rPr lang="en-US" b="0" i="1" smtClean="0">
+                            <a:latin typeface="Cambria Math" panose="02040503050406030204" pitchFamily="18" charset="0"/>
+                          </a:rPr>
+                          <m:t>10</m:t>
+                        </m:r>
+                      </m:sup>
+                    </m:sSup>
+                  </m:oMath>
+                </a14:m>
+                <a:r>
+                  <a:rPr lang="ru-RU" dirty="0"/>
+                  <a:t> бит? При каком параметре стойкости принято считать систему стойкой?</a:t>
+                </a:r>
+              </a:p>
+              <a:p>
+                <a:pPr marL="0" indent="0">
+                  <a:buNone/>
+                </a:pPr>
+                <a:endParaRPr lang="ru-RU" dirty="0"/>
+              </a:p>
+              <a:p>
+                <a:pPr marL="0" indent="0">
+                  <a:buNone/>
+                </a:pPr>
+                <a:r>
+                  <a:rPr lang="ru-RU" dirty="0"/>
+                  <a:t>Необходимый параметр стойкости зависит от приложения используемой криптосистемы.</a:t>
+                </a:r>
+                <a:endParaRPr lang="en-US" dirty="0"/>
+              </a:p>
+              <a:p>
+                <a:pPr marL="0" indent="0">
+                  <a:buNone/>
+                </a:pPr>
+                <a:endParaRPr lang="en-US" dirty="0"/>
+              </a:p>
+              <a:p>
+                <a:pPr marL="0" indent="0">
+                  <a:buNone/>
+                </a:pPr>
+                <a:r>
+                  <a:rPr lang="ru-RU" dirty="0"/>
+                  <a:t>Для систем общего назначения рекомендуемые параметры стойкости 80-256 бит.</a:t>
+                </a:r>
+              </a:p>
+            </p:txBody>
+          </p:sp>
+        </mc:Choice>
+        <mc:Fallback xmlns="">
+          <p:sp>
+            <p:nvSpPr>
+              <p:cNvPr id="3" name="Объект 2"/>
+              <p:cNvSpPr>
+                <a:spLocks noGrp="1" noRot="1" noChangeAspect="1" noMove="1" noResize="1" noEditPoints="1" noAdjustHandles="1" noChangeArrowheads="1" noChangeShapeType="1" noTextEdit="1"/>
+              </p:cNvSpPr>
+              <p:nvPr>
+                <p:ph idx="1"/>
+              </p:nvPr>
+            </p:nvSpPr>
+            <p:spPr>
+              <a:blipFill>
+                <a:blip r:embed="rId2"/>
+                <a:stretch>
+                  <a:fillRect l="-1043" t="-1961"/>
+                </a:stretch>
+              </a:blipFill>
+            </p:spPr>
+            <p:txBody>
+              <a:bodyPr/>
+              <a:lstStyle/>
+              <a:p>
+                <a:r>
+                  <a:rPr lang="ru-RU">
+                    <a:noFill/>
+                  </a:rPr>
+                  <a:t> </a:t>
+                </a:r>
+              </a:p>
+            </p:txBody>
+          </p:sp>
+        </mc:Fallback>
+      </mc:AlternateContent>
+      <p:sp>
+        <p:nvSpPr>
+          <p:cNvPr id="4" name="Номер слайда 3"/>
+          <p:cNvSpPr>
+            <a:spLocks noGrp="1"/>
+          </p:cNvSpPr>
+          <p:nvPr>
+            <p:ph type="sldNum" sz="quarter" idx="12"/>
+          </p:nvPr>
+        </p:nvSpPr>
+        <p:spPr/>
+        <p:txBody>
+          <a:bodyPr/>
+          <a:lstStyle/>
+          <a:p>
+            <a:fld id="{8253DDDB-F8F7-4D64-A7FD-3F3D61C1949F}" type="slidenum">
+              <a:rPr lang="ru-RU" smtClean="0"/>
+              <a:t>17</a:t>
+            </a:fld>
+            <a:endParaRPr lang="ru-RU"/>
+          </a:p>
+        </p:txBody>
+      </p:sp>
+    </p:spTree>
+    <p:extLst>
+      <p:ext uri="{BB962C8B-B14F-4D97-AF65-F5344CB8AC3E}">
+        <p14:creationId xmlns:p14="http://schemas.microsoft.com/office/powerpoint/2010/main" val="2857086617"/>
+      </p:ext>
+    </p:extLst>
+  </p:cSld>
+  <p:clrMapOvr>
+    <a:masterClrMapping/>
+  </p:clrMapOvr>
+</p:sld>
+</file>
+
+<file path=ppt/slides/slide18.xml><?xml version="1.0" encoding="utf-8"?>
+<p:sld xmlns:a="http://schemas.openxmlformats.org/drawingml/2006/main" xmlns:r="http://schemas.openxmlformats.org/officeDocument/2006/relationships" xmlns:p="http://schemas.openxmlformats.org/presentationml/2006/main">
+  <p:cSld>
+    <p:spTree>
+      <p:nvGrpSpPr>
+        <p:cNvPr id="1" name=""/>
+        <p:cNvGrpSpPr/>
+        <p:nvPr/>
+      </p:nvGrpSpPr>
+      <p:grpSpPr>
+        <a:xfrm>
+          <a:off x="0" y="0"/>
+          <a:ext cx="0" cy="0"/>
+          <a:chOff x="0" y="0"/>
+          <a:chExt cx="0" cy="0"/>
+        </a:xfrm>
+      </p:grpSpPr>
+      <p:sp>
+        <p:nvSpPr>
+          <p:cNvPr id="2" name="Заголовок 1"/>
+          <p:cNvSpPr>
+            <a:spLocks noGrp="1"/>
+          </p:cNvSpPr>
+          <p:nvPr>
+            <p:ph type="title"/>
+          </p:nvPr>
+        </p:nvSpPr>
+        <p:spPr/>
+        <p:txBody>
+          <a:bodyPr/>
+          <a:lstStyle/>
+          <a:p>
+            <a:r>
+              <a:rPr lang="ru-RU" dirty="0"/>
+              <a:t>Оценки величин</a:t>
+            </a:r>
+          </a:p>
+        </p:txBody>
+      </p:sp>
+      <mc:AlternateContent xmlns:mc="http://schemas.openxmlformats.org/markup-compatibility/2006" xmlns:a14="http://schemas.microsoft.com/office/drawing/2010/main">
+        <mc:Choice Requires="a14">
+          <p:sp>
+            <p:nvSpPr>
+              <p:cNvPr id="3" name="Объект 2"/>
+              <p:cNvSpPr>
+                <a:spLocks noGrp="1"/>
+              </p:cNvSpPr>
+              <p:nvPr>
+                <p:ph idx="1"/>
+              </p:nvPr>
+            </p:nvSpPr>
+            <p:spPr/>
+            <p:txBody>
+              <a:bodyPr>
+                <a:normAutofit lnSpcReduction="10000"/>
+              </a:bodyPr>
+              <a:lstStyle/>
+              <a:p>
+                <a:pPr marL="0" indent="0">
+                  <a:buNone/>
+                </a:pPr>
+                <a14:m>
+                  <m:oMath xmlns:m="http://schemas.openxmlformats.org/officeDocument/2006/math">
+                    <m:r>
+                      <a:rPr lang="en-US" b="0" i="1" smtClean="0">
+                        <a:latin typeface="Cambria Math" panose="02040503050406030204" pitchFamily="18" charset="0"/>
+                      </a:rPr>
+                      <m:t>~</m:t>
+                    </m:r>
+                    <m:sSup>
+                      <m:sSupPr>
+                        <m:ctrlPr>
+                          <a:rPr lang="en-US" b="0" i="1" smtClean="0">
+                            <a:latin typeface="Cambria Math" panose="02040503050406030204" pitchFamily="18" charset="0"/>
+                          </a:rPr>
+                        </m:ctrlPr>
+                      </m:sSupPr>
+                      <m:e>
+                        <m:r>
+                          <a:rPr lang="en-US" b="0" i="1" smtClean="0">
+                            <a:latin typeface="Cambria Math" panose="02040503050406030204" pitchFamily="18" charset="0"/>
+                          </a:rPr>
+                          <m:t>2</m:t>
+                        </m:r>
+                      </m:e>
+                      <m:sup>
+                        <m:r>
+                          <a:rPr lang="en-US" b="0" i="1" smtClean="0">
+                            <a:latin typeface="Cambria Math" panose="02040503050406030204" pitchFamily="18" charset="0"/>
+                          </a:rPr>
+                          <m:t>240</m:t>
+                        </m:r>
+                      </m:sup>
+                    </m:sSup>
+                  </m:oMath>
+                </a14:m>
+                <a:r>
+                  <a:rPr lang="ru-RU" dirty="0"/>
+                  <a:t> - число элементарных частиц в обозримой вселенной</a:t>
+                </a:r>
+              </a:p>
+              <a:p>
+                <a:pPr marL="0" indent="0">
+                  <a:buNone/>
+                </a:pPr>
+                <a:endParaRPr lang="ru-RU" dirty="0"/>
+              </a:p>
+              <a:p>
+                <a:pPr marL="0" indent="0">
+                  <a:buNone/>
+                </a:pPr>
+                <a14:m>
+                  <m:oMath xmlns:m="http://schemas.openxmlformats.org/officeDocument/2006/math">
+                    <m:r>
+                      <a:rPr lang="en-US" b="0" i="1" smtClean="0">
+                        <a:latin typeface="Cambria Math" panose="02040503050406030204" pitchFamily="18" charset="0"/>
+                      </a:rPr>
+                      <m:t>~</m:t>
+                    </m:r>
+                    <m:sSup>
+                      <m:sSupPr>
+                        <m:ctrlPr>
+                          <a:rPr lang="en-US" b="0" i="1" smtClean="0">
+                            <a:latin typeface="Cambria Math" panose="02040503050406030204" pitchFamily="18" charset="0"/>
+                          </a:rPr>
+                        </m:ctrlPr>
+                      </m:sSupPr>
+                      <m:e>
+                        <m:r>
+                          <a:rPr lang="en-US" b="0" i="1" smtClean="0">
+                            <a:latin typeface="Cambria Math" panose="02040503050406030204" pitchFamily="18" charset="0"/>
+                          </a:rPr>
+                          <m:t>1/2</m:t>
+                        </m:r>
+                      </m:e>
+                      <m:sup>
+                        <m:r>
+                          <a:rPr lang="en-US" b="0" i="1" smtClean="0">
+                            <a:latin typeface="Cambria Math" panose="02040503050406030204" pitchFamily="18" charset="0"/>
+                          </a:rPr>
+                          <m:t>119</m:t>
+                        </m:r>
+                      </m:sup>
+                    </m:sSup>
+                  </m:oMath>
+                </a14:m>
+                <a:r>
+                  <a:rPr lang="en-US" dirty="0"/>
+                  <a:t>- </a:t>
+                </a:r>
+                <a:r>
+                  <a:rPr lang="ru-RU" dirty="0"/>
+                  <a:t>шанс выиграть в лотерею, с миллионом участников 6 раз подряд</a:t>
+                </a:r>
+                <a:endParaRPr lang="en-US" dirty="0"/>
+              </a:p>
+              <a:p>
+                <a:pPr marL="0" indent="0">
+                  <a:buNone/>
+                </a:pPr>
+                <a:endParaRPr lang="en-US" dirty="0"/>
+              </a:p>
+              <a:p>
+                <a:pPr marL="0" indent="0">
+                  <a:buNone/>
+                </a:pPr>
+                <a14:m>
+                  <m:oMath xmlns:m="http://schemas.openxmlformats.org/officeDocument/2006/math">
+                    <m:sSup>
+                      <m:sSupPr>
+                        <m:ctrlPr>
+                          <a:rPr lang="en-US" b="0" i="1" smtClean="0">
+                            <a:latin typeface="Cambria Math" panose="02040503050406030204" pitchFamily="18" charset="0"/>
+                          </a:rPr>
+                        </m:ctrlPr>
+                      </m:sSupPr>
+                      <m:e>
+                        <m:r>
+                          <a:rPr lang="en-US" i="1">
+                            <a:latin typeface="Cambria Math" panose="02040503050406030204" pitchFamily="18" charset="0"/>
+                          </a:rPr>
+                          <m:t>~</m:t>
+                        </m:r>
+                        <m:r>
+                          <a:rPr lang="en-US" b="0" i="1" smtClean="0">
+                            <a:latin typeface="Cambria Math" panose="02040503050406030204" pitchFamily="18" charset="0"/>
+                          </a:rPr>
+                          <m:t>2</m:t>
+                        </m:r>
+                      </m:e>
+                      <m:sup>
+                        <m:r>
+                          <a:rPr lang="en-US" b="0" i="1" smtClean="0">
+                            <a:latin typeface="Cambria Math" panose="02040503050406030204" pitchFamily="18" charset="0"/>
+                          </a:rPr>
+                          <m:t>60</m:t>
+                        </m:r>
+                      </m:sup>
+                    </m:sSup>
+                  </m:oMath>
+                </a14:m>
+                <a:r>
+                  <a:rPr lang="en-US" dirty="0"/>
+                  <a:t> - </a:t>
+                </a:r>
+                <a:r>
+                  <a:rPr lang="ru-RU" dirty="0"/>
+                  <a:t>секунд с большого взрыва (</a:t>
+                </a:r>
+                <a14:m>
+                  <m:oMath xmlns:m="http://schemas.openxmlformats.org/officeDocument/2006/math">
+                    <m:sSup>
+                      <m:sSupPr>
+                        <m:ctrlPr>
+                          <a:rPr lang="en-US" i="1" dirty="0" smtClean="0">
+                            <a:latin typeface="Cambria Math" panose="02040503050406030204" pitchFamily="18" charset="0"/>
+                          </a:rPr>
+                        </m:ctrlPr>
+                      </m:sSupPr>
+                      <m:e>
+                        <m:r>
+                          <a:rPr lang="ru-RU" i="1" dirty="0" smtClean="0">
+                            <a:latin typeface="Cambria Math" panose="02040503050406030204" pitchFamily="18" charset="0"/>
+                          </a:rPr>
+                          <m:t>2</m:t>
+                        </m:r>
+                      </m:e>
+                      <m:sup>
+                        <m:r>
+                          <a:rPr lang="en-US" i="1" dirty="0" smtClean="0">
+                            <a:latin typeface="Cambria Math" panose="02040503050406030204" pitchFamily="18" charset="0"/>
+                          </a:rPr>
+                          <m:t>200</m:t>
+                        </m:r>
+                      </m:sup>
+                    </m:sSup>
+                  </m:oMath>
+                </a14:m>
+                <a:r>
+                  <a:rPr lang="en-US" dirty="0"/>
+                  <a:t> - </a:t>
+                </a:r>
+                <a:r>
+                  <a:rPr lang="ru-RU" dirty="0"/>
+                  <a:t>в </a:t>
+                </a:r>
+                <a:r>
+                  <a:rPr lang="ru-RU" dirty="0" err="1"/>
+                  <a:t>планковских</a:t>
+                </a:r>
+                <a:r>
+                  <a:rPr lang="ru-RU" dirty="0"/>
+                  <a:t> единицах)</a:t>
+                </a:r>
+                <a:r>
+                  <a:rPr lang="en-US" dirty="0"/>
+                  <a:t> </a:t>
+                </a:r>
+                <a:endParaRPr lang="ru-RU" dirty="0"/>
+              </a:p>
+              <a:p>
+                <a:pPr marL="0" indent="0">
+                  <a:buNone/>
+                </a:pPr>
+                <a:endParaRPr lang="en-US" dirty="0"/>
+              </a:p>
+              <a:p>
+                <a:pPr marL="0" indent="0">
+                  <a:buNone/>
+                </a:pPr>
+                <a14:m>
+                  <m:oMath xmlns:m="http://schemas.openxmlformats.org/officeDocument/2006/math">
+                    <m:r>
+                      <a:rPr lang="en-US" b="0" i="1" smtClean="0">
+                        <a:latin typeface="Cambria Math" panose="02040503050406030204" pitchFamily="18" charset="0"/>
+                      </a:rPr>
+                      <m:t>~</m:t>
+                    </m:r>
+                    <m:sSup>
+                      <m:sSupPr>
+                        <m:ctrlPr>
+                          <a:rPr lang="en-US" b="0" i="1" smtClean="0">
+                            <a:latin typeface="Cambria Math" panose="02040503050406030204" pitchFamily="18" charset="0"/>
+                          </a:rPr>
+                        </m:ctrlPr>
+                      </m:sSupPr>
+                      <m:e>
+                        <m:r>
+                          <a:rPr lang="en-US" b="0" i="1" smtClean="0">
+                            <a:latin typeface="Cambria Math" panose="02040503050406030204" pitchFamily="18" charset="0"/>
+                          </a:rPr>
+                          <m:t>2</m:t>
+                        </m:r>
+                      </m:e>
+                      <m:sup>
+                        <m:r>
+                          <a:rPr lang="en-US" b="0" i="1" smtClean="0">
+                            <a:latin typeface="Cambria Math" panose="02040503050406030204" pitchFamily="18" charset="0"/>
+                          </a:rPr>
+                          <m:t>42</m:t>
+                        </m:r>
+                      </m:sup>
+                    </m:sSup>
+                  </m:oMath>
+                </a14:m>
+                <a:r>
+                  <a:rPr lang="en-US" dirty="0"/>
+                  <a:t> - </a:t>
+                </a:r>
+                <a:r>
+                  <a:rPr lang="ru-RU" dirty="0"/>
+                  <a:t>вычислительная сложность </a:t>
+                </a:r>
+                <a:r>
+                  <a:rPr lang="ru-RU" dirty="0" err="1"/>
+                  <a:t>майнинга</a:t>
+                </a:r>
+                <a:r>
+                  <a:rPr lang="ru-RU" dirty="0"/>
+                  <a:t> </a:t>
+                </a:r>
+                <a:r>
+                  <a:rPr lang="ru-RU" dirty="0" err="1"/>
+                  <a:t>биткоина</a:t>
+                </a:r>
+                <a:r>
+                  <a:rPr lang="ru-RU" dirty="0"/>
+                  <a:t> (2018 год)</a:t>
+                </a:r>
+              </a:p>
+              <a:p>
+                <a:pPr marL="0" indent="0">
+                  <a:buNone/>
+                </a:pPr>
+                <a:endParaRPr lang="ru-RU" dirty="0"/>
+              </a:p>
+              <a:p>
+                <a:pPr marL="0" indent="0">
+                  <a:buNone/>
+                </a:pPr>
+                <a14:m>
+                  <m:oMath xmlns:m="http://schemas.openxmlformats.org/officeDocument/2006/math">
+                    <m:r>
+                      <a:rPr lang="en-US" i="1" dirty="0" smtClean="0">
+                        <a:latin typeface="Cambria Math" panose="02040503050406030204" pitchFamily="18" charset="0"/>
+                      </a:rPr>
+                      <m:t>~</m:t>
+                    </m:r>
+                    <m:sSup>
+                      <m:sSupPr>
+                        <m:ctrlPr>
+                          <a:rPr lang="en-US" b="0" i="1" dirty="0" smtClean="0">
+                            <a:latin typeface="Cambria Math" panose="02040503050406030204" pitchFamily="18" charset="0"/>
+                          </a:rPr>
+                        </m:ctrlPr>
+                      </m:sSupPr>
+                      <m:e>
+                        <m:r>
+                          <a:rPr lang="en-US" b="0" i="1" dirty="0" smtClean="0">
+                            <a:latin typeface="Cambria Math" panose="02040503050406030204" pitchFamily="18" charset="0"/>
+                          </a:rPr>
+                          <m:t>2</m:t>
+                        </m:r>
+                      </m:e>
+                      <m:sup>
+                        <m:r>
+                          <a:rPr lang="en-US" b="0" i="1" dirty="0" smtClean="0">
+                            <a:latin typeface="Cambria Math" panose="02040503050406030204" pitchFamily="18" charset="0"/>
+                          </a:rPr>
+                          <m:t>30</m:t>
+                        </m:r>
+                      </m:sup>
+                    </m:sSup>
+                  </m:oMath>
+                </a14:m>
+                <a:r>
+                  <a:rPr lang="en-US" dirty="0"/>
+                  <a:t> - </a:t>
+                </a:r>
+                <a:r>
+                  <a:rPr lang="ru-RU" dirty="0"/>
+                  <a:t>можно перебрать на домашнем компьютере за несколько часов</a:t>
+                </a:r>
+                <a:endParaRPr lang="en-US" dirty="0"/>
+              </a:p>
+              <a:p>
+                <a:pPr marL="0" indent="0">
+                  <a:buNone/>
+                </a:pPr>
+                <a:endParaRPr lang="ru-RU" dirty="0"/>
+              </a:p>
+            </p:txBody>
+          </p:sp>
+        </mc:Choice>
+        <mc:Fallback xmlns="">
+          <p:sp>
+            <p:nvSpPr>
+              <p:cNvPr id="3" name="Объект 2"/>
+              <p:cNvSpPr>
+                <a:spLocks noGrp="1" noRot="1" noChangeAspect="1" noMove="1" noResize="1" noEditPoints="1" noAdjustHandles="1" noChangeArrowheads="1" noChangeShapeType="1" noTextEdit="1"/>
+              </p:cNvSpPr>
+              <p:nvPr>
+                <p:ph idx="1"/>
+              </p:nvPr>
+            </p:nvSpPr>
+            <p:spPr>
+              <a:blipFill>
+                <a:blip r:embed="rId2"/>
+                <a:stretch>
+                  <a:fillRect l="-1043" t="-2801" b="-2241"/>
+                </a:stretch>
+              </a:blipFill>
+            </p:spPr>
+            <p:txBody>
+              <a:bodyPr/>
+              <a:lstStyle/>
+              <a:p>
+                <a:r>
+                  <a:rPr lang="ru-RU">
+                    <a:noFill/>
+                  </a:rPr>
+                  <a:t> </a:t>
+                </a:r>
+              </a:p>
+            </p:txBody>
+          </p:sp>
+        </mc:Fallback>
+      </mc:AlternateContent>
+      <p:sp>
+        <p:nvSpPr>
+          <p:cNvPr id="4" name="Номер слайда 3"/>
+          <p:cNvSpPr>
+            <a:spLocks noGrp="1"/>
+          </p:cNvSpPr>
+          <p:nvPr>
+            <p:ph type="sldNum" sz="quarter" idx="12"/>
+          </p:nvPr>
+        </p:nvSpPr>
+        <p:spPr/>
+        <p:txBody>
+          <a:bodyPr/>
+          <a:lstStyle/>
+          <a:p>
+            <a:fld id="{8253DDDB-F8F7-4D64-A7FD-3F3D61C1949F}" type="slidenum">
+              <a:rPr lang="ru-RU" smtClean="0"/>
+              <a:t>18</a:t>
+            </a:fld>
+            <a:endParaRPr lang="ru-RU"/>
+          </a:p>
+        </p:txBody>
+      </p:sp>
+    </p:spTree>
+    <p:extLst>
+      <p:ext uri="{BB962C8B-B14F-4D97-AF65-F5344CB8AC3E}">
+        <p14:creationId xmlns:p14="http://schemas.microsoft.com/office/powerpoint/2010/main" val="2966295883"/>
+      </p:ext>
+    </p:extLst>
+  </p:cSld>
+  <p:clrMapOvr>
+    <a:masterClrMapping/>
+  </p:clrMapOvr>
+</p:sld>
+</file>
+
+<file path=ppt/slides/slide19.xml><?xml version="1.0" encoding="utf-8"?>
+<p:sld xmlns:a="http://schemas.openxmlformats.org/drawingml/2006/main" xmlns:r="http://schemas.openxmlformats.org/officeDocument/2006/relationships" xmlns:p="http://schemas.openxmlformats.org/presentationml/2006/main">
+  <p:cSld>
+    <p:spTree>
+      <p:nvGrpSpPr>
+        <p:cNvPr id="1" name=""/>
+        <p:cNvGrpSpPr/>
+        <p:nvPr/>
+      </p:nvGrpSpPr>
+      <p:grpSpPr>
+        <a:xfrm>
+          <a:off x="0" y="0"/>
+          <a:ext cx="0" cy="0"/>
+          <a:chOff x="0" y="0"/>
+          <a:chExt cx="0" cy="0"/>
+        </a:xfrm>
+      </p:grpSpPr>
+      <p:sp>
+        <p:nvSpPr>
+          <p:cNvPr id="2" name="Заголовок 1"/>
+          <p:cNvSpPr>
+            <a:spLocks noGrp="1"/>
+          </p:cNvSpPr>
+          <p:nvPr>
+            <p:ph type="title"/>
+          </p:nvPr>
+        </p:nvSpPr>
+        <p:spPr/>
+        <p:txBody>
+          <a:bodyPr/>
+          <a:lstStyle/>
+          <a:p>
+            <a:r>
+              <a:rPr lang="ru-RU" dirty="0"/>
+              <a:t>Статистическая неразличимость</a:t>
+            </a:r>
+          </a:p>
+        </p:txBody>
+      </p:sp>
+      <mc:AlternateContent xmlns:mc="http://schemas.openxmlformats.org/markup-compatibility/2006" xmlns:a14="http://schemas.microsoft.com/office/drawing/2010/main">
+        <mc:Choice Requires="a14">
+          <p:sp>
+            <p:nvSpPr>
+              <p:cNvPr id="3" name="Объект 2"/>
+              <p:cNvSpPr>
+                <a:spLocks noGrp="1"/>
+              </p:cNvSpPr>
+              <p:nvPr>
+                <p:ph idx="1"/>
+              </p:nvPr>
+            </p:nvSpPr>
+            <p:spPr/>
+            <p:txBody>
+              <a:bodyPr/>
+              <a:lstStyle/>
+              <a:p>
+                <a:pPr marL="0" indent="0">
+                  <a:buNone/>
+                </a:pPr>
+                <a:r>
+                  <a:rPr lang="ru-RU" dirty="0"/>
+                  <a:t>Два </a:t>
+                </a:r>
+                <a:r>
+                  <a:rPr lang="ru-RU" b="1" dirty="0"/>
+                  <a:t>эксперимента</a:t>
+                </a:r>
+                <a:r>
+                  <a:rPr lang="ru-RU" dirty="0"/>
+                  <a:t> игры называются </a:t>
+                </a:r>
+                <a:r>
+                  <a:rPr lang="ru-RU" b="1" dirty="0"/>
+                  <a:t>статистически неразличимыми</a:t>
+                </a:r>
+                <a:r>
+                  <a:rPr lang="ru-RU" dirty="0"/>
+                  <a:t>, если не существует эффективного алгоритма противника, способного различить</a:t>
+                </a:r>
+                <a:r>
+                  <a:rPr lang="en-US" dirty="0"/>
+                  <a:t> </a:t>
+                </a:r>
+                <a:r>
+                  <a:rPr lang="ru-RU" dirty="0"/>
+                  <a:t>эти эксперименты.</a:t>
+                </a:r>
+              </a:p>
+              <a:p>
+                <a:pPr marL="0" indent="0">
+                  <a:buNone/>
+                </a:pPr>
+                <a:r>
+                  <a:rPr lang="ru-RU" dirty="0"/>
+                  <a:t>Т.е. </a:t>
+                </a:r>
+                <a14:m>
+                  <m:oMath xmlns:m="http://schemas.openxmlformats.org/officeDocument/2006/math">
+                    <m:r>
+                      <a:rPr lang="ru-RU" b="0" i="1" smtClean="0">
+                        <a:latin typeface="Cambria Math" panose="02040503050406030204" pitchFamily="18" charset="0"/>
+                      </a:rPr>
+                      <m:t>∀</m:t>
+                    </m:r>
+                    <m:r>
+                      <a:rPr lang="en-US" b="0" i="1" smtClean="0">
+                        <a:latin typeface="Cambria Math" panose="02040503050406030204" pitchFamily="18" charset="0"/>
+                      </a:rPr>
+                      <m:t>𝐴</m:t>
+                    </m:r>
+                    <m:r>
+                      <a:rPr lang="en-US" b="0" i="1" smtClean="0">
+                        <a:latin typeface="Cambria Math" panose="02040503050406030204" pitchFamily="18" charset="0"/>
+                      </a:rPr>
+                      <m:t> </m:t>
+                    </m:r>
+                    <m:r>
+                      <m:rPr>
+                        <m:sty m:val="p"/>
+                      </m:rPr>
+                      <a:rPr lang="en-US" b="0" i="0" smtClean="0">
+                        <a:latin typeface="Cambria Math" panose="02040503050406030204" pitchFamily="18" charset="0"/>
+                      </a:rPr>
+                      <m:t>Di</m:t>
+                    </m:r>
+                    <m:sSub>
+                      <m:sSubPr>
+                        <m:ctrlPr>
+                          <a:rPr lang="en-US" b="0" i="1" smtClean="0">
                             <a:latin typeface="Cambria Math" panose="02040503050406030204" pitchFamily="18" charset="0"/>
                           </a:rPr>
                         </m:ctrlPr>
@@ -7848,7 +9109,7 @@
             </p:txBody>
           </p:sp>
         </mc:Choice>
-        <mc:Fallback>
+        <mc:Fallback xmlns="">
           <p:sp>
             <p:nvSpPr>
               <p:cNvPr id="3" name="Объект 2"/>
@@ -7899,7 +9160,7 @@
           <a:p>
             <a:fld id="{8253DDDB-F8F7-4D64-A7FD-3F3D61C1949F}" type="slidenum">
               <a:rPr lang="ru-RU" smtClean="0"/>
-              <a:t>16</a:t>
+              <a:t>19</a:t>
             </a:fld>
             <a:endParaRPr lang="ru-RU"/>
           </a:p>
@@ -8847,7 +10108,7 @@
 </p:sld>
 </file>
 
-<file path=ppt/slides/slide17.xml><?xml version="1.0" encoding="utf-8"?>
+<file path=ppt/slides/slide2.xml><?xml version="1.0" encoding="utf-8"?>
 <p:sld xmlns:a="http://schemas.openxmlformats.org/drawingml/2006/main" xmlns:r="http://schemas.openxmlformats.org/officeDocument/2006/relationships" xmlns:p="http://schemas.openxmlformats.org/presentationml/2006/main">
   <p:cSld>
     <p:spTree>
@@ -8881,13 +10142,623 @@
           <a:p>
             <a:r>
               <a:rPr lang="ru-RU" dirty="0"/>
-              <a:t>Эффективность в игре</a:t>
+              <a:t>Тест.</a:t>
             </a:r>
           </a:p>
         </p:txBody>
       </p:sp>
-      <mc:AlternateContent xmlns:mc="http://schemas.openxmlformats.org/markup-compatibility/2006">
-        <mc:Choice xmlns:a14="http://schemas.microsoft.com/office/drawing/2010/main" Requires="a14">
+      <p:sp>
+        <p:nvSpPr>
+          <p:cNvPr id="3" name="Объект 2"/>
+          <p:cNvSpPr>
+            <a:spLocks noGrp="1"/>
+          </p:cNvSpPr>
+          <p:nvPr>
+            <p:ph idx="1"/>
+          </p:nvPr>
+        </p:nvSpPr>
+        <p:spPr>
+          <a:xfrm>
+            <a:off x="5628541" y="1408579"/>
+            <a:ext cx="6148754" cy="4351338"/>
+          </a:xfrm>
+        </p:spPr>
+        <p:txBody>
+          <a:bodyPr/>
+          <a:lstStyle/>
+          <a:p>
+            <a:r>
+              <a:rPr lang="ru-RU" dirty="0"/>
+              <a:t>Положить телефон экраном вниз справа от себя</a:t>
+            </a:r>
+          </a:p>
+          <a:p>
+            <a:r>
+              <a:rPr lang="ru-RU" dirty="0"/>
+              <a:t>Не разговаривать с соседями</a:t>
+            </a:r>
+          </a:p>
+          <a:p>
+            <a:r>
+              <a:rPr lang="ru-RU" dirty="0"/>
+              <a:t>Не пользоваться конспектами и электронными устройствами</a:t>
+            </a:r>
+          </a:p>
+          <a:p>
+            <a:r>
+              <a:rPr lang="ru-RU" dirty="0"/>
+              <a:t>Написать номер (по таблице) и ФИО на листочке</a:t>
+            </a:r>
+          </a:p>
+          <a:p>
+            <a:r>
+              <a:rPr lang="ru-RU" dirty="0"/>
+              <a:t>Написать краткий ответ на вопрос</a:t>
+            </a:r>
+            <a:endParaRPr lang="en-US" dirty="0"/>
+          </a:p>
+          <a:p>
+            <a:r>
+              <a:rPr lang="ru-RU" dirty="0"/>
+              <a:t>Дождаться окончания теста</a:t>
+            </a:r>
+          </a:p>
+        </p:txBody>
+      </p:sp>
+      <p:sp>
+        <p:nvSpPr>
+          <p:cNvPr id="4" name="Номер слайда 3"/>
+          <p:cNvSpPr>
+            <a:spLocks noGrp="1"/>
+          </p:cNvSpPr>
+          <p:nvPr>
+            <p:ph type="sldNum" sz="quarter" idx="12"/>
+          </p:nvPr>
+        </p:nvSpPr>
+        <p:spPr/>
+        <p:txBody>
+          <a:bodyPr/>
+          <a:lstStyle/>
+          <a:p>
+            <a:fld id="{8253DDDB-F8F7-4D64-A7FD-3F3D61C1949F}" type="slidenum">
+              <a:rPr lang="ru-RU" smtClean="0"/>
+              <a:t>2</a:t>
+            </a:fld>
+            <a:endParaRPr lang="ru-RU"/>
+          </a:p>
+        </p:txBody>
+      </p:sp>
+      <p:sp>
+        <p:nvSpPr>
+          <p:cNvPr id="5" name="Прямоугольник 4"/>
+          <p:cNvSpPr/>
+          <p:nvPr/>
+        </p:nvSpPr>
+        <p:spPr>
+          <a:xfrm>
+            <a:off x="284285" y="5433158"/>
+            <a:ext cx="10688515" cy="317012"/>
+          </a:xfrm>
+          <a:prstGeom prst="rect">
+            <a:avLst/>
+          </a:prstGeom>
+          <a:solidFill>
+            <a:schemeClr val="accent6">
+              <a:alpha val="50000"/>
+            </a:schemeClr>
+          </a:solidFill>
+          <a:ln>
+            <a:noFill/>
+          </a:ln>
+        </p:spPr>
+        <p:style>
+          <a:lnRef idx="0">
+            <a:scrgbClr r="0" g="0" b="0"/>
+          </a:lnRef>
+          <a:fillRef idx="0">
+            <a:scrgbClr r="0" g="0" b="0"/>
+          </a:fillRef>
+          <a:effectRef idx="0">
+            <a:scrgbClr r="0" g="0" b="0"/>
+          </a:effectRef>
+          <a:fontRef idx="minor">
+            <a:schemeClr val="lt1"/>
+          </a:fontRef>
+        </p:style>
+        <p:txBody>
+          <a:bodyPr rtlCol="0" anchor="ctr"/>
+          <a:lstStyle/>
+          <a:p>
+            <a:pPr algn="ctr"/>
+            <a:endParaRPr lang="ru-RU"/>
+          </a:p>
+        </p:txBody>
+      </p:sp>
+      <p:sp>
+        <p:nvSpPr>
+          <p:cNvPr id="6" name="Прямоугольник 5"/>
+          <p:cNvSpPr/>
+          <p:nvPr/>
+        </p:nvSpPr>
+        <p:spPr>
+          <a:xfrm>
+            <a:off x="284285" y="5819530"/>
+            <a:ext cx="10688515" cy="317012"/>
+          </a:xfrm>
+          <a:prstGeom prst="rect">
+            <a:avLst/>
+          </a:prstGeom>
+          <a:solidFill>
+            <a:schemeClr val="accent6">
+              <a:alpha val="50000"/>
+            </a:schemeClr>
+          </a:solidFill>
+          <a:ln>
+            <a:noFill/>
+          </a:ln>
+        </p:spPr>
+        <p:style>
+          <a:lnRef idx="0">
+            <a:scrgbClr r="0" g="0" b="0"/>
+          </a:lnRef>
+          <a:fillRef idx="0">
+            <a:scrgbClr r="0" g="0" b="0"/>
+          </a:fillRef>
+          <a:effectRef idx="0">
+            <a:scrgbClr r="0" g="0" b="0"/>
+          </a:effectRef>
+          <a:fontRef idx="minor">
+            <a:schemeClr val="lt1"/>
+          </a:fontRef>
+        </p:style>
+        <p:txBody>
+          <a:bodyPr rtlCol="0" anchor="ctr"/>
+          <a:lstStyle/>
+          <a:p>
+            <a:pPr algn="ctr"/>
+            <a:endParaRPr lang="ru-RU"/>
+          </a:p>
+        </p:txBody>
+      </p:sp>
+      <p:sp>
+        <p:nvSpPr>
+          <p:cNvPr id="7" name="Прямоугольник 6"/>
+          <p:cNvSpPr/>
+          <p:nvPr/>
+        </p:nvSpPr>
+        <p:spPr>
+          <a:xfrm>
+            <a:off x="284284" y="6205902"/>
+            <a:ext cx="10688515" cy="317012"/>
+          </a:xfrm>
+          <a:prstGeom prst="rect">
+            <a:avLst/>
+          </a:prstGeom>
+          <a:solidFill>
+            <a:schemeClr val="accent6">
+              <a:alpha val="50000"/>
+            </a:schemeClr>
+          </a:solidFill>
+          <a:ln>
+            <a:noFill/>
+          </a:ln>
+        </p:spPr>
+        <p:style>
+          <a:lnRef idx="0">
+            <a:scrgbClr r="0" g="0" b="0"/>
+          </a:lnRef>
+          <a:fillRef idx="0">
+            <a:scrgbClr r="0" g="0" b="0"/>
+          </a:fillRef>
+          <a:effectRef idx="0">
+            <a:scrgbClr r="0" g="0" b="0"/>
+          </a:effectRef>
+          <a:fontRef idx="minor">
+            <a:schemeClr val="lt1"/>
+          </a:fontRef>
+        </p:style>
+        <p:txBody>
+          <a:bodyPr rtlCol="0" anchor="ctr"/>
+          <a:lstStyle/>
+          <a:p>
+            <a:pPr algn="ctr"/>
+            <a:endParaRPr lang="ru-RU"/>
+          </a:p>
+        </p:txBody>
+      </p:sp>
+      <mc:AlternateContent xmlns:mc="http://schemas.openxmlformats.org/markup-compatibility/2006" xmlns:a14="http://schemas.microsoft.com/office/drawing/2010/main">
+        <mc:Choice Requires="a14">
+          <p:sp>
+            <p:nvSpPr>
+              <p:cNvPr id="8" name="Прямоугольник 7"/>
+              <p:cNvSpPr/>
+              <p:nvPr/>
+            </p:nvSpPr>
+            <p:spPr>
+              <a:xfrm>
+                <a:off x="185371" y="1408578"/>
+                <a:ext cx="5318614" cy="3355662"/>
+              </a:xfrm>
+              <a:prstGeom prst="rect">
+                <a:avLst/>
+              </a:prstGeom>
+            </p:spPr>
+            <p:txBody>
+              <a:bodyPr wrap="square">
+                <a:spAutoFit/>
+              </a:bodyPr>
+              <a:lstStyle/>
+              <a:p>
+                <a:r>
+                  <a:rPr lang="ru-RU" sz="2600" dirty="0"/>
+                  <a:t>Пусть задана игра на семантическую стойкость для алгоритма </a:t>
+                </a:r>
+                <a14:m>
+                  <m:oMath xmlns:m="http://schemas.openxmlformats.org/officeDocument/2006/math">
+                    <m:r>
+                      <a:rPr lang="en-US" sz="2600" i="1">
+                        <a:latin typeface="Cambria Math" panose="02040503050406030204" pitchFamily="18" charset="0"/>
+                      </a:rPr>
+                      <m:t>𝐴</m:t>
+                    </m:r>
+                  </m:oMath>
+                </a14:m>
+                <a:r>
+                  <a:rPr lang="ru-RU" sz="2600" b="1" dirty="0"/>
+                  <a:t> </a:t>
+                </a:r>
+                <a:r>
+                  <a:rPr lang="ru-RU" sz="2600" dirty="0"/>
+                  <a:t>против шифра </a:t>
+                </a:r>
+                <a14:m>
+                  <m:oMath xmlns:m="http://schemas.openxmlformats.org/officeDocument/2006/math">
+                    <m:r>
+                      <m:rPr>
+                        <m:sty m:val="p"/>
+                      </m:rPr>
+                      <a:rPr lang="ru-RU" sz="2600">
+                        <a:latin typeface="Cambria Math" panose="02040503050406030204" pitchFamily="18" charset="0"/>
+                      </a:rPr>
+                      <m:t>Ε</m:t>
+                    </m:r>
+                    <m:r>
+                      <a:rPr lang="en-US" sz="2600" i="1">
+                        <a:latin typeface="Cambria Math" panose="02040503050406030204" pitchFamily="18" charset="0"/>
+                      </a:rPr>
+                      <m:t>=(</m:t>
+                    </m:r>
+                    <m:r>
+                      <a:rPr lang="en-US" sz="2600" i="1">
+                        <a:latin typeface="Cambria Math" panose="02040503050406030204" pitchFamily="18" charset="0"/>
+                      </a:rPr>
+                      <m:t>𝐸</m:t>
+                    </m:r>
+                    <m:r>
+                      <a:rPr lang="en-US" sz="2600" i="1">
+                        <a:latin typeface="Cambria Math" panose="02040503050406030204" pitchFamily="18" charset="0"/>
+                      </a:rPr>
+                      <m:t>,</m:t>
+                    </m:r>
+                    <m:r>
+                      <a:rPr lang="en-US" sz="2600" i="1">
+                        <a:latin typeface="Cambria Math" panose="02040503050406030204" pitchFamily="18" charset="0"/>
+                      </a:rPr>
+                      <m:t>𝐷</m:t>
+                    </m:r>
+                    <m:r>
+                      <a:rPr lang="en-US" sz="2600" i="1">
+                        <a:latin typeface="Cambria Math" panose="02040503050406030204" pitchFamily="18" charset="0"/>
+                      </a:rPr>
+                      <m:t>)</m:t>
+                    </m:r>
+                  </m:oMath>
+                </a14:m>
+                <a:r>
+                  <a:rPr lang="ru-RU" sz="2600" b="1" dirty="0"/>
+                  <a:t> </a:t>
+                </a:r>
+                <a:r>
+                  <a:rPr lang="ru-RU" sz="2600" dirty="0"/>
+                  <a:t>на </a:t>
+                </a:r>
+                <a14:m>
+                  <m:oMath xmlns:m="http://schemas.openxmlformats.org/officeDocument/2006/math">
+                    <m:r>
+                      <a:rPr lang="en-US" sz="2600" i="1">
+                        <a:latin typeface="Cambria Math" panose="02040503050406030204" pitchFamily="18" charset="0"/>
+                      </a:rPr>
+                      <m:t>(</m:t>
+                    </m:r>
+                    <m:r>
+                      <a:rPr lang="en-US" sz="2600" i="1">
+                        <a:latin typeface="Cambria Math" panose="02040503050406030204" pitchFamily="18" charset="0"/>
+                      </a:rPr>
+                      <m:t>𝐾</m:t>
+                    </m:r>
+                    <m:r>
+                      <a:rPr lang="en-US" sz="2600" i="1">
+                        <a:latin typeface="Cambria Math" panose="02040503050406030204" pitchFamily="18" charset="0"/>
+                      </a:rPr>
+                      <m:t>,</m:t>
+                    </m:r>
+                    <m:r>
+                      <a:rPr lang="en-US" sz="2600" i="1">
+                        <a:latin typeface="Cambria Math" panose="02040503050406030204" pitchFamily="18" charset="0"/>
+                      </a:rPr>
+                      <m:t>𝑀</m:t>
+                    </m:r>
+                    <m:r>
+                      <a:rPr lang="en-US" sz="2600" i="1">
+                        <a:latin typeface="Cambria Math" panose="02040503050406030204" pitchFamily="18" charset="0"/>
+                      </a:rPr>
+                      <m:t>,</m:t>
+                    </m:r>
+                    <m:r>
+                      <a:rPr lang="en-US" sz="2600" i="1">
+                        <a:latin typeface="Cambria Math" panose="02040503050406030204" pitchFamily="18" charset="0"/>
+                      </a:rPr>
+                      <m:t>𝐶</m:t>
+                    </m:r>
+                    <m:r>
+                      <a:rPr lang="en-US" sz="2600" i="1">
+                        <a:latin typeface="Cambria Math" panose="02040503050406030204" pitchFamily="18" charset="0"/>
+                      </a:rPr>
+                      <m:t>)</m:t>
+                    </m:r>
+                  </m:oMath>
+                </a14:m>
+                <a:r>
+                  <a:rPr lang="ru-RU" sz="2600" b="1" dirty="0"/>
+                  <a:t>.</a:t>
+                </a:r>
+              </a:p>
+              <a:p>
+                <a:endParaRPr lang="ru-RU" sz="2600" b="1" dirty="0"/>
+              </a:p>
+              <a:p>
+                <a14:m>
+                  <m:oMath xmlns:m="http://schemas.openxmlformats.org/officeDocument/2006/math">
+                    <m:sSub>
+                      <m:sSubPr>
+                        <m:ctrlPr>
+                          <a:rPr lang="en-US" sz="2600" i="1">
+                            <a:latin typeface="Cambria Math" panose="02040503050406030204" pitchFamily="18" charset="0"/>
+                          </a:rPr>
+                        </m:ctrlPr>
+                      </m:sSubPr>
+                      <m:e>
+                        <m:r>
+                          <a:rPr lang="en-US" sz="2600" i="1">
+                            <a:latin typeface="Cambria Math" panose="02040503050406030204" pitchFamily="18" charset="0"/>
+                          </a:rPr>
+                          <m:t>𝑊</m:t>
+                        </m:r>
+                      </m:e>
+                      <m:sub>
+                        <m:r>
+                          <a:rPr lang="en-US" sz="2600" i="1">
+                            <a:latin typeface="Cambria Math" panose="02040503050406030204" pitchFamily="18" charset="0"/>
+                          </a:rPr>
+                          <m:t>𝑏</m:t>
+                        </m:r>
+                      </m:sub>
+                    </m:sSub>
+                  </m:oMath>
+                </a14:m>
+                <a:r>
+                  <a:rPr lang="ru-RU" sz="2600" dirty="0"/>
+                  <a:t> - событие того, что </a:t>
+                </a:r>
+                <a14:m>
+                  <m:oMath xmlns:m="http://schemas.openxmlformats.org/officeDocument/2006/math">
+                    <m:sSup>
+                      <m:sSupPr>
+                        <m:ctrlPr>
+                          <a:rPr lang="en-US" sz="2600" i="1">
+                            <a:latin typeface="Cambria Math" panose="02040503050406030204" pitchFamily="18" charset="0"/>
+                          </a:rPr>
+                        </m:ctrlPr>
+                      </m:sSupPr>
+                      <m:e>
+                        <m:r>
+                          <a:rPr lang="en-US" sz="2600" i="1">
+                            <a:latin typeface="Cambria Math" panose="02040503050406030204" pitchFamily="18" charset="0"/>
+                          </a:rPr>
+                          <m:t>𝑏</m:t>
+                        </m:r>
+                      </m:e>
+                      <m:sup>
+                        <m:r>
+                          <a:rPr lang="en-US" sz="2600" i="1">
+                            <a:latin typeface="Cambria Math" panose="02040503050406030204" pitchFamily="18" charset="0"/>
+                          </a:rPr>
+                          <m:t>′</m:t>
+                        </m:r>
+                      </m:sup>
+                    </m:sSup>
+                    <m:r>
+                      <a:rPr lang="en-US" sz="2600" i="1">
+                        <a:latin typeface="Cambria Math" panose="02040503050406030204" pitchFamily="18" charset="0"/>
+                      </a:rPr>
+                      <m:t>=1</m:t>
+                    </m:r>
+                  </m:oMath>
+                </a14:m>
+                <a:r>
+                  <a:rPr lang="en-US" sz="2600" dirty="0"/>
+                  <a:t> </a:t>
+                </a:r>
+                <a:r>
+                  <a:rPr lang="ru-RU" sz="2600" dirty="0"/>
+                  <a:t>в эксперименте </a:t>
+                </a:r>
+                <a14:m>
+                  <m:oMath xmlns:m="http://schemas.openxmlformats.org/officeDocument/2006/math">
+                    <m:r>
+                      <a:rPr lang="en-US" sz="2600" i="1">
+                        <a:latin typeface="Cambria Math" panose="02040503050406030204" pitchFamily="18" charset="0"/>
+                      </a:rPr>
+                      <m:t>𝑏</m:t>
+                    </m:r>
+                  </m:oMath>
+                </a14:m>
+                <a:endParaRPr lang="ru-RU" sz="2600" dirty="0"/>
+              </a:p>
+              <a:p>
+                <a14:m>
+                  <m:oMath xmlns:m="http://schemas.openxmlformats.org/officeDocument/2006/math">
+                    <m:r>
+                      <a:rPr lang="en-US" sz="2600" i="1">
+                        <a:latin typeface="Cambria Math" panose="02040503050406030204" pitchFamily="18" charset="0"/>
+                      </a:rPr>
+                      <m:t>𝑊</m:t>
+                    </m:r>
+                  </m:oMath>
+                </a14:m>
+                <a:r>
+                  <a:rPr lang="ru-RU" sz="2600" dirty="0"/>
+                  <a:t> - событие, при котором </a:t>
+                </a:r>
+                <a14:m>
+                  <m:oMath xmlns:m="http://schemas.openxmlformats.org/officeDocument/2006/math">
+                    <m:sSup>
+                      <m:sSupPr>
+                        <m:ctrlPr>
+                          <a:rPr lang="en-US" sz="2600" i="1">
+                            <a:latin typeface="Cambria Math" panose="02040503050406030204" pitchFamily="18" charset="0"/>
+                          </a:rPr>
+                        </m:ctrlPr>
+                      </m:sSupPr>
+                      <m:e>
+                        <m:r>
+                          <a:rPr lang="en-US" sz="2600" i="1">
+                            <a:latin typeface="Cambria Math" panose="02040503050406030204" pitchFamily="18" charset="0"/>
+                          </a:rPr>
+                          <m:t>𝑏</m:t>
+                        </m:r>
+                      </m:e>
+                      <m:sup>
+                        <m:r>
+                          <a:rPr lang="en-US" sz="2600">
+                            <a:latin typeface="Cambria Math" panose="02040503050406030204" pitchFamily="18" charset="0"/>
+                          </a:rPr>
+                          <m:t>′</m:t>
+                        </m:r>
+                      </m:sup>
+                    </m:sSup>
+                    <m:r>
+                      <a:rPr lang="en-US" sz="2600">
+                        <a:latin typeface="Cambria Math" panose="02040503050406030204" pitchFamily="18" charset="0"/>
+                      </a:rPr>
+                      <m:t>=</m:t>
+                    </m:r>
+                    <m:r>
+                      <a:rPr lang="en-US" sz="2600" i="1">
+                        <a:latin typeface="Cambria Math" panose="02040503050406030204" pitchFamily="18" charset="0"/>
+                      </a:rPr>
+                      <m:t>𝑏</m:t>
+                    </m:r>
+                  </m:oMath>
+                </a14:m>
+                <a:endParaRPr lang="ru-RU" sz="2600" dirty="0"/>
+              </a:p>
+            </p:txBody>
+          </p:sp>
+        </mc:Choice>
+        <mc:Fallback xmlns="">
+          <p:sp>
+            <p:nvSpPr>
+              <p:cNvPr id="8" name="Прямоугольник 7"/>
+              <p:cNvSpPr>
+                <a:spLocks noRot="1" noChangeAspect="1" noMove="1" noResize="1" noEditPoints="1" noAdjustHandles="1" noChangeArrowheads="1" noChangeShapeType="1" noTextEdit="1"/>
+              </p:cNvSpPr>
+              <p:nvPr/>
+            </p:nvSpPr>
+            <p:spPr>
+              <a:xfrm>
+                <a:off x="185371" y="1408578"/>
+                <a:ext cx="5318614" cy="3355662"/>
+              </a:xfrm>
+              <a:prstGeom prst="rect">
+                <a:avLst/>
+              </a:prstGeom>
+              <a:blipFill>
+                <a:blip r:embed="rId2"/>
+                <a:stretch>
+                  <a:fillRect l="-2062" t="-1452" b="-3811"/>
+                </a:stretch>
+              </a:blipFill>
+            </p:spPr>
+            <p:txBody>
+              <a:bodyPr/>
+              <a:lstStyle/>
+              <a:p>
+                <a:r>
+                  <a:rPr lang="ru-RU">
+                    <a:noFill/>
+                  </a:rPr>
+                  <a:t> </a:t>
+                </a:r>
+              </a:p>
+            </p:txBody>
+          </p:sp>
+        </mc:Fallback>
+      </mc:AlternateContent>
+    </p:spTree>
+    <p:extLst>
+      <p:ext uri="{BB962C8B-B14F-4D97-AF65-F5344CB8AC3E}">
+        <p14:creationId xmlns:p14="http://schemas.microsoft.com/office/powerpoint/2010/main" val="4178352858"/>
+      </p:ext>
+    </p:extLst>
+  </p:cSld>
+  <p:clrMapOvr>
+    <a:masterClrMapping/>
+  </p:clrMapOvr>
+</p:sld>
+</file>
+
+<file path=ppt/slides/slide20.xml><?xml version="1.0" encoding="utf-8"?>
+<p:sld xmlns:a="http://schemas.openxmlformats.org/drawingml/2006/main" xmlns:r="http://schemas.openxmlformats.org/officeDocument/2006/relationships" xmlns:p="http://schemas.openxmlformats.org/presentationml/2006/main">
+  <p:cSld>
+    <p:spTree>
+      <p:nvGrpSpPr>
+        <p:cNvPr id="1" name=""/>
+        <p:cNvGrpSpPr/>
+        <p:nvPr/>
+      </p:nvGrpSpPr>
+      <p:grpSpPr>
+        <a:xfrm>
+          <a:off x="0" y="0"/>
+          <a:ext cx="0" cy="0"/>
+          <a:chOff x="0" y="0"/>
+          <a:chExt cx="0" cy="0"/>
+        </a:xfrm>
+      </p:grpSpPr>
+      <p:sp>
+        <p:nvSpPr>
+          <p:cNvPr id="2" name="Заголовок 1"/>
+          <p:cNvSpPr>
+            <a:spLocks noGrp="1"/>
+          </p:cNvSpPr>
+          <p:nvPr>
+            <p:ph type="title"/>
+          </p:nvPr>
+        </p:nvSpPr>
+        <p:spPr/>
+        <p:txBody>
+          <a:bodyPr/>
+          <a:lstStyle/>
+          <a:p>
+            <a:r>
+              <a:rPr lang="ru-RU" dirty="0"/>
+              <a:t>Статистическая неразличимость</a:t>
+            </a:r>
+          </a:p>
+        </p:txBody>
+      </p:sp>
+      <mc:AlternateContent xmlns:mc="http://schemas.openxmlformats.org/markup-compatibility/2006" xmlns:a14="http://schemas.microsoft.com/office/drawing/2010/main">
+        <mc:Choice Requires="a14">
           <p:sp>
             <p:nvSpPr>
               <p:cNvPr id="3" name="Объект 2"/>
@@ -9465,7 +11336,7 @@
             </p:txBody>
           </p:sp>
         </mc:Choice>
-        <mc:Fallback>
+        <mc:Fallback xmlns="">
           <p:sp>
             <p:nvSpPr>
               <p:cNvPr id="3" name="Объект 2"/>
@@ -9516,7 +11387,7 @@
           <a:p>
             <a:fld id="{8253DDDB-F8F7-4D64-A7FD-3F3D61C1949F}" type="slidenum">
               <a:rPr lang="ru-RU" smtClean="0"/>
-              <a:t>17</a:t>
+              <a:t>20</a:t>
             </a:fld>
             <a:endParaRPr lang="ru-RU"/>
           </a:p>
@@ -10582,7 +12453,7 @@
 </p:sld>
 </file>
 
-<file path=ppt/slides/slide18.xml><?xml version="1.0" encoding="utf-8"?>
+<file path=ppt/slides/slide21.xml><?xml version="1.0" encoding="utf-8"?>
 <p:sld xmlns:a="http://schemas.openxmlformats.org/drawingml/2006/main" xmlns:r="http://schemas.openxmlformats.org/officeDocument/2006/relationships" xmlns:p="http://schemas.openxmlformats.org/presentationml/2006/main">
   <p:cSld>
     <p:spTree>
@@ -10671,14 +12542,14 @@
           <a:p>
             <a:fld id="{8253DDDB-F8F7-4D64-A7FD-3F3D61C1949F}" type="slidenum">
               <a:rPr lang="ru-RU" smtClean="0"/>
-              <a:t>18</a:t>
+              <a:t>21</a:t>
             </a:fld>
             <a:endParaRPr lang="ru-RU"/>
           </a:p>
         </p:txBody>
       </p:sp>
-      <mc:AlternateContent xmlns:mc="http://schemas.openxmlformats.org/markup-compatibility/2006">
-        <mc:Choice xmlns:a14="http://schemas.microsoft.com/office/drawing/2010/main" Requires="a14">
+      <mc:AlternateContent xmlns:mc="http://schemas.openxmlformats.org/markup-compatibility/2006" xmlns:a14="http://schemas.microsoft.com/office/drawing/2010/main">
+        <mc:Choice Requires="a14">
           <p:sp>
             <p:nvSpPr>
               <p:cNvPr id="5" name="Прямоугольник 4"/>
@@ -10719,7 +12590,7 @@
                       <m:sSub>
                         <m:sSubPr>
                           <m:ctrlPr>
-                            <a:rPr lang="ru-RU" sz="2600" b="0" smtClean="0">
+                            <a:rPr lang="ru-RU" sz="2600" b="0" i="1" smtClean="0">
                               <a:latin typeface="Cambria Math" panose="02040503050406030204" pitchFamily="18" charset="0"/>
                             </a:rPr>
                           </m:ctrlPr>
@@ -10919,7 +12790,7 @@
             </p:txBody>
           </p:sp>
         </mc:Choice>
-        <mc:Fallback>
+        <mc:Fallback xmlns="">
           <p:sp>
             <p:nvSpPr>
               <p:cNvPr id="5" name="Прямоугольник 4"/>
@@ -12021,1681 +13892,6 @@
 </p:sld>
 </file>
 
-<file path=ppt/slides/slide19.xml><?xml version="1.0" encoding="utf-8"?>
-<p:sld xmlns:a="http://schemas.openxmlformats.org/drawingml/2006/main" xmlns:r="http://schemas.openxmlformats.org/officeDocument/2006/relationships" xmlns:p="http://schemas.openxmlformats.org/presentationml/2006/main">
-  <p:cSld>
-    <p:spTree>
-      <p:nvGrpSpPr>
-        <p:cNvPr id="1" name=""/>
-        <p:cNvGrpSpPr/>
-        <p:nvPr/>
-      </p:nvGrpSpPr>
-      <p:grpSpPr>
-        <a:xfrm>
-          <a:off x="0" y="0"/>
-          <a:ext cx="0" cy="0"/>
-          <a:chOff x="0" y="0"/>
-          <a:chExt cx="0" cy="0"/>
-        </a:xfrm>
-      </p:grpSpPr>
-      <p:sp>
-        <p:nvSpPr>
-          <p:cNvPr id="2" name="Заголовок 1"/>
-          <p:cNvSpPr>
-            <a:spLocks noGrp="1"/>
-          </p:cNvSpPr>
-          <p:nvPr>
-            <p:ph type="title"/>
-          </p:nvPr>
-        </p:nvSpPr>
-        <p:spPr/>
-        <p:txBody>
-          <a:bodyPr/>
-          <a:lstStyle/>
-          <a:p>
-            <a:r>
-              <a:rPr lang="ru-RU" dirty="0"/>
-              <a:t>Параметр стойкости</a:t>
-            </a:r>
-          </a:p>
-        </p:txBody>
-      </p:sp>
-      <mc:AlternateContent xmlns:mc="http://schemas.openxmlformats.org/markup-compatibility/2006">
-        <mc:Choice xmlns:a14="http://schemas.microsoft.com/office/drawing/2010/main" Requires="a14">
-          <p:sp>
-            <p:nvSpPr>
-              <p:cNvPr id="3" name="Объект 2"/>
-              <p:cNvSpPr>
-                <a:spLocks noGrp="1"/>
-              </p:cNvSpPr>
-              <p:nvPr>
-                <p:ph idx="1"/>
-              </p:nvPr>
-            </p:nvSpPr>
-            <p:spPr/>
-            <p:txBody>
-              <a:bodyPr/>
-              <a:lstStyle/>
-              <a:p>
-                <a:pPr marL="0" indent="0">
-                  <a:buNone/>
-                </a:pPr>
-                <a:r>
-                  <a:rPr lang="ru-RU" b="1" dirty="0"/>
-                  <a:t>Параметром стойкости </a:t>
-                </a:r>
-                <a:r>
-                  <a:rPr lang="ru-RU" dirty="0"/>
-                  <a:t>называют двоичный логарифм, от необходимого числа операций для осуществления теоретической или практической атаки.</a:t>
-                </a:r>
-              </a:p>
-              <a:p>
-                <a:pPr marL="0" indent="0">
-                  <a:buNone/>
-                </a:pPr>
-                <a:endParaRPr lang="ru-RU" dirty="0"/>
-              </a:p>
-              <a:p>
-                <a:pPr marL="0" indent="0">
-                  <a:buNone/>
-                </a:pPr>
-                <a:r>
-                  <a:rPr lang="ru-RU" dirty="0"/>
-                  <a:t>Пример</a:t>
-                </a:r>
-                <a:r>
-                  <a:rPr lang="en-US" dirty="0"/>
-                  <a:t>: </a:t>
-                </a:r>
-                <a:r>
-                  <a:rPr lang="ru-RU" dirty="0"/>
-                  <a:t>идеальный (нет атак, помимо перебора ключа) шифр с ключом длины </a:t>
-                </a:r>
-                <a14:m>
-                  <m:oMath xmlns:m="http://schemas.openxmlformats.org/officeDocument/2006/math">
-                    <m:r>
-                      <a:rPr lang="en-US" b="0" i="1" smtClean="0">
-                        <a:latin typeface="Cambria Math" panose="02040503050406030204" pitchFamily="18" charset="0"/>
-                      </a:rPr>
-                      <m:t>𝑙</m:t>
-                    </m:r>
-                  </m:oMath>
-                </a14:m>
-                <a:r>
-                  <a:rPr lang="ru-RU" dirty="0"/>
-                  <a:t>, параметр стойкости </a:t>
-                </a:r>
-                <a14:m>
-                  <m:oMath xmlns:m="http://schemas.openxmlformats.org/officeDocument/2006/math">
-                    <m:r>
-                      <a:rPr lang="en-US" b="0" i="1" smtClean="0">
-                        <a:latin typeface="Cambria Math" panose="02040503050406030204" pitchFamily="18" charset="0"/>
-                      </a:rPr>
-                      <m:t>𝑙</m:t>
-                    </m:r>
-                  </m:oMath>
-                </a14:m>
-                <a:r>
-                  <a:rPr lang="ru-RU" dirty="0"/>
-                  <a:t> бит (необходимо перебрать весь ключ).</a:t>
-                </a:r>
-              </a:p>
-              <a:p>
-                <a:pPr marL="0" indent="0">
-                  <a:buNone/>
-                </a:pPr>
-                <a:endParaRPr lang="ru-RU" dirty="0"/>
-              </a:p>
-              <a:p>
-                <a:pPr marL="0" indent="0">
-                  <a:buNone/>
-                </a:pPr>
-                <a:r>
-                  <a:rPr lang="ru-RU" dirty="0"/>
-                  <a:t>Пример</a:t>
-                </a:r>
-                <a:r>
-                  <a:rPr lang="en-US" dirty="0"/>
-                  <a:t>: </a:t>
-                </a:r>
-                <a:r>
-                  <a:rPr lang="ru-RU" dirty="0"/>
-                  <a:t>Семантически стойкий шифр </a:t>
-                </a:r>
-                <a14:m>
-                  <m:oMath xmlns:m="http://schemas.openxmlformats.org/officeDocument/2006/math">
-                    <m:r>
-                      <m:rPr>
-                        <m:sty m:val="p"/>
-                      </m:rPr>
-                      <a:rPr lang="ru-RU" b="0" i="0" smtClean="0">
-                        <a:latin typeface="Cambria Math" panose="02040503050406030204" pitchFamily="18" charset="0"/>
-                      </a:rPr>
-                      <m:t>Ε</m:t>
-                    </m:r>
-                    <m:r>
-                      <a:rPr lang="en-US" b="0" i="1" smtClean="0">
-                        <a:latin typeface="Cambria Math" panose="02040503050406030204" pitchFamily="18" charset="0"/>
-                      </a:rPr>
-                      <m:t>=</m:t>
-                    </m:r>
-                    <m:d>
-                      <m:dPr>
-                        <m:ctrlPr>
-                          <a:rPr lang="en-US" b="0" i="1" smtClean="0">
-                            <a:latin typeface="Cambria Math" panose="02040503050406030204" pitchFamily="18" charset="0"/>
-                          </a:rPr>
-                        </m:ctrlPr>
-                      </m:dPr>
-                      <m:e>
-                        <m:r>
-                          <a:rPr lang="en-US" b="0" i="1" smtClean="0">
-                            <a:latin typeface="Cambria Math" panose="02040503050406030204" pitchFamily="18" charset="0"/>
-                          </a:rPr>
-                          <m:t>𝐸</m:t>
-                        </m:r>
-                        <m:r>
-                          <a:rPr lang="en-US" b="0" i="1" smtClean="0">
-                            <a:latin typeface="Cambria Math" panose="02040503050406030204" pitchFamily="18" charset="0"/>
-                          </a:rPr>
-                          <m:t>,</m:t>
-                        </m:r>
-                        <m:r>
-                          <a:rPr lang="en-US" b="0" i="1" smtClean="0">
-                            <a:latin typeface="Cambria Math" panose="02040503050406030204" pitchFamily="18" charset="0"/>
-                          </a:rPr>
-                          <m:t>𝐷</m:t>
-                        </m:r>
-                      </m:e>
-                    </m:d>
-                    <m:r>
-                      <a:rPr lang="en-US" b="0" i="1" smtClean="0">
-                        <a:latin typeface="Cambria Math" panose="02040503050406030204" pitchFamily="18" charset="0"/>
-                      </a:rPr>
-                      <m:t>:∀</m:t>
-                    </m:r>
-                    <m:r>
-                      <a:rPr lang="en-US" b="0" i="1" smtClean="0">
-                        <a:latin typeface="Cambria Math" panose="02040503050406030204" pitchFamily="18" charset="0"/>
-                      </a:rPr>
-                      <m:t>𝐴</m:t>
-                    </m:r>
-                    <m:r>
-                      <a:rPr lang="en-US" b="0" i="1" smtClean="0">
-                        <a:latin typeface="Cambria Math" panose="02040503050406030204" pitchFamily="18" charset="0"/>
-                      </a:rPr>
-                      <m:t> </m:t>
-                    </m:r>
-                    <m:r>
-                      <a:rPr lang="en-US" b="0" i="1" smtClean="0">
-                        <a:latin typeface="Cambria Math" panose="02040503050406030204" pitchFamily="18" charset="0"/>
-                      </a:rPr>
-                      <m:t>𝑆</m:t>
-                    </m:r>
-                    <m:sSub>
-                      <m:sSubPr>
-                        <m:ctrlPr>
-                          <a:rPr lang="en-US" b="0" i="1" smtClean="0">
-                            <a:latin typeface="Cambria Math" panose="02040503050406030204" pitchFamily="18" charset="0"/>
-                          </a:rPr>
-                        </m:ctrlPr>
-                      </m:sSubPr>
-                      <m:e>
-                        <m:r>
-                          <a:rPr lang="en-US" b="0" i="1" smtClean="0">
-                            <a:latin typeface="Cambria Math" panose="02040503050406030204" pitchFamily="18" charset="0"/>
-                          </a:rPr>
-                          <m:t>𝑆</m:t>
-                        </m:r>
-                      </m:e>
-                      <m:sub>
-                        <m:r>
-                          <a:rPr lang="en-US" b="0" i="1" smtClean="0">
-                            <a:latin typeface="Cambria Math" panose="02040503050406030204" pitchFamily="18" charset="0"/>
-                          </a:rPr>
-                          <m:t>𝑎𝑑𝑣</m:t>
-                        </m:r>
-                      </m:sub>
-                    </m:sSub>
-                    <m:d>
-                      <m:dPr>
-                        <m:begChr m:val="["/>
-                        <m:endChr m:val="]"/>
-                        <m:ctrlPr>
-                          <a:rPr lang="en-US" b="0" i="1" smtClean="0">
-                            <a:latin typeface="Cambria Math" panose="02040503050406030204" pitchFamily="18" charset="0"/>
-                          </a:rPr>
-                        </m:ctrlPr>
-                      </m:dPr>
-                      <m:e>
-                        <m:r>
-                          <a:rPr lang="en-US" b="0" i="1" smtClean="0">
-                            <a:latin typeface="Cambria Math" panose="02040503050406030204" pitchFamily="18" charset="0"/>
-                          </a:rPr>
-                          <m:t>𝐴</m:t>
-                        </m:r>
-                        <m:r>
-                          <a:rPr lang="en-US" b="0" i="1" smtClean="0">
-                            <a:latin typeface="Cambria Math" panose="02040503050406030204" pitchFamily="18" charset="0"/>
-                          </a:rPr>
-                          <m:t>,</m:t>
-                        </m:r>
-                        <m:r>
-                          <a:rPr lang="en-US" b="0" i="1" smtClean="0">
-                            <a:latin typeface="Cambria Math" panose="02040503050406030204" pitchFamily="18" charset="0"/>
-                          </a:rPr>
-                          <m:t>𝐸</m:t>
-                        </m:r>
-                      </m:e>
-                    </m:d>
-                    <m:r>
-                      <a:rPr lang="en-US" b="0" i="1" smtClean="0">
-                        <a:latin typeface="Cambria Math" panose="02040503050406030204" pitchFamily="18" charset="0"/>
-                      </a:rPr>
-                      <m:t>≤1/</m:t>
-                    </m:r>
-                    <m:sSup>
-                      <m:sSupPr>
-                        <m:ctrlPr>
-                          <a:rPr lang="en-US" b="0" i="1" smtClean="0">
-                            <a:latin typeface="Cambria Math" panose="02040503050406030204" pitchFamily="18" charset="0"/>
-                          </a:rPr>
-                        </m:ctrlPr>
-                      </m:sSupPr>
-                      <m:e>
-                        <m:r>
-                          <a:rPr lang="en-US" b="0" i="1" smtClean="0">
-                            <a:latin typeface="Cambria Math" panose="02040503050406030204" pitchFamily="18" charset="0"/>
-                          </a:rPr>
-                          <m:t>2</m:t>
-                        </m:r>
-                      </m:e>
-                      <m:sup>
-                        <m:r>
-                          <a:rPr lang="en-US" b="0" i="1" smtClean="0">
-                            <a:latin typeface="Cambria Math" panose="02040503050406030204" pitchFamily="18" charset="0"/>
-                          </a:rPr>
-                          <m:t>𝑘</m:t>
-                        </m:r>
-                      </m:sup>
-                    </m:sSup>
-                  </m:oMath>
-                </a14:m>
-                <a:r>
-                  <a:rPr lang="ru-RU" dirty="0"/>
-                  <a:t>, параметр стойкости </a:t>
-                </a:r>
-                <a14:m>
-                  <m:oMath xmlns:m="http://schemas.openxmlformats.org/officeDocument/2006/math">
-                    <m:r>
-                      <a:rPr lang="en-US" b="0" i="1" smtClean="0">
-                        <a:latin typeface="Cambria Math" panose="02040503050406030204" pitchFamily="18" charset="0"/>
-                      </a:rPr>
-                      <m:t>𝑘</m:t>
-                    </m:r>
-                  </m:oMath>
-                </a14:m>
-                <a:r>
-                  <a:rPr lang="ru-RU" dirty="0"/>
-                  <a:t> бит.</a:t>
-                </a:r>
-              </a:p>
-            </p:txBody>
-          </p:sp>
-        </mc:Choice>
-        <mc:Fallback>
-          <p:sp>
-            <p:nvSpPr>
-              <p:cNvPr id="3" name="Объект 2"/>
-              <p:cNvSpPr>
-                <a:spLocks noGrp="1" noRot="1" noChangeAspect="1" noMove="1" noResize="1" noEditPoints="1" noAdjustHandles="1" noChangeArrowheads="1" noChangeShapeType="1" noTextEdit="1"/>
-              </p:cNvSpPr>
-              <p:nvPr>
-                <p:ph idx="1"/>
-              </p:nvPr>
-            </p:nvSpPr>
-            <p:spPr>
-              <a:blipFill>
-                <a:blip r:embed="rId2"/>
-                <a:stretch>
-                  <a:fillRect l="-1043" t="-2101" r="-1623"/>
-                </a:stretch>
-              </a:blipFill>
-            </p:spPr>
-            <p:txBody>
-              <a:bodyPr/>
-              <a:lstStyle/>
-              <a:p>
-                <a:r>
-                  <a:rPr lang="ru-RU">
-                    <a:noFill/>
-                  </a:rPr>
-                  <a:t> </a:t>
-                </a:r>
-              </a:p>
-            </p:txBody>
-          </p:sp>
-        </mc:Fallback>
-      </mc:AlternateContent>
-      <p:sp>
-        <p:nvSpPr>
-          <p:cNvPr id="4" name="Номер слайда 3"/>
-          <p:cNvSpPr>
-            <a:spLocks noGrp="1"/>
-          </p:cNvSpPr>
-          <p:nvPr>
-            <p:ph type="sldNum" sz="quarter" idx="12"/>
-          </p:nvPr>
-        </p:nvSpPr>
-        <p:spPr/>
-        <p:txBody>
-          <a:bodyPr/>
-          <a:lstStyle/>
-          <a:p>
-            <a:fld id="{8253DDDB-F8F7-4D64-A7FD-3F3D61C1949F}" type="slidenum">
-              <a:rPr lang="ru-RU" smtClean="0"/>
-              <a:t>19</a:t>
-            </a:fld>
-            <a:endParaRPr lang="ru-RU"/>
-          </a:p>
-        </p:txBody>
-      </p:sp>
-    </p:spTree>
-    <p:extLst>
-      <p:ext uri="{BB962C8B-B14F-4D97-AF65-F5344CB8AC3E}">
-        <p14:creationId xmlns:p14="http://schemas.microsoft.com/office/powerpoint/2010/main" val="252789709"/>
-      </p:ext>
-    </p:extLst>
-  </p:cSld>
-  <p:clrMapOvr>
-    <a:masterClrMapping/>
-  </p:clrMapOvr>
-</p:sld>
-</file>
-
-<file path=ppt/slides/slide2.xml><?xml version="1.0" encoding="utf-8"?>
-<p:sld xmlns:a="http://schemas.openxmlformats.org/drawingml/2006/main" xmlns:r="http://schemas.openxmlformats.org/officeDocument/2006/relationships" xmlns:p="http://schemas.openxmlformats.org/presentationml/2006/main">
-  <p:cSld>
-    <p:spTree>
-      <p:nvGrpSpPr>
-        <p:cNvPr id="1" name=""/>
-        <p:cNvGrpSpPr/>
-        <p:nvPr/>
-      </p:nvGrpSpPr>
-      <p:grpSpPr>
-        <a:xfrm>
-          <a:off x="0" y="0"/>
-          <a:ext cx="0" cy="0"/>
-          <a:chOff x="0" y="0"/>
-          <a:chExt cx="0" cy="0"/>
-        </a:xfrm>
-      </p:grpSpPr>
-      <p:sp>
-        <p:nvSpPr>
-          <p:cNvPr id="2" name="Заголовок 1"/>
-          <p:cNvSpPr>
-            <a:spLocks noGrp="1"/>
-          </p:cNvSpPr>
-          <p:nvPr>
-            <p:ph type="title"/>
-          </p:nvPr>
-        </p:nvSpPr>
-        <p:spPr/>
-        <p:txBody>
-          <a:bodyPr/>
-          <a:lstStyle/>
-          <a:p>
-            <a:r>
-              <a:rPr lang="ru-RU" dirty="0"/>
-              <a:t>Тест.</a:t>
-            </a:r>
-          </a:p>
-        </p:txBody>
-      </p:sp>
-      <p:sp>
-        <p:nvSpPr>
-          <p:cNvPr id="3" name="Объект 2"/>
-          <p:cNvSpPr>
-            <a:spLocks noGrp="1"/>
-          </p:cNvSpPr>
-          <p:nvPr>
-            <p:ph idx="1"/>
-          </p:nvPr>
-        </p:nvSpPr>
-        <p:spPr>
-          <a:xfrm>
-            <a:off x="5628541" y="1408579"/>
-            <a:ext cx="6148754" cy="4351338"/>
-          </a:xfrm>
-        </p:spPr>
-        <p:txBody>
-          <a:bodyPr/>
-          <a:lstStyle/>
-          <a:p>
-            <a:r>
-              <a:rPr lang="ru-RU" dirty="0"/>
-              <a:t>Положить телефон экраном вниз справа от себя</a:t>
-            </a:r>
-          </a:p>
-          <a:p>
-            <a:r>
-              <a:rPr lang="ru-RU" dirty="0"/>
-              <a:t>Не разговаривать с соседями</a:t>
-            </a:r>
-          </a:p>
-          <a:p>
-            <a:r>
-              <a:rPr lang="ru-RU" dirty="0"/>
-              <a:t>Не пользоваться конспектами и электронными устройствами</a:t>
-            </a:r>
-          </a:p>
-          <a:p>
-            <a:r>
-              <a:rPr lang="ru-RU" dirty="0"/>
-              <a:t>Написать номер (по таблице) и ФИО на листочке</a:t>
-            </a:r>
-          </a:p>
-          <a:p>
-            <a:r>
-              <a:rPr lang="ru-RU" dirty="0"/>
-              <a:t>Написать краткий ответ на вопрос</a:t>
-            </a:r>
-            <a:endParaRPr lang="en-US" dirty="0"/>
-          </a:p>
-          <a:p>
-            <a:r>
-              <a:rPr lang="ru-RU" dirty="0"/>
-              <a:t>Дождаться окончания теста</a:t>
-            </a:r>
-          </a:p>
-        </p:txBody>
-      </p:sp>
-      <p:sp>
-        <p:nvSpPr>
-          <p:cNvPr id="4" name="Номер слайда 3"/>
-          <p:cNvSpPr>
-            <a:spLocks noGrp="1"/>
-          </p:cNvSpPr>
-          <p:nvPr>
-            <p:ph type="sldNum" sz="quarter" idx="12"/>
-          </p:nvPr>
-        </p:nvSpPr>
-        <p:spPr/>
-        <p:txBody>
-          <a:bodyPr/>
-          <a:lstStyle/>
-          <a:p>
-            <a:fld id="{8253DDDB-F8F7-4D64-A7FD-3F3D61C1949F}" type="slidenum">
-              <a:rPr lang="ru-RU" smtClean="0"/>
-              <a:t>2</a:t>
-            </a:fld>
-            <a:endParaRPr lang="ru-RU"/>
-          </a:p>
-        </p:txBody>
-      </p:sp>
-      <p:sp>
-        <p:nvSpPr>
-          <p:cNvPr id="5" name="Прямоугольник 4"/>
-          <p:cNvSpPr/>
-          <p:nvPr/>
-        </p:nvSpPr>
-        <p:spPr>
-          <a:xfrm>
-            <a:off x="284285" y="5433158"/>
-            <a:ext cx="10688515" cy="317012"/>
-          </a:xfrm>
-          <a:prstGeom prst="rect">
-            <a:avLst/>
-          </a:prstGeom>
-          <a:solidFill>
-            <a:schemeClr val="accent6">
-              <a:alpha val="50000"/>
-            </a:schemeClr>
-          </a:solidFill>
-          <a:ln>
-            <a:noFill/>
-          </a:ln>
-        </p:spPr>
-        <p:style>
-          <a:lnRef idx="0">
-            <a:scrgbClr r="0" g="0" b="0"/>
-          </a:lnRef>
-          <a:fillRef idx="0">
-            <a:scrgbClr r="0" g="0" b="0"/>
-          </a:fillRef>
-          <a:effectRef idx="0">
-            <a:scrgbClr r="0" g="0" b="0"/>
-          </a:effectRef>
-          <a:fontRef idx="minor">
-            <a:schemeClr val="lt1"/>
-          </a:fontRef>
-        </p:style>
-        <p:txBody>
-          <a:bodyPr rtlCol="0" anchor="ctr"/>
-          <a:lstStyle/>
-          <a:p>
-            <a:pPr algn="ctr"/>
-            <a:endParaRPr lang="ru-RU"/>
-          </a:p>
-        </p:txBody>
-      </p:sp>
-      <p:sp>
-        <p:nvSpPr>
-          <p:cNvPr id="6" name="Прямоугольник 5"/>
-          <p:cNvSpPr/>
-          <p:nvPr/>
-        </p:nvSpPr>
-        <p:spPr>
-          <a:xfrm>
-            <a:off x="284285" y="5819530"/>
-            <a:ext cx="10688515" cy="317012"/>
-          </a:xfrm>
-          <a:prstGeom prst="rect">
-            <a:avLst/>
-          </a:prstGeom>
-          <a:solidFill>
-            <a:schemeClr val="accent6">
-              <a:alpha val="50000"/>
-            </a:schemeClr>
-          </a:solidFill>
-          <a:ln>
-            <a:noFill/>
-          </a:ln>
-        </p:spPr>
-        <p:style>
-          <a:lnRef idx="0">
-            <a:scrgbClr r="0" g="0" b="0"/>
-          </a:lnRef>
-          <a:fillRef idx="0">
-            <a:scrgbClr r="0" g="0" b="0"/>
-          </a:fillRef>
-          <a:effectRef idx="0">
-            <a:scrgbClr r="0" g="0" b="0"/>
-          </a:effectRef>
-          <a:fontRef idx="minor">
-            <a:schemeClr val="lt1"/>
-          </a:fontRef>
-        </p:style>
-        <p:txBody>
-          <a:bodyPr rtlCol="0" anchor="ctr"/>
-          <a:lstStyle/>
-          <a:p>
-            <a:pPr algn="ctr"/>
-            <a:endParaRPr lang="ru-RU"/>
-          </a:p>
-        </p:txBody>
-      </p:sp>
-      <p:sp>
-        <p:nvSpPr>
-          <p:cNvPr id="7" name="Прямоугольник 6"/>
-          <p:cNvSpPr/>
-          <p:nvPr/>
-        </p:nvSpPr>
-        <p:spPr>
-          <a:xfrm>
-            <a:off x="284284" y="6205902"/>
-            <a:ext cx="10688515" cy="317012"/>
-          </a:xfrm>
-          <a:prstGeom prst="rect">
-            <a:avLst/>
-          </a:prstGeom>
-          <a:solidFill>
-            <a:schemeClr val="accent6">
-              <a:alpha val="50000"/>
-            </a:schemeClr>
-          </a:solidFill>
-          <a:ln>
-            <a:noFill/>
-          </a:ln>
-        </p:spPr>
-        <p:style>
-          <a:lnRef idx="0">
-            <a:scrgbClr r="0" g="0" b="0"/>
-          </a:lnRef>
-          <a:fillRef idx="0">
-            <a:scrgbClr r="0" g="0" b="0"/>
-          </a:fillRef>
-          <a:effectRef idx="0">
-            <a:scrgbClr r="0" g="0" b="0"/>
-          </a:effectRef>
-          <a:fontRef idx="minor">
-            <a:schemeClr val="lt1"/>
-          </a:fontRef>
-        </p:style>
-        <p:txBody>
-          <a:bodyPr rtlCol="0" anchor="ctr"/>
-          <a:lstStyle/>
-          <a:p>
-            <a:pPr algn="ctr"/>
-            <a:endParaRPr lang="ru-RU"/>
-          </a:p>
-        </p:txBody>
-      </p:sp>
-      <mc:AlternateContent xmlns:mc="http://schemas.openxmlformats.org/markup-compatibility/2006" xmlns:a14="http://schemas.microsoft.com/office/drawing/2010/main">
-        <mc:Choice Requires="a14">
-          <p:sp>
-            <p:nvSpPr>
-              <p:cNvPr id="8" name="Прямоугольник 7"/>
-              <p:cNvSpPr/>
-              <p:nvPr/>
-            </p:nvSpPr>
-            <p:spPr>
-              <a:xfrm>
-                <a:off x="185371" y="1408578"/>
-                <a:ext cx="5318614" cy="3355662"/>
-              </a:xfrm>
-              <a:prstGeom prst="rect">
-                <a:avLst/>
-              </a:prstGeom>
-            </p:spPr>
-            <p:txBody>
-              <a:bodyPr wrap="square">
-                <a:spAutoFit/>
-              </a:bodyPr>
-              <a:lstStyle/>
-              <a:p>
-                <a:r>
-                  <a:rPr lang="ru-RU" sz="2600" dirty="0"/>
-                  <a:t>Пусть задана игра на семантическую стойкость для алгоритма </a:t>
-                </a:r>
-                <a14:m>
-                  <m:oMath xmlns:m="http://schemas.openxmlformats.org/officeDocument/2006/math">
-                    <m:r>
-                      <a:rPr lang="en-US" sz="2600" i="1">
-                        <a:latin typeface="Cambria Math" panose="02040503050406030204" pitchFamily="18" charset="0"/>
-                      </a:rPr>
-                      <m:t>𝐴</m:t>
-                    </m:r>
-                  </m:oMath>
-                </a14:m>
-                <a:r>
-                  <a:rPr lang="ru-RU" sz="2600" b="1" dirty="0"/>
-                  <a:t> </a:t>
-                </a:r>
-                <a:r>
-                  <a:rPr lang="ru-RU" sz="2600" dirty="0"/>
-                  <a:t>против шифра </a:t>
-                </a:r>
-                <a14:m>
-                  <m:oMath xmlns:m="http://schemas.openxmlformats.org/officeDocument/2006/math">
-                    <m:r>
-                      <m:rPr>
-                        <m:sty m:val="p"/>
-                      </m:rPr>
-                      <a:rPr lang="ru-RU" sz="2600">
-                        <a:latin typeface="Cambria Math" panose="02040503050406030204" pitchFamily="18" charset="0"/>
-                      </a:rPr>
-                      <m:t>Ε</m:t>
-                    </m:r>
-                    <m:r>
-                      <a:rPr lang="en-US" sz="2600" i="1">
-                        <a:latin typeface="Cambria Math" panose="02040503050406030204" pitchFamily="18" charset="0"/>
-                      </a:rPr>
-                      <m:t>=(</m:t>
-                    </m:r>
-                    <m:r>
-                      <a:rPr lang="en-US" sz="2600" i="1">
-                        <a:latin typeface="Cambria Math" panose="02040503050406030204" pitchFamily="18" charset="0"/>
-                      </a:rPr>
-                      <m:t>𝐸</m:t>
-                    </m:r>
-                    <m:r>
-                      <a:rPr lang="en-US" sz="2600" i="1">
-                        <a:latin typeface="Cambria Math" panose="02040503050406030204" pitchFamily="18" charset="0"/>
-                      </a:rPr>
-                      <m:t>,</m:t>
-                    </m:r>
-                    <m:r>
-                      <a:rPr lang="en-US" sz="2600" i="1">
-                        <a:latin typeface="Cambria Math" panose="02040503050406030204" pitchFamily="18" charset="0"/>
-                      </a:rPr>
-                      <m:t>𝐷</m:t>
-                    </m:r>
-                    <m:r>
-                      <a:rPr lang="en-US" sz="2600" i="1">
-                        <a:latin typeface="Cambria Math" panose="02040503050406030204" pitchFamily="18" charset="0"/>
-                      </a:rPr>
-                      <m:t>)</m:t>
-                    </m:r>
-                  </m:oMath>
-                </a14:m>
-                <a:r>
-                  <a:rPr lang="ru-RU" sz="2600" b="1" dirty="0"/>
-                  <a:t> </a:t>
-                </a:r>
-                <a:r>
-                  <a:rPr lang="ru-RU" sz="2600" dirty="0"/>
-                  <a:t>на </a:t>
-                </a:r>
-                <a14:m>
-                  <m:oMath xmlns:m="http://schemas.openxmlformats.org/officeDocument/2006/math">
-                    <m:r>
-                      <a:rPr lang="en-US" sz="2600" i="1">
-                        <a:latin typeface="Cambria Math" panose="02040503050406030204" pitchFamily="18" charset="0"/>
-                      </a:rPr>
-                      <m:t>(</m:t>
-                    </m:r>
-                    <m:r>
-                      <a:rPr lang="en-US" sz="2600" i="1">
-                        <a:latin typeface="Cambria Math" panose="02040503050406030204" pitchFamily="18" charset="0"/>
-                      </a:rPr>
-                      <m:t>𝐾</m:t>
-                    </m:r>
-                    <m:r>
-                      <a:rPr lang="en-US" sz="2600" i="1">
-                        <a:latin typeface="Cambria Math" panose="02040503050406030204" pitchFamily="18" charset="0"/>
-                      </a:rPr>
-                      <m:t>,</m:t>
-                    </m:r>
-                    <m:r>
-                      <a:rPr lang="en-US" sz="2600" i="1">
-                        <a:latin typeface="Cambria Math" panose="02040503050406030204" pitchFamily="18" charset="0"/>
-                      </a:rPr>
-                      <m:t>𝑀</m:t>
-                    </m:r>
-                    <m:r>
-                      <a:rPr lang="en-US" sz="2600" i="1">
-                        <a:latin typeface="Cambria Math" panose="02040503050406030204" pitchFamily="18" charset="0"/>
-                      </a:rPr>
-                      <m:t>,</m:t>
-                    </m:r>
-                    <m:r>
-                      <a:rPr lang="en-US" sz="2600" i="1">
-                        <a:latin typeface="Cambria Math" panose="02040503050406030204" pitchFamily="18" charset="0"/>
-                      </a:rPr>
-                      <m:t>𝐶</m:t>
-                    </m:r>
-                    <m:r>
-                      <a:rPr lang="en-US" sz="2600" i="1">
-                        <a:latin typeface="Cambria Math" panose="02040503050406030204" pitchFamily="18" charset="0"/>
-                      </a:rPr>
-                      <m:t>)</m:t>
-                    </m:r>
-                  </m:oMath>
-                </a14:m>
-                <a:r>
-                  <a:rPr lang="ru-RU" sz="2600" b="1" dirty="0"/>
-                  <a:t>.</a:t>
-                </a:r>
-              </a:p>
-              <a:p>
-                <a:endParaRPr lang="ru-RU" sz="2600" b="1" dirty="0"/>
-              </a:p>
-              <a:p>
-                <a14:m>
-                  <m:oMath xmlns:m="http://schemas.openxmlformats.org/officeDocument/2006/math">
-                    <m:sSub>
-                      <m:sSubPr>
-                        <m:ctrlPr>
-                          <a:rPr lang="en-US" sz="2600" i="1">
-                            <a:latin typeface="Cambria Math" panose="02040503050406030204" pitchFamily="18" charset="0"/>
-                          </a:rPr>
-                        </m:ctrlPr>
-                      </m:sSubPr>
-                      <m:e>
-                        <m:r>
-                          <a:rPr lang="en-US" sz="2600" i="1">
-                            <a:latin typeface="Cambria Math" panose="02040503050406030204" pitchFamily="18" charset="0"/>
-                          </a:rPr>
-                          <m:t>𝑊</m:t>
-                        </m:r>
-                      </m:e>
-                      <m:sub>
-                        <m:r>
-                          <a:rPr lang="en-US" sz="2600" i="1">
-                            <a:latin typeface="Cambria Math" panose="02040503050406030204" pitchFamily="18" charset="0"/>
-                          </a:rPr>
-                          <m:t>𝑏</m:t>
-                        </m:r>
-                      </m:sub>
-                    </m:sSub>
-                  </m:oMath>
-                </a14:m>
-                <a:r>
-                  <a:rPr lang="ru-RU" sz="2600" dirty="0"/>
-                  <a:t> - событие того, что </a:t>
-                </a:r>
-                <a14:m>
-                  <m:oMath xmlns:m="http://schemas.openxmlformats.org/officeDocument/2006/math">
-                    <m:sSup>
-                      <m:sSupPr>
-                        <m:ctrlPr>
-                          <a:rPr lang="en-US" sz="2600" i="1">
-                            <a:latin typeface="Cambria Math" panose="02040503050406030204" pitchFamily="18" charset="0"/>
-                          </a:rPr>
-                        </m:ctrlPr>
-                      </m:sSupPr>
-                      <m:e>
-                        <m:r>
-                          <a:rPr lang="en-US" sz="2600" i="1">
-                            <a:latin typeface="Cambria Math" panose="02040503050406030204" pitchFamily="18" charset="0"/>
-                          </a:rPr>
-                          <m:t>𝑏</m:t>
-                        </m:r>
-                      </m:e>
-                      <m:sup>
-                        <m:r>
-                          <a:rPr lang="en-US" sz="2600" i="1">
-                            <a:latin typeface="Cambria Math" panose="02040503050406030204" pitchFamily="18" charset="0"/>
-                          </a:rPr>
-                          <m:t>′</m:t>
-                        </m:r>
-                      </m:sup>
-                    </m:sSup>
-                    <m:r>
-                      <a:rPr lang="en-US" sz="2600" i="1">
-                        <a:latin typeface="Cambria Math" panose="02040503050406030204" pitchFamily="18" charset="0"/>
-                      </a:rPr>
-                      <m:t>=1</m:t>
-                    </m:r>
-                  </m:oMath>
-                </a14:m>
-                <a:r>
-                  <a:rPr lang="en-US" sz="2600" dirty="0"/>
-                  <a:t> </a:t>
-                </a:r>
-                <a:r>
-                  <a:rPr lang="ru-RU" sz="2600" dirty="0"/>
-                  <a:t>в эксперименте </a:t>
-                </a:r>
-                <a14:m>
-                  <m:oMath xmlns:m="http://schemas.openxmlformats.org/officeDocument/2006/math">
-                    <m:r>
-                      <a:rPr lang="en-US" sz="2600" i="1">
-                        <a:latin typeface="Cambria Math" panose="02040503050406030204" pitchFamily="18" charset="0"/>
-                      </a:rPr>
-                      <m:t>𝑏</m:t>
-                    </m:r>
-                  </m:oMath>
-                </a14:m>
-                <a:endParaRPr lang="ru-RU" sz="2600" dirty="0"/>
-              </a:p>
-              <a:p>
-                <a14:m>
-                  <m:oMath xmlns:m="http://schemas.openxmlformats.org/officeDocument/2006/math">
-                    <m:r>
-                      <a:rPr lang="en-US" sz="2600" i="1">
-                        <a:latin typeface="Cambria Math" panose="02040503050406030204" pitchFamily="18" charset="0"/>
-                      </a:rPr>
-                      <m:t>𝑊</m:t>
-                    </m:r>
-                  </m:oMath>
-                </a14:m>
-                <a:r>
-                  <a:rPr lang="ru-RU" sz="2600" dirty="0"/>
-                  <a:t> - событие, при котором </a:t>
-                </a:r>
-                <a14:m>
-                  <m:oMath xmlns:m="http://schemas.openxmlformats.org/officeDocument/2006/math">
-                    <m:sSup>
-                      <m:sSupPr>
-                        <m:ctrlPr>
-                          <a:rPr lang="en-US" sz="2600" i="1">
-                            <a:latin typeface="Cambria Math" panose="02040503050406030204" pitchFamily="18" charset="0"/>
-                          </a:rPr>
-                        </m:ctrlPr>
-                      </m:sSupPr>
-                      <m:e>
-                        <m:r>
-                          <a:rPr lang="en-US" sz="2600" i="1">
-                            <a:latin typeface="Cambria Math" panose="02040503050406030204" pitchFamily="18" charset="0"/>
-                          </a:rPr>
-                          <m:t>𝑏</m:t>
-                        </m:r>
-                      </m:e>
-                      <m:sup>
-                        <m:r>
-                          <a:rPr lang="en-US" sz="2600">
-                            <a:latin typeface="Cambria Math" panose="02040503050406030204" pitchFamily="18" charset="0"/>
-                          </a:rPr>
-                          <m:t>′</m:t>
-                        </m:r>
-                      </m:sup>
-                    </m:sSup>
-                    <m:r>
-                      <a:rPr lang="en-US" sz="2600">
-                        <a:latin typeface="Cambria Math" panose="02040503050406030204" pitchFamily="18" charset="0"/>
-                      </a:rPr>
-                      <m:t>=</m:t>
-                    </m:r>
-                    <m:r>
-                      <a:rPr lang="en-US" sz="2600" i="1">
-                        <a:latin typeface="Cambria Math" panose="02040503050406030204" pitchFamily="18" charset="0"/>
-                      </a:rPr>
-                      <m:t>𝑏</m:t>
-                    </m:r>
-                  </m:oMath>
-                </a14:m>
-                <a:endParaRPr lang="ru-RU" sz="2600" dirty="0"/>
-              </a:p>
-            </p:txBody>
-          </p:sp>
-        </mc:Choice>
-        <mc:Fallback xmlns="">
-          <p:sp>
-            <p:nvSpPr>
-              <p:cNvPr id="8" name="Прямоугольник 7"/>
-              <p:cNvSpPr>
-                <a:spLocks noRot="1" noChangeAspect="1" noMove="1" noResize="1" noEditPoints="1" noAdjustHandles="1" noChangeArrowheads="1" noChangeShapeType="1" noTextEdit="1"/>
-              </p:cNvSpPr>
-              <p:nvPr/>
-            </p:nvSpPr>
-            <p:spPr>
-              <a:xfrm>
-                <a:off x="185371" y="1408578"/>
-                <a:ext cx="5318614" cy="3355662"/>
-              </a:xfrm>
-              <a:prstGeom prst="rect">
-                <a:avLst/>
-              </a:prstGeom>
-              <a:blipFill>
-                <a:blip r:embed="rId2"/>
-                <a:stretch>
-                  <a:fillRect l="-2062" t="-1452" b="-3811"/>
-                </a:stretch>
-              </a:blipFill>
-            </p:spPr>
-            <p:txBody>
-              <a:bodyPr/>
-              <a:lstStyle/>
-              <a:p>
-                <a:r>
-                  <a:rPr lang="ru-RU">
-                    <a:noFill/>
-                  </a:rPr>
-                  <a:t> </a:t>
-                </a:r>
-              </a:p>
-            </p:txBody>
-          </p:sp>
-        </mc:Fallback>
-      </mc:AlternateContent>
-    </p:spTree>
-    <p:extLst>
-      <p:ext uri="{BB962C8B-B14F-4D97-AF65-F5344CB8AC3E}">
-        <p14:creationId xmlns:p14="http://schemas.microsoft.com/office/powerpoint/2010/main" val="4178352858"/>
-      </p:ext>
-    </p:extLst>
-  </p:cSld>
-  <p:clrMapOvr>
-    <a:masterClrMapping/>
-  </p:clrMapOvr>
-</p:sld>
-</file>
-
-<file path=ppt/slides/slide20.xml><?xml version="1.0" encoding="utf-8"?>
-<p:sld xmlns:a="http://schemas.openxmlformats.org/drawingml/2006/main" xmlns:r="http://schemas.openxmlformats.org/officeDocument/2006/relationships" xmlns:p="http://schemas.openxmlformats.org/presentationml/2006/main">
-  <p:cSld>
-    <p:spTree>
-      <p:nvGrpSpPr>
-        <p:cNvPr id="1" name=""/>
-        <p:cNvGrpSpPr/>
-        <p:nvPr/>
-      </p:nvGrpSpPr>
-      <p:grpSpPr>
-        <a:xfrm>
-          <a:off x="0" y="0"/>
-          <a:ext cx="0" cy="0"/>
-          <a:chOff x="0" y="0"/>
-          <a:chExt cx="0" cy="0"/>
-        </a:xfrm>
-      </p:grpSpPr>
-      <p:sp>
-        <p:nvSpPr>
-          <p:cNvPr id="2" name="Заголовок 1"/>
-          <p:cNvSpPr>
-            <a:spLocks noGrp="1"/>
-          </p:cNvSpPr>
-          <p:nvPr>
-            <p:ph type="title"/>
-          </p:nvPr>
-        </p:nvSpPr>
-        <p:spPr/>
-        <p:txBody>
-          <a:bodyPr/>
-          <a:lstStyle/>
-          <a:p>
-            <a:r>
-              <a:rPr lang="ru-RU" dirty="0"/>
-              <a:t>Оценки величин</a:t>
-            </a:r>
-          </a:p>
-        </p:txBody>
-      </p:sp>
-      <mc:AlternateContent xmlns:mc="http://schemas.openxmlformats.org/markup-compatibility/2006" xmlns:a14="http://schemas.microsoft.com/office/drawing/2010/main">
-        <mc:Choice Requires="a14">
-          <p:sp>
-            <p:nvSpPr>
-              <p:cNvPr id="3" name="Объект 2"/>
-              <p:cNvSpPr>
-                <a:spLocks noGrp="1"/>
-              </p:cNvSpPr>
-              <p:nvPr>
-                <p:ph idx="1"/>
-              </p:nvPr>
-            </p:nvSpPr>
-            <p:spPr/>
-            <p:txBody>
-              <a:bodyPr/>
-              <a:lstStyle/>
-              <a:p>
-                <a:pPr marL="0" indent="0">
-                  <a:buNone/>
-                </a:pPr>
-                <a:r>
-                  <a:rPr lang="ru-RU" dirty="0"/>
-                  <a:t>Параметр стойкости</a:t>
-                </a:r>
-                <a:r>
-                  <a:rPr lang="en-US" dirty="0"/>
-                  <a:t> 10 </a:t>
-                </a:r>
-                <a:r>
-                  <a:rPr lang="ru-RU" dirty="0"/>
-                  <a:t>бит это много или мало? А </a:t>
-                </a:r>
-                <a14:m>
-                  <m:oMath xmlns:m="http://schemas.openxmlformats.org/officeDocument/2006/math">
-                    <m:sSup>
-                      <m:sSupPr>
-                        <m:ctrlPr>
-                          <a:rPr lang="en-US" b="0" i="1" smtClean="0">
-                            <a:latin typeface="Cambria Math" panose="02040503050406030204" pitchFamily="18" charset="0"/>
-                          </a:rPr>
-                        </m:ctrlPr>
-                      </m:sSupPr>
-                      <m:e>
-                        <m:r>
-                          <a:rPr lang="ru-RU" b="0" i="1" smtClean="0">
-                            <a:latin typeface="Cambria Math" panose="02040503050406030204" pitchFamily="18" charset="0"/>
-                          </a:rPr>
-                          <m:t>2</m:t>
-                        </m:r>
-                      </m:e>
-                      <m:sup>
-                        <m:r>
-                          <a:rPr lang="en-US" b="0" i="1" smtClean="0">
-                            <a:latin typeface="Cambria Math" panose="02040503050406030204" pitchFamily="18" charset="0"/>
-                          </a:rPr>
-                          <m:t>10</m:t>
-                        </m:r>
-                      </m:sup>
-                    </m:sSup>
-                  </m:oMath>
-                </a14:m>
-                <a:r>
-                  <a:rPr lang="ru-RU" dirty="0"/>
-                  <a:t> бит? При каком параметре стойкости принято считать систему стойкой?</a:t>
-                </a:r>
-              </a:p>
-              <a:p>
-                <a:pPr marL="0" indent="0">
-                  <a:buNone/>
-                </a:pPr>
-                <a:endParaRPr lang="ru-RU" dirty="0"/>
-              </a:p>
-              <a:p>
-                <a:pPr marL="0" indent="0">
-                  <a:buNone/>
-                </a:pPr>
-                <a:r>
-                  <a:rPr lang="ru-RU" dirty="0"/>
-                  <a:t>Необходимый параметр стойкости зависит от приложения используемой криптосистемы.</a:t>
-                </a:r>
-                <a:endParaRPr lang="en-US" dirty="0"/>
-              </a:p>
-              <a:p>
-                <a:pPr marL="0" indent="0">
-                  <a:buNone/>
-                </a:pPr>
-                <a:endParaRPr lang="en-US" dirty="0"/>
-              </a:p>
-              <a:p>
-                <a:pPr marL="0" indent="0">
-                  <a:buNone/>
-                </a:pPr>
-                <a:r>
-                  <a:rPr lang="ru-RU" dirty="0"/>
-                  <a:t>Для систем общего назначения рекомендуемые параметры стойкости 80-256 бит.</a:t>
-                </a:r>
-              </a:p>
-            </p:txBody>
-          </p:sp>
-        </mc:Choice>
-        <mc:Fallback xmlns="">
-          <p:sp>
-            <p:nvSpPr>
-              <p:cNvPr id="3" name="Объект 2"/>
-              <p:cNvSpPr>
-                <a:spLocks noGrp="1" noRot="1" noChangeAspect="1" noMove="1" noResize="1" noEditPoints="1" noAdjustHandles="1" noChangeArrowheads="1" noChangeShapeType="1" noTextEdit="1"/>
-              </p:cNvSpPr>
-              <p:nvPr>
-                <p:ph idx="1"/>
-              </p:nvPr>
-            </p:nvSpPr>
-            <p:spPr>
-              <a:blipFill>
-                <a:blip r:embed="rId2"/>
-                <a:stretch>
-                  <a:fillRect l="-1043" t="-1961"/>
-                </a:stretch>
-              </a:blipFill>
-            </p:spPr>
-            <p:txBody>
-              <a:bodyPr/>
-              <a:lstStyle/>
-              <a:p>
-                <a:r>
-                  <a:rPr lang="ru-RU">
-                    <a:noFill/>
-                  </a:rPr>
-                  <a:t> </a:t>
-                </a:r>
-              </a:p>
-            </p:txBody>
-          </p:sp>
-        </mc:Fallback>
-      </mc:AlternateContent>
-      <p:sp>
-        <p:nvSpPr>
-          <p:cNvPr id="4" name="Номер слайда 3"/>
-          <p:cNvSpPr>
-            <a:spLocks noGrp="1"/>
-          </p:cNvSpPr>
-          <p:nvPr>
-            <p:ph type="sldNum" sz="quarter" idx="12"/>
-          </p:nvPr>
-        </p:nvSpPr>
-        <p:spPr/>
-        <p:txBody>
-          <a:bodyPr/>
-          <a:lstStyle/>
-          <a:p>
-            <a:fld id="{8253DDDB-F8F7-4D64-A7FD-3F3D61C1949F}" type="slidenum">
-              <a:rPr lang="ru-RU" smtClean="0"/>
-              <a:t>20</a:t>
-            </a:fld>
-            <a:endParaRPr lang="ru-RU"/>
-          </a:p>
-        </p:txBody>
-      </p:sp>
-    </p:spTree>
-    <p:extLst>
-      <p:ext uri="{BB962C8B-B14F-4D97-AF65-F5344CB8AC3E}">
-        <p14:creationId xmlns:p14="http://schemas.microsoft.com/office/powerpoint/2010/main" val="2857086617"/>
-      </p:ext>
-    </p:extLst>
-  </p:cSld>
-  <p:clrMapOvr>
-    <a:masterClrMapping/>
-  </p:clrMapOvr>
-</p:sld>
-</file>
-
-<file path=ppt/slides/slide21.xml><?xml version="1.0" encoding="utf-8"?>
-<p:sld xmlns:a="http://schemas.openxmlformats.org/drawingml/2006/main" xmlns:r="http://schemas.openxmlformats.org/officeDocument/2006/relationships" xmlns:p="http://schemas.openxmlformats.org/presentationml/2006/main">
-  <p:cSld>
-    <p:spTree>
-      <p:nvGrpSpPr>
-        <p:cNvPr id="1" name=""/>
-        <p:cNvGrpSpPr/>
-        <p:nvPr/>
-      </p:nvGrpSpPr>
-      <p:grpSpPr>
-        <a:xfrm>
-          <a:off x="0" y="0"/>
-          <a:ext cx="0" cy="0"/>
-          <a:chOff x="0" y="0"/>
-          <a:chExt cx="0" cy="0"/>
-        </a:xfrm>
-      </p:grpSpPr>
-      <p:sp>
-        <p:nvSpPr>
-          <p:cNvPr id="2" name="Заголовок 1"/>
-          <p:cNvSpPr>
-            <a:spLocks noGrp="1"/>
-          </p:cNvSpPr>
-          <p:nvPr>
-            <p:ph type="title"/>
-          </p:nvPr>
-        </p:nvSpPr>
-        <p:spPr/>
-        <p:txBody>
-          <a:bodyPr/>
-          <a:lstStyle/>
-          <a:p>
-            <a:r>
-              <a:rPr lang="ru-RU" dirty="0"/>
-              <a:t>Оценки величин</a:t>
-            </a:r>
-          </a:p>
-        </p:txBody>
-      </p:sp>
-      <mc:AlternateContent xmlns:mc="http://schemas.openxmlformats.org/markup-compatibility/2006" xmlns:a14="http://schemas.microsoft.com/office/drawing/2010/main">
-        <mc:Choice Requires="a14">
-          <p:sp>
-            <p:nvSpPr>
-              <p:cNvPr id="3" name="Объект 2"/>
-              <p:cNvSpPr>
-                <a:spLocks noGrp="1"/>
-              </p:cNvSpPr>
-              <p:nvPr>
-                <p:ph idx="1"/>
-              </p:nvPr>
-            </p:nvSpPr>
-            <p:spPr/>
-            <p:txBody>
-              <a:bodyPr>
-                <a:normAutofit lnSpcReduction="10000"/>
-              </a:bodyPr>
-              <a:lstStyle/>
-              <a:p>
-                <a:pPr marL="0" indent="0">
-                  <a:buNone/>
-                </a:pPr>
-                <a14:m>
-                  <m:oMath xmlns:m="http://schemas.openxmlformats.org/officeDocument/2006/math">
-                    <m:r>
-                      <a:rPr lang="en-US" b="0" i="1" smtClean="0">
-                        <a:latin typeface="Cambria Math" panose="02040503050406030204" pitchFamily="18" charset="0"/>
-                      </a:rPr>
-                      <m:t>~</m:t>
-                    </m:r>
-                    <m:sSup>
-                      <m:sSupPr>
-                        <m:ctrlPr>
-                          <a:rPr lang="en-US" b="0" i="1" smtClean="0">
-                            <a:latin typeface="Cambria Math" panose="02040503050406030204" pitchFamily="18" charset="0"/>
-                          </a:rPr>
-                        </m:ctrlPr>
-                      </m:sSupPr>
-                      <m:e>
-                        <m:r>
-                          <a:rPr lang="en-US" b="0" i="1" smtClean="0">
-                            <a:latin typeface="Cambria Math" panose="02040503050406030204" pitchFamily="18" charset="0"/>
-                          </a:rPr>
-                          <m:t>2</m:t>
-                        </m:r>
-                      </m:e>
-                      <m:sup>
-                        <m:r>
-                          <a:rPr lang="en-US" b="0" i="1" smtClean="0">
-                            <a:latin typeface="Cambria Math" panose="02040503050406030204" pitchFamily="18" charset="0"/>
-                          </a:rPr>
-                          <m:t>240</m:t>
-                        </m:r>
-                      </m:sup>
-                    </m:sSup>
-                  </m:oMath>
-                </a14:m>
-                <a:r>
-                  <a:rPr lang="ru-RU" dirty="0"/>
-                  <a:t> - число элементарных частиц в обозримой вселенной</a:t>
-                </a:r>
-              </a:p>
-              <a:p>
-                <a:pPr marL="0" indent="0">
-                  <a:buNone/>
-                </a:pPr>
-                <a:endParaRPr lang="ru-RU" dirty="0"/>
-              </a:p>
-              <a:p>
-                <a:pPr marL="0" indent="0">
-                  <a:buNone/>
-                </a:pPr>
-                <a14:m>
-                  <m:oMath xmlns:m="http://schemas.openxmlformats.org/officeDocument/2006/math">
-                    <m:r>
-                      <a:rPr lang="en-US" b="0" i="1" smtClean="0">
-                        <a:latin typeface="Cambria Math" panose="02040503050406030204" pitchFamily="18" charset="0"/>
-                      </a:rPr>
-                      <m:t>~</m:t>
-                    </m:r>
-                    <m:sSup>
-                      <m:sSupPr>
-                        <m:ctrlPr>
-                          <a:rPr lang="en-US" b="0" i="1" smtClean="0">
-                            <a:latin typeface="Cambria Math" panose="02040503050406030204" pitchFamily="18" charset="0"/>
-                          </a:rPr>
-                        </m:ctrlPr>
-                      </m:sSupPr>
-                      <m:e>
-                        <m:r>
-                          <a:rPr lang="en-US" b="0" i="1" smtClean="0">
-                            <a:latin typeface="Cambria Math" panose="02040503050406030204" pitchFamily="18" charset="0"/>
-                          </a:rPr>
-                          <m:t>1/2</m:t>
-                        </m:r>
-                      </m:e>
-                      <m:sup>
-                        <m:r>
-                          <a:rPr lang="en-US" b="0" i="1" smtClean="0">
-                            <a:latin typeface="Cambria Math" panose="02040503050406030204" pitchFamily="18" charset="0"/>
-                          </a:rPr>
-                          <m:t>119</m:t>
-                        </m:r>
-                      </m:sup>
-                    </m:sSup>
-                  </m:oMath>
-                </a14:m>
-                <a:r>
-                  <a:rPr lang="en-US" dirty="0"/>
-                  <a:t>- </a:t>
-                </a:r>
-                <a:r>
-                  <a:rPr lang="ru-RU" dirty="0"/>
-                  <a:t>шанс выиграть в лотерею, с миллионом участников 6 раз подряд</a:t>
-                </a:r>
-                <a:endParaRPr lang="en-US" dirty="0"/>
-              </a:p>
-              <a:p>
-                <a:pPr marL="0" indent="0">
-                  <a:buNone/>
-                </a:pPr>
-                <a:endParaRPr lang="en-US" dirty="0"/>
-              </a:p>
-              <a:p>
-                <a:pPr marL="0" indent="0">
-                  <a:buNone/>
-                </a:pPr>
-                <a14:m>
-                  <m:oMath xmlns:m="http://schemas.openxmlformats.org/officeDocument/2006/math">
-                    <m:sSup>
-                      <m:sSupPr>
-                        <m:ctrlPr>
-                          <a:rPr lang="en-US" b="0" i="1" smtClean="0">
-                            <a:latin typeface="Cambria Math" panose="02040503050406030204" pitchFamily="18" charset="0"/>
-                          </a:rPr>
-                        </m:ctrlPr>
-                      </m:sSupPr>
-                      <m:e>
-                        <m:r>
-                          <a:rPr lang="en-US" i="1">
-                            <a:latin typeface="Cambria Math" panose="02040503050406030204" pitchFamily="18" charset="0"/>
-                          </a:rPr>
-                          <m:t>~</m:t>
-                        </m:r>
-                        <m:r>
-                          <a:rPr lang="en-US" b="0" i="1" smtClean="0">
-                            <a:latin typeface="Cambria Math" panose="02040503050406030204" pitchFamily="18" charset="0"/>
-                          </a:rPr>
-                          <m:t>2</m:t>
-                        </m:r>
-                      </m:e>
-                      <m:sup>
-                        <m:r>
-                          <a:rPr lang="en-US" b="0" i="1" smtClean="0">
-                            <a:latin typeface="Cambria Math" panose="02040503050406030204" pitchFamily="18" charset="0"/>
-                          </a:rPr>
-                          <m:t>60</m:t>
-                        </m:r>
-                      </m:sup>
-                    </m:sSup>
-                  </m:oMath>
-                </a14:m>
-                <a:r>
-                  <a:rPr lang="en-US" dirty="0"/>
-                  <a:t> - </a:t>
-                </a:r>
-                <a:r>
-                  <a:rPr lang="ru-RU" dirty="0"/>
-                  <a:t>секунд с большого взрыва (</a:t>
-                </a:r>
-                <a14:m>
-                  <m:oMath xmlns:m="http://schemas.openxmlformats.org/officeDocument/2006/math">
-                    <m:sSup>
-                      <m:sSupPr>
-                        <m:ctrlPr>
-                          <a:rPr lang="en-US" i="1" dirty="0" smtClean="0">
-                            <a:latin typeface="Cambria Math" panose="02040503050406030204" pitchFamily="18" charset="0"/>
-                          </a:rPr>
-                        </m:ctrlPr>
-                      </m:sSupPr>
-                      <m:e>
-                        <m:r>
-                          <a:rPr lang="ru-RU" i="1" dirty="0" smtClean="0">
-                            <a:latin typeface="Cambria Math" panose="02040503050406030204" pitchFamily="18" charset="0"/>
-                          </a:rPr>
-                          <m:t>2</m:t>
-                        </m:r>
-                      </m:e>
-                      <m:sup>
-                        <m:r>
-                          <a:rPr lang="en-US" i="1" dirty="0" smtClean="0">
-                            <a:latin typeface="Cambria Math" panose="02040503050406030204" pitchFamily="18" charset="0"/>
-                          </a:rPr>
-                          <m:t>200</m:t>
-                        </m:r>
-                      </m:sup>
-                    </m:sSup>
-                  </m:oMath>
-                </a14:m>
-                <a:r>
-                  <a:rPr lang="en-US" dirty="0"/>
-                  <a:t> - </a:t>
-                </a:r>
-                <a:r>
-                  <a:rPr lang="ru-RU" dirty="0"/>
-                  <a:t>в </a:t>
-                </a:r>
-                <a:r>
-                  <a:rPr lang="ru-RU" dirty="0" err="1"/>
-                  <a:t>планковских</a:t>
-                </a:r>
-                <a:r>
-                  <a:rPr lang="ru-RU" dirty="0"/>
-                  <a:t> единицах)</a:t>
-                </a:r>
-                <a:r>
-                  <a:rPr lang="en-US" dirty="0"/>
-                  <a:t> </a:t>
-                </a:r>
-                <a:endParaRPr lang="ru-RU" dirty="0"/>
-              </a:p>
-              <a:p>
-                <a:pPr marL="0" indent="0">
-                  <a:buNone/>
-                </a:pPr>
-                <a:endParaRPr lang="en-US" dirty="0"/>
-              </a:p>
-              <a:p>
-                <a:pPr marL="0" indent="0">
-                  <a:buNone/>
-                </a:pPr>
-                <a14:m>
-                  <m:oMath xmlns:m="http://schemas.openxmlformats.org/officeDocument/2006/math">
-                    <m:r>
-                      <a:rPr lang="en-US" b="0" i="1" smtClean="0">
-                        <a:latin typeface="Cambria Math" panose="02040503050406030204" pitchFamily="18" charset="0"/>
-                      </a:rPr>
-                      <m:t>~</m:t>
-                    </m:r>
-                    <m:sSup>
-                      <m:sSupPr>
-                        <m:ctrlPr>
-                          <a:rPr lang="en-US" b="0" i="1" smtClean="0">
-                            <a:latin typeface="Cambria Math" panose="02040503050406030204" pitchFamily="18" charset="0"/>
-                          </a:rPr>
-                        </m:ctrlPr>
-                      </m:sSupPr>
-                      <m:e>
-                        <m:r>
-                          <a:rPr lang="en-US" b="0" i="1" smtClean="0">
-                            <a:latin typeface="Cambria Math" panose="02040503050406030204" pitchFamily="18" charset="0"/>
-                          </a:rPr>
-                          <m:t>2</m:t>
-                        </m:r>
-                      </m:e>
-                      <m:sup>
-                        <m:r>
-                          <a:rPr lang="en-US" b="0" i="1" smtClean="0">
-                            <a:latin typeface="Cambria Math" panose="02040503050406030204" pitchFamily="18" charset="0"/>
-                          </a:rPr>
-                          <m:t>42</m:t>
-                        </m:r>
-                      </m:sup>
-                    </m:sSup>
-                  </m:oMath>
-                </a14:m>
-                <a:r>
-                  <a:rPr lang="en-US" dirty="0"/>
-                  <a:t> - </a:t>
-                </a:r>
-                <a:r>
-                  <a:rPr lang="ru-RU" dirty="0"/>
-                  <a:t>вычислительная сложность </a:t>
-                </a:r>
-                <a:r>
-                  <a:rPr lang="ru-RU" dirty="0" err="1"/>
-                  <a:t>майнинга</a:t>
-                </a:r>
-                <a:r>
-                  <a:rPr lang="ru-RU" dirty="0"/>
-                  <a:t> </a:t>
-                </a:r>
-                <a:r>
-                  <a:rPr lang="ru-RU" dirty="0" err="1"/>
-                  <a:t>биткоина</a:t>
-                </a:r>
-                <a:r>
-                  <a:rPr lang="ru-RU" dirty="0"/>
-                  <a:t> (2018 год)</a:t>
-                </a:r>
-              </a:p>
-              <a:p>
-                <a:pPr marL="0" indent="0">
-                  <a:buNone/>
-                </a:pPr>
-                <a:endParaRPr lang="ru-RU" dirty="0"/>
-              </a:p>
-              <a:p>
-                <a:pPr marL="0" indent="0">
-                  <a:buNone/>
-                </a:pPr>
-                <a14:m>
-                  <m:oMath xmlns:m="http://schemas.openxmlformats.org/officeDocument/2006/math">
-                    <m:r>
-                      <a:rPr lang="en-US" i="1" dirty="0" smtClean="0">
-                        <a:latin typeface="Cambria Math" panose="02040503050406030204" pitchFamily="18" charset="0"/>
-                      </a:rPr>
-                      <m:t>~</m:t>
-                    </m:r>
-                    <m:sSup>
-                      <m:sSupPr>
-                        <m:ctrlPr>
-                          <a:rPr lang="en-US" b="0" i="1" dirty="0" smtClean="0">
-                            <a:latin typeface="Cambria Math" panose="02040503050406030204" pitchFamily="18" charset="0"/>
-                          </a:rPr>
-                        </m:ctrlPr>
-                      </m:sSupPr>
-                      <m:e>
-                        <m:r>
-                          <a:rPr lang="en-US" b="0" i="1" dirty="0" smtClean="0">
-                            <a:latin typeface="Cambria Math" panose="02040503050406030204" pitchFamily="18" charset="0"/>
-                          </a:rPr>
-                          <m:t>2</m:t>
-                        </m:r>
-                      </m:e>
-                      <m:sup>
-                        <m:r>
-                          <a:rPr lang="en-US" b="0" i="1" dirty="0" smtClean="0">
-                            <a:latin typeface="Cambria Math" panose="02040503050406030204" pitchFamily="18" charset="0"/>
-                          </a:rPr>
-                          <m:t>30</m:t>
-                        </m:r>
-                      </m:sup>
-                    </m:sSup>
-                  </m:oMath>
-                </a14:m>
-                <a:r>
-                  <a:rPr lang="en-US" dirty="0"/>
-                  <a:t> - </a:t>
-                </a:r>
-                <a:r>
-                  <a:rPr lang="ru-RU" dirty="0"/>
-                  <a:t>можно перебрать на домашнем компьютере за несколько часов</a:t>
-                </a:r>
-                <a:endParaRPr lang="en-US" dirty="0"/>
-              </a:p>
-              <a:p>
-                <a:pPr marL="0" indent="0">
-                  <a:buNone/>
-                </a:pPr>
-                <a:endParaRPr lang="ru-RU" dirty="0"/>
-              </a:p>
-            </p:txBody>
-          </p:sp>
-        </mc:Choice>
-        <mc:Fallback xmlns="">
-          <p:sp>
-            <p:nvSpPr>
-              <p:cNvPr id="3" name="Объект 2"/>
-              <p:cNvSpPr>
-                <a:spLocks noGrp="1" noRot="1" noChangeAspect="1" noMove="1" noResize="1" noEditPoints="1" noAdjustHandles="1" noChangeArrowheads="1" noChangeShapeType="1" noTextEdit="1"/>
-              </p:cNvSpPr>
-              <p:nvPr>
-                <p:ph idx="1"/>
-              </p:nvPr>
-            </p:nvSpPr>
-            <p:spPr>
-              <a:blipFill>
-                <a:blip r:embed="rId2"/>
-                <a:stretch>
-                  <a:fillRect l="-1043" t="-2801" b="-2241"/>
-                </a:stretch>
-              </a:blipFill>
-            </p:spPr>
-            <p:txBody>
-              <a:bodyPr/>
-              <a:lstStyle/>
-              <a:p>
-                <a:r>
-                  <a:rPr lang="ru-RU">
-                    <a:noFill/>
-                  </a:rPr>
-                  <a:t> </a:t>
-                </a:r>
-              </a:p>
-            </p:txBody>
-          </p:sp>
-        </mc:Fallback>
-      </mc:AlternateContent>
-      <p:sp>
-        <p:nvSpPr>
-          <p:cNvPr id="4" name="Номер слайда 3"/>
-          <p:cNvSpPr>
-            <a:spLocks noGrp="1"/>
-          </p:cNvSpPr>
-          <p:nvPr>
-            <p:ph type="sldNum" sz="quarter" idx="12"/>
-          </p:nvPr>
-        </p:nvSpPr>
-        <p:spPr/>
-        <p:txBody>
-          <a:bodyPr/>
-          <a:lstStyle/>
-          <a:p>
-            <a:fld id="{8253DDDB-F8F7-4D64-A7FD-3F3D61C1949F}" type="slidenum">
-              <a:rPr lang="ru-RU" smtClean="0"/>
-              <a:t>21</a:t>
-            </a:fld>
-            <a:endParaRPr lang="ru-RU"/>
-          </a:p>
-        </p:txBody>
-      </p:sp>
-    </p:spTree>
-    <p:extLst>
-      <p:ext uri="{BB962C8B-B14F-4D97-AF65-F5344CB8AC3E}">
-        <p14:creationId xmlns:p14="http://schemas.microsoft.com/office/powerpoint/2010/main" val="2966295883"/>
-      </p:ext>
-    </p:extLst>
-  </p:cSld>
-  <p:clrMapOvr>
-    <a:masterClrMapping/>
-  </p:clrMapOvr>
-</p:sld>
-</file>
-
 <file path=ppt/slides/slide22.xml><?xml version="1.0" encoding="utf-8"?>
 <p:sld xmlns:a="http://schemas.openxmlformats.org/drawingml/2006/main" xmlns:r="http://schemas.openxmlformats.org/officeDocument/2006/relationships" xmlns:p="http://schemas.openxmlformats.org/presentationml/2006/main">
   <p:cSld>
@@ -13801,7 +13997,7 @@
             </a:pPr>
             <a:r>
               <a:rPr lang="ru-RU" dirty="0"/>
-              <a:t>Основная идея – заменить случайный длинный вектор ключа на «псевдослучайную» последовательность, называемую гаммой.</a:t>
+              <a:t>Основная идея – заменить случайный длинный вектор ключа на «псевдослучайную» последовательность, называемую гаммой*.</a:t>
             </a:r>
           </a:p>
         </p:txBody>
@@ -13826,6 +14022,41 @@
               <a:t>22</a:t>
             </a:fld>
             <a:endParaRPr lang="ru-RU"/>
+          </a:p>
+        </p:txBody>
+      </p:sp>
+      <p:sp>
+        <p:nvSpPr>
+          <p:cNvPr id="5" name="TextBox 4">
+            <a:extLst>
+              <a:ext uri="{FF2B5EF4-FFF2-40B4-BE49-F238E27FC236}">
+                <a16:creationId xmlns:a16="http://schemas.microsoft.com/office/drawing/2014/main" id="{76EEB95C-1244-4CF8-9A62-570897B0E8AE}"/>
+              </a:ext>
+            </a:extLst>
+          </p:cNvPr>
+          <p:cNvSpPr txBox="1"/>
+          <p:nvPr/>
+        </p:nvSpPr>
+        <p:spPr>
+          <a:xfrm>
+            <a:off x="838200" y="6171684"/>
+            <a:ext cx="3636958" cy="369332"/>
+          </a:xfrm>
+          <a:prstGeom prst="rect">
+            <a:avLst/>
+          </a:prstGeom>
+          <a:noFill/>
+        </p:spPr>
+        <p:txBody>
+          <a:bodyPr wrap="none" rtlCol="0">
+            <a:spAutoFit/>
+          </a:bodyPr>
+          <a:lstStyle/>
+          <a:p>
+            <a:r>
+              <a:rPr lang="ru-RU" dirty="0"/>
+              <a:t>* – в русскоязычной терминологии</a:t>
+            </a:r>
           </a:p>
         </p:txBody>
       </p:sp>
@@ -15340,7 +15571,7 @@
             <p:spPr/>
             <p:txBody>
               <a:bodyPr>
-                <a:normAutofit fontScale="92500" lnSpcReduction="10000"/>
+                <a:normAutofit fontScale="92500" lnSpcReduction="20000"/>
               </a:bodyPr>
               <a:lstStyle/>
               <a:p>
@@ -15395,7 +15626,15 @@
                 </a:r>
                 <a:r>
                   <a:rPr lang="ru-RU" b="1" dirty="0"/>
-                  <a:t>псевдослучайным генератором</a:t>
+                  <a:t>псевдослучайным генератором (</a:t>
+                </a:r>
+                <a:r>
+                  <a:rPr lang="en-US" b="1" dirty="0"/>
+                  <a:t>PRG</a:t>
+                </a:r>
+                <a:r>
+                  <a:rPr lang="ru-RU" b="1" dirty="0"/>
+                  <a:t>)</a:t>
                 </a:r>
                 <a:r>
                   <a:rPr lang="en-US" dirty="0"/>
@@ -15441,16 +15680,14 @@
                 </a14:m>
                 <a:r>
                   <a:rPr lang="ru-RU" dirty="0"/>
-                  <a:t> </a:t>
-                </a:r>
-                <a:r>
-                  <a:rPr lang="en-US" b="1" dirty="0"/>
-                  <a:t>PRG</a:t>
-                </a:r>
-                <a:r>
-                  <a:rPr lang="ru-RU" dirty="0"/>
                   <a:t>.</a:t>
                 </a:r>
+              </a:p>
+              <a:p>
+                <a:pPr marL="0" indent="0">
+                  <a:buNone/>
+                </a:pPr>
+                <a:endParaRPr lang="ru-RU" dirty="0"/>
               </a:p>
               <a:p>
                 <a:pPr marL="0" indent="0">
@@ -15941,7 +16178,15 @@
                 </a14:m>
                 <a:r>
                   <a:rPr lang="en-US" dirty="0"/>
-                  <a:t> - </a:t>
+                  <a:t> </a:t>
+                </a:r>
+                <a:r>
+                  <a:rPr lang="ru-RU" dirty="0"/>
+                  <a:t>–</a:t>
+                </a:r>
+                <a:r>
+                  <a:rPr lang="en-US" dirty="0"/>
+                  <a:t> </a:t>
                 </a:r>
                 <a:r>
                   <a:rPr lang="ru-RU" dirty="0"/>
@@ -15957,7 +16202,15 @@
                 </a:pPr>
                 <a:r>
                   <a:rPr lang="ru-RU" dirty="0"/>
-                  <a:t>Аналогично можно ввести Поточный шифр по произвольному модулю.</a:t>
+                  <a:t>Аналогично можно ввести </a:t>
+                </a:r>
+                <a:r>
+                  <a:rPr lang="ru-RU" b="1" dirty="0"/>
+                  <a:t>Поточный шифр по произвольному модулю</a:t>
+                </a:r>
+                <a:r>
+                  <a:rPr lang="ru-RU" dirty="0"/>
+                  <a:t>.</a:t>
                 </a:r>
               </a:p>
               <a:p>
@@ -16014,7 +16267,10 @@
                     </m:r>
                   </m:oMath>
                 </a14:m>
-                <a:endParaRPr lang="ru-RU" dirty="0"/>
+                <a:r>
+                  <a:rPr lang="ru-RU" dirty="0"/>
+                  <a:t>.</a:t>
+                </a:r>
               </a:p>
             </p:txBody>
           </p:sp>
@@ -16034,7 +16290,7 @@
               <a:blipFill>
                 <a:blip r:embed="rId2"/>
                 <a:stretch>
-                  <a:fillRect l="-928" t="-2661" b="-140"/>
+                  <a:fillRect l="-928" t="-3221"/>
                 </a:stretch>
               </a:blipFill>
             </p:spPr>
@@ -17390,8 +17646,8 @@
           </a:p>
         </p:txBody>
       </p:sp>
-      <mc:AlternateContent xmlns:mc="http://schemas.openxmlformats.org/markup-compatibility/2006">
-        <mc:Choice xmlns:a14="http://schemas.microsoft.com/office/drawing/2010/main" Requires="a14">
+      <mc:AlternateContent xmlns:mc="http://schemas.openxmlformats.org/markup-compatibility/2006" xmlns:a14="http://schemas.microsoft.com/office/drawing/2010/main">
+        <mc:Choice Requires="a14">
           <p:sp>
             <p:nvSpPr>
               <p:cNvPr id="3" name="Объект 2"/>
@@ -17574,7 +17830,7 @@
                       <m:sSub>
                         <m:sSubPr>
                           <m:ctrlPr>
-                            <a:rPr lang="en-US">
+                            <a:rPr lang="en-US" i="1">
                               <a:latin typeface="Cambria Math" panose="02040503050406030204" pitchFamily="18" charset="0"/>
                             </a:rPr>
                           </m:ctrlPr>
@@ -17779,7 +18035,7 @@
             </p:txBody>
           </p:sp>
         </mc:Choice>
-        <mc:Fallback>
+        <mc:Fallback xmlns="">
           <p:sp>
             <p:nvSpPr>
               <p:cNvPr id="3" name="Объект 2"/>
@@ -18360,8 +18616,8 @@
           </a:p>
         </p:txBody>
       </p:sp>
-      <mc:AlternateContent xmlns:mc="http://schemas.openxmlformats.org/markup-compatibility/2006">
-        <mc:Choice xmlns:a14="http://schemas.microsoft.com/office/drawing/2010/main" Requires="a14">
+      <mc:AlternateContent xmlns:mc="http://schemas.openxmlformats.org/markup-compatibility/2006" xmlns:a14="http://schemas.microsoft.com/office/drawing/2010/main">
+        <mc:Choice Requires="a14">
           <p:sp>
             <p:nvSpPr>
               <p:cNvPr id="15" name="Text Box 13"/>
@@ -18547,7 +18803,7 @@
             </p:txBody>
           </p:sp>
         </mc:Choice>
-        <mc:Fallback>
+        <mc:Fallback xmlns="">
           <p:sp>
             <p:nvSpPr>
               <p:cNvPr id="15" name="Text Box 13"/>
@@ -18823,10 +19079,13 @@
                 <a14:m>
                   <m:oMath xmlns:m="http://schemas.openxmlformats.org/officeDocument/2006/math">
                     <m:r>
-                      <a:rPr lang="en-US" i="1">
-                        <a:latin typeface="Cambria Math" panose="02040503050406030204" pitchFamily="18" charset="0"/>
-                      </a:rPr>
-                      <m:t>𝑃𝑅</m:t>
+                      <m:rPr>
+                        <m:sty m:val="p"/>
+                      </m:rPr>
+                      <a:rPr lang="en-US" i="0">
+                        <a:latin typeface="Cambria Math" panose="02040503050406030204" pitchFamily="18" charset="0"/>
+                      </a:rPr>
+                      <m:t>PR</m:t>
                     </m:r>
                     <m:sSub>
                       <m:sSubPr>
@@ -18838,18 +19097,24 @@
                       </m:sSubPr>
                       <m:e>
                         <m:r>
-                          <a:rPr lang="en-US" i="1">
-                            <a:latin typeface="Cambria Math" panose="02040503050406030204" pitchFamily="18" charset="0"/>
-                          </a:rPr>
-                          <m:t>𝐺</m:t>
+                          <m:rPr>
+                            <m:sty m:val="p"/>
+                          </m:rPr>
+                          <a:rPr lang="en-US" i="0">
+                            <a:latin typeface="Cambria Math" panose="02040503050406030204" pitchFamily="18" charset="0"/>
+                          </a:rPr>
+                          <m:t>G</m:t>
                         </m:r>
                       </m:e>
                       <m:sub>
                         <m:r>
-                          <a:rPr lang="en-US" i="1">
-                            <a:latin typeface="Cambria Math" panose="02040503050406030204" pitchFamily="18" charset="0"/>
-                          </a:rPr>
-                          <m:t>𝑎𝑑𝑣</m:t>
+                          <m:rPr>
+                            <m:sty m:val="p"/>
+                          </m:rPr>
+                          <a:rPr lang="en-US" i="0">
+                            <a:latin typeface="Cambria Math" panose="02040503050406030204" pitchFamily="18" charset="0"/>
+                          </a:rPr>
+                          <m:t>adv</m:t>
                         </m:r>
                       </m:sub>
                     </m:sSub>
@@ -18941,7 +19206,7 @@
                 </a:r>
                 <a:r>
                   <a:rPr lang="ru-RU" b="1" dirty="0"/>
-                  <a:t>статистическим тестом</a:t>
+                  <a:t>статистическим тестом*</a:t>
                 </a:r>
                 <a:r>
                   <a:rPr lang="ru-RU" dirty="0"/>
@@ -19142,7 +19407,7 @@
                 <a:off x="838200" y="1555230"/>
                 <a:ext cx="10515600" cy="2554601"/>
               </a:xfrm>
-              <a:blipFill rotWithShape="0">
+              <a:blipFill>
                 <a:blip r:embed="rId2"/>
                 <a:stretch>
                   <a:fillRect l="-928" t="-5489" r="-1333"/>
@@ -20044,8 +20309,8 @@
           </p:sp>
         </mc:Fallback>
       </mc:AlternateContent>
-      <mc:AlternateContent xmlns:mc="http://schemas.openxmlformats.org/markup-compatibility/2006">
-        <mc:Choice xmlns:a14="http://schemas.microsoft.com/office/drawing/2010/main" Requires="a14">
+      <mc:AlternateContent xmlns:mc="http://schemas.openxmlformats.org/markup-compatibility/2006" xmlns:a14="http://schemas.microsoft.com/office/drawing/2010/main">
+        <mc:Choice Requires="a14">
           <p:sp>
             <p:nvSpPr>
               <p:cNvPr id="17" name="Прямоугольник 16"/>
@@ -20086,7 +20351,7 @@
                       <m:sSub>
                         <m:sSubPr>
                           <m:ctrlPr>
-                            <a:rPr lang="en-US">
+                            <a:rPr lang="en-US" i="1">
                               <a:latin typeface="Cambria Math" panose="02040503050406030204" pitchFamily="18" charset="0"/>
                             </a:rPr>
                           </m:ctrlPr>
@@ -20291,7 +20556,7 @@
             </p:txBody>
           </p:sp>
         </mc:Choice>
-        <mc:Fallback>
+        <mc:Fallback xmlns="">
           <p:sp>
             <p:nvSpPr>
               <p:cNvPr id="17" name="Прямоугольник 16"/>
@@ -20330,6 +20595,41 @@
           </p:sp>
         </mc:Fallback>
       </mc:AlternateContent>
+      <p:sp>
+        <p:nvSpPr>
+          <p:cNvPr id="18" name="TextBox 17">
+            <a:extLst>
+              <a:ext uri="{FF2B5EF4-FFF2-40B4-BE49-F238E27FC236}">
+                <a16:creationId xmlns:a16="http://schemas.microsoft.com/office/drawing/2014/main" id="{344BAB94-425D-4996-BDF9-FFB55E30A1C8}"/>
+              </a:ext>
+            </a:extLst>
+          </p:cNvPr>
+          <p:cNvSpPr txBox="1"/>
+          <p:nvPr/>
+        </p:nvSpPr>
+        <p:spPr>
+          <a:xfrm>
+            <a:off x="370395" y="6445797"/>
+            <a:ext cx="3383234" cy="369332"/>
+          </a:xfrm>
+          <a:prstGeom prst="rect">
+            <a:avLst/>
+          </a:prstGeom>
+          <a:noFill/>
+        </p:spPr>
+        <p:txBody>
+          <a:bodyPr wrap="none" rtlCol="0">
+            <a:spAutoFit/>
+          </a:bodyPr>
+          <a:lstStyle/>
+          <a:p>
+            <a:r>
+              <a:rPr lang="ru-RU" dirty="0"/>
+              <a:t>* в англоязычной терминологии</a:t>
+            </a:r>
+          </a:p>
+        </p:txBody>
+      </p:sp>
     </p:spTree>
     <p:extLst>
       <p:ext uri="{BB962C8B-B14F-4D97-AF65-F5344CB8AC3E}">
@@ -20493,7 +20793,7 @@
                 </a:r>
                 <a:r>
                   <a:rPr lang="ru-RU" dirty="0"/>
-                  <a:t>- генератор.</a:t>
+                  <a:t>– генератор.</a:t>
                 </a:r>
               </a:p>
               <a:p>
@@ -20582,11 +20882,7 @@
                 </a14:m>
                 <a:r>
                   <a:rPr lang="ru-RU" dirty="0"/>
-                  <a:t> является начальным заполнением внутреннего состояния. Тогда максимально возможная </a:t>
-                </a:r>
-                <a:r>
-                  <a:rPr lang="ru-RU"/>
-                  <a:t>энтропия выходной</a:t>
+                  <a:t> является начальным заполнением внутреннего состояния. Тогда максимально возможная энтропия выходной</a:t>
                 </a:r>
               </a:p>
               <a:p>
@@ -20594,7 +20890,7 @@
                   <a:buNone/>
                 </a:pPr>
                 <a:r>
-                  <a:rPr lang="ru-RU"/>
+                  <a:rPr lang="ru-RU" dirty="0"/>
                   <a:t>последовательности </a:t>
                 </a:r>
                 <a14:m>
@@ -21007,7 +21303,15 @@
                 </a14:m>
                 <a:r>
                   <a:rPr lang="en-US" dirty="0"/>
-                  <a:t> - </a:t>
+                  <a:t> </a:t>
+                </a:r>
+                <a:r>
+                  <a:rPr lang="ru-RU" dirty="0"/>
+                  <a:t>–</a:t>
+                </a:r>
+                <a:r>
+                  <a:rPr lang="en-US" dirty="0"/>
+                  <a:t> </a:t>
                 </a:r>
                 <a:r>
                   <a:rPr lang="ru-RU" dirty="0"/>
@@ -22016,8 +22320,8 @@
           </a:p>
         </p:txBody>
       </p:sp>
-      <mc:AlternateContent xmlns:mc="http://schemas.openxmlformats.org/markup-compatibility/2006">
-        <mc:Choice xmlns:a14="http://schemas.microsoft.com/office/drawing/2010/main" Requires="a14">
+      <mc:AlternateContent xmlns:mc="http://schemas.openxmlformats.org/markup-compatibility/2006" xmlns:a14="http://schemas.microsoft.com/office/drawing/2010/main">
+        <mc:Choice Requires="a14">
           <p:sp>
             <p:nvSpPr>
               <p:cNvPr id="8" name="TextBox 7"/>
@@ -22027,7 +22331,7 @@
             <p:spPr>
               <a:xfrm>
                 <a:off x="5345724" y="1408579"/>
-                <a:ext cx="6008076" cy="2677656"/>
+                <a:ext cx="6008076" cy="2246769"/>
               </a:xfrm>
               <a:prstGeom prst="rect">
                 <a:avLst/>
@@ -22048,15 +22352,123 @@
                   <a:buFont typeface="Wingdings" panose="05000000000000000000" pitchFamily="2" charset="2"/>
                   <a:buChar char="§"/>
                 </a:pPr>
-                <a:r>
-                  <a:rPr lang="ru-RU" sz="2800" dirty="0">
-                    <a:latin typeface="Cambria Math" panose="02040503050406030204" pitchFamily="18" charset="0"/>
-                  </a:rPr>
-                  <a:t>Что отправляет и что получает противник?</a:t>
-                </a:r>
-                <a:endParaRPr lang="en-US" sz="2800" dirty="0">
-                  <a:latin typeface="Cambria Math" panose="02040503050406030204" pitchFamily="18" charset="0"/>
-                </a:endParaRPr>
+                <a14:m>
+                  <m:oMath xmlns:m="http://schemas.openxmlformats.org/officeDocument/2006/math">
+                    <m:r>
+                      <m:rPr>
+                        <m:sty m:val="p"/>
+                      </m:rPr>
+                      <a:rPr lang="en-US" sz="2800">
+                        <a:latin typeface="Cambria Math" panose="02040503050406030204" pitchFamily="18" charset="0"/>
+                      </a:rPr>
+                      <m:t>SSadv</m:t>
+                    </m:r>
+                    <m:d>
+                      <m:dPr>
+                        <m:begChr m:val="["/>
+                        <m:endChr m:val="]"/>
+                        <m:ctrlPr>
+                          <a:rPr lang="en-US" sz="2800" i="1">
+                            <a:latin typeface="Cambria Math" panose="02040503050406030204" pitchFamily="18" charset="0"/>
+                          </a:rPr>
+                        </m:ctrlPr>
+                      </m:dPr>
+                      <m:e>
+                        <m:r>
+                          <a:rPr lang="en-US" sz="2800" i="1">
+                            <a:latin typeface="Cambria Math" panose="02040503050406030204" pitchFamily="18" charset="0"/>
+                          </a:rPr>
+                          <m:t>𝐴</m:t>
+                        </m:r>
+                        <m:r>
+                          <a:rPr lang="en-US" sz="2800" i="1">
+                            <a:latin typeface="Cambria Math" panose="02040503050406030204" pitchFamily="18" charset="0"/>
+                          </a:rPr>
+                          <m:t>,</m:t>
+                        </m:r>
+                        <m:r>
+                          <m:rPr>
+                            <m:sty m:val="p"/>
+                          </m:rPr>
+                          <a:rPr lang="en-US" sz="2800">
+                            <a:latin typeface="Cambria Math" panose="02040503050406030204" pitchFamily="18" charset="0"/>
+                          </a:rPr>
+                          <m:t>Ε</m:t>
+                        </m:r>
+                      </m:e>
+                    </m:d>
+                    <m:r>
+                      <a:rPr lang="en-US" sz="2800" i="1">
+                        <a:latin typeface="Cambria Math" panose="02040503050406030204" pitchFamily="18" charset="0"/>
+                      </a:rPr>
+                      <m:t>=</m:t>
+                    </m:r>
+                  </m:oMath>
+                </a14:m>
+                <a:r>
+                  <a:rPr lang="ru-RU" sz="2800" b="1" dirty="0"/>
+                  <a:t> ??? </a:t>
+                </a:r>
+                <a:r>
+                  <a:rPr lang="en-US" sz="2800" dirty="0"/>
+                  <a:t>(</a:t>
+                </a:r>
+                <a:r>
+                  <a:rPr lang="ru-RU" sz="2800" dirty="0"/>
+                  <a:t>функция от </a:t>
+                </a:r>
+                <a14:m>
+                  <m:oMath xmlns:m="http://schemas.openxmlformats.org/officeDocument/2006/math">
+                    <m:sSub>
+                      <m:sSubPr>
+                        <m:ctrlPr>
+                          <a:rPr lang="en-US" sz="2800" b="0" i="1" smtClean="0">
+                            <a:latin typeface="Cambria Math" panose="02040503050406030204" pitchFamily="18" charset="0"/>
+                          </a:rPr>
+                        </m:ctrlPr>
+                      </m:sSubPr>
+                      <m:e>
+                        <m:r>
+                          <a:rPr lang="en-US" sz="2800" b="0" i="1" smtClean="0">
+                            <a:latin typeface="Cambria Math" panose="02040503050406030204" pitchFamily="18" charset="0"/>
+                          </a:rPr>
+                          <m:t>𝑊</m:t>
+                        </m:r>
+                      </m:e>
+                      <m:sub>
+                        <m:r>
+                          <a:rPr lang="en-US" sz="2800" b="0" i="1" smtClean="0">
+                            <a:latin typeface="Cambria Math" panose="02040503050406030204" pitchFamily="18" charset="0"/>
+                          </a:rPr>
+                          <m:t>𝑏</m:t>
+                        </m:r>
+                      </m:sub>
+                    </m:sSub>
+                    <m:r>
+                      <a:rPr lang="en-US" sz="2800" b="0" i="1" smtClean="0">
+                        <a:latin typeface="Cambria Math" panose="02040503050406030204" pitchFamily="18" charset="0"/>
+                      </a:rPr>
+                      <m:t>, </m:t>
+                    </m:r>
+                    <m:r>
+                      <a:rPr lang="en-US" sz="2800" b="0" i="1" smtClean="0">
+                        <a:latin typeface="Cambria Math" panose="02040503050406030204" pitchFamily="18" charset="0"/>
+                      </a:rPr>
+                      <m:t>𝑏</m:t>
+                    </m:r>
+                    <m:r>
+                      <a:rPr lang="en-US" sz="2800" b="0" i="1" smtClean="0">
+                        <a:latin typeface="Cambria Math" panose="02040503050406030204" pitchFamily="18" charset="0"/>
+                      </a:rPr>
+                      <m:t>=0,1</m:t>
+                    </m:r>
+                  </m:oMath>
+                </a14:m>
+                <a:r>
+                  <a:rPr lang="en-US" sz="2800" dirty="0"/>
+                  <a:t>)</a:t>
+                </a:r>
+                <a:endParaRPr lang="ru-RU" sz="2800" dirty="0"/>
               </a:p>
               <a:p>
                 <a:pPr marL="457200" indent="-457200">
@@ -22065,46 +22477,34 @@
                 </a:pPr>
                 <a14:m>
                   <m:oMath xmlns:m="http://schemas.openxmlformats.org/officeDocument/2006/math">
-                    <m:r>
-                      <m:rPr>
-                        <m:sty m:val="p"/>
-                      </m:rPr>
-                      <a:rPr lang="en-US" sz="2800" b="0" i="0" smtClean="0">
-                        <a:latin typeface="Cambria Math" panose="02040503050406030204" pitchFamily="18" charset="0"/>
-                      </a:rPr>
-                      <m:t>S</m:t>
-                    </m:r>
-                    <m:sSub>
-                      <m:sSubPr>
+                    <m:sSup>
+                      <m:sSupPr>
                         <m:ctrlPr>
-                          <a:rPr lang="en-US" sz="2800" b="0" smtClean="0">
+                          <a:rPr lang="en-US" sz="2800" i="1">
                             <a:latin typeface="Cambria Math" panose="02040503050406030204" pitchFamily="18" charset="0"/>
                           </a:rPr>
                         </m:ctrlPr>
-                      </m:sSubPr>
+                      </m:sSupPr>
                       <m:e>
                         <m:r>
                           <m:rPr>
                             <m:sty m:val="p"/>
                           </m:rPr>
-                          <a:rPr lang="en-US" sz="2800" b="0" i="0" smtClean="0">
-                            <a:latin typeface="Cambria Math" panose="02040503050406030204" pitchFamily="18" charset="0"/>
-                          </a:rPr>
-                          <m:t>S</m:t>
+                          <a:rPr lang="en-US" sz="2800">
+                            <a:latin typeface="Cambria Math" panose="02040503050406030204" pitchFamily="18" charset="0"/>
+                          </a:rPr>
+                          <m:t>SSadv</m:t>
                         </m:r>
                       </m:e>
-                      <m:sub>
+                      <m:sup>
                         <m:r>
-                          <m:rPr>
-                            <m:sty m:val="p"/>
-                          </m:rPr>
-                          <a:rPr lang="en-US" sz="2800" b="0" i="0" smtClean="0">
-                            <a:latin typeface="Cambria Math" panose="02040503050406030204" pitchFamily="18" charset="0"/>
-                          </a:rPr>
-                          <m:t>adv</m:t>
+                          <a:rPr lang="en-US" sz="2800">
+                            <a:latin typeface="Cambria Math" panose="02040503050406030204" pitchFamily="18" charset="0"/>
+                          </a:rPr>
+                          <m:t>∗</m:t>
                         </m:r>
-                      </m:sub>
-                    </m:sSub>
+                      </m:sup>
+                    </m:sSup>
                     <m:d>
                       <m:dPr>
                         <m:begChr m:val="["/>
@@ -22161,28 +22561,155 @@
                 </a:r>
                 <a:r>
                   <a:rPr lang="ru-RU" sz="2800" dirty="0"/>
-                  <a:t>функция от</a:t>
-                </a:r>
-                <a:r>
-                  <a:rPr lang="en-US" sz="2800" dirty="0"/>
-                  <a:t> </a:t>
-                </a:r>
-                <a:r>
-                  <a:rPr lang="ru-RU" sz="2800" dirty="0"/>
-                  <a:t>вероятностей</a:t>
-                </a:r>
+                  <a:t>функция от </a:t>
+                </a:r>
+                <a14:m>
+                  <m:oMath xmlns:m="http://schemas.openxmlformats.org/officeDocument/2006/math">
+                    <m:r>
+                      <a:rPr lang="en-US" sz="2800" b="0" i="1" smtClean="0">
+                        <a:latin typeface="Cambria Math" panose="02040503050406030204" pitchFamily="18" charset="0"/>
+                      </a:rPr>
+                      <m:t>𝑊</m:t>
+                    </m:r>
+                  </m:oMath>
+                </a14:m>
                 <a:r>
                   <a:rPr lang="en-US" sz="2800" dirty="0"/>
                   <a:t>)</a:t>
                 </a:r>
               </a:p>
               <a:p>
+                <a:pPr marL="457200" indent="-457200">
+                  <a:buFont typeface="Wingdings" panose="05000000000000000000" pitchFamily="2" charset="2"/>
+                  <a:buChar char="§"/>
+                </a:pPr>
+                <a:r>
+                  <a:rPr lang="ru-RU" sz="2800" dirty="0"/>
+                  <a:t>Связь </a:t>
+                </a:r>
+                <a14:m>
+                  <m:oMath xmlns:m="http://schemas.openxmlformats.org/officeDocument/2006/math">
+                    <m:r>
+                      <m:rPr>
+                        <m:sty m:val="p"/>
+                      </m:rPr>
+                      <a:rPr lang="en-US" sz="2800">
+                        <a:latin typeface="Cambria Math" panose="02040503050406030204" pitchFamily="18" charset="0"/>
+                      </a:rPr>
+                      <m:t>SSadv</m:t>
+                    </m:r>
+                    <m:d>
+                      <m:dPr>
+                        <m:begChr m:val="["/>
+                        <m:endChr m:val="]"/>
+                        <m:ctrlPr>
+                          <a:rPr lang="en-US" sz="2800" i="1">
+                            <a:latin typeface="Cambria Math" panose="02040503050406030204" pitchFamily="18" charset="0"/>
+                          </a:rPr>
+                        </m:ctrlPr>
+                      </m:dPr>
+                      <m:e>
+                        <m:r>
+                          <a:rPr lang="en-US" sz="2800" i="1">
+                            <a:latin typeface="Cambria Math" panose="02040503050406030204" pitchFamily="18" charset="0"/>
+                          </a:rPr>
+                          <m:t>𝐴</m:t>
+                        </m:r>
+                        <m:r>
+                          <a:rPr lang="en-US" sz="2800" i="1">
+                            <a:latin typeface="Cambria Math" panose="02040503050406030204" pitchFamily="18" charset="0"/>
+                          </a:rPr>
+                          <m:t>,</m:t>
+                        </m:r>
+                        <m:r>
+                          <m:rPr>
+                            <m:sty m:val="p"/>
+                          </m:rPr>
+                          <a:rPr lang="en-US" sz="2800">
+                            <a:latin typeface="Cambria Math" panose="02040503050406030204" pitchFamily="18" charset="0"/>
+                          </a:rPr>
+                          <m:t>Ε</m:t>
+                        </m:r>
+                      </m:e>
+                    </m:d>
+                  </m:oMath>
+                </a14:m>
+                <a:r>
+                  <a:rPr lang="ru-RU" sz="2800" dirty="0"/>
+                  <a:t> и </a:t>
+                </a:r>
+                <a14:m>
+                  <m:oMath xmlns:m="http://schemas.openxmlformats.org/officeDocument/2006/math">
+                    <m:sSup>
+                      <m:sSupPr>
+                        <m:ctrlPr>
+                          <a:rPr lang="en-US" sz="2800" i="1">
+                            <a:latin typeface="Cambria Math" panose="02040503050406030204" pitchFamily="18" charset="0"/>
+                          </a:rPr>
+                        </m:ctrlPr>
+                      </m:sSupPr>
+                      <m:e>
+                        <m:r>
+                          <m:rPr>
+                            <m:sty m:val="p"/>
+                          </m:rPr>
+                          <a:rPr lang="en-US" sz="2800">
+                            <a:latin typeface="Cambria Math" panose="02040503050406030204" pitchFamily="18" charset="0"/>
+                          </a:rPr>
+                          <m:t>SSadv</m:t>
+                        </m:r>
+                      </m:e>
+                      <m:sup>
+                        <m:r>
+                          <a:rPr lang="en-US" sz="2800">
+                            <a:latin typeface="Cambria Math" panose="02040503050406030204" pitchFamily="18" charset="0"/>
+                          </a:rPr>
+                          <m:t>∗</m:t>
+                        </m:r>
+                      </m:sup>
+                    </m:sSup>
+                    <m:d>
+                      <m:dPr>
+                        <m:begChr m:val="["/>
+                        <m:endChr m:val="]"/>
+                        <m:ctrlPr>
+                          <a:rPr lang="en-US" sz="2800" i="1">
+                            <a:latin typeface="Cambria Math" panose="02040503050406030204" pitchFamily="18" charset="0"/>
+                          </a:rPr>
+                        </m:ctrlPr>
+                      </m:dPr>
+                      <m:e>
+                        <m:r>
+                          <a:rPr lang="en-US" sz="2800" i="1">
+                            <a:latin typeface="Cambria Math" panose="02040503050406030204" pitchFamily="18" charset="0"/>
+                          </a:rPr>
+                          <m:t>𝐴</m:t>
+                        </m:r>
+                        <m:r>
+                          <a:rPr lang="en-US" sz="2800" i="1">
+                            <a:latin typeface="Cambria Math" panose="02040503050406030204" pitchFamily="18" charset="0"/>
+                          </a:rPr>
+                          <m:t>,</m:t>
+                        </m:r>
+                        <m:r>
+                          <m:rPr>
+                            <m:sty m:val="p"/>
+                          </m:rPr>
+                          <a:rPr lang="en-US" sz="2800">
+                            <a:latin typeface="Cambria Math" panose="02040503050406030204" pitchFamily="18" charset="0"/>
+                          </a:rPr>
+                          <m:t>Ε</m:t>
+                        </m:r>
+                      </m:e>
+                    </m:d>
+                  </m:oMath>
+                </a14:m>
                 <a:endParaRPr lang="ru-RU" sz="2800" dirty="0"/>
               </a:p>
             </p:txBody>
           </p:sp>
         </mc:Choice>
-        <mc:Fallback>
+        <mc:Fallback xmlns="">
           <p:sp>
             <p:nvSpPr>
               <p:cNvPr id="8" name="TextBox 7"/>
@@ -22194,7 +22721,7 @@
             <p:spPr>
               <a:xfrm>
                 <a:off x="5345724" y="1408579"/>
-                <a:ext cx="6008076" cy="2677656"/>
+                <a:ext cx="6008076" cy="2246769"/>
               </a:xfrm>
               <a:prstGeom prst="rect">
                 <a:avLst/>
@@ -22202,7 +22729,7 @@
               <a:blipFill>
                 <a:blip r:embed="rId2"/>
                 <a:stretch>
-                  <a:fillRect l="-1826"/>
+                  <a:fillRect l="-1826" b="-6775"/>
                 </a:stretch>
               </a:blipFill>
             </p:spPr>
@@ -22563,7 +23090,7 @@
     </p:spTree>
     <p:extLst>
       <p:ext uri="{BB962C8B-B14F-4D97-AF65-F5344CB8AC3E}">
-        <p14:creationId xmlns:p14="http://schemas.microsoft.com/office/powerpoint/2010/main" val="779306383"/>
+        <p14:creationId xmlns:p14="http://schemas.microsoft.com/office/powerpoint/2010/main" val="2682748614"/>
       </p:ext>
     </p:extLst>
   </p:cSld>
@@ -22791,8 +23318,8 @@
           </a:p>
         </p:txBody>
       </p:sp>
-      <mc:AlternateContent xmlns:mc="http://schemas.openxmlformats.org/markup-compatibility/2006">
-        <mc:Choice xmlns:a14="http://schemas.microsoft.com/office/drawing/2010/main" Requires="a14">
+      <mc:AlternateContent xmlns:mc="http://schemas.openxmlformats.org/markup-compatibility/2006" xmlns:a14="http://schemas.microsoft.com/office/drawing/2010/main">
+        <mc:Choice Requires="a14">
           <p:sp>
             <p:nvSpPr>
               <p:cNvPr id="3" name="Объект 2"/>
@@ -23001,7 +23528,7 @@
                       <m:sSub>
                         <m:sSubPr>
                           <m:ctrlPr>
-                            <a:rPr lang="en-US" b="0" smtClean="0">
+                            <a:rPr lang="en-US" b="0" i="1" smtClean="0">
                               <a:latin typeface="Cambria Math" panose="02040503050406030204" pitchFamily="18" charset="0"/>
                             </a:rPr>
                           </m:ctrlPr>
@@ -23534,7 +24061,7 @@
             </p:txBody>
           </p:sp>
         </mc:Choice>
-        <mc:Fallback>
+        <mc:Fallback xmlns="">
           <p:sp>
             <p:nvSpPr>
               <p:cNvPr id="3" name="Объект 2"/>
@@ -23681,8 +24208,8 @@
           </a:p>
         </p:txBody>
       </p:sp>
-      <mc:AlternateContent xmlns:mc="http://schemas.openxmlformats.org/markup-compatibility/2006">
-        <mc:Choice xmlns:a14="http://schemas.microsoft.com/office/drawing/2010/main" Requires="a14">
+      <mc:AlternateContent xmlns:mc="http://schemas.openxmlformats.org/markup-compatibility/2006" xmlns:a14="http://schemas.microsoft.com/office/drawing/2010/main">
+        <mc:Choice Requires="a14">
           <p:sp>
             <p:nvSpPr>
               <p:cNvPr id="3" name="Объект 2"/>
@@ -23987,7 +24514,7 @@
                     <m:sSub>
                       <m:sSubPr>
                         <m:ctrlPr>
-                          <a:rPr lang="en-US" b="0" smtClean="0">
+                          <a:rPr lang="en-US" b="0" i="1" smtClean="0">
                             <a:latin typeface="Cambria Math" panose="02040503050406030204" pitchFamily="18" charset="0"/>
                             <a:ea typeface="Cambria Math" panose="02040503050406030204" pitchFamily="18" charset="0"/>
                           </a:rPr>
@@ -24060,7 +24587,7 @@
             </p:txBody>
           </p:sp>
         </mc:Choice>
-        <mc:Fallback>
+        <mc:Fallback xmlns="">
           <p:sp>
             <p:nvSpPr>
               <p:cNvPr id="3" name="Объект 2"/>
@@ -24734,7 +25261,7 @@
         <p:spPr>
           <a:xfrm>
             <a:off x="720505" y="1690688"/>
-            <a:ext cx="10542006" cy="1450864"/>
+            <a:ext cx="10542006" cy="1132411"/>
           </a:xfrm>
           <a:prstGeom prst="roundRect">
             <a:avLst/>
@@ -24815,7 +25342,7 @@
                 </a:r>
                 <a:r>
                   <a:rPr lang="en-US" dirty="0"/>
-                  <a:t>Yao’82 </a:t>
+                  <a:t>Yao’82</a:t>
                 </a:r>
                 <a:r>
                   <a:rPr lang="ru-RU" dirty="0"/>
@@ -24996,7 +25523,7 @@
               </p:nvPr>
             </p:nvSpPr>
             <p:spPr>
-              <a:blipFill rotWithShape="0">
+              <a:blipFill>
                 <a:blip r:embed="rId2"/>
                 <a:stretch>
                   <a:fillRect l="-1043" t="-2101" r="-1681"/>
@@ -25131,8 +25658,8 @@
           </a:p>
         </p:txBody>
       </p:sp>
-      <mc:AlternateContent xmlns:mc="http://schemas.openxmlformats.org/markup-compatibility/2006">
-        <mc:Choice xmlns:a14="http://schemas.microsoft.com/office/drawing/2010/main" Requires="a14">
+      <mc:AlternateContent xmlns:mc="http://schemas.openxmlformats.org/markup-compatibility/2006" xmlns:a14="http://schemas.microsoft.com/office/drawing/2010/main">
+        <mc:Choice Requires="a14">
           <p:sp>
             <p:nvSpPr>
               <p:cNvPr id="3" name="Объект 2"/>
@@ -25254,10 +25781,13 @@
                 <a14:m>
                   <m:oMath xmlns:m="http://schemas.openxmlformats.org/officeDocument/2006/math">
                     <m:r>
-                      <a:rPr lang="en-US" b="0" i="1" smtClean="0">
-                        <a:latin typeface="Cambria Math" panose="02040503050406030204" pitchFamily="18" charset="0"/>
-                      </a:rPr>
-                      <m:t>𝐸</m:t>
+                      <m:rPr>
+                        <m:sty m:val="p"/>
+                      </m:rPr>
+                      <a:rPr lang="en-US" b="0" i="0" smtClean="0">
+                        <a:latin typeface="Cambria Math" panose="02040503050406030204" pitchFamily="18" charset="0"/>
+                      </a:rPr>
+                      <m:t>E</m:t>
                     </m:r>
                   </m:oMath>
                 </a14:m>
@@ -25390,7 +25920,7 @@
                     <m:sSub>
                       <m:sSubPr>
                         <m:ctrlPr>
-                          <a:rPr lang="en-US" b="0" smtClean="0">
+                          <a:rPr lang="en-US" b="0" i="1" smtClean="0">
                             <a:latin typeface="Cambria Math" panose="02040503050406030204" pitchFamily="18" charset="0"/>
                           </a:rPr>
                         </m:ctrlPr>
@@ -25442,10 +25972,13 @@
                           <m:t>,</m:t>
                         </m:r>
                         <m:r>
-                          <a:rPr lang="en-US" b="0" i="1" smtClean="0">
-                            <a:latin typeface="Cambria Math" panose="02040503050406030204" pitchFamily="18" charset="0"/>
-                          </a:rPr>
-                          <m:t>𝐸</m:t>
+                          <m:rPr>
+                            <m:sty m:val="p"/>
+                          </m:rPr>
+                          <a:rPr lang="en-US" b="0" i="0" smtClean="0">
+                            <a:latin typeface="Cambria Math" panose="02040503050406030204" pitchFamily="18" charset="0"/>
+                          </a:rPr>
+                          <m:t>E</m:t>
                         </m:r>
                       </m:e>
                     </m:d>
@@ -25467,7 +26000,7 @@
                     <m:sSub>
                       <m:sSubPr>
                         <m:ctrlPr>
-                          <a:rPr lang="en-US" b="0" smtClean="0">
+                          <a:rPr lang="en-US" b="0" i="1" smtClean="0">
                             <a:latin typeface="Cambria Math" panose="02040503050406030204" pitchFamily="18" charset="0"/>
                           </a:rPr>
                         </m:ctrlPr>
@@ -25532,7 +26065,7 @@
             </p:txBody>
           </p:sp>
         </mc:Choice>
-        <mc:Fallback>
+        <mc:Fallback xmlns="">
           <p:sp>
             <p:nvSpPr>
               <p:cNvPr id="3" name="Объект 2"/>
@@ -28425,8 +28958,8 @@
           </a:p>
         </p:txBody>
       </p:sp>
-      <mc:AlternateContent xmlns:mc="http://schemas.openxmlformats.org/markup-compatibility/2006">
-        <mc:Choice xmlns:a14="http://schemas.microsoft.com/office/drawing/2010/main" Requires="a14">
+      <mc:AlternateContent xmlns:mc="http://schemas.openxmlformats.org/markup-compatibility/2006" xmlns:a14="http://schemas.microsoft.com/office/drawing/2010/main">
+        <mc:Choice Requires="a14">
           <p:sp>
             <p:nvSpPr>
               <p:cNvPr id="6" name="Объект 2"/>
@@ -28716,10 +29249,13 @@
                 <a14:m>
                   <m:oMath xmlns:m="http://schemas.openxmlformats.org/officeDocument/2006/math">
                     <m:r>
-                      <a:rPr lang="en-US" i="1" smtClean="0">
-                        <a:latin typeface="Cambria Math" panose="02040503050406030204" pitchFamily="18" charset="0"/>
-                      </a:rPr>
-                      <m:t>𝐸</m:t>
+                      <m:rPr>
+                        <m:sty m:val="p"/>
+                      </m:rPr>
+                      <a:rPr lang="en-US" i="0" smtClean="0">
+                        <a:latin typeface="Cambria Math" panose="02040503050406030204" pitchFamily="18" charset="0"/>
+                      </a:rPr>
+                      <m:t>E</m:t>
                     </m:r>
                   </m:oMath>
                 </a14:m>
@@ -28853,7 +29389,7 @@
                     <m:sSub>
                       <m:sSubPr>
                         <m:ctrlPr>
-                          <a:rPr lang="en-US" b="0" smtClean="0">
+                          <a:rPr lang="en-US" b="0" i="1" smtClean="0">
                             <a:latin typeface="Cambria Math" panose="02040503050406030204" pitchFamily="18" charset="0"/>
                           </a:rPr>
                         </m:ctrlPr>
@@ -28905,10 +29441,13 @@
                           <m:t>,</m:t>
                         </m:r>
                         <m:r>
-                          <a:rPr lang="en-US" i="1" smtClean="0">
-                            <a:latin typeface="Cambria Math" panose="02040503050406030204" pitchFamily="18" charset="0"/>
-                          </a:rPr>
-                          <m:t>𝐸</m:t>
+                          <m:rPr>
+                            <m:sty m:val="p"/>
+                          </m:rPr>
+                          <a:rPr lang="en-US" i="0" smtClean="0">
+                            <a:latin typeface="Cambria Math" panose="02040503050406030204" pitchFamily="18" charset="0"/>
+                          </a:rPr>
+                          <m:t>E</m:t>
                         </m:r>
                       </m:e>
                     </m:d>
@@ -28930,7 +29469,7 @@
                     <m:sSub>
                       <m:sSubPr>
                         <m:ctrlPr>
-                          <a:rPr lang="en-US" b="0" smtClean="0">
+                          <a:rPr lang="en-US" b="0" i="1" smtClean="0">
                             <a:latin typeface="Cambria Math" panose="02040503050406030204" pitchFamily="18" charset="0"/>
                           </a:rPr>
                         </m:ctrlPr>
@@ -28995,7 +29534,7 @@
             </p:txBody>
           </p:sp>
         </mc:Choice>
-        <mc:Fallback>
+        <mc:Fallback xmlns="">
           <p:sp>
             <p:nvSpPr>
               <p:cNvPr id="6" name="Объект 2"/>
@@ -29333,104 +29872,249 @@
             </a:p>
           </p:txBody>
         </p:sp>
-        <p:sp>
-          <p:nvSpPr>
-            <p:cNvPr id="13" name="Text Box 11"/>
-            <p:cNvSpPr txBox="1">
-              <a:spLocks noChangeArrowheads="1"/>
-            </p:cNvSpPr>
-            <p:nvPr/>
-          </p:nvSpPr>
-          <p:spPr bwMode="auto">
-            <a:xfrm>
-              <a:off x="1968" y="1783"/>
-              <a:ext cx="1980" cy="336"/>
-            </a:xfrm>
-            <a:prstGeom prst="rect">
-              <a:avLst/>
-            </a:prstGeom>
-            <a:noFill/>
-            <a:ln w="9525">
-              <a:noFill/>
-              <a:miter lim="800000"/>
-              <a:headEnd/>
-              <a:tailEnd/>
-            </a:ln>
-            <a:effectLst/>
-          </p:spPr>
-          <p:txBody>
-            <a:bodyPr wrap="none">
-              <a:spAutoFit/>
-            </a:bodyPr>
-            <a:lstStyle/>
-            <a:p>
-              <a:r>
-                <a:rPr lang="en-US" sz="2000" i="1" dirty="0"/>
-                <a:t>m</a:t>
-              </a:r>
-              <a:r>
-                <a:rPr lang="en-US" sz="2000" i="1" baseline="-25000" dirty="0"/>
-                <a:t>0</a:t>
-              </a:r>
-              <a:r>
-                <a:rPr lang="en-US" sz="2000" i="1" dirty="0"/>
-                <a:t> , m</a:t>
-              </a:r>
-              <a:r>
-                <a:rPr lang="en-US" sz="2000" i="1" baseline="-25000" dirty="0"/>
-                <a:t>1  </a:t>
-              </a:r>
-              <a:r>
-                <a:rPr lang="en-US" sz="2000" i="1" dirty="0">
-                  <a:sym typeface="Symbol" pitchFamily="18" charset="2"/>
-                </a:rPr>
-                <a:t> M :    </a:t>
-              </a:r>
-              <a:r>
-                <a:rPr lang="en-US" sz="2000" dirty="0">
-                  <a:sym typeface="Symbol" pitchFamily="18" charset="2"/>
-                </a:rPr>
-                <a:t>|</a:t>
-              </a:r>
-              <a:r>
-                <a:rPr lang="en-US" sz="2000" i="1" dirty="0">
-                  <a:sym typeface="Symbol" pitchFamily="18" charset="2"/>
-                </a:rPr>
-                <a:t>m</a:t>
-              </a:r>
-              <a:r>
-                <a:rPr lang="en-US" sz="2000" i="1" baseline="-25000" dirty="0">
-                  <a:sym typeface="Symbol" pitchFamily="18" charset="2"/>
-                </a:rPr>
-                <a:t>0</a:t>
-              </a:r>
-              <a:r>
-                <a:rPr lang="en-US" sz="2000" dirty="0">
-                  <a:sym typeface="Symbol" pitchFamily="18" charset="2"/>
-                </a:rPr>
-                <a:t>| = |</a:t>
-              </a:r>
-              <a:r>
-                <a:rPr lang="en-US" sz="2000" i="1" dirty="0">
-                  <a:sym typeface="Symbol" pitchFamily="18" charset="2"/>
-                </a:rPr>
-                <a:t>m</a:t>
-              </a:r>
-              <a:r>
-                <a:rPr lang="en-US" sz="2000" i="1" baseline="-25000" dirty="0">
-                  <a:sym typeface="Symbol" pitchFamily="18" charset="2"/>
-                </a:rPr>
-                <a:t>1</a:t>
-              </a:r>
-              <a:r>
-                <a:rPr lang="en-US" sz="2000" dirty="0">
-                  <a:sym typeface="Symbol" pitchFamily="18" charset="2"/>
-                </a:rPr>
-                <a:t>|</a:t>
-              </a:r>
-            </a:p>
-          </p:txBody>
-        </p:sp>
+        <mc:AlternateContent xmlns:mc="http://schemas.openxmlformats.org/markup-compatibility/2006" xmlns:a14="http://schemas.microsoft.com/office/drawing/2010/main">
+          <mc:Choice Requires="a14">
+            <p:sp>
+              <p:nvSpPr>
+                <p:cNvPr id="13" name="Text Box 11"/>
+                <p:cNvSpPr txBox="1">
+                  <a:spLocks noChangeArrowheads="1"/>
+                </p:cNvSpPr>
+                <p:nvPr/>
+              </p:nvSpPr>
+              <p:spPr bwMode="auto">
+                <a:xfrm>
+                  <a:off x="1968" y="1783"/>
+                  <a:ext cx="2184" cy="336"/>
+                </a:xfrm>
+                <a:prstGeom prst="rect">
+                  <a:avLst/>
+                </a:prstGeom>
+                <a:noFill/>
+                <a:ln w="9525">
+                  <a:noFill/>
+                  <a:miter lim="800000"/>
+                  <a:headEnd/>
+                  <a:tailEnd/>
+                </a:ln>
+                <a:effectLst/>
+              </p:spPr>
+              <p:txBody>
+                <a:bodyPr wrap="none">
+                  <a:spAutoFit/>
+                </a:bodyPr>
+                <a:lstStyle/>
+                <a:p>
+                  <a:pPr/>
+                  <a14:m>
+                    <m:oMathPara xmlns:m="http://schemas.openxmlformats.org/officeDocument/2006/math">
+                      <m:oMathParaPr>
+                        <m:jc m:val="centerGroup"/>
+                      </m:oMathParaPr>
+                      <m:oMath xmlns:m="http://schemas.openxmlformats.org/officeDocument/2006/math">
+                        <m:sSub>
+                          <m:sSubPr>
+                            <m:ctrlPr>
+                              <a:rPr lang="en-US" sz="2000" i="1" dirty="0">
+                                <a:latin typeface="Cambria Math" panose="02040503050406030204" pitchFamily="18" charset="0"/>
+                              </a:rPr>
+                            </m:ctrlPr>
+                          </m:sSubPr>
+                          <m:e>
+                            <m:r>
+                              <a:rPr lang="en-US" sz="2000" i="1" dirty="0">
+                                <a:latin typeface="Cambria Math" panose="02040503050406030204" pitchFamily="18" charset="0"/>
+                              </a:rPr>
+                              <m:t>𝑚</m:t>
+                            </m:r>
+                          </m:e>
+                          <m:sub>
+                            <m:r>
+                              <a:rPr lang="en-US" sz="2000" i="1" dirty="0">
+                                <a:latin typeface="Cambria Math" panose="02040503050406030204" pitchFamily="18" charset="0"/>
+                              </a:rPr>
+                              <m:t>0</m:t>
+                            </m:r>
+                          </m:sub>
+                        </m:sSub>
+                        <m:r>
+                          <a:rPr lang="en-US" sz="2000" i="1" dirty="0">
+                            <a:latin typeface="Cambria Math" panose="02040503050406030204" pitchFamily="18" charset="0"/>
+                          </a:rPr>
+                          <m:t>, </m:t>
+                        </m:r>
+                        <m:sSub>
+                          <m:sSubPr>
+                            <m:ctrlPr>
+                              <a:rPr lang="en-US" sz="2000" i="1" dirty="0">
+                                <a:latin typeface="Cambria Math" panose="02040503050406030204" pitchFamily="18" charset="0"/>
+                              </a:rPr>
+                            </m:ctrlPr>
+                          </m:sSubPr>
+                          <m:e>
+                            <m:r>
+                              <a:rPr lang="en-US" sz="2000" i="1" dirty="0">
+                                <a:latin typeface="Cambria Math" panose="02040503050406030204" pitchFamily="18" charset="0"/>
+                              </a:rPr>
+                              <m:t>𝑚</m:t>
+                            </m:r>
+                          </m:e>
+                          <m:sub>
+                            <m:r>
+                              <a:rPr lang="en-US" sz="2000" i="1" dirty="0">
+                                <a:latin typeface="Cambria Math" panose="02040503050406030204" pitchFamily="18" charset="0"/>
+                              </a:rPr>
+                              <m:t>1</m:t>
+                            </m:r>
+                          </m:sub>
+                        </m:sSub>
+                        <m:r>
+                          <a:rPr lang="en-US" sz="2000" i="1" dirty="0">
+                            <a:latin typeface="Cambria Math" panose="02040503050406030204" pitchFamily="18" charset="0"/>
+                          </a:rPr>
+                          <m:t>∈</m:t>
+                        </m:r>
+                        <m:r>
+                          <a:rPr lang="en-US" sz="2000" i="1" dirty="0">
+                            <a:latin typeface="Cambria Math" panose="02040503050406030204" pitchFamily="18" charset="0"/>
+                            <a:sym typeface="Symbol" pitchFamily="18" charset="2"/>
+                          </a:rPr>
+                          <m:t> </m:t>
+                        </m:r>
+                        <m:r>
+                          <a:rPr lang="en-US" sz="2000" i="1" dirty="0">
+                            <a:latin typeface="Cambria Math" panose="02040503050406030204" pitchFamily="18" charset="0"/>
+                            <a:sym typeface="Symbol" pitchFamily="18" charset="2"/>
+                          </a:rPr>
+                          <m:t>𝑀</m:t>
+                        </m:r>
+                        <m:r>
+                          <a:rPr lang="en-US" sz="2000" i="1" dirty="0">
+                            <a:latin typeface="Cambria Math" panose="02040503050406030204" pitchFamily="18" charset="0"/>
+                            <a:sym typeface="Symbol" pitchFamily="18" charset="2"/>
+                          </a:rPr>
+                          <m:t> :    |</m:t>
+                        </m:r>
+                        <m:sSub>
+                          <m:sSubPr>
+                            <m:ctrlPr>
+                              <a:rPr lang="en-US" sz="2000" i="1" dirty="0">
+                                <a:latin typeface="Cambria Math" panose="02040503050406030204" pitchFamily="18" charset="0"/>
+                              </a:rPr>
+                            </m:ctrlPr>
+                          </m:sSubPr>
+                          <m:e>
+                            <m:r>
+                              <a:rPr lang="en-US" sz="2000" i="1" dirty="0">
+                                <a:latin typeface="Cambria Math" panose="02040503050406030204" pitchFamily="18" charset="0"/>
+                              </a:rPr>
+                              <m:t>𝑚</m:t>
+                            </m:r>
+                          </m:e>
+                          <m:sub>
+                            <m:r>
+                              <a:rPr lang="en-US" sz="2000" i="1" dirty="0">
+                                <a:latin typeface="Cambria Math" panose="02040503050406030204" pitchFamily="18" charset="0"/>
+                              </a:rPr>
+                              <m:t>0</m:t>
+                            </m:r>
+                          </m:sub>
+                        </m:sSub>
+                        <m:r>
+                          <a:rPr lang="en-US" sz="2000" i="1" dirty="0">
+                            <a:latin typeface="Cambria Math" panose="02040503050406030204" pitchFamily="18" charset="0"/>
+                            <a:sym typeface="Symbol" pitchFamily="18" charset="2"/>
+                          </a:rPr>
+                          <m:t>| = |</m:t>
+                        </m:r>
+                        <m:sSub>
+                          <m:sSubPr>
+                            <m:ctrlPr>
+                              <a:rPr lang="en-US" sz="2000" i="1" dirty="0">
+                                <a:latin typeface="Cambria Math" panose="02040503050406030204" pitchFamily="18" charset="0"/>
+                              </a:rPr>
+                            </m:ctrlPr>
+                          </m:sSubPr>
+                          <m:e>
+                            <m:r>
+                              <a:rPr lang="en-US" sz="2000" i="1" dirty="0">
+                                <a:latin typeface="Cambria Math" panose="02040503050406030204" pitchFamily="18" charset="0"/>
+                              </a:rPr>
+                              <m:t>𝑚</m:t>
+                            </m:r>
+                          </m:e>
+                          <m:sub>
+                            <m:r>
+                              <a:rPr lang="en-US" sz="2000" i="1" dirty="0">
+                                <a:latin typeface="Cambria Math" panose="02040503050406030204" pitchFamily="18" charset="0"/>
+                              </a:rPr>
+                              <m:t>1</m:t>
+                            </m:r>
+                          </m:sub>
+                        </m:sSub>
+                        <m:r>
+                          <a:rPr lang="en-US" sz="2000" i="1" dirty="0">
+                            <a:latin typeface="Cambria Math" panose="02040503050406030204" pitchFamily="18" charset="0"/>
+                            <a:sym typeface="Symbol" pitchFamily="18" charset="2"/>
+                          </a:rPr>
+                          <m:t>|</m:t>
+                        </m:r>
+                      </m:oMath>
+                    </m:oMathPara>
+                  </a14:m>
+                  <a:endParaRPr lang="en-US" sz="2000" dirty="0">
+                    <a:sym typeface="Symbol" pitchFamily="18" charset="2"/>
+                  </a:endParaRPr>
+                </a:p>
+              </p:txBody>
+            </p:sp>
+          </mc:Choice>
+          <mc:Fallback xmlns="">
+            <p:sp>
+              <p:nvSpPr>
+                <p:cNvPr id="13" name="Text Box 11"/>
+                <p:cNvSpPr txBox="1">
+                  <a:spLocks noRot="1" noChangeAspect="1" noMove="1" noResize="1" noEditPoints="1" noAdjustHandles="1" noChangeArrowheads="1" noChangeShapeType="1" noTextEdit="1"/>
+                </p:cNvSpPr>
+                <p:nvPr/>
+              </p:nvSpPr>
+              <p:spPr bwMode="auto">
+                <a:xfrm>
+                  <a:off x="1968" y="1783"/>
+                  <a:ext cx="2184" cy="336"/>
+                </a:xfrm>
+                <a:prstGeom prst="rect">
+                  <a:avLst/>
+                </a:prstGeom>
+                <a:blipFill>
+                  <a:blip r:embed="rId5"/>
+                  <a:stretch>
+                    <a:fillRect b="-15385"/>
+                  </a:stretch>
+                </a:blipFill>
+                <a:ln w="9525">
+                  <a:noFill/>
+                  <a:miter lim="800000"/>
+                  <a:headEnd/>
+                  <a:tailEnd/>
+                </a:ln>
+                <a:effectLst/>
+              </p:spPr>
+              <p:txBody>
+                <a:bodyPr/>
+                <a:lstStyle/>
+                <a:p>
+                  <a:r>
+                    <a:rPr lang="ru-RU">
+                      <a:noFill/>
+                    </a:rPr>
+                    <a:t> </a:t>
+                  </a:r>
+                </a:p>
+              </p:txBody>
+            </p:sp>
+          </mc:Fallback>
+        </mc:AlternateContent>
       </p:grpSp>
       <p:grpSp>
         <p:nvGrpSpPr>
@@ -29442,10 +30126,10 @@
         </p:nvGrpSpPr>
         <p:grpSpPr bwMode="auto">
           <a:xfrm>
-            <a:off x="4381122" y="5066913"/>
-            <a:ext cx="3733802" cy="522685"/>
-            <a:chOff x="1776" y="2018"/>
-            <a:chExt cx="2352" cy="439"/>
+            <a:off x="4381122" y="5183596"/>
+            <a:ext cx="3733802" cy="402432"/>
+            <a:chOff x="1776" y="2116"/>
+            <a:chExt cx="2352" cy="338"/>
           </a:xfrm>
         </p:grpSpPr>
         <p:sp>
@@ -29483,85 +30167,175 @@
             </a:p>
           </p:txBody>
         </p:sp>
-        <p:sp>
-          <p:nvSpPr>
-            <p:cNvPr id="16" name="Text Box 14"/>
-            <p:cNvSpPr txBox="1">
-              <a:spLocks noChangeArrowheads="1"/>
-            </p:cNvSpPr>
-            <p:nvPr/>
-          </p:nvSpPr>
-          <p:spPr bwMode="auto">
-            <a:xfrm>
-              <a:off x="2400" y="2018"/>
-              <a:ext cx="1197" cy="439"/>
-            </a:xfrm>
-            <a:prstGeom prst="rect">
-              <a:avLst/>
-            </a:prstGeom>
-            <a:noFill/>
-            <a:ln w="9525">
-              <a:noFill/>
-              <a:miter lim="800000"/>
-              <a:headEnd/>
-              <a:tailEnd/>
-            </a:ln>
-            <a:effectLst/>
-          </p:spPr>
-          <p:txBody>
-            <a:bodyPr wrap="none">
-              <a:spAutoFit/>
-            </a:bodyPr>
-            <a:lstStyle/>
-            <a:p>
-              <a:r>
-                <a:rPr lang="en-US" sz="2000" i="1" dirty="0"/>
-                <a:t>c </a:t>
-              </a:r>
-              <a:r>
-                <a:rPr lang="en-US" sz="2000" i="1" dirty="0">
-                  <a:sym typeface="Symbol" pitchFamily="18" charset="2"/>
-                </a:rPr>
-                <a:t> </a:t>
-              </a:r>
-              <a:r>
-                <a:rPr lang="en-US" sz="2400" b="1" i="1" dirty="0" err="1"/>
-                <a:t>m</a:t>
-              </a:r>
-              <a:r>
-                <a:rPr lang="en-US" sz="2400" b="1" i="1" baseline="-25000" dirty="0" err="1"/>
-                <a:t>b</a:t>
-              </a:r>
-              <a:r>
-                <a:rPr lang="en-US" sz="2400" b="1" i="1" baseline="-25000" dirty="0"/>
-                <a:t> </a:t>
-              </a:r>
-              <a:r>
-                <a:rPr lang="en-US" sz="2000" b="1" dirty="0"/>
-                <a:t>⊕</a:t>
-              </a:r>
-              <a:r>
-                <a:rPr lang="en-US" sz="2000" b="1" i="1" dirty="0"/>
-                <a:t> </a:t>
-              </a:r>
-              <a:r>
-                <a:rPr lang="en-US" sz="2000" b="1" i="1" dirty="0">
-                  <a:sym typeface="Symbol" pitchFamily="18" charset="2"/>
-                </a:rPr>
-                <a:t>G(</a:t>
-              </a:r>
-              <a:r>
-                <a:rPr lang="en-US" sz="2000" b="1" i="1" dirty="0"/>
-                <a:t>k)</a:t>
-              </a:r>
-              <a:r>
-                <a:rPr lang="en-US" sz="2800" b="1" i="1" dirty="0"/>
-                <a:t> </a:t>
-              </a:r>
-              <a:endParaRPr lang="en-US" sz="2000" b="1" i="1" dirty="0"/>
-            </a:p>
-          </p:txBody>
-        </p:sp>
+        <mc:AlternateContent xmlns:mc="http://schemas.openxmlformats.org/markup-compatibility/2006" xmlns:a14="http://schemas.microsoft.com/office/drawing/2010/main">
+          <mc:Choice Requires="a14">
+            <p:sp>
+              <p:nvSpPr>
+                <p:cNvPr id="16" name="Text Box 14"/>
+                <p:cNvSpPr txBox="1">
+                  <a:spLocks noChangeArrowheads="1"/>
+                </p:cNvSpPr>
+                <p:nvPr/>
+              </p:nvSpPr>
+              <p:spPr bwMode="auto">
+                <a:xfrm>
+                  <a:off x="2276" y="2116"/>
+                  <a:ext cx="1312" cy="336"/>
+                </a:xfrm>
+                <a:prstGeom prst="rect">
+                  <a:avLst/>
+                </a:prstGeom>
+                <a:noFill/>
+                <a:ln w="9525">
+                  <a:noFill/>
+                  <a:miter lim="800000"/>
+                  <a:headEnd/>
+                  <a:tailEnd/>
+                </a:ln>
+                <a:effectLst/>
+              </p:spPr>
+              <p:txBody>
+                <a:bodyPr wrap="none">
+                  <a:spAutoFit/>
+                </a:bodyPr>
+                <a:lstStyle/>
+                <a:p>
+                  <a:pPr/>
+                  <a14:m>
+                    <m:oMathPara xmlns:m="http://schemas.openxmlformats.org/officeDocument/2006/math">
+                      <m:oMathParaPr>
+                        <m:jc m:val="centerGroup"/>
+                      </m:oMathParaPr>
+                      <m:oMath xmlns:m="http://schemas.openxmlformats.org/officeDocument/2006/math">
+                        <m:r>
+                          <a:rPr lang="en-US" sz="2000" i="1" dirty="0" smtClean="0">
+                            <a:latin typeface="Cambria Math" panose="02040503050406030204" pitchFamily="18" charset="0"/>
+                          </a:rPr>
+                          <m:t>𝑐</m:t>
+                        </m:r>
+                        <m:r>
+                          <a:rPr lang="ru-RU" sz="2000" b="0" i="1" dirty="0" smtClean="0">
+                            <a:latin typeface="Cambria Math" panose="02040503050406030204" pitchFamily="18" charset="0"/>
+                          </a:rPr>
+                          <m:t>←</m:t>
+                        </m:r>
+                        <m:r>
+                          <a:rPr lang="en-US" sz="2000" i="1" dirty="0" smtClean="0">
+                            <a:latin typeface="Cambria Math" panose="02040503050406030204" pitchFamily="18" charset="0"/>
+                          </a:rPr>
+                          <m:t> </m:t>
+                        </m:r>
+                        <m:sSub>
+                          <m:sSubPr>
+                            <m:ctrlPr>
+                              <a:rPr lang="en-US" sz="2000" b="0" i="1" dirty="0" smtClean="0">
+                                <a:latin typeface="Cambria Math" panose="02040503050406030204" pitchFamily="18" charset="0"/>
+                              </a:rPr>
+                            </m:ctrlPr>
+                          </m:sSubPr>
+                          <m:e>
+                            <m:r>
+                              <a:rPr lang="en-US" sz="2000" b="0" i="1" dirty="0" smtClean="0">
+                                <a:latin typeface="Cambria Math" panose="02040503050406030204" pitchFamily="18" charset="0"/>
+                              </a:rPr>
+                              <m:t>𝑚</m:t>
+                            </m:r>
+                          </m:e>
+                          <m:sub>
+                            <m:r>
+                              <a:rPr lang="en-US" sz="2000" b="0" i="1" dirty="0" smtClean="0">
+                                <a:latin typeface="Cambria Math" panose="02040503050406030204" pitchFamily="18" charset="0"/>
+                              </a:rPr>
+                              <m:t>𝑏</m:t>
+                            </m:r>
+                          </m:sub>
+                        </m:sSub>
+                        <m:r>
+                          <a:rPr lang="en-US" sz="2000" b="0" i="1" dirty="0" smtClean="0">
+                            <a:latin typeface="Cambria Math" panose="02040503050406030204" pitchFamily="18" charset="0"/>
+                          </a:rPr>
+                          <m:t>⊕</m:t>
+                        </m:r>
+                        <m:r>
+                          <a:rPr lang="en-US" sz="2000" b="0" i="1" dirty="0" smtClean="0">
+                            <a:latin typeface="Cambria Math" panose="02040503050406030204" pitchFamily="18" charset="0"/>
+                            <a:sym typeface="Symbol" pitchFamily="18" charset="2"/>
+                          </a:rPr>
+                          <m:t>𝐺</m:t>
+                        </m:r>
+                        <m:r>
+                          <a:rPr lang="en-US" sz="2000" b="0" i="1" dirty="0" smtClean="0">
+                            <a:latin typeface="Cambria Math" panose="02040503050406030204" pitchFamily="18" charset="0"/>
+                            <a:sym typeface="Symbol" pitchFamily="18" charset="2"/>
+                          </a:rPr>
+                          <m:t>(</m:t>
+                        </m:r>
+                        <m:r>
+                          <a:rPr lang="en-US" sz="2000" b="0" i="1" dirty="0" smtClean="0">
+                            <a:latin typeface="Cambria Math" panose="02040503050406030204" pitchFamily="18" charset="0"/>
+                          </a:rPr>
+                          <m:t>𝑘</m:t>
+                        </m:r>
+                        <m:r>
+                          <a:rPr lang="en-US" sz="2000" b="0" i="1" dirty="0" smtClean="0">
+                            <a:latin typeface="Cambria Math" panose="02040503050406030204" pitchFamily="18" charset="0"/>
+                          </a:rPr>
+                          <m:t>) </m:t>
+                        </m:r>
+                      </m:oMath>
+                    </m:oMathPara>
+                  </a14:m>
+                  <a:endParaRPr lang="en-US" sz="2000" i="1" dirty="0"/>
+                </a:p>
+              </p:txBody>
+            </p:sp>
+          </mc:Choice>
+          <mc:Fallback xmlns="">
+            <p:sp>
+              <p:nvSpPr>
+                <p:cNvPr id="16" name="Text Box 14"/>
+                <p:cNvSpPr txBox="1">
+                  <a:spLocks noRot="1" noChangeAspect="1" noMove="1" noResize="1" noEditPoints="1" noAdjustHandles="1" noChangeArrowheads="1" noChangeShapeType="1" noTextEdit="1"/>
+                </p:cNvSpPr>
+                <p:nvPr/>
+              </p:nvSpPr>
+              <p:spPr bwMode="auto">
+                <a:xfrm>
+                  <a:off x="2276" y="2116"/>
+                  <a:ext cx="1312" cy="336"/>
+                </a:xfrm>
+                <a:prstGeom prst="rect">
+                  <a:avLst/>
+                </a:prstGeom>
+                <a:blipFill>
+                  <a:blip r:embed="rId6"/>
+                  <a:stretch>
+                    <a:fillRect b="-15152"/>
+                  </a:stretch>
+                </a:blipFill>
+                <a:ln w="9525">
+                  <a:noFill/>
+                  <a:miter lim="800000"/>
+                  <a:headEnd/>
+                  <a:tailEnd/>
+                </a:ln>
+                <a:effectLst/>
+              </p:spPr>
+              <p:txBody>
+                <a:bodyPr/>
+                <a:lstStyle/>
+                <a:p>
+                  <a:r>
+                    <a:rPr lang="ru-RU">
+                      <a:noFill/>
+                    </a:rPr>
+                    <a:t> </a:t>
+                  </a:r>
+                </a:p>
+              </p:txBody>
+            </p:sp>
+          </mc:Fallback>
+        </mc:AlternateContent>
       </p:grpSp>
       <p:grpSp>
         <p:nvGrpSpPr>
@@ -29699,8 +30473,8 @@
           </a:p>
         </p:txBody>
       </p:sp>
-      <mc:AlternateContent xmlns:mc="http://schemas.openxmlformats.org/markup-compatibility/2006">
-        <mc:Choice xmlns:a14="http://schemas.microsoft.com/office/drawing/2010/main" Requires="a14">
+      <mc:AlternateContent xmlns:mc="http://schemas.openxmlformats.org/markup-compatibility/2006" xmlns:a14="http://schemas.microsoft.com/office/drawing/2010/main">
+        <mc:Choice Requires="a14">
           <p:sp>
             <p:nvSpPr>
               <p:cNvPr id="21" name="Text Box 8"/>
@@ -29732,6 +30506,7 @@
               </a:bodyPr>
               <a:lstStyle/>
               <a:p>
+                <a:pPr/>
                 <a14:m>
                   <m:oMathPara xmlns:m="http://schemas.openxmlformats.org/officeDocument/2006/math">
                     <m:oMathParaPr>
@@ -29816,7 +30591,7 @@
             </p:txBody>
           </p:sp>
         </mc:Choice>
-        <mc:Fallback>
+        <mc:Fallback xmlns="">
           <p:sp>
             <p:nvSpPr>
               <p:cNvPr id="21" name="Text Box 8"/>
@@ -29834,7 +30609,7 @@
                 <a:avLst/>
               </a:prstGeom>
               <a:blipFill>
-                <a:blip r:embed="rId5"/>
+                <a:blip r:embed="rId7"/>
                 <a:stretch>
                   <a:fillRect/>
                 </a:stretch>
@@ -30426,8 +31201,8 @@
           </a:p>
         </p:txBody>
       </p:sp>
-      <mc:AlternateContent xmlns:mc="http://schemas.openxmlformats.org/markup-compatibility/2006">
-        <mc:Choice xmlns:a14="http://schemas.microsoft.com/office/drawing/2010/main" Requires="a14">
+      <mc:AlternateContent xmlns:mc="http://schemas.openxmlformats.org/markup-compatibility/2006" xmlns:a14="http://schemas.microsoft.com/office/drawing/2010/main">
+        <mc:Choice Requires="a14">
           <p:sp>
             <p:nvSpPr>
               <p:cNvPr id="6" name="Объект 2"/>
@@ -30854,7 +31629,7 @@
                     <m:sSub>
                       <m:sSubPr>
                         <m:ctrlPr>
-                          <a:rPr lang="en-US" b="0" smtClean="0">
+                          <a:rPr lang="en-US" b="0" i="1" smtClean="0">
                             <a:latin typeface="Cambria Math" panose="02040503050406030204" pitchFamily="18" charset="0"/>
                           </a:rPr>
                         </m:ctrlPr>
@@ -30906,10 +31681,13 @@
                           <m:t>,</m:t>
                         </m:r>
                         <m:r>
-                          <a:rPr lang="en-US" i="1" smtClean="0">
-                            <a:latin typeface="Cambria Math" panose="02040503050406030204" pitchFamily="18" charset="0"/>
-                          </a:rPr>
-                          <m:t>𝐸</m:t>
+                          <m:rPr>
+                            <m:sty m:val="p"/>
+                          </m:rPr>
+                          <a:rPr lang="en-US" i="0" smtClean="0">
+                            <a:latin typeface="Cambria Math" panose="02040503050406030204" pitchFamily="18" charset="0"/>
+                          </a:rPr>
+                          <m:t>E</m:t>
                         </m:r>
                       </m:e>
                     </m:d>
@@ -30931,7 +31709,7 @@
                     <m:sSub>
                       <m:sSubPr>
                         <m:ctrlPr>
-                          <a:rPr lang="en-US" b="0" smtClean="0">
+                          <a:rPr lang="en-US" b="0" i="1" smtClean="0">
                             <a:latin typeface="Cambria Math" panose="02040503050406030204" pitchFamily="18" charset="0"/>
                           </a:rPr>
                         </m:ctrlPr>
@@ -30996,7 +31774,7 @@
             </p:txBody>
           </p:sp>
         </mc:Choice>
-        <mc:Fallback>
+        <mc:Fallback xmlns="">
           <p:sp>
             <p:nvSpPr>
               <p:cNvPr id="6" name="Объект 2"/>
@@ -31203,116 +31981,255 @@
             </a:p>
           </p:txBody>
         </p:sp>
-        <p:sp>
-          <p:nvSpPr>
-            <p:cNvPr id="13" name="Text Box 11"/>
-            <p:cNvSpPr txBox="1">
-              <a:spLocks noChangeArrowheads="1"/>
-            </p:cNvSpPr>
-            <p:nvPr/>
-          </p:nvSpPr>
-          <p:spPr bwMode="auto">
-            <a:xfrm>
-              <a:off x="1968" y="1783"/>
-              <a:ext cx="1980" cy="336"/>
-            </a:xfrm>
-            <a:prstGeom prst="rect">
-              <a:avLst/>
-            </a:prstGeom>
-            <a:noFill/>
-            <a:ln w="9525">
-              <a:noFill/>
-              <a:miter lim="800000"/>
-              <a:headEnd/>
-              <a:tailEnd/>
-            </a:ln>
-            <a:effectLst/>
-          </p:spPr>
-          <p:txBody>
-            <a:bodyPr wrap="none">
-              <a:spAutoFit/>
-            </a:bodyPr>
-            <a:lstStyle/>
-            <a:p>
-              <a:r>
-                <a:rPr lang="en-US" sz="2000" i="1" dirty="0"/>
-                <a:t>m</a:t>
-              </a:r>
-              <a:r>
-                <a:rPr lang="en-US" sz="2000" i="1" baseline="-25000" dirty="0"/>
-                <a:t>0</a:t>
-              </a:r>
-              <a:r>
-                <a:rPr lang="en-US" sz="2000" i="1" dirty="0"/>
-                <a:t> , m</a:t>
-              </a:r>
-              <a:r>
-                <a:rPr lang="en-US" sz="2000" i="1" baseline="-25000" dirty="0"/>
-                <a:t>1  </a:t>
-              </a:r>
-              <a:r>
-                <a:rPr lang="en-US" sz="2000" i="1" dirty="0">
-                  <a:sym typeface="Symbol" pitchFamily="18" charset="2"/>
-                </a:rPr>
-                <a:t> M :    </a:t>
-              </a:r>
-              <a:r>
-                <a:rPr lang="en-US" sz="2000" dirty="0">
-                  <a:sym typeface="Symbol" pitchFamily="18" charset="2"/>
-                </a:rPr>
-                <a:t>|</a:t>
-              </a:r>
-              <a:r>
-                <a:rPr lang="en-US" sz="2000" i="1" dirty="0">
-                  <a:sym typeface="Symbol" pitchFamily="18" charset="2"/>
-                </a:rPr>
-                <a:t>m</a:t>
-              </a:r>
-              <a:r>
-                <a:rPr lang="en-US" sz="2000" i="1" baseline="-25000" dirty="0">
-                  <a:sym typeface="Symbol" pitchFamily="18" charset="2"/>
-                </a:rPr>
-                <a:t>0</a:t>
-              </a:r>
-              <a:r>
-                <a:rPr lang="en-US" sz="2000" dirty="0">
-                  <a:sym typeface="Symbol" pitchFamily="18" charset="2"/>
-                </a:rPr>
-                <a:t>|</a:t>
-              </a:r>
-              <a:r>
-                <a:rPr lang="en-US" sz="2000" i="1" dirty="0">
-                  <a:sym typeface="Symbol" pitchFamily="18" charset="2"/>
-                </a:rPr>
-                <a:t> = </a:t>
-              </a:r>
-              <a:r>
-                <a:rPr lang="en-US" sz="2000" dirty="0">
-                  <a:sym typeface="Symbol" pitchFamily="18" charset="2"/>
-                </a:rPr>
-                <a:t>|</a:t>
-              </a:r>
-              <a:r>
-                <a:rPr lang="en-US" sz="2000" i="1" dirty="0">
-                  <a:sym typeface="Symbol" pitchFamily="18" charset="2"/>
-                </a:rPr>
-                <a:t>m</a:t>
-              </a:r>
-              <a:r>
-                <a:rPr lang="en-US" sz="2000" i="1" baseline="-25000" dirty="0">
-                  <a:sym typeface="Symbol" pitchFamily="18" charset="2"/>
-                </a:rPr>
-                <a:t>1</a:t>
-              </a:r>
-              <a:r>
-                <a:rPr lang="en-US" sz="2000" dirty="0">
-                  <a:sym typeface="Symbol" pitchFamily="18" charset="2"/>
-                </a:rPr>
-                <a:t>|</a:t>
-              </a:r>
-            </a:p>
-          </p:txBody>
-        </p:sp>
+        <mc:AlternateContent xmlns:mc="http://schemas.openxmlformats.org/markup-compatibility/2006" xmlns:a14="http://schemas.microsoft.com/office/drawing/2010/main">
+          <mc:Choice Requires="a14">
+            <p:sp>
+              <p:nvSpPr>
+                <p:cNvPr id="13" name="Text Box 11"/>
+                <p:cNvSpPr txBox="1">
+                  <a:spLocks noChangeArrowheads="1"/>
+                </p:cNvSpPr>
+                <p:nvPr/>
+              </p:nvSpPr>
+              <p:spPr bwMode="auto">
+                <a:xfrm>
+                  <a:off x="1968" y="1783"/>
+                  <a:ext cx="2178" cy="336"/>
+                </a:xfrm>
+                <a:prstGeom prst="rect">
+                  <a:avLst/>
+                </a:prstGeom>
+                <a:noFill/>
+                <a:ln w="9525">
+                  <a:noFill/>
+                  <a:miter lim="800000"/>
+                  <a:headEnd/>
+                  <a:tailEnd/>
+                </a:ln>
+                <a:effectLst/>
+              </p:spPr>
+              <p:txBody>
+                <a:bodyPr wrap="none">
+                  <a:spAutoFit/>
+                </a:bodyPr>
+                <a:lstStyle/>
+                <a:p>
+                  <a:pPr/>
+                  <a14:m>
+                    <m:oMathPara xmlns:m="http://schemas.openxmlformats.org/officeDocument/2006/math">
+                      <m:oMathParaPr>
+                        <m:jc m:val="centerGroup"/>
+                      </m:oMathParaPr>
+                      <m:oMath xmlns:m="http://schemas.openxmlformats.org/officeDocument/2006/math">
+                        <m:sSub>
+                          <m:sSubPr>
+                            <m:ctrlPr>
+                              <a:rPr lang="en-US" sz="2000" b="0" i="1" dirty="0" smtClean="0">
+                                <a:latin typeface="Cambria Math" panose="02040503050406030204" pitchFamily="18" charset="0"/>
+                              </a:rPr>
+                            </m:ctrlPr>
+                          </m:sSubPr>
+                          <m:e>
+                            <m:r>
+                              <a:rPr lang="en-US" sz="2000" i="1" dirty="0" smtClean="0">
+                                <a:latin typeface="Cambria Math" panose="02040503050406030204" pitchFamily="18" charset="0"/>
+                              </a:rPr>
+                              <m:t>𝑚</m:t>
+                            </m:r>
+                          </m:e>
+                          <m:sub>
+                            <m:r>
+                              <a:rPr lang="en-US" sz="2000" b="0" i="1" dirty="0" smtClean="0">
+                                <a:latin typeface="Cambria Math" panose="02040503050406030204" pitchFamily="18" charset="0"/>
+                              </a:rPr>
+                              <m:t>0</m:t>
+                            </m:r>
+                          </m:sub>
+                        </m:sSub>
+                        <m:r>
+                          <a:rPr lang="en-US" sz="2000" b="0" i="1" dirty="0" smtClean="0">
+                            <a:latin typeface="Cambria Math" panose="02040503050406030204" pitchFamily="18" charset="0"/>
+                          </a:rPr>
+                          <m:t>,</m:t>
+                        </m:r>
+                        <m:r>
+                          <a:rPr lang="en-US" sz="2000" i="1" dirty="0">
+                            <a:latin typeface="Cambria Math" panose="02040503050406030204" pitchFamily="18" charset="0"/>
+                          </a:rPr>
+                          <m:t> </m:t>
+                        </m:r>
+                        <m:sSub>
+                          <m:sSubPr>
+                            <m:ctrlPr>
+                              <a:rPr lang="en-US" sz="2000" b="0" i="1" dirty="0" smtClean="0">
+                                <a:latin typeface="Cambria Math" panose="02040503050406030204" pitchFamily="18" charset="0"/>
+                              </a:rPr>
+                            </m:ctrlPr>
+                          </m:sSubPr>
+                          <m:e>
+                            <m:r>
+                              <a:rPr lang="en-US" sz="2000" i="1" dirty="0">
+                                <a:latin typeface="Cambria Math" panose="02040503050406030204" pitchFamily="18" charset="0"/>
+                              </a:rPr>
+                              <m:t>𝑚</m:t>
+                            </m:r>
+                          </m:e>
+                          <m:sub>
+                            <m:r>
+                              <a:rPr lang="en-US" sz="2000" b="0" i="1" dirty="0" smtClean="0">
+                                <a:latin typeface="Cambria Math" panose="02040503050406030204" pitchFamily="18" charset="0"/>
+                              </a:rPr>
+                              <m:t>1</m:t>
+                            </m:r>
+                          </m:sub>
+                        </m:sSub>
+                        <m:r>
+                          <a:rPr lang="en-US" sz="2000" b="0" i="1" dirty="0" smtClean="0">
+                            <a:latin typeface="Cambria Math" panose="02040503050406030204" pitchFamily="18" charset="0"/>
+                          </a:rPr>
+                          <m:t>∈</m:t>
+                        </m:r>
+                        <m:r>
+                          <a:rPr lang="en-US" sz="2000" i="1" dirty="0">
+                            <a:latin typeface="Cambria Math" panose="02040503050406030204" pitchFamily="18" charset="0"/>
+                            <a:sym typeface="Symbol" pitchFamily="18" charset="2"/>
+                          </a:rPr>
+                          <m:t> </m:t>
+                        </m:r>
+                        <m:r>
+                          <a:rPr lang="en-US" sz="2000" i="1" dirty="0">
+                            <a:latin typeface="Cambria Math" panose="02040503050406030204" pitchFamily="18" charset="0"/>
+                            <a:sym typeface="Symbol" pitchFamily="18" charset="2"/>
+                          </a:rPr>
+                          <m:t>𝑀</m:t>
+                        </m:r>
+                        <m:r>
+                          <a:rPr lang="en-US" sz="2000" i="1" dirty="0">
+                            <a:latin typeface="Cambria Math" panose="02040503050406030204" pitchFamily="18" charset="0"/>
+                            <a:sym typeface="Symbol" pitchFamily="18" charset="2"/>
+                          </a:rPr>
+                          <m:t> :    |</m:t>
+                        </m:r>
+                        <m:sSub>
+                          <m:sSubPr>
+                            <m:ctrlPr>
+                              <a:rPr lang="en-US" sz="2000" i="1" dirty="0">
+                                <a:latin typeface="Cambria Math" panose="02040503050406030204" pitchFamily="18" charset="0"/>
+                              </a:rPr>
+                            </m:ctrlPr>
+                          </m:sSubPr>
+                          <m:e>
+                            <m:r>
+                              <a:rPr lang="en-US" sz="2000" i="1" dirty="0">
+                                <a:latin typeface="Cambria Math" panose="02040503050406030204" pitchFamily="18" charset="0"/>
+                              </a:rPr>
+                              <m:t>𝑚</m:t>
+                            </m:r>
+                          </m:e>
+                          <m:sub>
+                            <m:r>
+                              <a:rPr lang="en-US" sz="2000" i="1" dirty="0">
+                                <a:latin typeface="Cambria Math" panose="02040503050406030204" pitchFamily="18" charset="0"/>
+                              </a:rPr>
+                              <m:t>0</m:t>
+                            </m:r>
+                          </m:sub>
+                        </m:sSub>
+                        <m:r>
+                          <a:rPr lang="en-US" sz="2000" i="1" dirty="0">
+                            <a:latin typeface="Cambria Math" panose="02040503050406030204" pitchFamily="18" charset="0"/>
+                            <a:sym typeface="Symbol" pitchFamily="18" charset="2"/>
+                          </a:rPr>
+                          <m:t>| = |</m:t>
+                        </m:r>
+                        <m:sSub>
+                          <m:sSubPr>
+                            <m:ctrlPr>
+                              <a:rPr lang="en-US" sz="2000" i="1" dirty="0">
+                                <a:latin typeface="Cambria Math" panose="02040503050406030204" pitchFamily="18" charset="0"/>
+                              </a:rPr>
+                            </m:ctrlPr>
+                          </m:sSubPr>
+                          <m:e>
+                            <m:r>
+                              <a:rPr lang="en-US" sz="2000" i="1" dirty="0">
+                                <a:latin typeface="Cambria Math" panose="02040503050406030204" pitchFamily="18" charset="0"/>
+                              </a:rPr>
+                              <m:t>𝑚</m:t>
+                            </m:r>
+                          </m:e>
+                          <m:sub>
+                            <m:r>
+                              <a:rPr lang="en-US" sz="2000" i="1" dirty="0">
+                                <a:latin typeface="Cambria Math" panose="02040503050406030204" pitchFamily="18" charset="0"/>
+                              </a:rPr>
+                              <m:t>1</m:t>
+                            </m:r>
+                          </m:sub>
+                        </m:sSub>
+                        <m:r>
+                          <a:rPr lang="en-US" sz="2000" i="1" dirty="0">
+                            <a:latin typeface="Cambria Math" panose="02040503050406030204" pitchFamily="18" charset="0"/>
+                            <a:sym typeface="Symbol" pitchFamily="18" charset="2"/>
+                          </a:rPr>
+                          <m:t>|</m:t>
+                        </m:r>
+                      </m:oMath>
+                    </m:oMathPara>
+                  </a14:m>
+                  <a:endParaRPr lang="en-US" sz="2000" dirty="0">
+                    <a:sym typeface="Symbol" pitchFamily="18" charset="2"/>
+                  </a:endParaRPr>
+                </a:p>
+              </p:txBody>
+            </p:sp>
+          </mc:Choice>
+          <mc:Fallback xmlns="">
+            <p:sp>
+              <p:nvSpPr>
+                <p:cNvPr id="13" name="Text Box 11"/>
+                <p:cNvSpPr txBox="1">
+                  <a:spLocks noRot="1" noChangeAspect="1" noMove="1" noResize="1" noEditPoints="1" noAdjustHandles="1" noChangeArrowheads="1" noChangeShapeType="1" noTextEdit="1"/>
+                </p:cNvSpPr>
+                <p:nvPr/>
+              </p:nvSpPr>
+              <p:spPr bwMode="auto">
+                <a:xfrm>
+                  <a:off x="1968" y="1783"/>
+                  <a:ext cx="2178" cy="336"/>
+                </a:xfrm>
+                <a:prstGeom prst="rect">
+                  <a:avLst/>
+                </a:prstGeom>
+                <a:blipFill>
+                  <a:blip r:embed="rId4"/>
+                  <a:stretch>
+                    <a:fillRect b="-15385"/>
+                  </a:stretch>
+                </a:blipFill>
+                <a:ln w="9525">
+                  <a:noFill/>
+                  <a:miter lim="800000"/>
+                  <a:headEnd/>
+                  <a:tailEnd/>
+                </a:ln>
+                <a:effectLst/>
+              </p:spPr>
+              <p:txBody>
+                <a:bodyPr/>
+                <a:lstStyle/>
+                <a:p>
+                  <a:r>
+                    <a:rPr lang="ru-RU">
+                      <a:noFill/>
+                    </a:rPr>
+                    <a:t> </a:t>
+                  </a:r>
+                </a:p>
+              </p:txBody>
+            </p:sp>
+          </mc:Fallback>
+        </mc:AlternateContent>
       </p:grpSp>
       <p:grpSp>
         <p:nvGrpSpPr>
@@ -31324,10 +32241,10 @@
         </p:nvGrpSpPr>
         <p:grpSpPr bwMode="auto">
           <a:xfrm>
-            <a:off x="4381122" y="5066913"/>
-            <a:ext cx="3733802" cy="522685"/>
-            <a:chOff x="1776" y="2018"/>
-            <a:chExt cx="2352" cy="439"/>
+            <a:off x="4381122" y="5213357"/>
+            <a:ext cx="3733802" cy="400050"/>
+            <a:chOff x="1776" y="2141"/>
+            <a:chExt cx="2352" cy="336"/>
           </a:xfrm>
         </p:grpSpPr>
         <p:sp>
@@ -31365,77 +32282,156 @@
             </a:p>
           </p:txBody>
         </p:sp>
-        <p:sp>
-          <p:nvSpPr>
-            <p:cNvPr id="16" name="Text Box 14"/>
-            <p:cNvSpPr txBox="1">
-              <a:spLocks noChangeArrowheads="1"/>
-            </p:cNvSpPr>
-            <p:nvPr/>
-          </p:nvSpPr>
-          <p:spPr bwMode="auto">
-            <a:xfrm>
-              <a:off x="2400" y="2018"/>
-              <a:ext cx="977" cy="439"/>
-            </a:xfrm>
-            <a:prstGeom prst="rect">
-              <a:avLst/>
-            </a:prstGeom>
-            <a:noFill/>
-            <a:ln w="9525">
-              <a:noFill/>
-              <a:miter lim="800000"/>
-              <a:headEnd/>
-              <a:tailEnd/>
-            </a:ln>
-            <a:effectLst/>
-          </p:spPr>
-          <p:txBody>
-            <a:bodyPr wrap="none">
-              <a:spAutoFit/>
-            </a:bodyPr>
-            <a:lstStyle/>
-            <a:p>
-              <a:r>
-                <a:rPr lang="en-US" sz="2000" dirty="0"/>
-                <a:t>c </a:t>
-              </a:r>
-              <a:r>
-                <a:rPr lang="en-US" sz="2000" dirty="0">
-                  <a:sym typeface="Symbol" pitchFamily="18" charset="2"/>
-                </a:rPr>
-                <a:t> </a:t>
-              </a:r>
-              <a:r>
-                <a:rPr lang="en-US" sz="2400" b="1" i="1" dirty="0" err="1"/>
-                <a:t>m</a:t>
-              </a:r>
-              <a:r>
-                <a:rPr lang="en-US" sz="2400" b="1" i="1" baseline="-25000" dirty="0" err="1"/>
-                <a:t>b</a:t>
-              </a:r>
-              <a:r>
-                <a:rPr lang="en-US" sz="2400" b="1" baseline="-25000" dirty="0"/>
-                <a:t> </a:t>
-              </a:r>
-              <a:r>
-                <a:rPr lang="en-US" sz="2000" b="1" dirty="0"/>
-                <a:t>⊕ </a:t>
-              </a:r>
-              <a:r>
-                <a:rPr lang="en-US" sz="2000" b="1" i="1" dirty="0">
-                  <a:sym typeface="Symbol" pitchFamily="18" charset="2"/>
-                </a:rPr>
-                <a:t>r</a:t>
-              </a:r>
-              <a:r>
-                <a:rPr lang="en-US" sz="2800" b="1" dirty="0"/>
-                <a:t> </a:t>
-              </a:r>
-              <a:endParaRPr lang="en-US" sz="2000" b="1" dirty="0"/>
-            </a:p>
-          </p:txBody>
-        </p:sp>
+        <mc:AlternateContent xmlns:mc="http://schemas.openxmlformats.org/markup-compatibility/2006" xmlns:a14="http://schemas.microsoft.com/office/drawing/2010/main">
+          <mc:Choice Requires="a14">
+            <p:sp>
+              <p:nvSpPr>
+                <p:cNvPr id="16" name="Text Box 14"/>
+                <p:cNvSpPr txBox="1">
+                  <a:spLocks noChangeArrowheads="1"/>
+                </p:cNvSpPr>
+                <p:nvPr/>
+              </p:nvSpPr>
+              <p:spPr bwMode="auto">
+                <a:xfrm>
+                  <a:off x="2430" y="2141"/>
+                  <a:ext cx="1075" cy="336"/>
+                </a:xfrm>
+                <a:prstGeom prst="rect">
+                  <a:avLst/>
+                </a:prstGeom>
+                <a:noFill/>
+                <a:ln w="9525">
+                  <a:noFill/>
+                  <a:miter lim="800000"/>
+                  <a:headEnd/>
+                  <a:tailEnd/>
+                </a:ln>
+                <a:effectLst/>
+              </p:spPr>
+              <p:txBody>
+                <a:bodyPr wrap="none">
+                  <a:spAutoFit/>
+                </a:bodyPr>
+                <a:lstStyle/>
+                <a:p>
+                  <a:pPr/>
+                  <a14:m>
+                    <m:oMathPara xmlns:m="http://schemas.openxmlformats.org/officeDocument/2006/math">
+                      <m:oMathParaPr>
+                        <m:jc m:val="centerGroup"/>
+                      </m:oMathParaPr>
+                      <m:oMath xmlns:m="http://schemas.openxmlformats.org/officeDocument/2006/math">
+                        <m:r>
+                          <a:rPr lang="en-US" sz="2000" i="1" dirty="0" smtClean="0">
+                            <a:latin typeface="Cambria Math" panose="02040503050406030204" pitchFamily="18" charset="0"/>
+                          </a:rPr>
+                          <m:t>𝑐</m:t>
+                        </m:r>
+                        <m:r>
+                          <a:rPr lang="en-US" sz="2000" b="0" i="1" dirty="0" smtClean="0">
+                            <a:latin typeface="Cambria Math" panose="02040503050406030204" pitchFamily="18" charset="0"/>
+                          </a:rPr>
+                          <m:t>←</m:t>
+                        </m:r>
+                        <m:sSub>
+                          <m:sSubPr>
+                            <m:ctrlPr>
+                              <a:rPr lang="en-US" sz="2000" b="1" i="1" dirty="0" smtClean="0">
+                                <a:latin typeface="Cambria Math" panose="02040503050406030204" pitchFamily="18" charset="0"/>
+                              </a:rPr>
+                            </m:ctrlPr>
+                          </m:sSubPr>
+                          <m:e>
+                            <m:r>
+                              <a:rPr lang="en-US" sz="2000" b="1" i="1" dirty="0" smtClean="0">
+                                <a:latin typeface="Cambria Math" panose="02040503050406030204" pitchFamily="18" charset="0"/>
+                              </a:rPr>
+                              <m:t>𝒎</m:t>
+                            </m:r>
+                          </m:e>
+                          <m:sub>
+                            <m:r>
+                              <a:rPr lang="en-US" sz="2000" b="1" i="1" dirty="0" smtClean="0">
+                                <a:latin typeface="Cambria Math" panose="02040503050406030204" pitchFamily="18" charset="0"/>
+                              </a:rPr>
+                              <m:t>𝒃</m:t>
+                            </m:r>
+                          </m:sub>
+                        </m:sSub>
+                        <m:r>
+                          <a:rPr lang="en-US" sz="2000" b="1" i="1" dirty="0">
+                            <a:latin typeface="Cambria Math" panose="02040503050406030204" pitchFamily="18" charset="0"/>
+                          </a:rPr>
+                          <m:t>⊕ </m:t>
+                        </m:r>
+                        <m:r>
+                          <a:rPr lang="en-US" sz="2000" b="1" i="1" dirty="0">
+                            <a:latin typeface="Cambria Math" panose="02040503050406030204" pitchFamily="18" charset="0"/>
+                            <a:sym typeface="Symbol" pitchFamily="18" charset="2"/>
+                          </a:rPr>
+                          <m:t>𝒓</m:t>
+                        </m:r>
+                        <m:r>
+                          <a:rPr lang="en-US" sz="2000" b="1" i="1" dirty="0">
+                            <a:latin typeface="Cambria Math" panose="02040503050406030204" pitchFamily="18" charset="0"/>
+                          </a:rPr>
+                          <m:t> </m:t>
+                        </m:r>
+                      </m:oMath>
+                    </m:oMathPara>
+                  </a14:m>
+                  <a:endParaRPr lang="en-US" sz="2000" b="1" dirty="0"/>
+                </a:p>
+              </p:txBody>
+            </p:sp>
+          </mc:Choice>
+          <mc:Fallback xmlns="">
+            <p:sp>
+              <p:nvSpPr>
+                <p:cNvPr id="16" name="Text Box 14"/>
+                <p:cNvSpPr txBox="1">
+                  <a:spLocks noRot="1" noChangeAspect="1" noMove="1" noResize="1" noEditPoints="1" noAdjustHandles="1" noChangeArrowheads="1" noChangeShapeType="1" noTextEdit="1"/>
+                </p:cNvSpPr>
+                <p:nvPr/>
+              </p:nvSpPr>
+              <p:spPr bwMode="auto">
+                <a:xfrm>
+                  <a:off x="2430" y="2141"/>
+                  <a:ext cx="1075" cy="336"/>
+                </a:xfrm>
+                <a:prstGeom prst="rect">
+                  <a:avLst/>
+                </a:prstGeom>
+                <a:blipFill>
+                  <a:blip r:embed="rId5"/>
+                  <a:stretch>
+                    <a:fillRect b="-7576"/>
+                  </a:stretch>
+                </a:blipFill>
+                <a:ln w="9525">
+                  <a:noFill/>
+                  <a:miter lim="800000"/>
+                  <a:headEnd/>
+                  <a:tailEnd/>
+                </a:ln>
+                <a:effectLst/>
+              </p:spPr>
+              <p:txBody>
+                <a:bodyPr/>
+                <a:lstStyle/>
+                <a:p>
+                  <a:r>
+                    <a:rPr lang="ru-RU">
+                      <a:noFill/>
+                    </a:rPr>
+                    <a:t> </a:t>
+                  </a:r>
+                </a:p>
+              </p:txBody>
+            </p:sp>
+          </mc:Fallback>
+        </mc:AlternateContent>
       </p:grpSp>
       <p:grpSp>
         <p:nvGrpSpPr>
@@ -31573,8 +32569,8 @@
           </a:p>
         </p:txBody>
       </p:sp>
-      <mc:AlternateContent xmlns:mc="http://schemas.openxmlformats.org/markup-compatibility/2006">
-        <mc:Choice xmlns:a14="http://schemas.microsoft.com/office/drawing/2010/main" Requires="a14">
+      <mc:AlternateContent xmlns:mc="http://schemas.openxmlformats.org/markup-compatibility/2006" xmlns:a14="http://schemas.microsoft.com/office/drawing/2010/main">
+        <mc:Choice Requires="a14">
           <p:sp>
             <p:nvSpPr>
               <p:cNvPr id="21" name="Text Box 8"/>
@@ -31606,6 +32602,7 @@
               </a:bodyPr>
               <a:lstStyle/>
               <a:p>
+                <a:pPr/>
                 <a14:m>
                   <m:oMathPara xmlns:m="http://schemas.openxmlformats.org/officeDocument/2006/math">
                     <m:oMathParaPr>
@@ -31690,7 +32687,7 @@
             </p:txBody>
           </p:sp>
         </mc:Choice>
-        <mc:Fallback>
+        <mc:Fallback xmlns="">
           <p:sp>
             <p:nvSpPr>
               <p:cNvPr id="21" name="Text Box 8"/>
@@ -31708,7 +32705,7 @@
                 <a:avLst/>
               </a:prstGeom>
               <a:blipFill>
-                <a:blip r:embed="rId4"/>
+                <a:blip r:embed="rId6"/>
                 <a:stretch>
                   <a:fillRect/>
                 </a:stretch>
@@ -31911,7 +32908,7 @@
                 <a:avLst/>
               </a:prstGeom>
               <a:blipFill>
-                <a:blip r:embed="rId6"/>
+                <a:blip r:embed="rId7"/>
                 <a:stretch>
                   <a:fillRect/>
                 </a:stretch>
@@ -32173,8 +33170,8 @@
           <a:chExt cx="0" cy="0"/>
         </a:xfrm>
       </p:grpSpPr>
-      <mc:AlternateContent xmlns:mc="http://schemas.openxmlformats.org/markup-compatibility/2006">
-        <mc:Choice xmlns:a14="http://schemas.microsoft.com/office/drawing/2010/main" Requires="a14">
+      <mc:AlternateContent xmlns:mc="http://schemas.openxmlformats.org/markup-compatibility/2006" xmlns:a14="http://schemas.microsoft.com/office/drawing/2010/main">
+        <mc:Choice Requires="a14">
           <p:sp>
             <p:nvSpPr>
               <p:cNvPr id="3" name="Объект 2"/>
@@ -32272,10 +33269,13 @@
                           <m:t>,</m:t>
                         </m:r>
                         <m:r>
-                          <a:rPr lang="en-US" b="0" i="1" smtClean="0">
-                            <a:latin typeface="Cambria Math" panose="02040503050406030204" pitchFamily="18" charset="0"/>
-                          </a:rPr>
-                          <m:t>𝑂𝑇</m:t>
+                          <m:rPr>
+                            <m:sty m:val="p"/>
+                          </m:rPr>
+                          <a:rPr lang="en-US" b="0" i="0" smtClean="0">
+                            <a:latin typeface="Cambria Math" panose="02040503050406030204" pitchFamily="18" charset="0"/>
+                          </a:rPr>
+                          <m:t>OT</m:t>
                         </m:r>
                         <m:sSup>
                           <m:sSupPr>
@@ -32287,15 +33287,18 @@
                           </m:sSupPr>
                           <m:e>
                             <m:r>
-                              <a:rPr lang="en-US" b="0" i="1" smtClean="0">
+                              <m:rPr>
+                                <m:sty m:val="p"/>
+                              </m:rPr>
+                              <a:rPr lang="en-US" b="0" i="0" smtClean="0">
                                 <a:latin typeface="Cambria Math" panose="02040503050406030204" pitchFamily="18" charset="0"/>
                               </a:rPr>
-                              <m:t>𝑃</m:t>
+                              <m:t>P</m:t>
                             </m:r>
                           </m:e>
                           <m:sup>
                             <m:r>
-                              <a:rPr lang="en-US" b="0" i="1" smtClean="0">
+                              <a:rPr lang="en-US" b="0" i="0" smtClean="0">
                                 <a:latin typeface="Cambria Math" panose="02040503050406030204" pitchFamily="18" charset="0"/>
                               </a:rPr>
                               <m:t>∗</m:t>
@@ -32698,7 +33701,7 @@
             </p:txBody>
           </p:sp>
         </mc:Choice>
-        <mc:Fallback>
+        <mc:Fallback xmlns="">
           <p:sp>
             <p:nvSpPr>
               <p:cNvPr id="3" name="Объект 2"/>
@@ -32797,8 +33800,8 @@
           </a:p>
         </p:txBody>
       </p:sp>
-      <mc:AlternateContent xmlns:mc="http://schemas.openxmlformats.org/markup-compatibility/2006">
-        <mc:Choice xmlns:a14="http://schemas.microsoft.com/office/drawing/2010/main" Requires="a14">
+      <mc:AlternateContent xmlns:mc="http://schemas.openxmlformats.org/markup-compatibility/2006" xmlns:a14="http://schemas.microsoft.com/office/drawing/2010/main">
+        <mc:Choice Requires="a14">
           <p:sp>
             <p:nvSpPr>
               <p:cNvPr id="6" name="Объект 2"/>
@@ -33276,10 +34279,13 @@
                           <m:t>,</m:t>
                         </m:r>
                         <m:r>
-                          <a:rPr lang="en-US" i="1">
-                            <a:latin typeface="Cambria Math" panose="02040503050406030204" pitchFamily="18" charset="0"/>
-                          </a:rPr>
-                          <m:t>𝐸</m:t>
+                          <m:rPr>
+                            <m:sty m:val="p"/>
+                          </m:rPr>
+                          <a:rPr lang="en-US" i="0">
+                            <a:latin typeface="Cambria Math" panose="02040503050406030204" pitchFamily="18" charset="0"/>
+                          </a:rPr>
+                          <m:t>E</m:t>
                         </m:r>
                       </m:e>
                     </m:d>
@@ -33366,7 +34372,7 @@
             </p:txBody>
           </p:sp>
         </mc:Choice>
-        <mc:Fallback>
+        <mc:Fallback xmlns="">
           <p:sp>
             <p:nvSpPr>
               <p:cNvPr id="6" name="Объект 2"/>
@@ -33791,8 +34797,8 @@
           </p:style>
         </p:cxnSp>
       </p:grpSp>
-      <mc:AlternateContent xmlns:mc="http://schemas.openxmlformats.org/markup-compatibility/2006">
-        <mc:Choice xmlns:a14="http://schemas.microsoft.com/office/drawing/2010/main" Requires="a14">
+      <mc:AlternateContent xmlns:mc="http://schemas.openxmlformats.org/markup-compatibility/2006" xmlns:a14="http://schemas.microsoft.com/office/drawing/2010/main">
+        <mc:Choice Requires="a14">
           <p:sp>
             <p:nvSpPr>
               <p:cNvPr id="2" name="Прямоугольник 1"/>
@@ -33802,7 +34808,7 @@
             <p:spPr>
               <a:xfrm>
                 <a:off x="2061244" y="5542365"/>
-                <a:ext cx="7520200" cy="513282"/>
+                <a:ext cx="8747523" cy="513282"/>
               </a:xfrm>
               <a:prstGeom prst="rect">
                 <a:avLst/>
@@ -33824,7 +34830,7 @@
                       <m:rPr>
                         <m:sty m:val="p"/>
                       </m:rPr>
-                      <a:rPr lang="en-US" sz="2800">
+                      <a:rPr lang="en-US" sz="2800" i="0" dirty="0" smtClean="0">
                         <a:latin typeface="Cambria Math" panose="02040503050406030204" pitchFamily="18" charset="0"/>
                       </a:rPr>
                       <m:t>S</m:t>
@@ -33832,7 +34838,7 @@
                     <m:sSub>
                       <m:sSubPr>
                         <m:ctrlPr>
-                          <a:rPr lang="en-US" sz="2800" i="1">
+                          <a:rPr lang="en-US" sz="2800" i="1" dirty="0" smtClean="0">
                             <a:latin typeface="Cambria Math" panose="02040503050406030204" pitchFamily="18" charset="0"/>
                           </a:rPr>
                         </m:ctrlPr>
@@ -33842,7 +34848,7 @@
                           <m:rPr>
                             <m:sty m:val="p"/>
                           </m:rPr>
-                          <a:rPr lang="en-US" sz="2800">
+                          <a:rPr lang="en-US" sz="2800" i="0" dirty="0" smtClean="0">
                             <a:latin typeface="Cambria Math" panose="02040503050406030204" pitchFamily="18" charset="0"/>
                           </a:rPr>
                           <m:t>S</m:t>
@@ -33853,74 +34859,117 @@
                           <m:rPr>
                             <m:sty m:val="p"/>
                           </m:rPr>
-                          <a:rPr lang="en-US" sz="2800">
+                          <a:rPr lang="en-US" sz="2800" i="0" dirty="0" smtClean="0">
                             <a:latin typeface="Cambria Math" panose="02040503050406030204" pitchFamily="18" charset="0"/>
                           </a:rPr>
                           <m:t>adv</m:t>
                         </m:r>
                       </m:sub>
                     </m:sSub>
-                  </m:oMath>
-                </a14:m>
-                <a:r>
-                  <a:rPr lang="en-US" sz="2600" dirty="0"/>
-                  <a:t>[</a:t>
-                </a:r>
-                <a:r>
-                  <a:rPr lang="en-US" sz="2600" i="1" dirty="0"/>
-                  <a:t>A,E</a:t>
-                </a:r>
-                <a:r>
-                  <a:rPr lang="en-US" sz="2600" dirty="0"/>
-                  <a:t>] = |</a:t>
-                </a:r>
-                <a:r>
-                  <a:rPr lang="en-US" sz="2600" dirty="0" err="1"/>
-                  <a:t>Pr</a:t>
-                </a:r>
-                <a:r>
-                  <a:rPr lang="en-US" sz="2600" dirty="0"/>
-                  <a:t>[</a:t>
-                </a:r>
-                <a:r>
-                  <a:rPr lang="en-US" sz="2600" i="1" dirty="0"/>
-                  <a:t>W</a:t>
-                </a:r>
-                <a:r>
-                  <a:rPr lang="en-US" sz="2600" i="1" baseline="-25000" dirty="0"/>
-                  <a:t>0</a:t>
-                </a:r>
-                <a:r>
-                  <a:rPr lang="en-US" sz="2600" dirty="0"/>
-                  <a:t>] – </a:t>
-                </a:r>
-                <a:r>
-                  <a:rPr lang="en-US" sz="2600" dirty="0" err="1"/>
-                  <a:t>Pr</a:t>
-                </a:r>
-                <a:r>
-                  <a:rPr lang="en-US" sz="2600" dirty="0"/>
-                  <a:t>[</a:t>
-                </a:r>
-                <a:r>
-                  <a:rPr lang="en-US" sz="2600" i="1" dirty="0"/>
-                  <a:t>W</a:t>
-                </a:r>
-                <a:r>
-                  <a:rPr lang="en-US" sz="2600" i="1" baseline="-25000" dirty="0"/>
-                  <a:t>1</a:t>
-                </a:r>
-                <a:r>
-                  <a:rPr lang="en-US" sz="2600" dirty="0"/>
-                  <a:t>]| ≤  2 * </a:t>
-                </a:r>
-                <a14:m>
-                  <m:oMath xmlns:m="http://schemas.openxmlformats.org/officeDocument/2006/math">
+                    <m:r>
+                      <a:rPr lang="en-US" sz="2600" i="1" dirty="0">
+                        <a:latin typeface="Cambria Math" panose="02040503050406030204" pitchFamily="18" charset="0"/>
+                      </a:rPr>
+                      <m:t>[</m:t>
+                    </m:r>
+                    <m:r>
+                      <a:rPr lang="en-US" sz="2600" i="1" dirty="0">
+                        <a:latin typeface="Cambria Math" panose="02040503050406030204" pitchFamily="18" charset="0"/>
+                      </a:rPr>
+                      <m:t>𝐴</m:t>
+                    </m:r>
+                    <m:r>
+                      <a:rPr lang="en-US" sz="2600" i="1" dirty="0">
+                        <a:latin typeface="Cambria Math" panose="02040503050406030204" pitchFamily="18" charset="0"/>
+                      </a:rPr>
+                      <m:t>,</m:t>
+                    </m:r>
                     <m:r>
                       <m:rPr>
                         <m:sty m:val="p"/>
                       </m:rPr>
-                      <a:rPr lang="en-US" sz="2800">
+                      <a:rPr lang="en-US" sz="2600" i="0" dirty="0">
+                        <a:latin typeface="Cambria Math" panose="02040503050406030204" pitchFamily="18" charset="0"/>
+                      </a:rPr>
+                      <m:t>E</m:t>
+                    </m:r>
+                    <m:r>
+                      <a:rPr lang="en-US" sz="2600" i="1" dirty="0">
+                        <a:latin typeface="Cambria Math" panose="02040503050406030204" pitchFamily="18" charset="0"/>
+                      </a:rPr>
+                      <m:t>] = |</m:t>
+                    </m:r>
+                    <m:r>
+                      <m:rPr>
+                        <m:sty m:val="p"/>
+                      </m:rPr>
+                      <a:rPr lang="en-US" sz="2600" i="1" dirty="0" err="1">
+                        <a:latin typeface="Cambria Math" panose="02040503050406030204" pitchFamily="18" charset="0"/>
+                      </a:rPr>
+                      <m:t>Pr</m:t>
+                    </m:r>
+                    <m:r>
+                      <a:rPr lang="en-US" sz="2600" i="1" dirty="0">
+                        <a:latin typeface="Cambria Math" panose="02040503050406030204" pitchFamily="18" charset="0"/>
+                      </a:rPr>
+                      <m:t>⁡[</m:t>
+                    </m:r>
+                    <m:r>
+                      <a:rPr lang="en-US" sz="2600" i="1" dirty="0">
+                        <a:latin typeface="Cambria Math" panose="02040503050406030204" pitchFamily="18" charset="0"/>
+                      </a:rPr>
+                      <m:t>𝑊</m:t>
+                    </m:r>
+                    <m:r>
+                      <a:rPr lang="en-US" sz="2600" i="1" baseline="-25000" dirty="0">
+                        <a:latin typeface="Cambria Math" panose="02040503050406030204" pitchFamily="18" charset="0"/>
+                      </a:rPr>
+                      <m:t>0</m:t>
+                    </m:r>
+                    <m:r>
+                      <a:rPr lang="en-US" sz="2600" i="1" dirty="0">
+                        <a:latin typeface="Cambria Math" panose="02040503050406030204" pitchFamily="18" charset="0"/>
+                      </a:rPr>
+                      <m:t>] – </m:t>
+                    </m:r>
+                    <m:r>
+                      <m:rPr>
+                        <m:sty m:val="p"/>
+                      </m:rPr>
+                      <a:rPr lang="en-US" sz="2600" i="1" dirty="0" err="1">
+                        <a:latin typeface="Cambria Math" panose="02040503050406030204" pitchFamily="18" charset="0"/>
+                      </a:rPr>
+                      <m:t>Pr</m:t>
+                    </m:r>
+                    <m:r>
+                      <a:rPr lang="en-US" sz="2600" i="1" dirty="0">
+                        <a:latin typeface="Cambria Math" panose="02040503050406030204" pitchFamily="18" charset="0"/>
+                      </a:rPr>
+                      <m:t>⁡[</m:t>
+                    </m:r>
+                    <m:r>
+                      <a:rPr lang="en-US" sz="2600" i="1" dirty="0">
+                        <a:latin typeface="Cambria Math" panose="02040503050406030204" pitchFamily="18" charset="0"/>
+                      </a:rPr>
+                      <m:t>𝑊</m:t>
+                    </m:r>
+                    <m:r>
+                      <a:rPr lang="en-US" sz="2600" i="1" baseline="-25000" dirty="0">
+                        <a:latin typeface="Cambria Math" panose="02040503050406030204" pitchFamily="18" charset="0"/>
+                      </a:rPr>
+                      <m:t>1</m:t>
+                    </m:r>
+                    <m:r>
+                      <a:rPr lang="en-US" sz="2600" i="1" dirty="0">
+                        <a:latin typeface="Cambria Math" panose="02040503050406030204" pitchFamily="18" charset="0"/>
+                      </a:rPr>
+                      <m:t>]| ≤  2 ∗ </m:t>
+                    </m:r>
+                    <m:r>
+                      <m:rPr>
+                        <m:sty m:val="p"/>
+                      </m:rPr>
+                      <a:rPr lang="en-US" sz="2800" i="0" dirty="0" err="1" smtClean="0">
                         <a:latin typeface="Cambria Math" panose="02040503050406030204" pitchFamily="18" charset="0"/>
                       </a:rPr>
                       <m:t>PR</m:t>
@@ -33928,7 +34977,7 @@
                     <m:sSub>
                       <m:sSubPr>
                         <m:ctrlPr>
-                          <a:rPr lang="en-US" sz="2800" i="1">
+                          <a:rPr lang="en-US" sz="2800" i="1" dirty="0" err="1" smtClean="0">
                             <a:latin typeface="Cambria Math" panose="02040503050406030204" pitchFamily="18" charset="0"/>
                           </a:rPr>
                         </m:ctrlPr>
@@ -33938,7 +34987,7 @@
                           <m:rPr>
                             <m:sty m:val="p"/>
                           </m:rPr>
-                          <a:rPr lang="en-US" sz="2800">
+                          <a:rPr lang="en-US" sz="2800" i="0" dirty="0" err="1" smtClean="0">
                             <a:latin typeface="Cambria Math" panose="02040503050406030204" pitchFamily="18" charset="0"/>
                           </a:rPr>
                           <m:t>G</m:t>
@@ -33949,33 +34998,51 @@
                           <m:rPr>
                             <m:sty m:val="p"/>
                           </m:rPr>
-                          <a:rPr lang="en-US" sz="2800">
+                          <a:rPr lang="en-US" sz="2800" i="0" dirty="0" err="1" smtClean="0">
                             <a:latin typeface="Cambria Math" panose="02040503050406030204" pitchFamily="18" charset="0"/>
                           </a:rPr>
                           <m:t>adv</m:t>
                         </m:r>
                       </m:sub>
                     </m:sSub>
+                    <m:r>
+                      <a:rPr lang="en-US" sz="2600" i="1" dirty="0">
+                        <a:latin typeface="Cambria Math" panose="02040503050406030204" pitchFamily="18" charset="0"/>
+                      </a:rPr>
+                      <m:t>[</m:t>
+                    </m:r>
+                    <m:r>
+                      <a:rPr lang="en-US" sz="2600" i="1" dirty="0">
+                        <a:latin typeface="Cambria Math" panose="02040503050406030204" pitchFamily="18" charset="0"/>
+                      </a:rPr>
+                      <m:t>𝐵</m:t>
+                    </m:r>
+                    <m:r>
+                      <a:rPr lang="en-US" sz="2600" i="1" dirty="0">
+                        <a:latin typeface="Cambria Math" panose="02040503050406030204" pitchFamily="18" charset="0"/>
+                      </a:rPr>
+                      <m:t>,</m:t>
+                    </m:r>
+                    <m:r>
+                      <a:rPr lang="en-US" sz="2600" i="1" dirty="0">
+                        <a:latin typeface="Cambria Math" panose="02040503050406030204" pitchFamily="18" charset="0"/>
+                      </a:rPr>
+                      <m:t>𝐺</m:t>
+                    </m:r>
+                    <m:r>
+                      <a:rPr lang="en-US" sz="2600" i="1" dirty="0">
+                        <a:latin typeface="Cambria Math" panose="02040503050406030204" pitchFamily="18" charset="0"/>
+                      </a:rPr>
+                      <m:t>] </m:t>
+                    </m:r>
                   </m:oMath>
                 </a14:m>
-                <a:r>
-                  <a:rPr lang="en-US" sz="2600" dirty="0"/>
-                  <a:t>[</a:t>
-                </a:r>
-                <a:r>
-                  <a:rPr lang="en-US" sz="2600" i="1" dirty="0"/>
-                  <a:t>B,G</a:t>
-                </a:r>
-                <a:r>
-                  <a:rPr lang="en-US" sz="2600" dirty="0"/>
-                  <a:t>] </a:t>
-                </a:r>
                 <a:endParaRPr lang="ru-RU" sz="2600" dirty="0"/>
               </a:p>
             </p:txBody>
           </p:sp>
         </mc:Choice>
-        <mc:Fallback>
+        <mc:Fallback xmlns="">
           <p:sp>
             <p:nvSpPr>
               <p:cNvPr id="2" name="Прямоугольник 1"/>
@@ -33987,7 +35054,7 @@
             <p:spPr>
               <a:xfrm>
                 <a:off x="2061244" y="5542365"/>
-                <a:ext cx="7520200" cy="513282"/>
+                <a:ext cx="8747523" cy="513282"/>
               </a:xfrm>
               <a:prstGeom prst="rect">
                 <a:avLst/>
@@ -33995,7 +35062,7 @@
               <a:blipFill>
                 <a:blip r:embed="rId4"/>
                 <a:stretch>
-                  <a:fillRect l="-1459" t="-9524" r="-486" b="-30952"/>
+                  <a:fillRect l="-1254" t="-9524" b="-27381"/>
                 </a:stretch>
               </a:blipFill>
             </p:spPr>
@@ -34025,7 +35092,7 @@
             <p:spPr>
               <a:xfrm>
                 <a:off x="12317" y="6428505"/>
-                <a:ext cx="3174715" cy="369332"/>
+                <a:ext cx="3121817" cy="369332"/>
               </a:xfrm>
               <a:prstGeom prst="rect">
                 <a:avLst/>
@@ -34042,23 +35109,25 @@
                   <a:rPr lang="en-US" dirty="0"/>
                   <a:t>*</a:t>
                 </a:r>
-                <a:r>
-                  <a:rPr lang="ru-RU" dirty="0"/>
-                  <a:t> </a:t>
-                </a:r>
                 <a14:m>
                   <m:oMath xmlns:m="http://schemas.openxmlformats.org/officeDocument/2006/math">
                     <m:r>
-                      <a:rPr lang="en-US" i="1" dirty="0" smtClean="0">
-                        <a:latin typeface="Cambria Math" panose="02040503050406030204" pitchFamily="18" charset="0"/>
-                      </a:rPr>
-                      <m:t>𝑂𝑇</m:t>
-                    </m:r>
-                    <m:r>
-                      <a:rPr lang="en-US" b="0" i="1" dirty="0" smtClean="0">
-                        <a:latin typeface="Cambria Math" panose="02040503050406030204" pitchFamily="18" charset="0"/>
-                      </a:rPr>
-                      <m:t>𝑃</m:t>
+                      <m:rPr>
+                        <m:sty m:val="p"/>
+                      </m:rPr>
+                      <a:rPr lang="en-US" i="0" dirty="0" smtClean="0">
+                        <a:latin typeface="Cambria Math" panose="02040503050406030204" pitchFamily="18" charset="0"/>
+                      </a:rPr>
+                      <m:t>OT</m:t>
+                    </m:r>
+                    <m:r>
+                      <m:rPr>
+                        <m:sty m:val="p"/>
+                      </m:rPr>
+                      <a:rPr lang="en-US" b="0" i="0" dirty="0" smtClean="0">
+                        <a:latin typeface="Cambria Math" panose="02040503050406030204" pitchFamily="18" charset="0"/>
+                      </a:rPr>
+                      <m:t>P</m:t>
                     </m:r>
                   </m:oMath>
                 </a14:m>
@@ -34086,7 +35155,7 @@
             <p:spPr>
               <a:xfrm>
                 <a:off x="12317" y="6428505"/>
-                <a:ext cx="3174715" cy="369332"/>
+                <a:ext cx="3121817" cy="369332"/>
               </a:xfrm>
               <a:prstGeom prst="rect">
                 <a:avLst/>
@@ -34094,7 +35163,7 @@
               <a:blipFill>
                 <a:blip r:embed="rId5"/>
                 <a:stretch>
-                  <a:fillRect l="-1536" t="-10000" r="-1727" b="-26667"/>
+                  <a:fillRect l="-1563" t="-10000" r="-977" b="-26667"/>
                 </a:stretch>
               </a:blipFill>
             </p:spPr>
@@ -34434,10 +35503,10 @@
         </p:nvGrpSpPr>
         <p:grpSpPr bwMode="auto">
           <a:xfrm>
-            <a:off x="6950048" y="3886601"/>
-            <a:ext cx="1635126" cy="522684"/>
-            <a:chOff x="3648" y="2913"/>
-            <a:chExt cx="1030" cy="439"/>
+            <a:off x="6273891" y="3894936"/>
+            <a:ext cx="2179712" cy="522684"/>
+            <a:chOff x="3648" y="2920"/>
+            <a:chExt cx="912" cy="439"/>
           </a:xfrm>
         </p:grpSpPr>
         <p:sp>
@@ -34487,8 +35556,8 @@
               </p:nvSpPr>
               <p:spPr bwMode="auto">
                 <a:xfrm>
-                  <a:off x="3650" y="2913"/>
-                  <a:ext cx="1028" cy="439"/>
+                  <a:off x="3807" y="2920"/>
+                  <a:ext cx="683" cy="439"/>
                 </a:xfrm>
                 <a:prstGeom prst="rect">
                   <a:avLst/>
@@ -34503,41 +35572,58 @@
                 <a:effectLst/>
               </p:spPr>
               <p:txBody>
-                <a:bodyPr wrap="none">
+                <a:bodyPr wrap="square">
                   <a:spAutoFit/>
                 </a:bodyPr>
                 <a:lstStyle/>
                 <a:p>
-                  <a:r>
-                    <a:rPr lang="en-US" sz="2000" i="1" dirty="0"/>
-                    <a:t>c </a:t>
-                  </a:r>
-                  <a:r>
-                    <a:rPr lang="en-US" sz="2000" i="1" dirty="0">
-                      <a:sym typeface="Symbol" pitchFamily="18" charset="2"/>
-                    </a:rPr>
-                    <a:t> </a:t>
-                  </a:r>
-                  <a:r>
-                    <a:rPr lang="en-US" sz="2400" b="1" i="1" dirty="0"/>
-                    <a:t>m</a:t>
-                  </a:r>
-                  <a:r>
-                    <a:rPr lang="en-US" sz="2400" b="1" i="1" baseline="-25000" dirty="0"/>
-                    <a:t>0</a:t>
-                  </a:r>
-                  <a:r>
-                    <a:rPr lang="en-US" sz="2400" b="1" dirty="0"/>
-                    <a:t>⊕</a:t>
-                  </a:r>
-                  <a:r>
-                    <a:rPr lang="en-US" sz="2400" dirty="0"/>
-                    <a:t> </a:t>
-                  </a:r>
                   <a14:m>
                     <m:oMath xmlns:m="http://schemas.openxmlformats.org/officeDocument/2006/math">
                       <m:r>
-                        <a:rPr lang="en-US" sz="2400" i="1">
+                        <a:rPr lang="en-US" sz="2000" b="0" i="1" smtClean="0">
+                          <a:latin typeface="Cambria Math" panose="02040503050406030204" pitchFamily="18" charset="0"/>
+                        </a:rPr>
+                        <m:t>𝑐</m:t>
+                      </m:r>
+                      <m:r>
+                        <a:rPr lang="en-US" sz="2000" b="0" i="1" smtClean="0">
+                          <a:latin typeface="Cambria Math" panose="02040503050406030204" pitchFamily="18" charset="0"/>
+                        </a:rPr>
+                        <m:t>←</m:t>
+                      </m:r>
+                      <m:sSub>
+                        <m:sSubPr>
+                          <m:ctrlPr>
+                            <a:rPr lang="en-US" sz="2000" b="0" i="1" smtClean="0">
+                              <a:latin typeface="Cambria Math" panose="02040503050406030204" pitchFamily="18" charset="0"/>
+                            </a:rPr>
+                          </m:ctrlPr>
+                        </m:sSubPr>
+                        <m:e>
+                          <m:r>
+                            <a:rPr lang="en-US" sz="2000" b="0" i="1" smtClean="0">
+                              <a:latin typeface="Cambria Math" panose="02040503050406030204" pitchFamily="18" charset="0"/>
+                            </a:rPr>
+                            <m:t>𝑚</m:t>
+                          </m:r>
+                        </m:e>
+                        <m:sub>
+                          <m:r>
+                            <a:rPr lang="en-US" sz="2000" b="0" i="1" smtClean="0">
+                              <a:latin typeface="Cambria Math" panose="02040503050406030204" pitchFamily="18" charset="0"/>
+                            </a:rPr>
+                            <m:t>0</m:t>
+                          </m:r>
+                        </m:sub>
+                      </m:sSub>
+                      <m:r>
+                        <a:rPr lang="en-US" sz="2000" b="0" i="1" smtClean="0">
+                          <a:latin typeface="Cambria Math" panose="02040503050406030204" pitchFamily="18" charset="0"/>
+                        </a:rPr>
+                        <m:t>⊕</m:t>
+                      </m:r>
+                      <m:r>
+                        <a:rPr lang="en-US" sz="2000" b="0" i="1" smtClean="0">
                           <a:latin typeface="Cambria Math" panose="02040503050406030204" pitchFamily="18" charset="0"/>
                         </a:rPr>
                         <m:t>𝛾</m:t>
@@ -34564,8 +35650,8 @@
               </p:nvSpPr>
               <p:spPr bwMode="auto">
                 <a:xfrm>
-                  <a:off x="3650" y="2913"/>
-                  <a:ext cx="1028" cy="439"/>
+                  <a:off x="3807" y="2920"/>
+                  <a:ext cx="683" cy="439"/>
                 </a:xfrm>
                 <a:prstGeom prst="rect">
                   <a:avLst/>
@@ -34573,7 +35659,7 @@
                 <a:blipFill>
                   <a:blip r:embed="rId2"/>
                   <a:stretch>
-                    <a:fillRect l="-4120" t="-2353" b="-24706"/>
+                    <a:fillRect/>
                   </a:stretch>
                 </a:blipFill>
                 <a:ln w="9525">
@@ -34721,101 +35807,41 @@
           </p:sp>
         </mc:Fallback>
       </mc:AlternateContent>
-      <p:grpSp>
-        <p:nvGrpSpPr>
-          <p:cNvPr id="13" name="Group 13"/>
-          <p:cNvGrpSpPr/>
+      <p:sp>
+        <p:nvSpPr>
+          <p:cNvPr id="14" name="Line 24"/>
+          <p:cNvSpPr>
+            <a:spLocks noChangeShapeType="1"/>
+          </p:cNvSpPr>
           <p:nvPr/>
-        </p:nvGrpSpPr>
-        <p:grpSpPr>
-          <a:xfrm>
-            <a:off x="7026244" y="3534176"/>
-            <a:ext cx="1447800" cy="400110"/>
-            <a:chOff x="5867400" y="2125267"/>
-            <a:chExt cx="1447800" cy="400110"/>
+        </p:nvSpPr>
+        <p:spPr bwMode="auto">
+          <a:xfrm flipH="1" flipV="1">
+            <a:off x="6273891" y="3894936"/>
+            <a:ext cx="2200153" cy="20240"/>
           </a:xfrm>
-        </p:grpSpPr>
-        <p:sp>
-          <p:nvSpPr>
-            <p:cNvPr id="14" name="Line 24"/>
-            <p:cNvSpPr>
-              <a:spLocks noChangeShapeType="1"/>
-            </p:cNvSpPr>
-            <p:nvPr/>
-          </p:nvSpPr>
-          <p:spPr bwMode="auto">
-            <a:xfrm flipH="1">
-              <a:off x="5867400" y="2506267"/>
-              <a:ext cx="1447800" cy="0"/>
-            </a:xfrm>
-            <a:prstGeom prst="line">
-              <a:avLst/>
-            </a:prstGeom>
-            <a:noFill/>
-            <a:ln w="38100">
-              <a:solidFill>
-                <a:schemeClr val="tx1"/>
-              </a:solidFill>
-              <a:round/>
-              <a:headEnd/>
-              <a:tailEnd type="triangle" w="med" len="med"/>
-            </a:ln>
-            <a:effectLst/>
-          </p:spPr>
-          <p:txBody>
-            <a:bodyPr/>
-            <a:lstStyle/>
-            <a:p>
-              <a:endParaRPr lang="en-US"/>
-            </a:p>
-          </p:txBody>
-        </p:sp>
-        <p:sp>
-          <p:nvSpPr>
-            <p:cNvPr id="15" name="TextBox 14"/>
-            <p:cNvSpPr txBox="1"/>
-            <p:nvPr/>
-          </p:nvSpPr>
-          <p:spPr>
-            <a:xfrm>
-              <a:off x="6038770" y="2125267"/>
-              <a:ext cx="925253" cy="400110"/>
-            </a:xfrm>
-            <a:prstGeom prst="rect">
-              <a:avLst/>
-            </a:prstGeom>
-            <a:noFill/>
-          </p:spPr>
-          <p:txBody>
-            <a:bodyPr wrap="none" rtlCol="0">
-              <a:spAutoFit/>
-            </a:bodyPr>
-            <a:lstStyle/>
-            <a:p>
-              <a:r>
-                <a:rPr lang="en-US" sz="2000" i="1" dirty="0"/>
-                <a:t>m</a:t>
-              </a:r>
-              <a:r>
-                <a:rPr lang="en-US" sz="2000" i="1" baseline="-25000" dirty="0"/>
-                <a:t>0</a:t>
-              </a:r>
-              <a:r>
-                <a:rPr lang="ru-RU" sz="2000" i="1" baseline="-25000" dirty="0"/>
-                <a:t> </a:t>
-              </a:r>
-              <a:r>
-                <a:rPr lang="en-US" sz="2000" i="1" dirty="0"/>
-                <a:t>, m</a:t>
-              </a:r>
-              <a:r>
-                <a:rPr lang="en-US" sz="2000" i="1" baseline="-25000" dirty="0"/>
-                <a:t>1</a:t>
-              </a:r>
-            </a:p>
-          </p:txBody>
-        </p:sp>
-      </p:grpSp>
+          <a:prstGeom prst="line">
+            <a:avLst/>
+          </a:prstGeom>
+          <a:noFill/>
+          <a:ln w="38100">
+            <a:solidFill>
+              <a:schemeClr val="tx1"/>
+            </a:solidFill>
+            <a:round/>
+            <a:headEnd/>
+            <a:tailEnd type="triangle" w="med" len="med"/>
+          </a:ln>
+          <a:effectLst/>
+        </p:spPr>
+        <p:txBody>
+          <a:bodyPr/>
+          <a:lstStyle/>
+          <a:p>
+            <a:endParaRPr lang="en-US"/>
+          </a:p>
+        </p:txBody>
+      </p:sp>
       <p:sp>
         <p:nvSpPr>
           <p:cNvPr id="17" name="TextBox 16"/>
@@ -34849,8 +35875,8 @@
           </a:p>
         </p:txBody>
       </p:sp>
-      <mc:AlternateContent xmlns:mc="http://schemas.openxmlformats.org/markup-compatibility/2006">
-        <mc:Choice xmlns:a14="http://schemas.microsoft.com/office/drawing/2010/main" Requires="a14">
+      <mc:AlternateContent xmlns:mc="http://schemas.openxmlformats.org/markup-compatibility/2006" xmlns:a14="http://schemas.microsoft.com/office/drawing/2010/main">
+        <mc:Choice Requires="a14">
           <p:sp>
             <p:nvSpPr>
               <p:cNvPr id="20" name="Объект 2"/>
@@ -34921,7 +35947,7 @@
                     <m:sSub>
                       <m:sSubPr>
                         <m:ctrlPr>
-                          <a:rPr lang="en-US" b="0" smtClean="0">
+                          <a:rPr lang="en-US" b="0" i="1" smtClean="0">
                             <a:latin typeface="Cambria Math" panose="02040503050406030204" pitchFamily="18" charset="0"/>
                           </a:rPr>
                         </m:ctrlPr>
@@ -35161,7 +36187,7 @@
             </p:txBody>
           </p:sp>
         </mc:Choice>
-        <mc:Fallback>
+        <mc:Fallback xmlns="">
           <p:sp>
             <p:nvSpPr>
               <p:cNvPr id="20" name="Объект 2"/>
@@ -35235,8 +36261,8 @@
           </a:fontRef>
         </p:style>
       </p:cxnSp>
-      <mc:AlternateContent xmlns:mc="http://schemas.openxmlformats.org/markup-compatibility/2006">
-        <mc:Choice xmlns:a14="http://schemas.microsoft.com/office/drawing/2010/main" Requires="a14">
+      <mc:AlternateContent xmlns:mc="http://schemas.openxmlformats.org/markup-compatibility/2006" xmlns:a14="http://schemas.microsoft.com/office/drawing/2010/main">
+        <mc:Choice Requires="a14">
           <p:sp>
             <p:nvSpPr>
               <p:cNvPr id="29" name="Объект 2"/>
@@ -36297,7 +37323,7 @@
             </p:txBody>
           </p:sp>
         </mc:Choice>
-        <mc:Fallback>
+        <mc:Fallback xmlns="">
           <p:sp>
             <p:nvSpPr>
               <p:cNvPr id="29" name="Объект 2"/>
@@ -36668,6 +37694,233 @@
           </a:p>
         </p:txBody>
       </p:sp>
+      <mc:AlternateContent xmlns:mc="http://schemas.openxmlformats.org/markup-compatibility/2006" xmlns:a14="http://schemas.microsoft.com/office/drawing/2010/main">
+        <mc:Choice Requires="a14">
+          <p:sp>
+            <p:nvSpPr>
+              <p:cNvPr id="3" name="TextBox 2">
+                <a:extLst>
+                  <a:ext uri="{FF2B5EF4-FFF2-40B4-BE49-F238E27FC236}">
+                    <a16:creationId xmlns:a16="http://schemas.microsoft.com/office/drawing/2014/main" id="{094568EB-8FD5-4043-B4EA-1EBFF90D66F5}"/>
+                  </a:ext>
+                </a:extLst>
+              </p:cNvPr>
+              <p:cNvSpPr txBox="1"/>
+              <p:nvPr/>
+            </p:nvSpPr>
+            <p:spPr>
+              <a:xfrm>
+                <a:off x="6398385" y="3510606"/>
+                <a:ext cx="2200154" cy="369332"/>
+              </a:xfrm>
+              <a:prstGeom prst="rect">
+                <a:avLst/>
+              </a:prstGeom>
+              <a:noFill/>
+            </p:spPr>
+            <p:txBody>
+              <a:bodyPr wrap="none" rtlCol="0">
+                <a:spAutoFit/>
+              </a:bodyPr>
+              <a:lstStyle/>
+              <a:p>
+                <a:pPr/>
+                <a14:m>
+                  <m:oMathPara xmlns:m="http://schemas.openxmlformats.org/officeDocument/2006/math">
+                    <m:oMathParaPr>
+                      <m:jc m:val="centerGroup"/>
+                    </m:oMathParaPr>
+                    <m:oMath xmlns:m="http://schemas.openxmlformats.org/officeDocument/2006/math">
+                      <m:sSub>
+                        <m:sSubPr>
+                          <m:ctrlPr>
+                            <a:rPr lang="en-US" b="0" i="1" smtClean="0">
+                              <a:latin typeface="Cambria Math" panose="02040503050406030204" pitchFamily="18" charset="0"/>
+                            </a:rPr>
+                          </m:ctrlPr>
+                        </m:sSubPr>
+                        <m:e>
+                          <m:r>
+                            <a:rPr lang="en-US" b="0" i="1" smtClean="0">
+                              <a:latin typeface="Cambria Math" panose="02040503050406030204" pitchFamily="18" charset="0"/>
+                            </a:rPr>
+                            <m:t>𝑚</m:t>
+                          </m:r>
+                        </m:e>
+                        <m:sub>
+                          <m:r>
+                            <a:rPr lang="en-US" b="0" i="1" smtClean="0">
+                              <a:latin typeface="Cambria Math" panose="02040503050406030204" pitchFamily="18" charset="0"/>
+                            </a:rPr>
+                            <m:t>0</m:t>
+                          </m:r>
+                        </m:sub>
+                      </m:sSub>
+                      <m:r>
+                        <a:rPr lang="en-US" b="0" i="1" smtClean="0">
+                          <a:latin typeface="Cambria Math" panose="02040503050406030204" pitchFamily="18" charset="0"/>
+                        </a:rPr>
+                        <m:t>,</m:t>
+                      </m:r>
+                      <m:sSub>
+                        <m:sSubPr>
+                          <m:ctrlPr>
+                            <a:rPr lang="en-US" b="0" i="1" smtClean="0">
+                              <a:latin typeface="Cambria Math" panose="02040503050406030204" pitchFamily="18" charset="0"/>
+                            </a:rPr>
+                          </m:ctrlPr>
+                        </m:sSubPr>
+                        <m:e>
+                          <m:r>
+                            <a:rPr lang="en-US" b="0" i="1" smtClean="0">
+                              <a:latin typeface="Cambria Math" panose="02040503050406030204" pitchFamily="18" charset="0"/>
+                            </a:rPr>
+                            <m:t>𝑚</m:t>
+                          </m:r>
+                        </m:e>
+                        <m:sub>
+                          <m:r>
+                            <a:rPr lang="en-US" b="0" i="1" smtClean="0">
+                              <a:latin typeface="Cambria Math" panose="02040503050406030204" pitchFamily="18" charset="0"/>
+                            </a:rPr>
+                            <m:t>1</m:t>
+                          </m:r>
+                        </m:sub>
+                      </m:sSub>
+                      <m:r>
+                        <a:rPr lang="en-US" b="0" i="1" smtClean="0">
+                          <a:latin typeface="Cambria Math" panose="02040503050406030204" pitchFamily="18" charset="0"/>
+                        </a:rPr>
+                        <m:t>,</m:t>
+                      </m:r>
+                      <m:d>
+                        <m:dPr>
+                          <m:begChr m:val="|"/>
+                          <m:endChr m:val="|"/>
+                          <m:ctrlPr>
+                            <a:rPr lang="en-US" b="0" i="1" smtClean="0">
+                              <a:latin typeface="Cambria Math" panose="02040503050406030204" pitchFamily="18" charset="0"/>
+                            </a:rPr>
+                          </m:ctrlPr>
+                        </m:dPr>
+                        <m:e>
+                          <m:sSub>
+                            <m:sSubPr>
+                              <m:ctrlPr>
+                                <a:rPr lang="en-US" b="0" i="1" smtClean="0">
+                                  <a:latin typeface="Cambria Math" panose="02040503050406030204" pitchFamily="18" charset="0"/>
+                                </a:rPr>
+                              </m:ctrlPr>
+                            </m:sSubPr>
+                            <m:e>
+                              <m:r>
+                                <a:rPr lang="en-US" b="0" i="1" smtClean="0">
+                                  <a:latin typeface="Cambria Math" panose="02040503050406030204" pitchFamily="18" charset="0"/>
+                                </a:rPr>
+                                <m:t>𝑚</m:t>
+                              </m:r>
+                            </m:e>
+                            <m:sub>
+                              <m:r>
+                                <a:rPr lang="en-US" b="0" i="1" smtClean="0">
+                                  <a:latin typeface="Cambria Math" panose="02040503050406030204" pitchFamily="18" charset="0"/>
+                                </a:rPr>
+                                <m:t>0</m:t>
+                              </m:r>
+                            </m:sub>
+                          </m:sSub>
+                        </m:e>
+                      </m:d>
+                      <m:r>
+                        <a:rPr lang="en-US" b="0" i="1" smtClean="0">
+                          <a:latin typeface="Cambria Math" panose="02040503050406030204" pitchFamily="18" charset="0"/>
+                        </a:rPr>
+                        <m:t>=|</m:t>
+                      </m:r>
+                      <m:sSub>
+                        <m:sSubPr>
+                          <m:ctrlPr>
+                            <a:rPr lang="en-US" b="0" i="1" smtClean="0">
+                              <a:latin typeface="Cambria Math" panose="02040503050406030204" pitchFamily="18" charset="0"/>
+                            </a:rPr>
+                          </m:ctrlPr>
+                        </m:sSubPr>
+                        <m:e>
+                          <m:r>
+                            <a:rPr lang="en-US" b="0" i="1" smtClean="0">
+                              <a:latin typeface="Cambria Math" panose="02040503050406030204" pitchFamily="18" charset="0"/>
+                            </a:rPr>
+                            <m:t>𝑚</m:t>
+                          </m:r>
+                        </m:e>
+                        <m:sub>
+                          <m:r>
+                            <a:rPr lang="en-US" b="0" i="1" smtClean="0">
+                              <a:latin typeface="Cambria Math" panose="02040503050406030204" pitchFamily="18" charset="0"/>
+                            </a:rPr>
+                            <m:t>1</m:t>
+                          </m:r>
+                        </m:sub>
+                      </m:sSub>
+                      <m:r>
+                        <a:rPr lang="en-US" b="0" i="1" smtClean="0">
+                          <a:latin typeface="Cambria Math" panose="02040503050406030204" pitchFamily="18" charset="0"/>
+                        </a:rPr>
+                        <m:t>|</m:t>
+                      </m:r>
+                    </m:oMath>
+                  </m:oMathPara>
+                </a14:m>
+                <a:endParaRPr lang="ru-RU" dirty="0"/>
+              </a:p>
+            </p:txBody>
+          </p:sp>
+        </mc:Choice>
+        <mc:Fallback xmlns="">
+          <p:sp>
+            <p:nvSpPr>
+              <p:cNvPr id="3" name="TextBox 2">
+                <a:extLst>
+                  <a:ext uri="{FF2B5EF4-FFF2-40B4-BE49-F238E27FC236}">
+                    <a16:creationId xmlns:a16="http://schemas.microsoft.com/office/drawing/2014/main" id="{094568EB-8FD5-4043-B4EA-1EBFF90D66F5}"/>
+                  </a:ext>
+                </a:extLst>
+              </p:cNvPr>
+              <p:cNvSpPr txBox="1">
+                <a:spLocks noRot="1" noChangeAspect="1" noMove="1" noResize="1" noEditPoints="1" noAdjustHandles="1" noChangeArrowheads="1" noChangeShapeType="1" noTextEdit="1"/>
+              </p:cNvSpPr>
+              <p:nvPr/>
+            </p:nvSpPr>
+            <p:spPr>
+              <a:xfrm>
+                <a:off x="6398385" y="3510606"/>
+                <a:ext cx="2200154" cy="369332"/>
+              </a:xfrm>
+              <a:prstGeom prst="rect">
+                <a:avLst/>
+              </a:prstGeom>
+              <a:blipFill>
+                <a:blip r:embed="rId7"/>
+                <a:stretch>
+                  <a:fillRect b="-13333"/>
+                </a:stretch>
+              </a:blipFill>
+            </p:spPr>
+            <p:txBody>
+              <a:bodyPr/>
+              <a:lstStyle/>
+              <a:p>
+                <a:r>
+                  <a:rPr lang="ru-RU">
+                    <a:noFill/>
+                  </a:rPr>
+                  <a:t> </a:t>
+                </a:r>
+              </a:p>
+            </p:txBody>
+          </p:sp>
+        </mc:Fallback>
+      </mc:AlternateContent>
     </p:spTree>
     <p:extLst>
       <p:ext uri="{BB962C8B-B14F-4D97-AF65-F5344CB8AC3E}">
@@ -36707,51 +37960,6 @@
                                     <p:set>
                                       <p:cBhvr>
                                         <p:cTn id="6" dur="1" fill="hold">
-                                          <p:stCondLst>
-                                            <p:cond delay="0"/>
-                                          </p:stCondLst>
-                                        </p:cTn>
-                                        <p:tgtEl>
-                                          <p:spTgt spid="13"/>
-                                        </p:tgtEl>
-                                        <p:attrNameLst>
-                                          <p:attrName>style.visibility</p:attrName>
-                                        </p:attrNameLst>
-                                      </p:cBhvr>
-                                      <p:to>
-                                        <p:strVal val="visible"/>
-                                      </p:to>
-                                    </p:set>
-                                  </p:childTnLst>
-                                </p:cTn>
-                              </p:par>
-                            </p:childTnLst>
-                          </p:cTn>
-                        </p:par>
-                      </p:childTnLst>
-                    </p:cTn>
-                  </p:par>
-                  <p:par>
-                    <p:cTn id="7" fill="hold">
-                      <p:stCondLst>
-                        <p:cond delay="indefinite"/>
-                      </p:stCondLst>
-                      <p:childTnLst>
-                        <p:par>
-                          <p:cTn id="8" fill="hold">
-                            <p:stCondLst>
-                              <p:cond delay="0"/>
-                            </p:stCondLst>
-                            <p:childTnLst>
-                              <p:par>
-                                <p:cTn id="9" presetID="1" presetClass="entr" presetSubtype="0" fill="hold" nodeType="clickEffect">
-                                  <p:stCondLst>
-                                    <p:cond delay="0"/>
-                                  </p:stCondLst>
-                                  <p:childTnLst>
-                                    <p:set>
-                                      <p:cBhvr>
-                                        <p:cTn id="10" dur="1" fill="hold">
                                           <p:stCondLst>
                                             <p:cond delay="0"/>
                                           </p:stCondLst>
@@ -37283,10 +38491,13 @@
                 <a14:m>
                   <m:oMath xmlns:m="http://schemas.openxmlformats.org/officeDocument/2006/math">
                     <m:r>
-                      <a:rPr lang="en-US" i="1" smtClean="0">
-                        <a:latin typeface="Cambria Math" panose="02040503050406030204" pitchFamily="18" charset="0"/>
-                      </a:rPr>
-                      <m:t>𝐸</m:t>
+                      <m:rPr>
+                        <m:sty m:val="p"/>
+                      </m:rPr>
+                      <a:rPr lang="en-US" i="0" smtClean="0">
+                        <a:latin typeface="Cambria Math" panose="02040503050406030204" pitchFamily="18" charset="0"/>
+                      </a:rPr>
+                      <m:t>E</m:t>
                     </m:r>
                   </m:oMath>
                 </a14:m>
@@ -38141,7 +39352,7 @@
             <p:spPr>
               <a:xfrm>
                 <a:off x="5345724" y="1408579"/>
-                <a:ext cx="6008076" cy="2246769"/>
+                <a:ext cx="6008076" cy="2677656"/>
               </a:xfrm>
               <a:prstGeom prst="rect">
                 <a:avLst/>
@@ -38162,123 +39373,15 @@
                   <a:buFont typeface="Wingdings" panose="05000000000000000000" pitchFamily="2" charset="2"/>
                   <a:buChar char="§"/>
                 </a:pPr>
-                <a14:m>
-                  <m:oMath xmlns:m="http://schemas.openxmlformats.org/officeDocument/2006/math">
-                    <m:r>
-                      <m:rPr>
-                        <m:sty m:val="p"/>
-                      </m:rPr>
-                      <a:rPr lang="en-US" sz="2800">
-                        <a:latin typeface="Cambria Math" panose="02040503050406030204" pitchFamily="18" charset="0"/>
-                      </a:rPr>
-                      <m:t>SSadv</m:t>
-                    </m:r>
-                    <m:d>
-                      <m:dPr>
-                        <m:begChr m:val="["/>
-                        <m:endChr m:val="]"/>
-                        <m:ctrlPr>
-                          <a:rPr lang="en-US" sz="2800" i="1">
-                            <a:latin typeface="Cambria Math" panose="02040503050406030204" pitchFamily="18" charset="0"/>
-                          </a:rPr>
-                        </m:ctrlPr>
-                      </m:dPr>
-                      <m:e>
-                        <m:r>
-                          <a:rPr lang="en-US" sz="2800" i="1">
-                            <a:latin typeface="Cambria Math" panose="02040503050406030204" pitchFamily="18" charset="0"/>
-                          </a:rPr>
-                          <m:t>𝐴</m:t>
-                        </m:r>
-                        <m:r>
-                          <a:rPr lang="en-US" sz="2800" i="1">
-                            <a:latin typeface="Cambria Math" panose="02040503050406030204" pitchFamily="18" charset="0"/>
-                          </a:rPr>
-                          <m:t>,</m:t>
-                        </m:r>
-                        <m:r>
-                          <m:rPr>
-                            <m:sty m:val="p"/>
-                          </m:rPr>
-                          <a:rPr lang="en-US" sz="2800">
-                            <a:latin typeface="Cambria Math" panose="02040503050406030204" pitchFamily="18" charset="0"/>
-                          </a:rPr>
-                          <m:t>Ε</m:t>
-                        </m:r>
-                      </m:e>
-                    </m:d>
-                    <m:r>
-                      <a:rPr lang="en-US" sz="2800" i="1">
-                        <a:latin typeface="Cambria Math" panose="02040503050406030204" pitchFamily="18" charset="0"/>
-                      </a:rPr>
-                      <m:t>=</m:t>
-                    </m:r>
-                  </m:oMath>
-                </a14:m>
-                <a:r>
-                  <a:rPr lang="ru-RU" sz="2800" b="1" dirty="0"/>
-                  <a:t> ??? </a:t>
-                </a:r>
-                <a:r>
-                  <a:rPr lang="en-US" sz="2800" dirty="0"/>
-                  <a:t>(</a:t>
-                </a:r>
-                <a:r>
-                  <a:rPr lang="ru-RU" sz="2800" dirty="0"/>
-                  <a:t>функция от </a:t>
-                </a:r>
-                <a14:m>
-                  <m:oMath xmlns:m="http://schemas.openxmlformats.org/officeDocument/2006/math">
-                    <m:sSub>
-                      <m:sSubPr>
-                        <m:ctrlPr>
-                          <a:rPr lang="en-US" sz="2800" b="0" i="1" smtClean="0">
-                            <a:latin typeface="Cambria Math" panose="02040503050406030204" pitchFamily="18" charset="0"/>
-                          </a:rPr>
-                        </m:ctrlPr>
-                      </m:sSubPr>
-                      <m:e>
-                        <m:r>
-                          <a:rPr lang="en-US" sz="2800" b="0" i="1" smtClean="0">
-                            <a:latin typeface="Cambria Math" panose="02040503050406030204" pitchFamily="18" charset="0"/>
-                          </a:rPr>
-                          <m:t>𝑊</m:t>
-                        </m:r>
-                      </m:e>
-                      <m:sub>
-                        <m:r>
-                          <a:rPr lang="en-US" sz="2800" b="0" i="1" smtClean="0">
-                            <a:latin typeface="Cambria Math" panose="02040503050406030204" pitchFamily="18" charset="0"/>
-                          </a:rPr>
-                          <m:t>𝑏</m:t>
-                        </m:r>
-                      </m:sub>
-                    </m:sSub>
-                    <m:r>
-                      <a:rPr lang="en-US" sz="2800" b="0" i="1" smtClean="0">
-                        <a:latin typeface="Cambria Math" panose="02040503050406030204" pitchFamily="18" charset="0"/>
-                      </a:rPr>
-                      <m:t>, </m:t>
-                    </m:r>
-                    <m:r>
-                      <a:rPr lang="en-US" sz="2800" b="0" i="1" smtClean="0">
-                        <a:latin typeface="Cambria Math" panose="02040503050406030204" pitchFamily="18" charset="0"/>
-                      </a:rPr>
-                      <m:t>𝑏</m:t>
-                    </m:r>
-                    <m:r>
-                      <a:rPr lang="en-US" sz="2800" b="0" i="1" smtClean="0">
-                        <a:latin typeface="Cambria Math" panose="02040503050406030204" pitchFamily="18" charset="0"/>
-                      </a:rPr>
-                      <m:t>=0,1</m:t>
-                    </m:r>
-                  </m:oMath>
-                </a14:m>
-                <a:r>
-                  <a:rPr lang="en-US" sz="2800" dirty="0"/>
-                  <a:t>)</a:t>
-                </a:r>
-                <a:endParaRPr lang="ru-RU" sz="2800" dirty="0"/>
+                <a:r>
+                  <a:rPr lang="ru-RU" sz="2800" dirty="0">
+                    <a:latin typeface="Cambria Math" panose="02040503050406030204" pitchFamily="18" charset="0"/>
+                  </a:rPr>
+                  <a:t>Что отправляет и что получает противник?</a:t>
+                </a:r>
+                <a:endParaRPr lang="en-US" sz="2800" dirty="0">
+                  <a:latin typeface="Cambria Math" panose="02040503050406030204" pitchFamily="18" charset="0"/>
+                </a:endParaRPr>
               </a:p>
               <a:p>
                 <a:pPr marL="457200" indent="-457200">
@@ -38287,34 +39390,46 @@
                 </a:pPr>
                 <a14:m>
                   <m:oMath xmlns:m="http://schemas.openxmlformats.org/officeDocument/2006/math">
-                    <m:sSup>
-                      <m:sSupPr>
+                    <m:r>
+                      <m:rPr>
+                        <m:sty m:val="p"/>
+                      </m:rPr>
+                      <a:rPr lang="en-US" sz="2800" b="0" i="0" smtClean="0">
+                        <a:latin typeface="Cambria Math" panose="02040503050406030204" pitchFamily="18" charset="0"/>
+                      </a:rPr>
+                      <m:t>S</m:t>
+                    </m:r>
+                    <m:sSub>
+                      <m:sSubPr>
                         <m:ctrlPr>
-                          <a:rPr lang="en-US" sz="2800" i="1">
+                          <a:rPr lang="en-US" sz="2800" b="0" i="1" smtClean="0">
                             <a:latin typeface="Cambria Math" panose="02040503050406030204" pitchFamily="18" charset="0"/>
                           </a:rPr>
                         </m:ctrlPr>
-                      </m:sSupPr>
+                      </m:sSubPr>
                       <m:e>
                         <m:r>
                           <m:rPr>
                             <m:sty m:val="p"/>
                           </m:rPr>
-                          <a:rPr lang="en-US" sz="2800">
-                            <a:latin typeface="Cambria Math" panose="02040503050406030204" pitchFamily="18" charset="0"/>
-                          </a:rPr>
-                          <m:t>SSadv</m:t>
+                          <a:rPr lang="en-US" sz="2800" b="0" i="0" smtClean="0">
+                            <a:latin typeface="Cambria Math" panose="02040503050406030204" pitchFamily="18" charset="0"/>
+                          </a:rPr>
+                          <m:t>S</m:t>
                         </m:r>
                       </m:e>
-                      <m:sup>
+                      <m:sub>
                         <m:r>
-                          <a:rPr lang="en-US" sz="2800">
-                            <a:latin typeface="Cambria Math" panose="02040503050406030204" pitchFamily="18" charset="0"/>
-                          </a:rPr>
-                          <m:t>∗</m:t>
+                          <m:rPr>
+                            <m:sty m:val="p"/>
+                          </m:rPr>
+                          <a:rPr lang="en-US" sz="2800" b="0" i="0" smtClean="0">
+                            <a:latin typeface="Cambria Math" panose="02040503050406030204" pitchFamily="18" charset="0"/>
+                          </a:rPr>
+                          <m:t>adv</m:t>
                         </m:r>
-                      </m:sup>
-                    </m:sSup>
+                      </m:sub>
+                    </m:sSub>
                     <m:d>
                       <m:dPr>
                         <m:begChr m:val="["/>
@@ -38371,149 +39486,22 @@
                 </a:r>
                 <a:r>
                   <a:rPr lang="ru-RU" sz="2800" dirty="0"/>
-                  <a:t>функция от </a:t>
-                </a:r>
-                <a14:m>
-                  <m:oMath xmlns:m="http://schemas.openxmlformats.org/officeDocument/2006/math">
-                    <m:r>
-                      <a:rPr lang="en-US" sz="2800" b="0" i="1" smtClean="0">
-                        <a:latin typeface="Cambria Math" panose="02040503050406030204" pitchFamily="18" charset="0"/>
-                      </a:rPr>
-                      <m:t>𝑊</m:t>
-                    </m:r>
-                  </m:oMath>
-                </a14:m>
+                  <a:t>функция от</a:t>
+                </a:r>
+                <a:r>
+                  <a:rPr lang="en-US" sz="2800" dirty="0"/>
+                  <a:t> </a:t>
+                </a:r>
+                <a:r>
+                  <a:rPr lang="ru-RU" sz="2800" dirty="0"/>
+                  <a:t>вероятностей</a:t>
+                </a:r>
                 <a:r>
                   <a:rPr lang="en-US" sz="2800" dirty="0"/>
                   <a:t>)</a:t>
                 </a:r>
               </a:p>
               <a:p>
-                <a:pPr marL="457200" indent="-457200">
-                  <a:buFont typeface="Wingdings" panose="05000000000000000000" pitchFamily="2" charset="2"/>
-                  <a:buChar char="§"/>
-                </a:pPr>
-                <a:r>
-                  <a:rPr lang="ru-RU" sz="2800" dirty="0"/>
-                  <a:t>Связь </a:t>
-                </a:r>
-                <a14:m>
-                  <m:oMath xmlns:m="http://schemas.openxmlformats.org/officeDocument/2006/math">
-                    <m:r>
-                      <m:rPr>
-                        <m:sty m:val="p"/>
-                      </m:rPr>
-                      <a:rPr lang="en-US" sz="2800">
-                        <a:latin typeface="Cambria Math" panose="02040503050406030204" pitchFamily="18" charset="0"/>
-                      </a:rPr>
-                      <m:t>SSadv</m:t>
-                    </m:r>
-                    <m:d>
-                      <m:dPr>
-                        <m:begChr m:val="["/>
-                        <m:endChr m:val="]"/>
-                        <m:ctrlPr>
-                          <a:rPr lang="en-US" sz="2800" i="1">
-                            <a:latin typeface="Cambria Math" panose="02040503050406030204" pitchFamily="18" charset="0"/>
-                          </a:rPr>
-                        </m:ctrlPr>
-                      </m:dPr>
-                      <m:e>
-                        <m:r>
-                          <a:rPr lang="en-US" sz="2800" i="1">
-                            <a:latin typeface="Cambria Math" panose="02040503050406030204" pitchFamily="18" charset="0"/>
-                          </a:rPr>
-                          <m:t>𝐴</m:t>
-                        </m:r>
-                        <m:r>
-                          <a:rPr lang="en-US" sz="2800" i="1">
-                            <a:latin typeface="Cambria Math" panose="02040503050406030204" pitchFamily="18" charset="0"/>
-                          </a:rPr>
-                          <m:t>,</m:t>
-                        </m:r>
-                        <m:r>
-                          <m:rPr>
-                            <m:sty m:val="p"/>
-                          </m:rPr>
-                          <a:rPr lang="en-US" sz="2800">
-                            <a:latin typeface="Cambria Math" panose="02040503050406030204" pitchFamily="18" charset="0"/>
-                          </a:rPr>
-                          <m:t>Ε</m:t>
-                        </m:r>
-                      </m:e>
-                    </m:d>
-                  </m:oMath>
-                </a14:m>
-                <a:r>
-                  <a:rPr lang="ru-RU" sz="2800" dirty="0"/>
-                  <a:t> и </a:t>
-                </a:r>
-                <a14:m>
-                  <m:oMath xmlns:m="http://schemas.openxmlformats.org/officeDocument/2006/math">
-                    <m:sSup>
-                      <m:sSupPr>
-                        <m:ctrlPr>
-                          <a:rPr lang="en-US" sz="2800" i="1">
-                            <a:latin typeface="Cambria Math" panose="02040503050406030204" pitchFamily="18" charset="0"/>
-                          </a:rPr>
-                        </m:ctrlPr>
-                      </m:sSupPr>
-                      <m:e>
-                        <m:r>
-                          <m:rPr>
-                            <m:sty m:val="p"/>
-                          </m:rPr>
-                          <a:rPr lang="en-US" sz="2800">
-                            <a:latin typeface="Cambria Math" panose="02040503050406030204" pitchFamily="18" charset="0"/>
-                          </a:rPr>
-                          <m:t>SSadv</m:t>
-                        </m:r>
-                      </m:e>
-                      <m:sup>
-                        <m:r>
-                          <a:rPr lang="en-US" sz="2800">
-                            <a:latin typeface="Cambria Math" panose="02040503050406030204" pitchFamily="18" charset="0"/>
-                          </a:rPr>
-                          <m:t>∗</m:t>
-                        </m:r>
-                      </m:sup>
-                    </m:sSup>
-                    <m:d>
-                      <m:dPr>
-                        <m:begChr m:val="["/>
-                        <m:endChr m:val="]"/>
-                        <m:ctrlPr>
-                          <a:rPr lang="en-US" sz="2800" i="1">
-                            <a:latin typeface="Cambria Math" panose="02040503050406030204" pitchFamily="18" charset="0"/>
-                          </a:rPr>
-                        </m:ctrlPr>
-                      </m:dPr>
-                      <m:e>
-                        <m:r>
-                          <a:rPr lang="en-US" sz="2800" i="1">
-                            <a:latin typeface="Cambria Math" panose="02040503050406030204" pitchFamily="18" charset="0"/>
-                          </a:rPr>
-                          <m:t>𝐴</m:t>
-                        </m:r>
-                        <m:r>
-                          <a:rPr lang="en-US" sz="2800" i="1">
-                            <a:latin typeface="Cambria Math" panose="02040503050406030204" pitchFamily="18" charset="0"/>
-                          </a:rPr>
-                          <m:t>,</m:t>
-                        </m:r>
-                        <m:r>
-                          <m:rPr>
-                            <m:sty m:val="p"/>
-                          </m:rPr>
-                          <a:rPr lang="en-US" sz="2800">
-                            <a:latin typeface="Cambria Math" panose="02040503050406030204" pitchFamily="18" charset="0"/>
-                          </a:rPr>
-                          <m:t>Ε</m:t>
-                        </m:r>
-                      </m:e>
-                    </m:d>
-                  </m:oMath>
-                </a14:m>
                 <a:endParaRPr lang="ru-RU" sz="2800" dirty="0"/>
               </a:p>
             </p:txBody>
@@ -38531,7 +39519,7 @@
             <p:spPr>
               <a:xfrm>
                 <a:off x="5345724" y="1408579"/>
-                <a:ext cx="6008076" cy="2246769"/>
+                <a:ext cx="6008076" cy="2677656"/>
               </a:xfrm>
               <a:prstGeom prst="rect">
                 <a:avLst/>
@@ -38539,7 +39527,7 @@
               <a:blipFill>
                 <a:blip r:embed="rId2"/>
                 <a:stretch>
-                  <a:fillRect l="-1826" b="-6775"/>
+                  <a:fillRect l="-1826"/>
                 </a:stretch>
               </a:blipFill>
             </p:spPr>
@@ -38900,7 +39888,7 @@
     </p:spTree>
     <p:extLst>
       <p:ext uri="{BB962C8B-B14F-4D97-AF65-F5344CB8AC3E}">
-        <p14:creationId xmlns:p14="http://schemas.microsoft.com/office/powerpoint/2010/main" val="2454264424"/>
+        <p14:creationId xmlns:p14="http://schemas.microsoft.com/office/powerpoint/2010/main" val="495928177"/>
       </p:ext>
     </p:extLst>
   </p:cSld>
@@ -39321,6 +40309,1165 @@
                   <a:buFont typeface="Wingdings" panose="05000000000000000000" pitchFamily="2" charset="2"/>
                   <a:buChar char="§"/>
                 </a:pPr>
+                <a14:m>
+                  <m:oMath xmlns:m="http://schemas.openxmlformats.org/officeDocument/2006/math">
+                    <m:r>
+                      <m:rPr>
+                        <m:sty m:val="p"/>
+                      </m:rPr>
+                      <a:rPr lang="en-US" sz="2800">
+                        <a:latin typeface="Cambria Math" panose="02040503050406030204" pitchFamily="18" charset="0"/>
+                      </a:rPr>
+                      <m:t>SSadv</m:t>
+                    </m:r>
+                    <m:d>
+                      <m:dPr>
+                        <m:begChr m:val="["/>
+                        <m:endChr m:val="]"/>
+                        <m:ctrlPr>
+                          <a:rPr lang="en-US" sz="2800" i="1">
+                            <a:latin typeface="Cambria Math" panose="02040503050406030204" pitchFamily="18" charset="0"/>
+                          </a:rPr>
+                        </m:ctrlPr>
+                      </m:dPr>
+                      <m:e>
+                        <m:r>
+                          <a:rPr lang="en-US" sz="2800" i="1">
+                            <a:latin typeface="Cambria Math" panose="02040503050406030204" pitchFamily="18" charset="0"/>
+                          </a:rPr>
+                          <m:t>𝐴</m:t>
+                        </m:r>
+                        <m:r>
+                          <a:rPr lang="en-US" sz="2800" i="1">
+                            <a:latin typeface="Cambria Math" panose="02040503050406030204" pitchFamily="18" charset="0"/>
+                          </a:rPr>
+                          <m:t>,</m:t>
+                        </m:r>
+                        <m:r>
+                          <m:rPr>
+                            <m:sty m:val="p"/>
+                          </m:rPr>
+                          <a:rPr lang="en-US" sz="2800">
+                            <a:latin typeface="Cambria Math" panose="02040503050406030204" pitchFamily="18" charset="0"/>
+                          </a:rPr>
+                          <m:t>Ε</m:t>
+                        </m:r>
+                      </m:e>
+                    </m:d>
+                    <m:r>
+                      <a:rPr lang="en-US" sz="2800" i="1">
+                        <a:latin typeface="Cambria Math" panose="02040503050406030204" pitchFamily="18" charset="0"/>
+                      </a:rPr>
+                      <m:t>=</m:t>
+                    </m:r>
+                  </m:oMath>
+                </a14:m>
+                <a:r>
+                  <a:rPr lang="ru-RU" sz="2800" b="1" dirty="0"/>
+                  <a:t> ??? </a:t>
+                </a:r>
+                <a:r>
+                  <a:rPr lang="en-US" sz="2800" dirty="0"/>
+                  <a:t>(</a:t>
+                </a:r>
+                <a:r>
+                  <a:rPr lang="ru-RU" sz="2800" dirty="0"/>
+                  <a:t>функция от </a:t>
+                </a:r>
+                <a14:m>
+                  <m:oMath xmlns:m="http://schemas.openxmlformats.org/officeDocument/2006/math">
+                    <m:sSub>
+                      <m:sSubPr>
+                        <m:ctrlPr>
+                          <a:rPr lang="en-US" sz="2800" b="0" i="1" smtClean="0">
+                            <a:latin typeface="Cambria Math" panose="02040503050406030204" pitchFamily="18" charset="0"/>
+                          </a:rPr>
+                        </m:ctrlPr>
+                      </m:sSubPr>
+                      <m:e>
+                        <m:r>
+                          <a:rPr lang="en-US" sz="2800" b="0" i="1" smtClean="0">
+                            <a:latin typeface="Cambria Math" panose="02040503050406030204" pitchFamily="18" charset="0"/>
+                          </a:rPr>
+                          <m:t>𝑊</m:t>
+                        </m:r>
+                      </m:e>
+                      <m:sub>
+                        <m:r>
+                          <a:rPr lang="en-US" sz="2800" b="0" i="1" smtClean="0">
+                            <a:latin typeface="Cambria Math" panose="02040503050406030204" pitchFamily="18" charset="0"/>
+                          </a:rPr>
+                          <m:t>𝑏</m:t>
+                        </m:r>
+                      </m:sub>
+                    </m:sSub>
+                    <m:r>
+                      <a:rPr lang="en-US" sz="2800" b="0" i="1" smtClean="0">
+                        <a:latin typeface="Cambria Math" panose="02040503050406030204" pitchFamily="18" charset="0"/>
+                      </a:rPr>
+                      <m:t>, </m:t>
+                    </m:r>
+                    <m:r>
+                      <a:rPr lang="en-US" sz="2800" b="0" i="1" smtClean="0">
+                        <a:latin typeface="Cambria Math" panose="02040503050406030204" pitchFamily="18" charset="0"/>
+                      </a:rPr>
+                      <m:t>𝑏</m:t>
+                    </m:r>
+                    <m:r>
+                      <a:rPr lang="en-US" sz="2800" b="0" i="1" smtClean="0">
+                        <a:latin typeface="Cambria Math" panose="02040503050406030204" pitchFamily="18" charset="0"/>
+                      </a:rPr>
+                      <m:t>=0,1</m:t>
+                    </m:r>
+                  </m:oMath>
+                </a14:m>
+                <a:r>
+                  <a:rPr lang="en-US" sz="2800" dirty="0"/>
+                  <a:t>)</a:t>
+                </a:r>
+                <a:endParaRPr lang="ru-RU" sz="2800" dirty="0"/>
+              </a:p>
+              <a:p>
+                <a:pPr marL="457200" indent="-457200">
+                  <a:buFont typeface="Wingdings" panose="05000000000000000000" pitchFamily="2" charset="2"/>
+                  <a:buChar char="§"/>
+                </a:pPr>
+                <a14:m>
+                  <m:oMath xmlns:m="http://schemas.openxmlformats.org/officeDocument/2006/math">
+                    <m:sSup>
+                      <m:sSupPr>
+                        <m:ctrlPr>
+                          <a:rPr lang="en-US" sz="2800" i="1">
+                            <a:latin typeface="Cambria Math" panose="02040503050406030204" pitchFamily="18" charset="0"/>
+                          </a:rPr>
+                        </m:ctrlPr>
+                      </m:sSupPr>
+                      <m:e>
+                        <m:r>
+                          <m:rPr>
+                            <m:sty m:val="p"/>
+                          </m:rPr>
+                          <a:rPr lang="en-US" sz="2800">
+                            <a:latin typeface="Cambria Math" panose="02040503050406030204" pitchFamily="18" charset="0"/>
+                          </a:rPr>
+                          <m:t>SSadv</m:t>
+                        </m:r>
+                      </m:e>
+                      <m:sup>
+                        <m:r>
+                          <a:rPr lang="en-US" sz="2800">
+                            <a:latin typeface="Cambria Math" panose="02040503050406030204" pitchFamily="18" charset="0"/>
+                          </a:rPr>
+                          <m:t>∗</m:t>
+                        </m:r>
+                      </m:sup>
+                    </m:sSup>
+                    <m:d>
+                      <m:dPr>
+                        <m:begChr m:val="["/>
+                        <m:endChr m:val="]"/>
+                        <m:ctrlPr>
+                          <a:rPr lang="en-US" sz="2800" i="1">
+                            <a:latin typeface="Cambria Math" panose="02040503050406030204" pitchFamily="18" charset="0"/>
+                          </a:rPr>
+                        </m:ctrlPr>
+                      </m:dPr>
+                      <m:e>
+                        <m:r>
+                          <a:rPr lang="en-US" sz="2800" i="1">
+                            <a:latin typeface="Cambria Math" panose="02040503050406030204" pitchFamily="18" charset="0"/>
+                          </a:rPr>
+                          <m:t>𝐴</m:t>
+                        </m:r>
+                        <m:r>
+                          <a:rPr lang="en-US" sz="2800" i="1">
+                            <a:latin typeface="Cambria Math" panose="02040503050406030204" pitchFamily="18" charset="0"/>
+                          </a:rPr>
+                          <m:t>,</m:t>
+                        </m:r>
+                        <m:r>
+                          <m:rPr>
+                            <m:sty m:val="p"/>
+                          </m:rPr>
+                          <a:rPr lang="en-US" sz="2800">
+                            <a:latin typeface="Cambria Math" panose="02040503050406030204" pitchFamily="18" charset="0"/>
+                          </a:rPr>
+                          <m:t>Ε</m:t>
+                        </m:r>
+                      </m:e>
+                    </m:d>
+                    <m:r>
+                      <a:rPr lang="en-US" sz="2800" i="1">
+                        <a:latin typeface="Cambria Math" panose="02040503050406030204" pitchFamily="18" charset="0"/>
+                      </a:rPr>
+                      <m:t>=</m:t>
+                    </m:r>
+                  </m:oMath>
+                </a14:m>
+                <a:r>
+                  <a:rPr lang="ru-RU" sz="2800" b="1" dirty="0"/>
+                  <a:t> ???</a:t>
+                </a:r>
+                <a:r>
+                  <a:rPr lang="en-US" sz="2800" b="1" dirty="0"/>
+                  <a:t> </a:t>
+                </a:r>
+                <a:r>
+                  <a:rPr lang="en-US" sz="2800" dirty="0"/>
+                  <a:t>(</a:t>
+                </a:r>
+                <a:r>
+                  <a:rPr lang="ru-RU" sz="2800" dirty="0"/>
+                  <a:t>функция от </a:t>
+                </a:r>
+                <a14:m>
+                  <m:oMath xmlns:m="http://schemas.openxmlformats.org/officeDocument/2006/math">
+                    <m:r>
+                      <a:rPr lang="en-US" sz="2800" b="0" i="1" smtClean="0">
+                        <a:latin typeface="Cambria Math" panose="02040503050406030204" pitchFamily="18" charset="0"/>
+                      </a:rPr>
+                      <m:t>𝑊</m:t>
+                    </m:r>
+                  </m:oMath>
+                </a14:m>
+                <a:r>
+                  <a:rPr lang="en-US" sz="2800" dirty="0"/>
+                  <a:t>)</a:t>
+                </a:r>
+              </a:p>
+              <a:p>
+                <a:pPr marL="457200" indent="-457200">
+                  <a:buFont typeface="Wingdings" panose="05000000000000000000" pitchFamily="2" charset="2"/>
+                  <a:buChar char="§"/>
+                </a:pPr>
+                <a:r>
+                  <a:rPr lang="ru-RU" sz="2800" dirty="0"/>
+                  <a:t>Связь </a:t>
+                </a:r>
+                <a14:m>
+                  <m:oMath xmlns:m="http://schemas.openxmlformats.org/officeDocument/2006/math">
+                    <m:r>
+                      <m:rPr>
+                        <m:sty m:val="p"/>
+                      </m:rPr>
+                      <a:rPr lang="en-US" sz="2800">
+                        <a:latin typeface="Cambria Math" panose="02040503050406030204" pitchFamily="18" charset="0"/>
+                      </a:rPr>
+                      <m:t>SSadv</m:t>
+                    </m:r>
+                    <m:d>
+                      <m:dPr>
+                        <m:begChr m:val="["/>
+                        <m:endChr m:val="]"/>
+                        <m:ctrlPr>
+                          <a:rPr lang="en-US" sz="2800" i="1">
+                            <a:latin typeface="Cambria Math" panose="02040503050406030204" pitchFamily="18" charset="0"/>
+                          </a:rPr>
+                        </m:ctrlPr>
+                      </m:dPr>
+                      <m:e>
+                        <m:r>
+                          <a:rPr lang="en-US" sz="2800" i="1">
+                            <a:latin typeface="Cambria Math" panose="02040503050406030204" pitchFamily="18" charset="0"/>
+                          </a:rPr>
+                          <m:t>𝐴</m:t>
+                        </m:r>
+                        <m:r>
+                          <a:rPr lang="en-US" sz="2800" i="1">
+                            <a:latin typeface="Cambria Math" panose="02040503050406030204" pitchFamily="18" charset="0"/>
+                          </a:rPr>
+                          <m:t>,</m:t>
+                        </m:r>
+                        <m:r>
+                          <m:rPr>
+                            <m:sty m:val="p"/>
+                          </m:rPr>
+                          <a:rPr lang="en-US" sz="2800">
+                            <a:latin typeface="Cambria Math" panose="02040503050406030204" pitchFamily="18" charset="0"/>
+                          </a:rPr>
+                          <m:t>Ε</m:t>
+                        </m:r>
+                      </m:e>
+                    </m:d>
+                  </m:oMath>
+                </a14:m>
+                <a:r>
+                  <a:rPr lang="ru-RU" sz="2800" dirty="0"/>
+                  <a:t> и </a:t>
+                </a:r>
+                <a14:m>
+                  <m:oMath xmlns:m="http://schemas.openxmlformats.org/officeDocument/2006/math">
+                    <m:sSup>
+                      <m:sSupPr>
+                        <m:ctrlPr>
+                          <a:rPr lang="en-US" sz="2800" i="1">
+                            <a:latin typeface="Cambria Math" panose="02040503050406030204" pitchFamily="18" charset="0"/>
+                          </a:rPr>
+                        </m:ctrlPr>
+                      </m:sSupPr>
+                      <m:e>
+                        <m:r>
+                          <m:rPr>
+                            <m:sty m:val="p"/>
+                          </m:rPr>
+                          <a:rPr lang="en-US" sz="2800">
+                            <a:latin typeface="Cambria Math" panose="02040503050406030204" pitchFamily="18" charset="0"/>
+                          </a:rPr>
+                          <m:t>SSadv</m:t>
+                        </m:r>
+                      </m:e>
+                      <m:sup>
+                        <m:r>
+                          <a:rPr lang="en-US" sz="2800">
+                            <a:latin typeface="Cambria Math" panose="02040503050406030204" pitchFamily="18" charset="0"/>
+                          </a:rPr>
+                          <m:t>∗</m:t>
+                        </m:r>
+                      </m:sup>
+                    </m:sSup>
+                    <m:d>
+                      <m:dPr>
+                        <m:begChr m:val="["/>
+                        <m:endChr m:val="]"/>
+                        <m:ctrlPr>
+                          <a:rPr lang="en-US" sz="2800" i="1">
+                            <a:latin typeface="Cambria Math" panose="02040503050406030204" pitchFamily="18" charset="0"/>
+                          </a:rPr>
+                        </m:ctrlPr>
+                      </m:dPr>
+                      <m:e>
+                        <m:r>
+                          <a:rPr lang="en-US" sz="2800" i="1">
+                            <a:latin typeface="Cambria Math" panose="02040503050406030204" pitchFamily="18" charset="0"/>
+                          </a:rPr>
+                          <m:t>𝐴</m:t>
+                        </m:r>
+                        <m:r>
+                          <a:rPr lang="en-US" sz="2800" i="1">
+                            <a:latin typeface="Cambria Math" panose="02040503050406030204" pitchFamily="18" charset="0"/>
+                          </a:rPr>
+                          <m:t>,</m:t>
+                        </m:r>
+                        <m:r>
+                          <m:rPr>
+                            <m:sty m:val="p"/>
+                          </m:rPr>
+                          <a:rPr lang="en-US" sz="2800">
+                            <a:latin typeface="Cambria Math" panose="02040503050406030204" pitchFamily="18" charset="0"/>
+                          </a:rPr>
+                          <m:t>Ε</m:t>
+                        </m:r>
+                      </m:e>
+                    </m:d>
+                  </m:oMath>
+                </a14:m>
+                <a:endParaRPr lang="ru-RU" sz="2800" dirty="0"/>
+              </a:p>
+            </p:txBody>
+          </p:sp>
+        </mc:Choice>
+        <mc:Fallback xmlns="">
+          <p:sp>
+            <p:nvSpPr>
+              <p:cNvPr id="8" name="TextBox 7"/>
+              <p:cNvSpPr txBox="1">
+                <a:spLocks noRot="1" noChangeAspect="1" noMove="1" noResize="1" noEditPoints="1" noAdjustHandles="1" noChangeArrowheads="1" noChangeShapeType="1" noTextEdit="1"/>
+              </p:cNvSpPr>
+              <p:nvPr/>
+            </p:nvSpPr>
+            <p:spPr>
+              <a:xfrm>
+                <a:off x="5345724" y="1408579"/>
+                <a:ext cx="6008076" cy="2246769"/>
+              </a:xfrm>
+              <a:prstGeom prst="rect">
+                <a:avLst/>
+              </a:prstGeom>
+              <a:blipFill>
+                <a:blip r:embed="rId2"/>
+                <a:stretch>
+                  <a:fillRect l="-1826" b="-6775"/>
+                </a:stretch>
+              </a:blipFill>
+            </p:spPr>
+            <p:txBody>
+              <a:bodyPr/>
+              <a:lstStyle/>
+              <a:p>
+                <a:r>
+                  <a:rPr lang="ru-RU">
+                    <a:noFill/>
+                  </a:rPr>
+                  <a:t> </a:t>
+                </a:r>
+              </a:p>
+            </p:txBody>
+          </p:sp>
+        </mc:Fallback>
+      </mc:AlternateContent>
+      <mc:AlternateContent xmlns:mc="http://schemas.openxmlformats.org/markup-compatibility/2006" xmlns:a14="http://schemas.microsoft.com/office/drawing/2010/main">
+        <mc:Choice Requires="a14">
+          <p:sp>
+            <p:nvSpPr>
+              <p:cNvPr id="10" name="Прямоугольник 9"/>
+              <p:cNvSpPr/>
+              <p:nvPr/>
+            </p:nvSpPr>
+            <p:spPr>
+              <a:xfrm>
+                <a:off x="185371" y="1408578"/>
+                <a:ext cx="5318614" cy="3355662"/>
+              </a:xfrm>
+              <a:prstGeom prst="rect">
+                <a:avLst/>
+              </a:prstGeom>
+            </p:spPr>
+            <p:txBody>
+              <a:bodyPr wrap="square">
+                <a:spAutoFit/>
+              </a:bodyPr>
+              <a:lstStyle/>
+              <a:p>
+                <a:r>
+                  <a:rPr lang="ru-RU" sz="2600" dirty="0"/>
+                  <a:t>Пусть задана игра на семантическую стойкость для алгоритма </a:t>
+                </a:r>
+                <a14:m>
+                  <m:oMath xmlns:m="http://schemas.openxmlformats.org/officeDocument/2006/math">
+                    <m:r>
+                      <a:rPr lang="en-US" sz="2600" i="1">
+                        <a:latin typeface="Cambria Math" panose="02040503050406030204" pitchFamily="18" charset="0"/>
+                      </a:rPr>
+                      <m:t>𝐴</m:t>
+                    </m:r>
+                  </m:oMath>
+                </a14:m>
+                <a:r>
+                  <a:rPr lang="ru-RU" sz="2600" b="1" dirty="0"/>
+                  <a:t> </a:t>
+                </a:r>
+                <a:r>
+                  <a:rPr lang="ru-RU" sz="2600" dirty="0"/>
+                  <a:t>против шифра </a:t>
+                </a:r>
+                <a14:m>
+                  <m:oMath xmlns:m="http://schemas.openxmlformats.org/officeDocument/2006/math">
+                    <m:r>
+                      <m:rPr>
+                        <m:sty m:val="p"/>
+                      </m:rPr>
+                      <a:rPr lang="ru-RU" sz="2600">
+                        <a:latin typeface="Cambria Math" panose="02040503050406030204" pitchFamily="18" charset="0"/>
+                      </a:rPr>
+                      <m:t>Ε</m:t>
+                    </m:r>
+                    <m:r>
+                      <a:rPr lang="en-US" sz="2600" i="1">
+                        <a:latin typeface="Cambria Math" panose="02040503050406030204" pitchFamily="18" charset="0"/>
+                      </a:rPr>
+                      <m:t>=(</m:t>
+                    </m:r>
+                    <m:r>
+                      <a:rPr lang="en-US" sz="2600" i="1">
+                        <a:latin typeface="Cambria Math" panose="02040503050406030204" pitchFamily="18" charset="0"/>
+                      </a:rPr>
+                      <m:t>𝐸</m:t>
+                    </m:r>
+                    <m:r>
+                      <a:rPr lang="en-US" sz="2600" i="1">
+                        <a:latin typeface="Cambria Math" panose="02040503050406030204" pitchFamily="18" charset="0"/>
+                      </a:rPr>
+                      <m:t>,</m:t>
+                    </m:r>
+                    <m:r>
+                      <a:rPr lang="en-US" sz="2600" i="1">
+                        <a:latin typeface="Cambria Math" panose="02040503050406030204" pitchFamily="18" charset="0"/>
+                      </a:rPr>
+                      <m:t>𝐷</m:t>
+                    </m:r>
+                    <m:r>
+                      <a:rPr lang="en-US" sz="2600" i="1">
+                        <a:latin typeface="Cambria Math" panose="02040503050406030204" pitchFamily="18" charset="0"/>
+                      </a:rPr>
+                      <m:t>)</m:t>
+                    </m:r>
+                  </m:oMath>
+                </a14:m>
+                <a:r>
+                  <a:rPr lang="ru-RU" sz="2600" b="1" dirty="0"/>
+                  <a:t> </a:t>
+                </a:r>
+                <a:r>
+                  <a:rPr lang="ru-RU" sz="2600" dirty="0"/>
+                  <a:t>на </a:t>
+                </a:r>
+                <a14:m>
+                  <m:oMath xmlns:m="http://schemas.openxmlformats.org/officeDocument/2006/math">
+                    <m:r>
+                      <a:rPr lang="en-US" sz="2600" i="1">
+                        <a:latin typeface="Cambria Math" panose="02040503050406030204" pitchFamily="18" charset="0"/>
+                      </a:rPr>
+                      <m:t>(</m:t>
+                    </m:r>
+                    <m:r>
+                      <a:rPr lang="en-US" sz="2600" i="1">
+                        <a:latin typeface="Cambria Math" panose="02040503050406030204" pitchFamily="18" charset="0"/>
+                      </a:rPr>
+                      <m:t>𝐾</m:t>
+                    </m:r>
+                    <m:r>
+                      <a:rPr lang="en-US" sz="2600" i="1">
+                        <a:latin typeface="Cambria Math" panose="02040503050406030204" pitchFamily="18" charset="0"/>
+                      </a:rPr>
+                      <m:t>,</m:t>
+                    </m:r>
+                    <m:r>
+                      <a:rPr lang="en-US" sz="2600" i="1">
+                        <a:latin typeface="Cambria Math" panose="02040503050406030204" pitchFamily="18" charset="0"/>
+                      </a:rPr>
+                      <m:t>𝑀</m:t>
+                    </m:r>
+                    <m:r>
+                      <a:rPr lang="en-US" sz="2600" i="1">
+                        <a:latin typeface="Cambria Math" panose="02040503050406030204" pitchFamily="18" charset="0"/>
+                      </a:rPr>
+                      <m:t>,</m:t>
+                    </m:r>
+                    <m:r>
+                      <a:rPr lang="en-US" sz="2600" i="1">
+                        <a:latin typeface="Cambria Math" panose="02040503050406030204" pitchFamily="18" charset="0"/>
+                      </a:rPr>
+                      <m:t>𝐶</m:t>
+                    </m:r>
+                    <m:r>
+                      <a:rPr lang="en-US" sz="2600" i="1">
+                        <a:latin typeface="Cambria Math" panose="02040503050406030204" pitchFamily="18" charset="0"/>
+                      </a:rPr>
+                      <m:t>)</m:t>
+                    </m:r>
+                  </m:oMath>
+                </a14:m>
+                <a:r>
+                  <a:rPr lang="ru-RU" sz="2600" b="1" dirty="0"/>
+                  <a:t>.</a:t>
+                </a:r>
+              </a:p>
+              <a:p>
+                <a:endParaRPr lang="ru-RU" sz="2600" b="1" dirty="0"/>
+              </a:p>
+              <a:p>
+                <a14:m>
+                  <m:oMath xmlns:m="http://schemas.openxmlformats.org/officeDocument/2006/math">
+                    <m:sSub>
+                      <m:sSubPr>
+                        <m:ctrlPr>
+                          <a:rPr lang="en-US" sz="2600" i="1">
+                            <a:latin typeface="Cambria Math" panose="02040503050406030204" pitchFamily="18" charset="0"/>
+                          </a:rPr>
+                        </m:ctrlPr>
+                      </m:sSubPr>
+                      <m:e>
+                        <m:r>
+                          <a:rPr lang="en-US" sz="2600" i="1">
+                            <a:latin typeface="Cambria Math" panose="02040503050406030204" pitchFamily="18" charset="0"/>
+                          </a:rPr>
+                          <m:t>𝑊</m:t>
+                        </m:r>
+                      </m:e>
+                      <m:sub>
+                        <m:r>
+                          <a:rPr lang="en-US" sz="2600" i="1">
+                            <a:latin typeface="Cambria Math" panose="02040503050406030204" pitchFamily="18" charset="0"/>
+                          </a:rPr>
+                          <m:t>𝑏</m:t>
+                        </m:r>
+                      </m:sub>
+                    </m:sSub>
+                  </m:oMath>
+                </a14:m>
+                <a:r>
+                  <a:rPr lang="ru-RU" sz="2600" dirty="0"/>
+                  <a:t> - событие того, что </a:t>
+                </a:r>
+                <a14:m>
+                  <m:oMath xmlns:m="http://schemas.openxmlformats.org/officeDocument/2006/math">
+                    <m:sSup>
+                      <m:sSupPr>
+                        <m:ctrlPr>
+                          <a:rPr lang="en-US" sz="2600" i="1">
+                            <a:latin typeface="Cambria Math" panose="02040503050406030204" pitchFamily="18" charset="0"/>
+                          </a:rPr>
+                        </m:ctrlPr>
+                      </m:sSupPr>
+                      <m:e>
+                        <m:r>
+                          <a:rPr lang="en-US" sz="2600" i="1">
+                            <a:latin typeface="Cambria Math" panose="02040503050406030204" pitchFamily="18" charset="0"/>
+                          </a:rPr>
+                          <m:t>𝑏</m:t>
+                        </m:r>
+                      </m:e>
+                      <m:sup>
+                        <m:r>
+                          <a:rPr lang="en-US" sz="2600" i="1">
+                            <a:latin typeface="Cambria Math" panose="02040503050406030204" pitchFamily="18" charset="0"/>
+                          </a:rPr>
+                          <m:t>′</m:t>
+                        </m:r>
+                      </m:sup>
+                    </m:sSup>
+                    <m:r>
+                      <a:rPr lang="en-US" sz="2600" i="1">
+                        <a:latin typeface="Cambria Math" panose="02040503050406030204" pitchFamily="18" charset="0"/>
+                      </a:rPr>
+                      <m:t>=1</m:t>
+                    </m:r>
+                  </m:oMath>
+                </a14:m>
+                <a:r>
+                  <a:rPr lang="en-US" sz="2600" dirty="0"/>
+                  <a:t> </a:t>
+                </a:r>
+                <a:r>
+                  <a:rPr lang="ru-RU" sz="2600" dirty="0"/>
+                  <a:t>в эксперименте </a:t>
+                </a:r>
+                <a14:m>
+                  <m:oMath xmlns:m="http://schemas.openxmlformats.org/officeDocument/2006/math">
+                    <m:r>
+                      <a:rPr lang="en-US" sz="2600" i="1">
+                        <a:latin typeface="Cambria Math" panose="02040503050406030204" pitchFamily="18" charset="0"/>
+                      </a:rPr>
+                      <m:t>𝑏</m:t>
+                    </m:r>
+                  </m:oMath>
+                </a14:m>
+                <a:endParaRPr lang="ru-RU" sz="2600" dirty="0"/>
+              </a:p>
+              <a:p>
+                <a14:m>
+                  <m:oMath xmlns:m="http://schemas.openxmlformats.org/officeDocument/2006/math">
+                    <m:r>
+                      <a:rPr lang="en-US" sz="2600" i="1">
+                        <a:latin typeface="Cambria Math" panose="02040503050406030204" pitchFamily="18" charset="0"/>
+                      </a:rPr>
+                      <m:t>𝑊</m:t>
+                    </m:r>
+                  </m:oMath>
+                </a14:m>
+                <a:r>
+                  <a:rPr lang="ru-RU" sz="2600" dirty="0"/>
+                  <a:t> - событие, при котором </a:t>
+                </a:r>
+                <a14:m>
+                  <m:oMath xmlns:m="http://schemas.openxmlformats.org/officeDocument/2006/math">
+                    <m:sSup>
+                      <m:sSupPr>
+                        <m:ctrlPr>
+                          <a:rPr lang="en-US" sz="2600" i="1">
+                            <a:latin typeface="Cambria Math" panose="02040503050406030204" pitchFamily="18" charset="0"/>
+                          </a:rPr>
+                        </m:ctrlPr>
+                      </m:sSupPr>
+                      <m:e>
+                        <m:r>
+                          <a:rPr lang="en-US" sz="2600" i="1">
+                            <a:latin typeface="Cambria Math" panose="02040503050406030204" pitchFamily="18" charset="0"/>
+                          </a:rPr>
+                          <m:t>𝑏</m:t>
+                        </m:r>
+                      </m:e>
+                      <m:sup>
+                        <m:r>
+                          <a:rPr lang="en-US" sz="2600">
+                            <a:latin typeface="Cambria Math" panose="02040503050406030204" pitchFamily="18" charset="0"/>
+                          </a:rPr>
+                          <m:t>′</m:t>
+                        </m:r>
+                      </m:sup>
+                    </m:sSup>
+                    <m:r>
+                      <a:rPr lang="en-US" sz="2600">
+                        <a:latin typeface="Cambria Math" panose="02040503050406030204" pitchFamily="18" charset="0"/>
+                      </a:rPr>
+                      <m:t>=</m:t>
+                    </m:r>
+                    <m:r>
+                      <a:rPr lang="en-US" sz="2600" i="1">
+                        <a:latin typeface="Cambria Math" panose="02040503050406030204" pitchFamily="18" charset="0"/>
+                      </a:rPr>
+                      <m:t>𝑏</m:t>
+                    </m:r>
+                  </m:oMath>
+                </a14:m>
+                <a:endParaRPr lang="ru-RU" sz="2600" dirty="0"/>
+              </a:p>
+            </p:txBody>
+          </p:sp>
+        </mc:Choice>
+        <mc:Fallback xmlns="">
+          <p:sp>
+            <p:nvSpPr>
+              <p:cNvPr id="10" name="Прямоугольник 9"/>
+              <p:cNvSpPr>
+                <a:spLocks noRot="1" noChangeAspect="1" noMove="1" noResize="1" noEditPoints="1" noAdjustHandles="1" noChangeArrowheads="1" noChangeShapeType="1" noTextEdit="1"/>
+              </p:cNvSpPr>
+              <p:nvPr/>
+            </p:nvSpPr>
+            <p:spPr>
+              <a:xfrm>
+                <a:off x="185371" y="1408578"/>
+                <a:ext cx="5318614" cy="3355662"/>
+              </a:xfrm>
+              <a:prstGeom prst="rect">
+                <a:avLst/>
+              </a:prstGeom>
+              <a:blipFill>
+                <a:blip r:embed="rId3"/>
+                <a:stretch>
+                  <a:fillRect l="-2062" t="-1452" b="-3811"/>
+                </a:stretch>
+              </a:blipFill>
+            </p:spPr>
+            <p:txBody>
+              <a:bodyPr/>
+              <a:lstStyle/>
+              <a:p>
+                <a:r>
+                  <a:rPr lang="ru-RU">
+                    <a:noFill/>
+                  </a:rPr>
+                  <a:t> </a:t>
+                </a:r>
+              </a:p>
+            </p:txBody>
+          </p:sp>
+        </mc:Fallback>
+      </mc:AlternateContent>
+    </p:spTree>
+    <p:extLst>
+      <p:ext uri="{BB962C8B-B14F-4D97-AF65-F5344CB8AC3E}">
+        <p14:creationId xmlns:p14="http://schemas.microsoft.com/office/powerpoint/2010/main" val="2454264424"/>
+      </p:ext>
+    </p:extLst>
+  </p:cSld>
+  <p:clrMapOvr>
+    <a:masterClrMapping/>
+  </p:clrMapOvr>
+  <p:timing>
+    <p:tnLst>
+      <p:par>
+        <p:cTn id="1" dur="indefinite" restart="never" nodeType="tmRoot">
+          <p:childTnLst>
+            <p:seq concurrent="1" nextAc="seek">
+              <p:cTn id="2" dur="indefinite" nodeType="mainSeq">
+                <p:childTnLst>
+                  <p:par>
+                    <p:cTn id="3" fill="hold">
+                      <p:stCondLst>
+                        <p:cond delay="indefinite"/>
+                        <p:cond evt="onBegin" delay="0">
+                          <p:tn val="2"/>
+                        </p:cond>
+                      </p:stCondLst>
+                      <p:childTnLst>
+                        <p:par>
+                          <p:cTn id="4" fill="hold">
+                            <p:stCondLst>
+                              <p:cond delay="0"/>
+                            </p:stCondLst>
+                            <p:childTnLst>
+                              <p:par>
+                                <p:cTn id="5" presetID="22" presetClass="exit" presetSubtype="2" fill="hold" grpId="0" nodeType="withEffect">
+                                  <p:stCondLst>
+                                    <p:cond delay="0"/>
+                                  </p:stCondLst>
+                                  <p:childTnLst>
+                                    <p:animEffect transition="out" filter="wipe(right)">
+                                      <p:cBhvr>
+                                        <p:cTn id="6" dur="59000"/>
+                                        <p:tgtEl>
+                                          <p:spTgt spid="5"/>
+                                        </p:tgtEl>
+                                      </p:cBhvr>
+                                    </p:animEffect>
+                                    <p:set>
+                                      <p:cBhvr>
+                                        <p:cTn id="7" dur="1" fill="hold">
+                                          <p:stCondLst>
+                                            <p:cond delay="58999"/>
+                                          </p:stCondLst>
+                                        </p:cTn>
+                                        <p:tgtEl>
+                                          <p:spTgt spid="5"/>
+                                        </p:tgtEl>
+                                        <p:attrNameLst>
+                                          <p:attrName>style.visibility</p:attrName>
+                                        </p:attrNameLst>
+                                      </p:cBhvr>
+                                      <p:to>
+                                        <p:strVal val="hidden"/>
+                                      </p:to>
+                                    </p:set>
+                                  </p:childTnLst>
+                                </p:cTn>
+                              </p:par>
+                            </p:childTnLst>
+                          </p:cTn>
+                        </p:par>
+                        <p:par>
+                          <p:cTn id="8" fill="hold">
+                            <p:stCondLst>
+                              <p:cond delay="59000"/>
+                            </p:stCondLst>
+                            <p:childTnLst>
+                              <p:par>
+                                <p:cTn id="9" presetID="22" presetClass="exit" presetSubtype="2" fill="hold" grpId="0" nodeType="afterEffect">
+                                  <p:stCondLst>
+                                    <p:cond delay="0"/>
+                                  </p:stCondLst>
+                                  <p:childTnLst>
+                                    <p:animEffect transition="out" filter="wipe(right)">
+                                      <p:cBhvr>
+                                        <p:cTn id="10" dur="59000"/>
+                                        <p:tgtEl>
+                                          <p:spTgt spid="6"/>
+                                        </p:tgtEl>
+                                      </p:cBhvr>
+                                    </p:animEffect>
+                                    <p:set>
+                                      <p:cBhvr>
+                                        <p:cTn id="11" dur="1" fill="hold">
+                                          <p:stCondLst>
+                                            <p:cond delay="58999"/>
+                                          </p:stCondLst>
+                                        </p:cTn>
+                                        <p:tgtEl>
+                                          <p:spTgt spid="6"/>
+                                        </p:tgtEl>
+                                        <p:attrNameLst>
+                                          <p:attrName>style.visibility</p:attrName>
+                                        </p:attrNameLst>
+                                      </p:cBhvr>
+                                      <p:to>
+                                        <p:strVal val="hidden"/>
+                                      </p:to>
+                                    </p:set>
+                                  </p:childTnLst>
+                                </p:cTn>
+                              </p:par>
+                            </p:childTnLst>
+                          </p:cTn>
+                        </p:par>
+                        <p:par>
+                          <p:cTn id="12" fill="hold">
+                            <p:stCondLst>
+                              <p:cond delay="118000"/>
+                            </p:stCondLst>
+                            <p:childTnLst>
+                              <p:par>
+                                <p:cTn id="13" presetID="22" presetClass="exit" presetSubtype="2" fill="hold" grpId="0" nodeType="afterEffect">
+                                  <p:stCondLst>
+                                    <p:cond delay="0"/>
+                                  </p:stCondLst>
+                                  <p:childTnLst>
+                                    <p:animEffect transition="out" filter="wipe(right)">
+                                      <p:cBhvr>
+                                        <p:cTn id="14" dur="59000"/>
+                                        <p:tgtEl>
+                                          <p:spTgt spid="7"/>
+                                        </p:tgtEl>
+                                      </p:cBhvr>
+                                    </p:animEffect>
+                                    <p:set>
+                                      <p:cBhvr>
+                                        <p:cTn id="15" dur="1" fill="hold">
+                                          <p:stCondLst>
+                                            <p:cond delay="58999"/>
+                                          </p:stCondLst>
+                                        </p:cTn>
+                                        <p:tgtEl>
+                                          <p:spTgt spid="7"/>
+                                        </p:tgtEl>
+                                        <p:attrNameLst>
+                                          <p:attrName>style.visibility</p:attrName>
+                                        </p:attrNameLst>
+                                      </p:cBhvr>
+                                      <p:to>
+                                        <p:strVal val="hidden"/>
+                                      </p:to>
+                                    </p:set>
+                                  </p:childTnLst>
+                                </p:cTn>
+                              </p:par>
+                            </p:childTnLst>
+                          </p:cTn>
+                        </p:par>
+                      </p:childTnLst>
+                    </p:cTn>
+                  </p:par>
+                </p:childTnLst>
+              </p:cTn>
+              <p:prevCondLst>
+                <p:cond evt="onPrev" delay="0">
+                  <p:tgtEl>
+                    <p:sldTgt/>
+                  </p:tgtEl>
+                </p:cond>
+              </p:prevCondLst>
+              <p:nextCondLst>
+                <p:cond evt="onNext" delay="0">
+                  <p:tgtEl>
+                    <p:sldTgt/>
+                  </p:tgtEl>
+                </p:cond>
+              </p:nextCondLst>
+            </p:seq>
+          </p:childTnLst>
+        </p:cTn>
+      </p:par>
+    </p:tnLst>
+    <p:bldLst>
+      <p:bldP spid="5" grpId="0" animBg="1"/>
+      <p:bldP spid="6" grpId="0" animBg="1"/>
+      <p:bldP spid="7" grpId="0" animBg="1"/>
+    </p:bldLst>
+  </p:timing>
+</p:sld>
+</file>
+
+<file path=ppt/slides/slide43.xml><?xml version="1.0" encoding="utf-8"?>
+<p:sld xmlns:a="http://schemas.openxmlformats.org/drawingml/2006/main" xmlns:r="http://schemas.openxmlformats.org/officeDocument/2006/relationships" xmlns:p="http://schemas.openxmlformats.org/presentationml/2006/main">
+  <p:cSld>
+    <p:spTree>
+      <p:nvGrpSpPr>
+        <p:cNvPr id="1" name=""/>
+        <p:cNvGrpSpPr/>
+        <p:nvPr/>
+      </p:nvGrpSpPr>
+      <p:grpSpPr>
+        <a:xfrm>
+          <a:off x="0" y="0"/>
+          <a:ext cx="0" cy="0"/>
+          <a:chOff x="0" y="0"/>
+          <a:chExt cx="0" cy="0"/>
+        </a:xfrm>
+      </p:grpSpPr>
+      <p:sp>
+        <p:nvSpPr>
+          <p:cNvPr id="2" name="Заголовок 1"/>
+          <p:cNvSpPr>
+            <a:spLocks noGrp="1"/>
+          </p:cNvSpPr>
+          <p:nvPr>
+            <p:ph type="title"/>
+          </p:nvPr>
+        </p:nvSpPr>
+        <p:spPr/>
+        <p:txBody>
+          <a:bodyPr/>
+          <a:lstStyle/>
+          <a:p>
+            <a:r>
+              <a:rPr lang="ru-RU" dirty="0"/>
+              <a:t>Тест.</a:t>
+            </a:r>
+          </a:p>
+        </p:txBody>
+      </p:sp>
+      <p:sp>
+        <p:nvSpPr>
+          <p:cNvPr id="4" name="Номер слайда 3"/>
+          <p:cNvSpPr>
+            <a:spLocks noGrp="1"/>
+          </p:cNvSpPr>
+          <p:nvPr>
+            <p:ph type="sldNum" sz="quarter" idx="12"/>
+          </p:nvPr>
+        </p:nvSpPr>
+        <p:spPr/>
+        <p:txBody>
+          <a:bodyPr/>
+          <a:lstStyle/>
+          <a:p>
+            <a:fld id="{8253DDDB-F8F7-4D64-A7FD-3F3D61C1949F}" type="slidenum">
+              <a:rPr lang="ru-RU" smtClean="0"/>
+              <a:t>43</a:t>
+            </a:fld>
+            <a:endParaRPr lang="ru-RU"/>
+          </a:p>
+        </p:txBody>
+      </p:sp>
+      <p:sp>
+        <p:nvSpPr>
+          <p:cNvPr id="5" name="Прямоугольник 4"/>
+          <p:cNvSpPr/>
+          <p:nvPr/>
+        </p:nvSpPr>
+        <p:spPr>
+          <a:xfrm>
+            <a:off x="284285" y="5433158"/>
+            <a:ext cx="10688515" cy="317012"/>
+          </a:xfrm>
+          <a:prstGeom prst="rect">
+            <a:avLst/>
+          </a:prstGeom>
+          <a:solidFill>
+            <a:schemeClr val="accent6">
+              <a:alpha val="50000"/>
+            </a:schemeClr>
+          </a:solidFill>
+          <a:ln>
+            <a:noFill/>
+          </a:ln>
+        </p:spPr>
+        <p:style>
+          <a:lnRef idx="0">
+            <a:scrgbClr r="0" g="0" b="0"/>
+          </a:lnRef>
+          <a:fillRef idx="0">
+            <a:scrgbClr r="0" g="0" b="0"/>
+          </a:fillRef>
+          <a:effectRef idx="0">
+            <a:scrgbClr r="0" g="0" b="0"/>
+          </a:effectRef>
+          <a:fontRef idx="minor">
+            <a:schemeClr val="lt1"/>
+          </a:fontRef>
+        </p:style>
+        <p:txBody>
+          <a:bodyPr rtlCol="0" anchor="ctr"/>
+          <a:lstStyle/>
+          <a:p>
+            <a:pPr algn="ctr"/>
+            <a:endParaRPr lang="ru-RU"/>
+          </a:p>
+        </p:txBody>
+      </p:sp>
+      <p:sp>
+        <p:nvSpPr>
+          <p:cNvPr id="6" name="Прямоугольник 5"/>
+          <p:cNvSpPr/>
+          <p:nvPr/>
+        </p:nvSpPr>
+        <p:spPr>
+          <a:xfrm>
+            <a:off x="284285" y="5819530"/>
+            <a:ext cx="10688515" cy="317012"/>
+          </a:xfrm>
+          <a:prstGeom prst="rect">
+            <a:avLst/>
+          </a:prstGeom>
+          <a:solidFill>
+            <a:schemeClr val="accent6">
+              <a:alpha val="50000"/>
+            </a:schemeClr>
+          </a:solidFill>
+          <a:ln>
+            <a:noFill/>
+          </a:ln>
+        </p:spPr>
+        <p:style>
+          <a:lnRef idx="0">
+            <a:scrgbClr r="0" g="0" b="0"/>
+          </a:lnRef>
+          <a:fillRef idx="0">
+            <a:scrgbClr r="0" g="0" b="0"/>
+          </a:fillRef>
+          <a:effectRef idx="0">
+            <a:scrgbClr r="0" g="0" b="0"/>
+          </a:effectRef>
+          <a:fontRef idx="minor">
+            <a:schemeClr val="lt1"/>
+          </a:fontRef>
+        </p:style>
+        <p:txBody>
+          <a:bodyPr rtlCol="0" anchor="ctr"/>
+          <a:lstStyle/>
+          <a:p>
+            <a:pPr algn="ctr"/>
+            <a:endParaRPr lang="ru-RU"/>
+          </a:p>
+        </p:txBody>
+      </p:sp>
+      <p:sp>
+        <p:nvSpPr>
+          <p:cNvPr id="7" name="Прямоугольник 6"/>
+          <p:cNvSpPr/>
+          <p:nvPr/>
+        </p:nvSpPr>
+        <p:spPr>
+          <a:xfrm>
+            <a:off x="284284" y="6205902"/>
+            <a:ext cx="10688515" cy="317012"/>
+          </a:xfrm>
+          <a:prstGeom prst="rect">
+            <a:avLst/>
+          </a:prstGeom>
+          <a:solidFill>
+            <a:schemeClr val="accent6">
+              <a:alpha val="50000"/>
+            </a:schemeClr>
+          </a:solidFill>
+          <a:ln>
+            <a:noFill/>
+          </a:ln>
+        </p:spPr>
+        <p:style>
+          <a:lnRef idx="0">
+            <a:scrgbClr r="0" g="0" b="0"/>
+          </a:lnRef>
+          <a:fillRef idx="0">
+            <a:scrgbClr r="0" g="0" b="0"/>
+          </a:fillRef>
+          <a:effectRef idx="0">
+            <a:scrgbClr r="0" g="0" b="0"/>
+          </a:effectRef>
+          <a:fontRef idx="minor">
+            <a:schemeClr val="lt1"/>
+          </a:fontRef>
+        </p:style>
+        <p:txBody>
+          <a:bodyPr rtlCol="0" anchor="ctr"/>
+          <a:lstStyle/>
+          <a:p>
+            <a:pPr algn="ctr"/>
+            <a:endParaRPr lang="ru-RU"/>
+          </a:p>
+        </p:txBody>
+      </p:sp>
+      <mc:AlternateContent xmlns:mc="http://schemas.openxmlformats.org/markup-compatibility/2006" xmlns:a14="http://schemas.microsoft.com/office/drawing/2010/main">
+        <mc:Choice Requires="a14">
+          <p:sp>
+            <p:nvSpPr>
+              <p:cNvPr id="8" name="TextBox 7"/>
+              <p:cNvSpPr txBox="1"/>
+              <p:nvPr/>
+            </p:nvSpPr>
+            <p:spPr>
+              <a:xfrm>
+                <a:off x="5345724" y="1408579"/>
+                <a:ext cx="6008076" cy="2246769"/>
+              </a:xfrm>
+              <a:prstGeom prst="rect">
+                <a:avLst/>
+              </a:prstGeom>
+              <a:noFill/>
+            </p:spPr>
+            <p:txBody>
+              <a:bodyPr wrap="square" rtlCol="0">
+                <a:spAutoFit/>
+              </a:bodyPr>
+              <a:lstStyle/>
+              <a:p>
+                <a:pPr algn="ctr"/>
+                <a:endParaRPr lang="ru-RU" sz="2800" b="1" dirty="0"/>
+              </a:p>
+              <a:p>
+                <a:pPr marL="457200" indent="-457200">
+                  <a:buFont typeface="Wingdings" panose="05000000000000000000" pitchFamily="2" charset="2"/>
+                  <a:buChar char="§"/>
+                </a:pPr>
                 <a:r>
                   <a:rPr lang="ru-RU" sz="2800" dirty="0">
                     <a:latin typeface="Cambria Math" panose="02040503050406030204" pitchFamily="18" charset="0"/>
@@ -40289,8 +42436,8 @@
           </a:p>
         </p:txBody>
       </p:sp>
-      <mc:AlternateContent xmlns:mc="http://schemas.openxmlformats.org/markup-compatibility/2006">
-        <mc:Choice xmlns:a14="http://schemas.microsoft.com/office/drawing/2010/main" Requires="a14">
+      <mc:AlternateContent xmlns:mc="http://schemas.openxmlformats.org/markup-compatibility/2006" xmlns:a14="http://schemas.microsoft.com/office/drawing/2010/main">
+        <mc:Choice Requires="a14">
           <p:sp>
             <p:nvSpPr>
               <p:cNvPr id="5" name="Прямоугольник 4"/>
@@ -40331,7 +42478,7 @@
                       <m:sSub>
                         <m:sSubPr>
                           <m:ctrlPr>
-                            <a:rPr lang="ru-RU" sz="2600" b="0" smtClean="0">
+                            <a:rPr lang="ru-RU" sz="2600" b="0" i="1" smtClean="0">
                               <a:latin typeface="Cambria Math" panose="02040503050406030204" pitchFamily="18" charset="0"/>
                             </a:rPr>
                           </m:ctrlPr>
@@ -40531,7 +42678,7 @@
             </p:txBody>
           </p:sp>
         </mc:Choice>
-        <mc:Fallback>
+        <mc:Fallback xmlns="">
           <p:sp>
             <p:nvSpPr>
               <p:cNvPr id="5" name="Прямоугольник 4"/>
@@ -41768,7 +43915,7 @@
                           <a:rPr lang="en-US" b="0" i="1" smtClean="0">
                             <a:latin typeface="Cambria Math" panose="02040503050406030204" pitchFamily="18" charset="0"/>
                           </a:rPr>
-                          <m:t>𝑍</m:t>
+                          <m:t>ℤ</m:t>
                         </m:r>
                       </m:e>
                       <m:sub>
@@ -41787,15 +43934,15 @@
                       <m:t>→</m:t>
                     </m:r>
                     <m:r>
-                      <a:rPr lang="en-US" b="0" i="1" smtClean="0">
-                        <a:latin typeface="Cambria Math" panose="02040503050406030204" pitchFamily="18" charset="0"/>
-                      </a:rPr>
-                      <m:t>𝑅</m:t>
+                      <a:rPr lang="en-US" i="1">
+                        <a:latin typeface="Cambria Math" panose="02040503050406030204" pitchFamily="18" charset="0"/>
+                      </a:rPr>
+                      <m:t>ℝ</m:t>
                     </m:r>
                   </m:oMath>
                 </a14:m>
                 <a:r>
-                  <a:rPr lang="ru-RU" dirty="0"/>
+                  <a:rPr lang="en-US" b="1" dirty="0"/>
                   <a:t> </a:t>
                 </a:r>
                 <a:r>
@@ -41840,7 +43987,7 @@
                           <a:rPr lang="en-US" b="0" i="1" smtClean="0">
                             <a:latin typeface="Cambria Math" panose="02040503050406030204" pitchFamily="18" charset="0"/>
                           </a:rPr>
-                          <m:t>𝑅</m:t>
+                          <m:t>ℝ</m:t>
                         </m:r>
                       </m:e>
                       <m:sub>
@@ -41902,7 +44049,7 @@
                           <a:rPr lang="en-US" b="0" i="1" smtClean="0">
                             <a:latin typeface="Cambria Math" panose="02040503050406030204" pitchFamily="18" charset="0"/>
                           </a:rPr>
-                          <m:t>𝑍</m:t>
+                          <m:t>ℤ</m:t>
                         </m:r>
                       </m:e>
                       <m:sub>
@@ -42110,10 +44257,10 @@
                       </m:sSubPr>
                       <m:e>
                         <m:r>
-                          <a:rPr lang="en-US" i="1">
-                            <a:latin typeface="Cambria Math" panose="02040503050406030204" pitchFamily="18" charset="0"/>
-                          </a:rPr>
-                          <m:t>𝑍</m:t>
+                          <a:rPr lang="en-US" b="0" i="1" smtClean="0">
+                            <a:latin typeface="Cambria Math" panose="02040503050406030204" pitchFamily="18" charset="0"/>
+                          </a:rPr>
+                          <m:t>ℤ</m:t>
                         </m:r>
                       </m:e>
                       <m:sub>
@@ -42132,10 +44279,10 @@
                       <m:t>→</m:t>
                     </m:r>
                     <m:r>
-                      <a:rPr lang="en-US" i="1">
-                        <a:latin typeface="Cambria Math" panose="02040503050406030204" pitchFamily="18" charset="0"/>
-                      </a:rPr>
-                      <m:t>𝑅</m:t>
+                      <a:rPr lang="en-US" b="0" i="1" smtClean="0">
+                        <a:latin typeface="Cambria Math" panose="02040503050406030204" pitchFamily="18" charset="0"/>
+                      </a:rPr>
+                      <m:t>ℝ</m:t>
                     </m:r>
                   </m:oMath>
                 </a14:m>
@@ -42367,7 +44514,7 @@
               <a:blipFill>
                 <a:blip r:embed="rId2"/>
                 <a:stretch>
-                  <a:fillRect l="-1043" t="-2632" r="-812" b="-2632"/>
+                  <a:fillRect l="-1043" t="-2632" r="-1159" b="-2632"/>
                 </a:stretch>
               </a:blipFill>
             </p:spPr>
@@ -42461,8 +44608,8 @@
           </a:p>
         </p:txBody>
       </p:sp>
-      <mc:AlternateContent xmlns:mc="http://schemas.openxmlformats.org/markup-compatibility/2006" xmlns:a14="http://schemas.microsoft.com/office/drawing/2010/main">
-        <mc:Choice Requires="a14">
+      <mc:AlternateContent xmlns:mc="http://schemas.openxmlformats.org/markup-compatibility/2006">
+        <mc:Choice xmlns:a14="http://schemas.microsoft.com/office/drawing/2010/main" Requires="a14">
           <p:sp>
             <p:nvSpPr>
               <p:cNvPr id="3" name="Объект 2"/>
@@ -42942,6 +45089,40 @@
                             </m:ctrlPr>
                           </m:sSupPr>
                           <m:e>
+                            <m:limLow>
+                              <m:limLowPr>
+                                <m:ctrlPr>
+                                  <a:rPr lang="en-US" i="1">
+                                    <a:latin typeface="Cambria Math" panose="02040503050406030204" pitchFamily="18" charset="0"/>
+                                  </a:rPr>
+                                </m:ctrlPr>
+                              </m:limLowPr>
+                              <m:e>
+                                <m:r>
+                                  <m:rPr>
+                                    <m:sty m:val="p"/>
+                                  </m:rPr>
+                                  <a:rPr lang="en-US">
+                                    <a:latin typeface="Cambria Math" panose="02040503050406030204" pitchFamily="18" charset="0"/>
+                                  </a:rPr>
+                                  <m:t>lim</m:t>
+                                </m:r>
+                              </m:e>
+                              <m:lim>
+                                <m:r>
+                                  <a:rPr lang="en-US" i="1">
+                                    <a:latin typeface="Cambria Math" panose="02040503050406030204" pitchFamily="18" charset="0"/>
+                                  </a:rPr>
+                                  <m:t>𝑛</m:t>
+                                </m:r>
+                                <m:r>
+                                  <a:rPr lang="en-US" i="1">
+                                    <a:latin typeface="Cambria Math" panose="02040503050406030204" pitchFamily="18" charset="0"/>
+                                  </a:rPr>
+                                  <m:t>→∞</m:t>
+                                </m:r>
+                              </m:lim>
+                            </m:limLow>
                             <m:r>
                               <a:rPr lang="en-US" b="0" i="1" smtClean="0">
                                 <a:latin typeface="Cambria Math" panose="02040503050406030204" pitchFamily="18" charset="0"/>
@@ -43178,6 +45359,40 @@
                             </m:ctrlPr>
                           </m:sSupPr>
                           <m:e>
+                            <m:limLow>
+                              <m:limLowPr>
+                                <m:ctrlPr>
+                                  <a:rPr lang="en-US" i="1">
+                                    <a:latin typeface="Cambria Math" panose="02040503050406030204" pitchFamily="18" charset="0"/>
+                                  </a:rPr>
+                                </m:ctrlPr>
+                              </m:limLowPr>
+                              <m:e>
+                                <m:r>
+                                  <m:rPr>
+                                    <m:sty m:val="p"/>
+                                  </m:rPr>
+                                  <a:rPr lang="en-US">
+                                    <a:latin typeface="Cambria Math" panose="02040503050406030204" pitchFamily="18" charset="0"/>
+                                  </a:rPr>
+                                  <m:t>lim</m:t>
+                                </m:r>
+                              </m:e>
+                              <m:lim>
+                                <m:r>
+                                  <a:rPr lang="en-US" i="1">
+                                    <a:latin typeface="Cambria Math" panose="02040503050406030204" pitchFamily="18" charset="0"/>
+                                  </a:rPr>
+                                  <m:t>𝑛</m:t>
+                                </m:r>
+                                <m:r>
+                                  <a:rPr lang="en-US" i="1">
+                                    <a:latin typeface="Cambria Math" panose="02040503050406030204" pitchFamily="18" charset="0"/>
+                                  </a:rPr>
+                                  <m:t>→∞</m:t>
+                                </m:r>
+                              </m:lim>
+                            </m:limLow>
                             <m:r>
                               <a:rPr lang="en-US" i="1">
                                 <a:latin typeface="Cambria Math" panose="02040503050406030204" pitchFamily="18" charset="0"/>
@@ -43237,6 +45452,40 @@
                           </a:rPr>
                           <m:t>=</m:t>
                         </m:r>
+                        <m:limLow>
+                          <m:limLowPr>
+                            <m:ctrlPr>
+                              <a:rPr lang="en-US" i="1">
+                                <a:latin typeface="Cambria Math" panose="02040503050406030204" pitchFamily="18" charset="0"/>
+                              </a:rPr>
+                            </m:ctrlPr>
+                          </m:limLowPr>
+                          <m:e>
+                            <m:r>
+                              <m:rPr>
+                                <m:sty m:val="p"/>
+                              </m:rPr>
+                              <a:rPr lang="en-US">
+                                <a:latin typeface="Cambria Math" panose="02040503050406030204" pitchFamily="18" charset="0"/>
+                              </a:rPr>
+                              <m:t>lim</m:t>
+                            </m:r>
+                          </m:e>
+                          <m:lim>
+                            <m:r>
+                              <a:rPr lang="en-US" i="1">
+                                <a:latin typeface="Cambria Math" panose="02040503050406030204" pitchFamily="18" charset="0"/>
+                              </a:rPr>
+                              <m:t>𝑛</m:t>
+                            </m:r>
+                            <m:r>
+                              <a:rPr lang="en-US" i="1">
+                                <a:latin typeface="Cambria Math" panose="02040503050406030204" pitchFamily="18" charset="0"/>
+                              </a:rPr>
+                              <m:t>→∞</m:t>
+                            </m:r>
+                          </m:lim>
+                        </m:limLow>
                         <m:r>
                           <a:rPr lang="en-US" b="0" i="1" smtClean="0">
                             <a:latin typeface="Cambria Math" panose="02040503050406030204" pitchFamily="18" charset="0"/>
@@ -43448,6 +45697,40 @@
                           </a:rPr>
                           <m:t>=</m:t>
                         </m:r>
+                        <m:limLow>
+                          <m:limLowPr>
+                            <m:ctrlPr>
+                              <a:rPr lang="en-US" i="1">
+                                <a:latin typeface="Cambria Math" panose="02040503050406030204" pitchFamily="18" charset="0"/>
+                              </a:rPr>
+                            </m:ctrlPr>
+                          </m:limLowPr>
+                          <m:e>
+                            <m:r>
+                              <m:rPr>
+                                <m:sty m:val="p"/>
+                              </m:rPr>
+                              <a:rPr lang="en-US">
+                                <a:latin typeface="Cambria Math" panose="02040503050406030204" pitchFamily="18" charset="0"/>
+                              </a:rPr>
+                              <m:t>lim</m:t>
+                            </m:r>
+                          </m:e>
+                          <m:lim>
+                            <m:r>
+                              <a:rPr lang="en-US" i="1">
+                                <a:latin typeface="Cambria Math" panose="02040503050406030204" pitchFamily="18" charset="0"/>
+                              </a:rPr>
+                              <m:t>𝑛</m:t>
+                            </m:r>
+                            <m:r>
+                              <a:rPr lang="en-US" i="1">
+                                <a:latin typeface="Cambria Math" panose="02040503050406030204" pitchFamily="18" charset="0"/>
+                              </a:rPr>
+                              <m:t>→∞</m:t>
+                            </m:r>
+                          </m:lim>
+                        </m:limLow>
                         <m:r>
                           <a:rPr lang="en-US" b="0" i="1" smtClean="0">
                             <a:latin typeface="Cambria Math" panose="02040503050406030204" pitchFamily="18" charset="0"/>
@@ -43469,7 +45752,7 @@
             </p:txBody>
           </p:sp>
         </mc:Choice>
-        <mc:Fallback xmlns="">
+        <mc:Fallback>
           <p:sp>
             <p:nvSpPr>
               <p:cNvPr id="3" name="Объект 2"/>
@@ -43638,7 +45921,7 @@
                           <a:rPr lang="en-US" b="0" i="1" smtClean="0">
                             <a:latin typeface="Cambria Math" panose="02040503050406030204" pitchFamily="18" charset="0"/>
                           </a:rPr>
-                          <m:t>𝑍</m:t>
+                          <m:t>ℤ</m:t>
                         </m:r>
                       </m:e>
                       <m:sub>
@@ -43660,7 +45943,7 @@
                       <a:rPr lang="en-US" b="0" i="1" smtClean="0">
                         <a:latin typeface="Cambria Math" panose="02040503050406030204" pitchFamily="18" charset="0"/>
                       </a:rPr>
-                      <m:t>𝑅</m:t>
+                      <m:t>ℝ</m:t>
                     </m:r>
                   </m:oMath>
                 </a14:m>
@@ -43755,7 +46038,7 @@
                           <a:rPr lang="en-US" i="1">
                             <a:latin typeface="Cambria Math" panose="02040503050406030204" pitchFamily="18" charset="0"/>
                           </a:rPr>
-                          <m:t>𝑍</m:t>
+                          <m:t>ℤ</m:t>
                         </m:r>
                       </m:e>
                       <m:sub>
@@ -43777,13 +46060,17 @@
                       <a:rPr lang="en-US" i="1">
                         <a:latin typeface="Cambria Math" panose="02040503050406030204" pitchFamily="18" charset="0"/>
                       </a:rPr>
-                      <m:t>𝑅</m:t>
+                      <m:t>ℝ</m:t>
                     </m:r>
                   </m:oMath>
                 </a14:m>
                 <a:r>
+                  <a:rPr lang="en-US" dirty="0"/>
+                  <a:t> </a:t>
+                </a:r>
+                <a:r>
                   <a:rPr lang="ru-RU" dirty="0"/>
-                  <a:t> называется </a:t>
+                  <a:t>называется </a:t>
                 </a:r>
                 <a:r>
                   <a:rPr lang="ru-RU" b="1" dirty="0" err="1"/>
@@ -43843,10 +46130,10 @@
                       </m:sSubPr>
                       <m:e>
                         <m:r>
-                          <a:rPr lang="en-US" b="0" i="1" smtClean="0">
-                            <a:latin typeface="Cambria Math" panose="02040503050406030204" pitchFamily="18" charset="0"/>
-                          </a:rPr>
-                          <m:t>𝑅</m:t>
+                          <a:rPr lang="en-US" i="1">
+                            <a:latin typeface="Cambria Math" panose="02040503050406030204" pitchFamily="18" charset="0"/>
+                          </a:rPr>
+                          <m:t>ℝ</m:t>
                         </m:r>
                       </m:e>
                       <m:sub>

--- a/Lectures/Lecture2.pptx
+++ b/Lectures/Lecture2.pptx
@@ -309,7 +309,7 @@
           <a:p>
             <a:fld id="{CBA08D16-15DC-4E25-BDC3-F25146157B16}" type="datetimeFigureOut">
               <a:rPr lang="ru-RU" smtClean="0"/>
-              <a:t>17.09.2026</a:t>
+              <a:t>01.10.2026</a:t>
             </a:fld>
             <a:endParaRPr lang="ru-RU"/>
           </a:p>
@@ -705,7 +705,7 @@
           <a:p>
             <a:fld id="{FCEC8293-DB51-454A-BE81-EC8FCB31EBA2}" type="datetime1">
               <a:rPr lang="ru-RU" smtClean="0"/>
-              <a:t>17.09.2026</a:t>
+              <a:t>01.10.2026</a:t>
             </a:fld>
             <a:endParaRPr lang="ru-RU"/>
           </a:p>
@@ -876,7 +876,7 @@
           <a:p>
             <a:fld id="{241C87B1-1C35-4DBD-BC18-2BC72E776603}" type="datetime1">
               <a:rPr lang="ru-RU" smtClean="0"/>
-              <a:t>17.09.2026</a:t>
+              <a:t>01.10.2026</a:t>
             </a:fld>
             <a:endParaRPr lang="ru-RU"/>
           </a:p>
@@ -1057,7 +1057,7 @@
           <a:p>
             <a:fld id="{3134C275-26C0-42CD-9111-9ADE65922AF9}" type="datetime1">
               <a:rPr lang="ru-RU" smtClean="0"/>
-              <a:t>17.09.2026</a:t>
+              <a:t>01.10.2026</a:t>
             </a:fld>
             <a:endParaRPr lang="ru-RU"/>
           </a:p>
@@ -1228,7 +1228,7 @@
           <a:p>
             <a:fld id="{C1A9A50B-C350-45F5-8AAB-ADB9E670AF2E}" type="datetime1">
               <a:rPr lang="ru-RU" smtClean="0"/>
-              <a:t>17.09.2026</a:t>
+              <a:t>01.10.2026</a:t>
             </a:fld>
             <a:endParaRPr lang="ru-RU"/>
           </a:p>
@@ -1476,7 +1476,7 @@
           <a:p>
             <a:fld id="{089688C9-348F-42F9-B6C0-5990DDE0C5B2}" type="datetime1">
               <a:rPr lang="ru-RU" smtClean="0"/>
-              <a:t>17.09.2026</a:t>
+              <a:t>01.10.2026</a:t>
             </a:fld>
             <a:endParaRPr lang="ru-RU"/>
           </a:p>
@@ -1708,7 +1708,7 @@
           <a:p>
             <a:fld id="{684AFD8F-6DD9-4AD3-A505-FDC3F5C5F3F6}" type="datetime1">
               <a:rPr lang="ru-RU" smtClean="0"/>
-              <a:t>17.09.2026</a:t>
+              <a:t>01.10.2026</a:t>
             </a:fld>
             <a:endParaRPr lang="ru-RU"/>
           </a:p>
@@ -2075,7 +2075,7 @@
           <a:p>
             <a:fld id="{63551EFE-4D02-45EB-A747-8B6F047B5AA0}" type="datetime1">
               <a:rPr lang="ru-RU" smtClean="0"/>
-              <a:t>17.09.2026</a:t>
+              <a:t>01.10.2026</a:t>
             </a:fld>
             <a:endParaRPr lang="ru-RU"/>
           </a:p>
@@ -2195,7 +2195,7 @@
           <a:p>
             <a:fld id="{813A9F34-E5CD-4B8F-AA9E-889C84372B20}" type="datetime1">
               <a:rPr lang="ru-RU" smtClean="0"/>
-              <a:t>17.09.2026</a:t>
+              <a:t>01.10.2026</a:t>
             </a:fld>
             <a:endParaRPr lang="ru-RU"/>
           </a:p>
@@ -2293,7 +2293,7 @@
           <a:p>
             <a:fld id="{51224D22-9B29-44A6-8E82-95FC492DEDC1}" type="datetime1">
               <a:rPr lang="ru-RU" smtClean="0"/>
-              <a:t>17.09.2026</a:t>
+              <a:t>01.10.2026</a:t>
             </a:fld>
             <a:endParaRPr lang="ru-RU"/>
           </a:p>
@@ -2571,7 +2571,7 @@
           <a:p>
             <a:fld id="{91D1034F-4441-48A1-BDC0-25EA1022324A}" type="datetime1">
               <a:rPr lang="ru-RU" smtClean="0"/>
-              <a:t>17.09.2026</a:t>
+              <a:t>01.10.2026</a:t>
             </a:fld>
             <a:endParaRPr lang="ru-RU"/>
           </a:p>
@@ -2826,7 +2826,7 @@
           <a:p>
             <a:fld id="{B0FFDE79-B627-473B-AE17-4C65BD2495F7}" type="datetime1">
               <a:rPr lang="ru-RU" smtClean="0"/>
-              <a:t>17.09.2026</a:t>
+              <a:t>01.10.2026</a:t>
             </a:fld>
             <a:endParaRPr lang="ru-RU"/>
           </a:p>
@@ -3040,7 +3040,7 @@
           <a:p>
             <a:fld id="{11CA537A-1B8C-47BA-9BA6-7CE3FAFDA8BE}" type="datetime1">
               <a:rPr lang="ru-RU" smtClean="0"/>
-              <a:t>17.09.2026</a:t>
+              <a:t>01.10.2026</a:t>
             </a:fld>
             <a:endParaRPr lang="ru-RU"/>
           </a:p>
@@ -4758,8 +4758,8 @@
           </a:p>
         </p:txBody>
       </p:sp>
-      <mc:AlternateContent xmlns:mc="http://schemas.openxmlformats.org/markup-compatibility/2006">
-        <mc:Choice xmlns:a14="http://schemas.microsoft.com/office/drawing/2010/main" Requires="a14">
+      <mc:AlternateContent xmlns:mc="http://schemas.openxmlformats.org/markup-compatibility/2006" xmlns:a14="http://schemas.microsoft.com/office/drawing/2010/main">
+        <mc:Choice Requires="a14">
           <p:sp>
             <p:nvSpPr>
               <p:cNvPr id="3" name="Объект 2"/>
@@ -5547,7 +5547,7 @@
             </p:txBody>
           </p:sp>
         </mc:Choice>
-        <mc:Fallback>
+        <mc:Fallback xmlns="">
           <p:sp>
             <p:nvSpPr>
               <p:cNvPr id="3" name="Объект 2"/>
@@ -7691,8 +7691,8 @@
           </a:p>
         </p:txBody>
       </p:sp>
-      <mc:AlternateContent xmlns:mc="http://schemas.openxmlformats.org/markup-compatibility/2006">
-        <mc:Choice xmlns:a14="http://schemas.microsoft.com/office/drawing/2010/main" Requires="a14">
+      <mc:AlternateContent xmlns:mc="http://schemas.openxmlformats.org/markup-compatibility/2006" xmlns:a14="http://schemas.microsoft.com/office/drawing/2010/main">
+        <mc:Choice Requires="a14">
           <p:sp>
             <p:nvSpPr>
               <p:cNvPr id="3" name="Объект 2"/>
@@ -7869,7 +7869,7 @@
                     <m:sSub>
                       <m:sSubPr>
                         <m:ctrlPr>
-                          <a:rPr lang="en-US" b="0" smtClean="0">
+                          <a:rPr lang="en-US" b="0" i="1" smtClean="0">
                             <a:latin typeface="Cambria Math" panose="02040503050406030204" pitchFamily="18" charset="0"/>
                           </a:rPr>
                         </m:ctrlPr>
@@ -7983,7 +7983,7 @@
             </p:txBody>
           </p:sp>
         </mc:Choice>
-        <mc:Fallback>
+        <mc:Fallback xmlns="">
           <p:sp>
             <p:nvSpPr>
               <p:cNvPr id="3" name="Объект 2"/>
@@ -43857,8 +43857,8 @@
           </a:p>
         </p:txBody>
       </p:sp>
-      <mc:AlternateContent xmlns:mc="http://schemas.openxmlformats.org/markup-compatibility/2006" xmlns:a14="http://schemas.microsoft.com/office/drawing/2010/main">
-        <mc:Choice Requires="a14">
+      <mc:AlternateContent xmlns:mc="http://schemas.openxmlformats.org/markup-compatibility/2006">
+        <mc:Choice xmlns:a14="http://schemas.microsoft.com/office/drawing/2010/main" Requires="a14">
           <p:sp>
             <p:nvSpPr>
               <p:cNvPr id="3" name="Объект 2"/>
@@ -44466,7 +44466,45 @@
                 </a14:m>
                 <a:r>
                   <a:rPr lang="ru-RU" dirty="0"/>
-                  <a:t> убывает быстрее любого полинома</a:t>
+                  <a:t> убывает быстрее любой функции вида </a:t>
+                </a:r>
+                <a14:m>
+                  <m:oMath xmlns:m="http://schemas.openxmlformats.org/officeDocument/2006/math">
+                    <m:r>
+                      <a:rPr lang="en-US" b="0" i="0" dirty="0" smtClean="0">
+                        <a:latin typeface="Cambria Math" panose="02040503050406030204" pitchFamily="18" charset="0"/>
+                      </a:rPr>
+                      <m:t>1/</m:t>
+                    </m:r>
+                    <m:r>
+                      <a:rPr lang="en-US" b="0" i="1" dirty="0" smtClean="0">
+                        <a:latin typeface="Cambria Math" panose="02040503050406030204" pitchFamily="18" charset="0"/>
+                      </a:rPr>
+                      <m:t>𝑝</m:t>
+                    </m:r>
+                    <m:r>
+                      <a:rPr lang="en-US" b="0" i="0" dirty="0" smtClean="0">
+                        <a:latin typeface="Cambria Math" panose="02040503050406030204" pitchFamily="18" charset="0"/>
+                      </a:rPr>
+                      <m:t>(</m:t>
+                    </m:r>
+                    <m:r>
+                      <a:rPr lang="en-US" i="1" dirty="0">
+                        <a:latin typeface="Cambria Math" panose="02040503050406030204" pitchFamily="18" charset="0"/>
+                      </a:rPr>
+                      <m:t>𝑛</m:t>
+                    </m:r>
+                    <m:r>
+                      <a:rPr lang="en-US" b="0" i="1" dirty="0" smtClean="0">
+                        <a:latin typeface="Cambria Math" panose="02040503050406030204" pitchFamily="18" charset="0"/>
+                      </a:rPr>
+                      <m:t>)</m:t>
+                    </m:r>
+                  </m:oMath>
+                </a14:m>
+                <a:r>
+                  <a:rPr lang="ru-RU" dirty="0"/>
+                  <a:t>,</a:t>
                 </a:r>
                 <a:r>
                   <a:rPr lang="en-US" dirty="0"/>
@@ -44474,28 +44512,59 @@
                 </a:r>
                 <a:r>
                   <a:rPr lang="ru-RU" dirty="0"/>
-                  <a:t>от </a:t>
+                  <a:t>где </a:t>
                 </a:r>
                 <a14:m>
                   <m:oMath xmlns:m="http://schemas.openxmlformats.org/officeDocument/2006/math">
                     <m:r>
-                      <a:rPr lang="en-US" i="1" dirty="0">
-                        <a:latin typeface="Cambria Math" panose="02040503050406030204" pitchFamily="18" charset="0"/>
-                      </a:rPr>
-                      <m:t>𝑛</m:t>
-                    </m:r>
+                      <a:rPr lang="en-US" b="0" i="1" smtClean="0">
+                        <a:latin typeface="Cambria Math" panose="02040503050406030204" pitchFamily="18" charset="0"/>
+                      </a:rPr>
+                      <m:t>𝑝</m:t>
+                    </m:r>
+                    <m:d>
+                      <m:dPr>
+                        <m:ctrlPr>
+                          <a:rPr lang="en-US" b="0" i="1" smtClean="0">
+                            <a:latin typeface="Cambria Math" panose="02040503050406030204" pitchFamily="18" charset="0"/>
+                          </a:rPr>
+                        </m:ctrlPr>
+                      </m:dPr>
+                      <m:e>
+                        <m:r>
+                          <a:rPr lang="en-US" b="0" i="1" smtClean="0">
+                            <a:latin typeface="Cambria Math" panose="02040503050406030204" pitchFamily="18" charset="0"/>
+                          </a:rPr>
+                          <m:t>𝑛</m:t>
+                        </m:r>
+                      </m:e>
+                    </m:d>
                   </m:oMath>
                 </a14:m>
                 <a:r>
                   <a:rPr lang="ru-RU" dirty="0"/>
-                  <a:t> .</a:t>
+                  <a:t> – полином от </a:t>
+                </a:r>
+                <a14:m>
+                  <m:oMath xmlns:m="http://schemas.openxmlformats.org/officeDocument/2006/math">
+                    <m:r>
+                      <a:rPr lang="en-US" b="0" i="1" smtClean="0">
+                        <a:latin typeface="Cambria Math" panose="02040503050406030204" pitchFamily="18" charset="0"/>
+                      </a:rPr>
+                      <m:t>𝑛</m:t>
+                    </m:r>
+                  </m:oMath>
+                </a14:m>
+                <a:r>
+                  <a:rPr lang="ru-RU" dirty="0"/>
+                  <a:t>.</a:t>
                 </a:r>
                 <a:endParaRPr lang="en-US" dirty="0"/>
               </a:p>
             </p:txBody>
           </p:sp>
         </mc:Choice>
-        <mc:Fallback xmlns="">
+        <mc:Fallback>
           <p:sp>
             <p:nvSpPr>
               <p:cNvPr id="3" name="Объект 2"/>
@@ -44608,8 +44677,8 @@
           </a:p>
         </p:txBody>
       </p:sp>
-      <mc:AlternateContent xmlns:mc="http://schemas.openxmlformats.org/markup-compatibility/2006">
-        <mc:Choice xmlns:a14="http://schemas.microsoft.com/office/drawing/2010/main" Requires="a14">
+      <mc:AlternateContent xmlns:mc="http://schemas.openxmlformats.org/markup-compatibility/2006" xmlns:a14="http://schemas.microsoft.com/office/drawing/2010/main">
+        <mc:Choice Requires="a14">
           <p:sp>
             <p:nvSpPr>
               <p:cNvPr id="3" name="Объект 2"/>
@@ -45752,7 +45821,7 @@
             </p:txBody>
           </p:sp>
         </mc:Choice>
-        <mc:Fallback>
+        <mc:Fallback xmlns="">
           <p:sp>
             <p:nvSpPr>
               <p:cNvPr id="3" name="Объект 2"/>
